--- a/Unit 4 - Ethics, Legal and Social Implications.pptx
+++ b/Unit 4 - Ethics, Legal and Social Implications.pptx
@@ -4165,7 +4165,7 @@
         </p:nvSpPr>
         <p:spPr>
           <a:xfrm>
-            <a:off x="932688" y="5159197"/>
+            <a:off x="932688" y="4992624"/>
             <a:ext cx="793598" cy="329184"/>
           </a:xfrm>
           <a:prstGeom prst="roundRect">
@@ -4232,7 +4232,7 @@
         </p:nvSpPr>
         <p:spPr>
           <a:xfrm>
-            <a:off x="1854302" y="5159197"/>
+            <a:off x="1854302" y="4992624"/>
             <a:ext cx="842066" cy="329184"/>
           </a:xfrm>
           <a:prstGeom prst="roundRect">
@@ -4299,7 +4299,7 @@
         </p:nvSpPr>
         <p:spPr>
           <a:xfrm>
-            <a:off x="2824384" y="5159197"/>
+            <a:off x="2824384" y="4992624"/>
             <a:ext cx="1002999" cy="329184"/>
           </a:xfrm>
           <a:prstGeom prst="roundRect">
@@ -4366,7 +4366,7 @@
         </p:nvSpPr>
         <p:spPr>
           <a:xfrm>
-            <a:off x="3955400" y="5159197"/>
+            <a:off x="3955400" y="4992624"/>
             <a:ext cx="1327717" cy="329184"/>
           </a:xfrm>
           <a:prstGeom prst="roundRect">
@@ -4433,7 +4433,7 @@
         </p:nvSpPr>
         <p:spPr>
           <a:xfrm>
-            <a:off x="932688" y="5742432"/>
+            <a:off x="932688" y="5614416"/>
             <a:ext cx="3840480" cy="12700"/>
           </a:xfrm>
           <a:prstGeom prst="rect">
@@ -4477,8 +4477,8 @@
         </p:nvSpPr>
         <p:spPr>
           <a:xfrm>
-            <a:off x="932688" y="5925312"/>
-            <a:ext cx="5486400" cy="640080"/>
+            <a:off x="932688" y="5797296"/>
+            <a:ext cx="4937760" cy="640080"/>
           </a:xfrm>
           <a:prstGeom prst="rect">
             <a:avLst/>
@@ -4493,7 +4493,7 @@
           <a:p>
             <a:pPr algn="l">
               <a:lnSpc>
-                <a:spcPct val="130000"/>
+                <a:spcPct val="122000"/>
               </a:lnSpc>
               <a:spcBef>
                 <a:spcPts val="0"/>
@@ -4503,33 +4503,102 @@
               </a:spcAft>
             </a:pPr>
             <a:r>
-              <a:rPr sz="1050" b="1" i="0">
-                <a:solidFill>
-                  <a:srgbClr val="FFFFFF"/>
-                </a:solidFill>
-                <a:latin typeface="Segoe UI"/>
-                <a:ea typeface="Segoe UI"/>
-                <a:cs typeface="Segoe UI"/>
-              </a:rPr>
-              <a:t>PGPM · Systems Specialisation</a:t>
+              <a:rPr sz="850" b="1" i="0" spc="160">
+                <a:solidFill>
+                  <a:srgbClr val="00B3A4"/>
+                </a:solidFill>
+                <a:latin typeface="Segoe UI"/>
+                <a:ea typeface="Segoe UI"/>
+                <a:cs typeface="Segoe UI"/>
+              </a:rPr>
+              <a:t>PRESENTED BY</a:t>
             </a:r>
           </a:p>
           <a:p>
             <a:pPr algn="l">
               <a:lnSpc>
-                <a:spcPct val="130000"/>
+                <a:spcPct val="122000"/>
               </a:lnSpc>
               <a:spcBef>
-                <a:spcPts val="0"/>
+                <a:spcPts val="400"/>
               </a:spcBef>
               <a:spcAft>
                 <a:spcPts val="0"/>
               </a:spcAft>
             </a:pPr>
             <a:r>
+              <a:rPr sz="1300" b="1" i="0">
+                <a:solidFill>
+                  <a:srgbClr val="FFFFFF"/>
+                </a:solidFill>
+                <a:latin typeface="Segoe UI"/>
+                <a:ea typeface="Segoe UI"/>
+                <a:cs typeface="Segoe UI"/>
+              </a:rPr>
+              <a:t>Lingesh K</a:t>
+            </a:r>
+            <a:r>
               <a:rPr sz="1050" b="0" i="0">
                 <a:solidFill>
-                  <a:srgbClr val="8B9DBE"/>
+                  <a:srgbClr val="7E91B4"/>
+                </a:solidFill>
+                <a:latin typeface="Segoe UI"/>
+                <a:ea typeface="Segoe UI"/>
+                <a:cs typeface="Segoe UI"/>
+              </a:rPr>
+              <a:t>      Register No. </a:t>
+            </a:r>
+            <a:r>
+              <a:rPr sz="1050" b="1" i="0">
+                <a:solidFill>
+                  <a:srgbClr val="C5D2E8"/>
+                </a:solidFill>
+                <a:latin typeface="Segoe UI"/>
+                <a:ea typeface="Segoe UI"/>
+                <a:cs typeface="Segoe UI"/>
+              </a:rPr>
+              <a:t>OSI2509030</a:t>
+            </a:r>
+          </a:p>
+        </p:txBody>
+      </p:sp>
+      <p:sp>
+        <p:nvSpPr>
+          <p:cNvPr id="18" name="TextBox 17"/>
+          <p:cNvSpPr txBox="1"/>
+          <p:nvPr/>
+        </p:nvSpPr>
+        <p:spPr>
+          <a:xfrm>
+            <a:off x="7180783" y="5870448"/>
+            <a:ext cx="4206240" cy="640080"/>
+          </a:xfrm>
+          <a:prstGeom prst="rect">
+            <a:avLst/>
+          </a:prstGeom>
+          <a:noFill/>
+        </p:spPr>
+        <p:txBody>
+          <a:bodyPr wrap="square" lIns="0" rIns="0" tIns="0" bIns="0" anchor="t">
+            <a:spAutoFit/>
+          </a:bodyPr>
+          <a:lstStyle/>
+          <a:p>
+            <a:pPr algn="r">
+              <a:lnSpc>
+                <a:spcPct val="134000"/>
+              </a:lnSpc>
+              <a:spcBef>
+                <a:spcPts val="0"/>
+              </a:spcBef>
+              <a:spcAft>
+                <a:spcPts val="0"/>
+              </a:spcAft>
+            </a:pPr>
+            <a:r>
+              <a:rPr sz="1000" b="1" i="0">
+                <a:solidFill>
+                  <a:srgbClr val="C5D2E8"/>
                 </a:solidFill>
                 <a:latin typeface="Segoe UI"/>
                 <a:ea typeface="Segoe UI"/>
@@ -4940,7 +5009,7 @@
         <p:spPr>
           <a:xfrm>
             <a:off x="987552" y="5943600"/>
-            <a:ext cx="5486400" cy="274320"/>
+            <a:ext cx="6400800" cy="274320"/>
           </a:xfrm>
           <a:prstGeom prst="rect">
             <a:avLst/>
@@ -5049,7 +5118,7 @@
         <p:spPr>
           <a:xfrm>
             <a:off x="713232" y="6272784"/>
-            <a:ext cx="8073923" cy="219456"/>
+            <a:ext cx="5597920" cy="219456"/>
           </a:xfrm>
           <a:prstGeom prst="rect">
             <a:avLst/>
@@ -5117,8 +5186,8 @@
         </p:nvSpPr>
         <p:spPr>
           <a:xfrm>
-            <a:off x="10381183" y="6272784"/>
-            <a:ext cx="1097280" cy="219456"/>
+            <a:off x="8826703" y="6272784"/>
+            <a:ext cx="2651760" cy="219456"/>
           </a:xfrm>
           <a:prstGeom prst="rect">
             <a:avLst/>
@@ -5143,9 +5212,31 @@
               </a:spcAft>
             </a:pPr>
             <a:r>
+              <a:rPr sz="900" b="0" i="0">
+                <a:solidFill>
+                  <a:srgbClr val="636E85"/>
+                </a:solidFill>
+                <a:latin typeface="Segoe UI"/>
+                <a:ea typeface="Segoe UI"/>
+                <a:cs typeface="Segoe UI"/>
+              </a:rPr>
+              <a:t>Lingesh K  ·  OSI2509030</a:t>
+            </a:r>
+            <a:r>
+              <a:rPr sz="900" b="0" i="0">
+                <a:solidFill>
+                  <a:srgbClr val="141C2E"/>
+                </a:solidFill>
+                <a:latin typeface="Segoe UI"/>
+                <a:ea typeface="Segoe UI"/>
+                <a:cs typeface="Segoe UI"/>
+              </a:rPr>
+              <a:t>     </a:t>
+            </a:r>
+            <a:r>
               <a:rPr sz="900" b="1" i="0">
                 <a:solidFill>
-                  <a:srgbClr val="636E85"/>
+                  <a:srgbClr val="0E1E3C"/>
                 </a:solidFill>
                 <a:latin typeface="Segoe UI"/>
                 <a:ea typeface="Segoe UI"/>
@@ -6497,7 +6588,7 @@
         <p:spPr>
           <a:xfrm>
             <a:off x="713232" y="6272784"/>
-            <a:ext cx="8073923" cy="219456"/>
+            <a:ext cx="5597920" cy="219456"/>
           </a:xfrm>
           <a:prstGeom prst="rect">
             <a:avLst/>
@@ -6565,8 +6656,8 @@
         </p:nvSpPr>
         <p:spPr>
           <a:xfrm>
-            <a:off x="10381183" y="6272784"/>
-            <a:ext cx="1097280" cy="219456"/>
+            <a:off x="8826703" y="6272784"/>
+            <a:ext cx="2651760" cy="219456"/>
           </a:xfrm>
           <a:prstGeom prst="rect">
             <a:avLst/>
@@ -6591,9 +6682,31 @@
               </a:spcAft>
             </a:pPr>
             <a:r>
+              <a:rPr sz="900" b="0" i="0">
+                <a:solidFill>
+                  <a:srgbClr val="636E85"/>
+                </a:solidFill>
+                <a:latin typeface="Segoe UI"/>
+                <a:ea typeface="Segoe UI"/>
+                <a:cs typeface="Segoe UI"/>
+              </a:rPr>
+              <a:t>Lingesh K  ·  OSI2509030</a:t>
+            </a:r>
+            <a:r>
+              <a:rPr sz="900" b="0" i="0">
+                <a:solidFill>
+                  <a:srgbClr val="141C2E"/>
+                </a:solidFill>
+                <a:latin typeface="Segoe UI"/>
+                <a:ea typeface="Segoe UI"/>
+                <a:cs typeface="Segoe UI"/>
+              </a:rPr>
+              <a:t>     </a:t>
+            </a:r>
+            <a:r>
               <a:rPr sz="900" b="1" i="0">
                 <a:solidFill>
-                  <a:srgbClr val="636E85"/>
+                  <a:srgbClr val="0E1E3C"/>
                 </a:solidFill>
                 <a:latin typeface="Segoe UI"/>
                 <a:ea typeface="Segoe UI"/>
@@ -8885,7 +8998,7 @@
         <p:spPr>
           <a:xfrm>
             <a:off x="987552" y="5943600"/>
-            <a:ext cx="5486400" cy="274320"/>
+            <a:ext cx="6400800" cy="274320"/>
           </a:xfrm>
           <a:prstGeom prst="rect">
             <a:avLst/>
@@ -8994,7 +9107,7 @@
         <p:spPr>
           <a:xfrm>
             <a:off x="713232" y="6272784"/>
-            <a:ext cx="8073923" cy="219456"/>
+            <a:ext cx="5597920" cy="219456"/>
           </a:xfrm>
           <a:prstGeom prst="rect">
             <a:avLst/>
@@ -9062,8 +9175,8 @@
         </p:nvSpPr>
         <p:spPr>
           <a:xfrm>
-            <a:off x="10381183" y="6272784"/>
-            <a:ext cx="1097280" cy="219456"/>
+            <a:off x="8826703" y="6272784"/>
+            <a:ext cx="2651760" cy="219456"/>
           </a:xfrm>
           <a:prstGeom prst="rect">
             <a:avLst/>
@@ -9088,9 +9201,31 @@
               </a:spcAft>
             </a:pPr>
             <a:r>
+              <a:rPr sz="900" b="0" i="0">
+                <a:solidFill>
+                  <a:srgbClr val="636E85"/>
+                </a:solidFill>
+                <a:latin typeface="Segoe UI"/>
+                <a:ea typeface="Segoe UI"/>
+                <a:cs typeface="Segoe UI"/>
+              </a:rPr>
+              <a:t>Lingesh K  ·  OSI2509030</a:t>
+            </a:r>
+            <a:r>
+              <a:rPr sz="900" b="0" i="0">
+                <a:solidFill>
+                  <a:srgbClr val="141C2E"/>
+                </a:solidFill>
+                <a:latin typeface="Segoe UI"/>
+                <a:ea typeface="Segoe UI"/>
+                <a:cs typeface="Segoe UI"/>
+              </a:rPr>
+              <a:t>     </a:t>
+            </a:r>
+            <a:r>
               <a:rPr sz="900" b="1" i="0">
                 <a:solidFill>
-                  <a:srgbClr val="636E85"/>
+                  <a:srgbClr val="0E1E3C"/>
                 </a:solidFill>
                 <a:latin typeface="Segoe UI"/>
                 <a:ea typeface="Segoe UI"/>
@@ -10301,7 +10436,7 @@
         <p:spPr>
           <a:xfrm>
             <a:off x="713232" y="6272784"/>
-            <a:ext cx="8073923" cy="219456"/>
+            <a:ext cx="5597920" cy="219456"/>
           </a:xfrm>
           <a:prstGeom prst="rect">
             <a:avLst/>
@@ -10369,8 +10504,8 @@
         </p:nvSpPr>
         <p:spPr>
           <a:xfrm>
-            <a:off x="10381183" y="6272784"/>
-            <a:ext cx="1097280" cy="219456"/>
+            <a:off x="8826703" y="6272784"/>
+            <a:ext cx="2651760" cy="219456"/>
           </a:xfrm>
           <a:prstGeom prst="rect">
             <a:avLst/>
@@ -10395,9 +10530,31 @@
               </a:spcAft>
             </a:pPr>
             <a:r>
+              <a:rPr sz="900" b="0" i="0">
+                <a:solidFill>
+                  <a:srgbClr val="636E85"/>
+                </a:solidFill>
+                <a:latin typeface="Segoe UI"/>
+                <a:ea typeface="Segoe UI"/>
+                <a:cs typeface="Segoe UI"/>
+              </a:rPr>
+              <a:t>Lingesh K  ·  OSI2509030</a:t>
+            </a:r>
+            <a:r>
+              <a:rPr sz="900" b="0" i="0">
+                <a:solidFill>
+                  <a:srgbClr val="141C2E"/>
+                </a:solidFill>
+                <a:latin typeface="Segoe UI"/>
+                <a:ea typeface="Segoe UI"/>
+                <a:cs typeface="Segoe UI"/>
+              </a:rPr>
+              <a:t>     </a:t>
+            </a:r>
+            <a:r>
               <a:rPr sz="900" b="1" i="0">
                 <a:solidFill>
-                  <a:srgbClr val="636E85"/>
+                  <a:srgbClr val="0E1E3C"/>
                 </a:solidFill>
                 <a:latin typeface="Segoe UI"/>
                 <a:ea typeface="Segoe UI"/>
@@ -11796,7 +11953,7 @@
         <p:spPr>
           <a:xfrm>
             <a:off x="713232" y="6272784"/>
-            <a:ext cx="8073923" cy="219456"/>
+            <a:ext cx="5597920" cy="219456"/>
           </a:xfrm>
           <a:prstGeom prst="rect">
             <a:avLst/>
@@ -11864,8 +12021,8 @@
         </p:nvSpPr>
         <p:spPr>
           <a:xfrm>
-            <a:off x="10381183" y="6272784"/>
-            <a:ext cx="1097280" cy="219456"/>
+            <a:off x="8826703" y="6272784"/>
+            <a:ext cx="2651760" cy="219456"/>
           </a:xfrm>
           <a:prstGeom prst="rect">
             <a:avLst/>
@@ -11890,9 +12047,31 @@
               </a:spcAft>
             </a:pPr>
             <a:r>
+              <a:rPr sz="900" b="0" i="0">
+                <a:solidFill>
+                  <a:srgbClr val="636E85"/>
+                </a:solidFill>
+                <a:latin typeface="Segoe UI"/>
+                <a:ea typeface="Segoe UI"/>
+                <a:cs typeface="Segoe UI"/>
+              </a:rPr>
+              <a:t>Lingesh K  ·  OSI2509030</a:t>
+            </a:r>
+            <a:r>
+              <a:rPr sz="900" b="0" i="0">
+                <a:solidFill>
+                  <a:srgbClr val="141C2E"/>
+                </a:solidFill>
+                <a:latin typeface="Segoe UI"/>
+                <a:ea typeface="Segoe UI"/>
+                <a:cs typeface="Segoe UI"/>
+              </a:rPr>
+              <a:t>     </a:t>
+            </a:r>
+            <a:r>
               <a:rPr sz="900" b="1" i="0">
                 <a:solidFill>
-                  <a:srgbClr val="636E85"/>
+                  <a:srgbClr val="0E1E3C"/>
                 </a:solidFill>
                 <a:latin typeface="Segoe UI"/>
                 <a:ea typeface="Segoe UI"/>
@@ -13593,7 +13772,7 @@
         <p:spPr>
           <a:xfrm>
             <a:off x="987552" y="5943600"/>
-            <a:ext cx="5486400" cy="274320"/>
+            <a:ext cx="6400800" cy="274320"/>
           </a:xfrm>
           <a:prstGeom prst="rect">
             <a:avLst/>
@@ -13702,7 +13881,7 @@
         <p:spPr>
           <a:xfrm>
             <a:off x="713232" y="6272784"/>
-            <a:ext cx="8073923" cy="219456"/>
+            <a:ext cx="5597920" cy="219456"/>
           </a:xfrm>
           <a:prstGeom prst="rect">
             <a:avLst/>
@@ -13770,8 +13949,8 @@
         </p:nvSpPr>
         <p:spPr>
           <a:xfrm>
-            <a:off x="10381183" y="6272784"/>
-            <a:ext cx="1097280" cy="219456"/>
+            <a:off x="8826703" y="6272784"/>
+            <a:ext cx="2651760" cy="219456"/>
           </a:xfrm>
           <a:prstGeom prst="rect">
             <a:avLst/>
@@ -13796,9 +13975,31 @@
               </a:spcAft>
             </a:pPr>
             <a:r>
+              <a:rPr sz="900" b="0" i="0">
+                <a:solidFill>
+                  <a:srgbClr val="636E85"/>
+                </a:solidFill>
+                <a:latin typeface="Segoe UI"/>
+                <a:ea typeface="Segoe UI"/>
+                <a:cs typeface="Segoe UI"/>
+              </a:rPr>
+              <a:t>Lingesh K  ·  OSI2509030</a:t>
+            </a:r>
+            <a:r>
+              <a:rPr sz="900" b="0" i="0">
+                <a:solidFill>
+                  <a:srgbClr val="141C2E"/>
+                </a:solidFill>
+                <a:latin typeface="Segoe UI"/>
+                <a:ea typeface="Segoe UI"/>
+                <a:cs typeface="Segoe UI"/>
+              </a:rPr>
+              <a:t>     </a:t>
+            </a:r>
+            <a:r>
               <a:rPr sz="900" b="1" i="0">
                 <a:solidFill>
-                  <a:srgbClr val="636E85"/>
+                  <a:srgbClr val="0E1E3C"/>
                 </a:solidFill>
                 <a:latin typeface="Segoe UI"/>
                 <a:ea typeface="Segoe UI"/>
@@ -15152,7 +15353,7 @@
         <p:spPr>
           <a:xfrm>
             <a:off x="713232" y="6272784"/>
-            <a:ext cx="8073923" cy="219456"/>
+            <a:ext cx="5597920" cy="219456"/>
           </a:xfrm>
           <a:prstGeom prst="rect">
             <a:avLst/>
@@ -15220,8 +15421,8 @@
         </p:nvSpPr>
         <p:spPr>
           <a:xfrm>
-            <a:off x="10381183" y="6272784"/>
-            <a:ext cx="1097280" cy="219456"/>
+            <a:off x="8826703" y="6272784"/>
+            <a:ext cx="2651760" cy="219456"/>
           </a:xfrm>
           <a:prstGeom prst="rect">
             <a:avLst/>
@@ -15246,9 +15447,31 @@
               </a:spcAft>
             </a:pPr>
             <a:r>
+              <a:rPr sz="900" b="0" i="0">
+                <a:solidFill>
+                  <a:srgbClr val="636E85"/>
+                </a:solidFill>
+                <a:latin typeface="Segoe UI"/>
+                <a:ea typeface="Segoe UI"/>
+                <a:cs typeface="Segoe UI"/>
+              </a:rPr>
+              <a:t>Lingesh K  ·  OSI2509030</a:t>
+            </a:r>
+            <a:r>
+              <a:rPr sz="900" b="0" i="0">
+                <a:solidFill>
+                  <a:srgbClr val="141C2E"/>
+                </a:solidFill>
+                <a:latin typeface="Segoe UI"/>
+                <a:ea typeface="Segoe UI"/>
+                <a:cs typeface="Segoe UI"/>
+              </a:rPr>
+              <a:t>     </a:t>
+            </a:r>
+            <a:r>
               <a:rPr sz="900" b="1" i="0">
                 <a:solidFill>
-                  <a:srgbClr val="636E85"/>
+                  <a:srgbClr val="0E1E3C"/>
                 </a:solidFill>
                 <a:latin typeface="Segoe UI"/>
                 <a:ea typeface="Segoe UI"/>
@@ -16988,7 +17211,7 @@
         <p:spPr>
           <a:xfrm>
             <a:off x="713232" y="6272784"/>
-            <a:ext cx="8073923" cy="219456"/>
+            <a:ext cx="5597920" cy="219456"/>
           </a:xfrm>
           <a:prstGeom prst="rect">
             <a:avLst/>
@@ -17056,8 +17279,8 @@
         </p:nvSpPr>
         <p:spPr>
           <a:xfrm>
-            <a:off x="10381183" y="6272784"/>
-            <a:ext cx="1097280" cy="219456"/>
+            <a:off x="8826703" y="6272784"/>
+            <a:ext cx="2651760" cy="219456"/>
           </a:xfrm>
           <a:prstGeom prst="rect">
             <a:avLst/>
@@ -17082,9 +17305,31 @@
               </a:spcAft>
             </a:pPr>
             <a:r>
+              <a:rPr sz="900" b="0" i="0">
+                <a:solidFill>
+                  <a:srgbClr val="636E85"/>
+                </a:solidFill>
+                <a:latin typeface="Segoe UI"/>
+                <a:ea typeface="Segoe UI"/>
+                <a:cs typeface="Segoe UI"/>
+              </a:rPr>
+              <a:t>Lingesh K  ·  OSI2509030</a:t>
+            </a:r>
+            <a:r>
+              <a:rPr sz="900" b="0" i="0">
+                <a:solidFill>
+                  <a:srgbClr val="141C2E"/>
+                </a:solidFill>
+                <a:latin typeface="Segoe UI"/>
+                <a:ea typeface="Segoe UI"/>
+                <a:cs typeface="Segoe UI"/>
+              </a:rPr>
+              <a:t>     </a:t>
+            </a:r>
+            <a:r>
               <a:rPr sz="900" b="1" i="0">
                 <a:solidFill>
-                  <a:srgbClr val="636E85"/>
+                  <a:srgbClr val="0E1E3C"/>
                 </a:solidFill>
                 <a:latin typeface="Segoe UI"/>
                 <a:ea typeface="Segoe UI"/>
@@ -18647,7 +18892,7 @@
         <p:spPr>
           <a:xfrm>
             <a:off x="713232" y="6272784"/>
-            <a:ext cx="8073923" cy="219456"/>
+            <a:ext cx="5597920" cy="219456"/>
           </a:xfrm>
           <a:prstGeom prst="rect">
             <a:avLst/>
@@ -18715,8 +18960,8 @@
         </p:nvSpPr>
         <p:spPr>
           <a:xfrm>
-            <a:off x="10381183" y="6272784"/>
-            <a:ext cx="1097280" cy="219456"/>
+            <a:off x="8826703" y="6272784"/>
+            <a:ext cx="2651760" cy="219456"/>
           </a:xfrm>
           <a:prstGeom prst="rect">
             <a:avLst/>
@@ -18741,9 +18986,31 @@
               </a:spcAft>
             </a:pPr>
             <a:r>
+              <a:rPr sz="900" b="0" i="0">
+                <a:solidFill>
+                  <a:srgbClr val="636E85"/>
+                </a:solidFill>
+                <a:latin typeface="Segoe UI"/>
+                <a:ea typeface="Segoe UI"/>
+                <a:cs typeface="Segoe UI"/>
+              </a:rPr>
+              <a:t>Lingesh K  ·  OSI2509030</a:t>
+            </a:r>
+            <a:r>
+              <a:rPr sz="900" b="0" i="0">
+                <a:solidFill>
+                  <a:srgbClr val="141C2E"/>
+                </a:solidFill>
+                <a:latin typeface="Segoe UI"/>
+                <a:ea typeface="Segoe UI"/>
+                <a:cs typeface="Segoe UI"/>
+              </a:rPr>
+              <a:t>     </a:t>
+            </a:r>
+            <a:r>
               <a:rPr sz="900" b="1" i="0">
                 <a:solidFill>
-                  <a:srgbClr val="636E85"/>
+                  <a:srgbClr val="0E1E3C"/>
                 </a:solidFill>
                 <a:latin typeface="Segoe UI"/>
                 <a:ea typeface="Segoe UI"/>
@@ -20059,7 +20326,7 @@
         <p:spPr>
           <a:xfrm>
             <a:off x="713232" y="6272784"/>
-            <a:ext cx="8073923" cy="219456"/>
+            <a:ext cx="5597920" cy="219456"/>
           </a:xfrm>
           <a:prstGeom prst="rect">
             <a:avLst/>
@@ -20127,8 +20394,8 @@
         </p:nvSpPr>
         <p:spPr>
           <a:xfrm>
-            <a:off x="10381183" y="6272784"/>
-            <a:ext cx="1097280" cy="219456"/>
+            <a:off x="8826703" y="6272784"/>
+            <a:ext cx="2651760" cy="219456"/>
           </a:xfrm>
           <a:prstGeom prst="rect">
             <a:avLst/>
@@ -20153,9 +20420,31 @@
               </a:spcAft>
             </a:pPr>
             <a:r>
+              <a:rPr sz="900" b="0" i="0">
+                <a:solidFill>
+                  <a:srgbClr val="636E85"/>
+                </a:solidFill>
+                <a:latin typeface="Segoe UI"/>
+                <a:ea typeface="Segoe UI"/>
+                <a:cs typeface="Segoe UI"/>
+              </a:rPr>
+              <a:t>Lingesh K  ·  OSI2509030</a:t>
+            </a:r>
+            <a:r>
+              <a:rPr sz="900" b="0" i="0">
+                <a:solidFill>
+                  <a:srgbClr val="141C2E"/>
+                </a:solidFill>
+                <a:latin typeface="Segoe UI"/>
+                <a:ea typeface="Segoe UI"/>
+                <a:cs typeface="Segoe UI"/>
+              </a:rPr>
+              <a:t>     </a:t>
+            </a:r>
+            <a:r>
               <a:rPr sz="900" b="1" i="0">
                 <a:solidFill>
-                  <a:srgbClr val="636E85"/>
+                  <a:srgbClr val="0E1E3C"/>
                 </a:solidFill>
                 <a:latin typeface="Segoe UI"/>
                 <a:ea typeface="Segoe UI"/>
@@ -21574,7 +21863,7 @@
         <p:spPr>
           <a:xfrm>
             <a:off x="713232" y="6272784"/>
-            <a:ext cx="8073923" cy="219456"/>
+            <a:ext cx="5597920" cy="219456"/>
           </a:xfrm>
           <a:prstGeom prst="rect">
             <a:avLst/>
@@ -21642,8 +21931,8 @@
         </p:nvSpPr>
         <p:spPr>
           <a:xfrm>
-            <a:off x="10381183" y="6272784"/>
-            <a:ext cx="1097280" cy="219456"/>
+            <a:off x="8826703" y="6272784"/>
+            <a:ext cx="2651760" cy="219456"/>
           </a:xfrm>
           <a:prstGeom prst="rect">
             <a:avLst/>
@@ -21668,9 +21957,31 @@
               </a:spcAft>
             </a:pPr>
             <a:r>
+              <a:rPr sz="900" b="0" i="0">
+                <a:solidFill>
+                  <a:srgbClr val="636E85"/>
+                </a:solidFill>
+                <a:latin typeface="Segoe UI"/>
+                <a:ea typeface="Segoe UI"/>
+                <a:cs typeface="Segoe UI"/>
+              </a:rPr>
+              <a:t>Lingesh K  ·  OSI2509030</a:t>
+            </a:r>
+            <a:r>
+              <a:rPr sz="900" b="0" i="0">
+                <a:solidFill>
+                  <a:srgbClr val="141C2E"/>
+                </a:solidFill>
+                <a:latin typeface="Segoe UI"/>
+                <a:ea typeface="Segoe UI"/>
+                <a:cs typeface="Segoe UI"/>
+              </a:rPr>
+              <a:t>     </a:t>
+            </a:r>
+            <a:r>
               <a:rPr sz="900" b="1" i="0">
                 <a:solidFill>
-                  <a:srgbClr val="636E85"/>
+                  <a:srgbClr val="0E1E3C"/>
                 </a:solidFill>
                 <a:latin typeface="Segoe UI"/>
                 <a:ea typeface="Segoe UI"/>
@@ -23825,8 +24136,8 @@
         </p:nvSpPr>
         <p:spPr>
           <a:xfrm>
-            <a:off x="987552" y="4882896"/>
-            <a:ext cx="7315200" cy="1572768"/>
+            <a:off x="987552" y="4718304"/>
+            <a:ext cx="7315200" cy="1207008"/>
           </a:xfrm>
           <a:prstGeom prst="rect">
             <a:avLst/>
@@ -23865,10 +24176,10 @@
           <a:p>
             <a:pPr algn="l">
               <a:lnSpc>
-                <a:spcPct val="132000"/>
+                <a:spcPct val="128000"/>
               </a:lnSpc>
               <a:spcBef>
-                <a:spcPts val="500"/>
+                <a:spcPts val="400"/>
               </a:spcBef>
               <a:spcAft>
                 <a:spcPts val="0"/>
@@ -23889,10 +24200,10 @@
           <a:p>
             <a:pPr algn="l">
               <a:lnSpc>
-                <a:spcPct val="132000"/>
+                <a:spcPct val="128000"/>
               </a:lnSpc>
               <a:spcBef>
-                <a:spcPts val="500"/>
+                <a:spcPts val="400"/>
               </a:spcBef>
               <a:spcAft>
                 <a:spcPts val="0"/>
@@ -23913,10 +24224,10 @@
           <a:p>
             <a:pPr algn="l">
               <a:lnSpc>
-                <a:spcPct val="132000"/>
+                <a:spcPct val="128000"/>
               </a:lnSpc>
               <a:spcBef>
-                <a:spcPts val="500"/>
+                <a:spcPts val="400"/>
               </a:spcBef>
               <a:spcAft>
                 <a:spcPts val="0"/>
@@ -23932,6 +24243,141 @@
                 <a:cs typeface="Segoe UI"/>
               </a:rPr>
               <a:t>— Who owns AI governance where you work - and do they know it?</a:t>
+            </a:r>
+          </a:p>
+        </p:txBody>
+      </p:sp>
+      <p:sp>
+        <p:nvSpPr>
+          <p:cNvPr id="11" name="Rectangle 10"/>
+          <p:cNvSpPr/>
+          <p:nvPr/>
+        </p:nvSpPr>
+        <p:spPr>
+          <a:xfrm>
+            <a:off x="987552" y="6035040"/>
+            <a:ext cx="3291840" cy="12700"/>
+          </a:xfrm>
+          <a:prstGeom prst="rect">
+            <a:avLst/>
+          </a:prstGeom>
+          <a:solidFill>
+            <a:srgbClr val="2A3E66"/>
+          </a:solidFill>
+          <a:ln>
+            <a:noFill/>
+          </a:ln>
+          <a:effectLst/>
+        </p:spPr>
+        <p:style>
+          <a:lnRef idx="1">
+            <a:schemeClr val="accent1"/>
+          </a:lnRef>
+          <a:fillRef idx="3">
+            <a:schemeClr val="accent1"/>
+          </a:fillRef>
+          <a:effectRef idx="2">
+            <a:schemeClr val="accent1"/>
+          </a:effectRef>
+          <a:fontRef idx="minor">
+            <a:schemeClr val="lt1"/>
+          </a:fontRef>
+        </p:style>
+        <p:txBody>
+          <a:bodyPr rtlCol="0" anchor="ctr"/>
+          <a:lstStyle/>
+          <a:p>
+            <a:pPr algn="ctr"/>
+          </a:p>
+        </p:txBody>
+      </p:sp>
+      <p:sp>
+        <p:nvSpPr>
+          <p:cNvPr id="12" name="TextBox 11"/>
+          <p:cNvSpPr txBox="1"/>
+          <p:nvPr/>
+        </p:nvSpPr>
+        <p:spPr>
+          <a:xfrm>
+            <a:off x="987552" y="6163056"/>
+            <a:ext cx="5852160" cy="292608"/>
+          </a:xfrm>
+          <a:prstGeom prst="rect">
+            <a:avLst/>
+          </a:prstGeom>
+          <a:noFill/>
+        </p:spPr>
+        <p:txBody>
+          <a:bodyPr wrap="square" lIns="0" rIns="0" tIns="0" bIns="0" anchor="t">
+            <a:spAutoFit/>
+          </a:bodyPr>
+          <a:lstStyle/>
+          <a:p>
+            <a:pPr algn="l">
+              <a:lnSpc>
+                <a:spcPct val="122000"/>
+              </a:lnSpc>
+              <a:spcBef>
+                <a:spcPts val="0"/>
+              </a:spcBef>
+              <a:spcAft>
+                <a:spcPts val="0"/>
+              </a:spcAft>
+            </a:pPr>
+            <a:r>
+              <a:rPr sz="1150" b="1" i="0">
+                <a:solidFill>
+                  <a:srgbClr val="FFFFFF"/>
+                </a:solidFill>
+                <a:latin typeface="Segoe UI"/>
+                <a:ea typeface="Segoe UI"/>
+                <a:cs typeface="Segoe UI"/>
+              </a:rPr>
+              <a:t>Lingesh K</a:t>
+            </a:r>
+            <a:r>
+              <a:rPr sz="1000" b="0" i="0">
+                <a:solidFill>
+                  <a:srgbClr val="7E91B4"/>
+                </a:solidFill>
+                <a:latin typeface="Segoe UI"/>
+                <a:ea typeface="Segoe UI"/>
+                <a:cs typeface="Segoe UI"/>
+              </a:rPr>
+              <a:t>   ·   Register No. </a:t>
+            </a:r>
+            <a:r>
+              <a:rPr sz="1000" b="1" i="0">
+                <a:solidFill>
+                  <a:srgbClr val="C5D2E8"/>
+                </a:solidFill>
+                <a:latin typeface="Segoe UI"/>
+                <a:ea typeface="Segoe UI"/>
+                <a:cs typeface="Segoe UI"/>
+              </a:rPr>
+              <a:t>OSI2509030</a:t>
+            </a:r>
+            <a:r>
+              <a:rPr sz="1000" b="0" i="0">
+                <a:solidFill>
+                  <a:srgbClr val="4A5E86"/>
+                </a:solidFill>
+                <a:latin typeface="Segoe UI"/>
+                <a:ea typeface="Segoe UI"/>
+                <a:cs typeface="Segoe UI"/>
+              </a:rPr>
+              <a:t>   ·   </a:t>
+            </a:r>
+            <a:r>
+              <a:rPr sz="1000" b="0" i="0">
+                <a:solidFill>
+                  <a:srgbClr val="7E91B4"/>
+                </a:solidFill>
+                <a:latin typeface="Segoe UI"/>
+                <a:ea typeface="Segoe UI"/>
+                <a:cs typeface="Segoe UI"/>
+              </a:rPr>
+              <a:t>PGPM · Systems Specialisation</a:t>
             </a:r>
           </a:p>
         </p:txBody>
@@ -24336,7 +24782,7 @@
         <p:spPr>
           <a:xfrm>
             <a:off x="987552" y="5943600"/>
-            <a:ext cx="5486400" cy="274320"/>
+            <a:ext cx="6400800" cy="274320"/>
           </a:xfrm>
           <a:prstGeom prst="rect">
             <a:avLst/>
@@ -24445,7 +24891,7 @@
         <p:spPr>
           <a:xfrm>
             <a:off x="713232" y="6272784"/>
-            <a:ext cx="8073923" cy="219456"/>
+            <a:ext cx="5597920" cy="219456"/>
           </a:xfrm>
           <a:prstGeom prst="rect">
             <a:avLst/>
@@ -24513,8 +24959,8 @@
         </p:nvSpPr>
         <p:spPr>
           <a:xfrm>
-            <a:off x="10381183" y="6272784"/>
-            <a:ext cx="1097280" cy="219456"/>
+            <a:off x="8826703" y="6272784"/>
+            <a:ext cx="2651760" cy="219456"/>
           </a:xfrm>
           <a:prstGeom prst="rect">
             <a:avLst/>
@@ -24539,9 +24985,31 @@
               </a:spcAft>
             </a:pPr>
             <a:r>
+              <a:rPr sz="900" b="0" i="0">
+                <a:solidFill>
+                  <a:srgbClr val="636E85"/>
+                </a:solidFill>
+                <a:latin typeface="Segoe UI"/>
+                <a:ea typeface="Segoe UI"/>
+                <a:cs typeface="Segoe UI"/>
+              </a:rPr>
+              <a:t>Lingesh K  ·  OSI2509030</a:t>
+            </a:r>
+            <a:r>
+              <a:rPr sz="900" b="0" i="0">
+                <a:solidFill>
+                  <a:srgbClr val="141C2E"/>
+                </a:solidFill>
+                <a:latin typeface="Segoe UI"/>
+                <a:ea typeface="Segoe UI"/>
+                <a:cs typeface="Segoe UI"/>
+              </a:rPr>
+              <a:t>     </a:t>
+            </a:r>
+            <a:r>
               <a:rPr sz="900" b="1" i="0">
                 <a:solidFill>
-                  <a:srgbClr val="636E85"/>
+                  <a:srgbClr val="0E1E3C"/>
                 </a:solidFill>
                 <a:latin typeface="Segoe UI"/>
                 <a:ea typeface="Segoe UI"/>
@@ -25873,7 +26341,7 @@
         <p:spPr>
           <a:xfrm>
             <a:off x="987552" y="5943600"/>
-            <a:ext cx="5486400" cy="274320"/>
+            <a:ext cx="6400800" cy="274320"/>
           </a:xfrm>
           <a:prstGeom prst="rect">
             <a:avLst/>
@@ -25982,7 +26450,7 @@
         <p:spPr>
           <a:xfrm>
             <a:off x="713232" y="6272784"/>
-            <a:ext cx="8073923" cy="219456"/>
+            <a:ext cx="5597920" cy="219456"/>
           </a:xfrm>
           <a:prstGeom prst="rect">
             <a:avLst/>
@@ -26050,8 +26518,8 @@
         </p:nvSpPr>
         <p:spPr>
           <a:xfrm>
-            <a:off x="10381183" y="6272784"/>
-            <a:ext cx="1097280" cy="219456"/>
+            <a:off x="8826703" y="6272784"/>
+            <a:ext cx="2651760" cy="219456"/>
           </a:xfrm>
           <a:prstGeom prst="rect">
             <a:avLst/>
@@ -26076,9 +26544,31 @@
               </a:spcAft>
             </a:pPr>
             <a:r>
+              <a:rPr sz="900" b="0" i="0">
+                <a:solidFill>
+                  <a:srgbClr val="636E85"/>
+                </a:solidFill>
+                <a:latin typeface="Segoe UI"/>
+                <a:ea typeface="Segoe UI"/>
+                <a:cs typeface="Segoe UI"/>
+              </a:rPr>
+              <a:t>Lingesh K  ·  OSI2509030</a:t>
+            </a:r>
+            <a:r>
+              <a:rPr sz="900" b="0" i="0">
+                <a:solidFill>
+                  <a:srgbClr val="141C2E"/>
+                </a:solidFill>
+                <a:latin typeface="Segoe UI"/>
+                <a:ea typeface="Segoe UI"/>
+                <a:cs typeface="Segoe UI"/>
+              </a:rPr>
+              <a:t>     </a:t>
+            </a:r>
+            <a:r>
               <a:rPr sz="900" b="1" i="0">
                 <a:solidFill>
-                  <a:srgbClr val="636E85"/>
+                  <a:srgbClr val="0E1E3C"/>
                 </a:solidFill>
                 <a:latin typeface="Segoe UI"/>
                 <a:ea typeface="Segoe UI"/>
@@ -27497,7 +27987,7 @@
         <p:spPr>
           <a:xfrm>
             <a:off x="713232" y="6272784"/>
-            <a:ext cx="8073923" cy="219456"/>
+            <a:ext cx="5597920" cy="219456"/>
           </a:xfrm>
           <a:prstGeom prst="rect">
             <a:avLst/>
@@ -27565,8 +28055,8 @@
         </p:nvSpPr>
         <p:spPr>
           <a:xfrm>
-            <a:off x="10381183" y="6272784"/>
-            <a:ext cx="1097280" cy="219456"/>
+            <a:off x="8826703" y="6272784"/>
+            <a:ext cx="2651760" cy="219456"/>
           </a:xfrm>
           <a:prstGeom prst="rect">
             <a:avLst/>
@@ -27591,9 +28081,31 @@
               </a:spcAft>
             </a:pPr>
             <a:r>
+              <a:rPr sz="900" b="0" i="0">
+                <a:solidFill>
+                  <a:srgbClr val="636E85"/>
+                </a:solidFill>
+                <a:latin typeface="Segoe UI"/>
+                <a:ea typeface="Segoe UI"/>
+                <a:cs typeface="Segoe UI"/>
+              </a:rPr>
+              <a:t>Lingesh K  ·  OSI2509030</a:t>
+            </a:r>
+            <a:r>
+              <a:rPr sz="900" b="0" i="0">
+                <a:solidFill>
+                  <a:srgbClr val="141C2E"/>
+                </a:solidFill>
+                <a:latin typeface="Segoe UI"/>
+                <a:ea typeface="Segoe UI"/>
+                <a:cs typeface="Segoe UI"/>
+              </a:rPr>
+              <a:t>     </a:t>
+            </a:r>
+            <a:r>
               <a:rPr sz="900" b="1" i="0">
                 <a:solidFill>
-                  <a:srgbClr val="636E85"/>
+                  <a:srgbClr val="0E1E3C"/>
                 </a:solidFill>
                 <a:latin typeface="Segoe UI"/>
                 <a:ea typeface="Segoe UI"/>
@@ -28673,7 +29185,7 @@
         <p:spPr>
           <a:xfrm>
             <a:off x="713232" y="6272784"/>
-            <a:ext cx="8073923" cy="219456"/>
+            <a:ext cx="5597920" cy="219456"/>
           </a:xfrm>
           <a:prstGeom prst="rect">
             <a:avLst/>
@@ -28741,8 +29253,8 @@
         </p:nvSpPr>
         <p:spPr>
           <a:xfrm>
-            <a:off x="10381183" y="6272784"/>
-            <a:ext cx="1097280" cy="219456"/>
+            <a:off x="8826703" y="6272784"/>
+            <a:ext cx="2651760" cy="219456"/>
           </a:xfrm>
           <a:prstGeom prst="rect">
             <a:avLst/>
@@ -28767,9 +29279,31 @@
               </a:spcAft>
             </a:pPr>
             <a:r>
+              <a:rPr sz="900" b="0" i="0">
+                <a:solidFill>
+                  <a:srgbClr val="636E85"/>
+                </a:solidFill>
+                <a:latin typeface="Segoe UI"/>
+                <a:ea typeface="Segoe UI"/>
+                <a:cs typeface="Segoe UI"/>
+              </a:rPr>
+              <a:t>Lingesh K  ·  OSI2509030</a:t>
+            </a:r>
+            <a:r>
+              <a:rPr sz="900" b="0" i="0">
+                <a:solidFill>
+                  <a:srgbClr val="141C2E"/>
+                </a:solidFill>
+                <a:latin typeface="Segoe UI"/>
+                <a:ea typeface="Segoe UI"/>
+                <a:cs typeface="Segoe UI"/>
+              </a:rPr>
+              <a:t>     </a:t>
+            </a:r>
+            <a:r>
               <a:rPr sz="900" b="1" i="0">
                 <a:solidFill>
-                  <a:srgbClr val="636E85"/>
+                  <a:srgbClr val="0E1E3C"/>
                 </a:solidFill>
                 <a:latin typeface="Segoe UI"/>
                 <a:ea typeface="Segoe UI"/>
@@ -30188,7 +30722,7 @@
         <p:spPr>
           <a:xfrm>
             <a:off x="713232" y="6272784"/>
-            <a:ext cx="8073923" cy="219456"/>
+            <a:ext cx="5597920" cy="219456"/>
           </a:xfrm>
           <a:prstGeom prst="rect">
             <a:avLst/>
@@ -30256,8 +30790,8 @@
         </p:nvSpPr>
         <p:spPr>
           <a:xfrm>
-            <a:off x="10381183" y="6272784"/>
-            <a:ext cx="1097280" cy="219456"/>
+            <a:off x="8826703" y="6272784"/>
+            <a:ext cx="2651760" cy="219456"/>
           </a:xfrm>
           <a:prstGeom prst="rect">
             <a:avLst/>
@@ -30282,9 +30816,31 @@
               </a:spcAft>
             </a:pPr>
             <a:r>
+              <a:rPr sz="900" b="0" i="0">
+                <a:solidFill>
+                  <a:srgbClr val="636E85"/>
+                </a:solidFill>
+                <a:latin typeface="Segoe UI"/>
+                <a:ea typeface="Segoe UI"/>
+                <a:cs typeface="Segoe UI"/>
+              </a:rPr>
+              <a:t>Lingesh K  ·  OSI2509030</a:t>
+            </a:r>
+            <a:r>
+              <a:rPr sz="900" b="0" i="0">
+                <a:solidFill>
+                  <a:srgbClr val="141C2E"/>
+                </a:solidFill>
+                <a:latin typeface="Segoe UI"/>
+                <a:ea typeface="Segoe UI"/>
+                <a:cs typeface="Segoe UI"/>
+              </a:rPr>
+              <a:t>     </a:t>
+            </a:r>
+            <a:r>
               <a:rPr sz="900" b="1" i="0">
                 <a:solidFill>
-                  <a:srgbClr val="636E85"/>
+                  <a:srgbClr val="0E1E3C"/>
                 </a:solidFill>
                 <a:latin typeface="Segoe UI"/>
                 <a:ea typeface="Segoe UI"/>

--- a/Unit 4 - Ethics, Legal and Social Implications.pptx
+++ b/Unit 4 - Ethics, Legal and Social Implications.pptx
@@ -3907,7 +3907,77 @@
       </p:sp>
       <p:sp>
         <p:nvSpPr>
-          <p:cNvPr id="7" name="TextBox 6"/>
+          <p:cNvPr id="7" name="logo-plate"/>
+          <p:cNvSpPr/>
+          <p:nvPr/>
+        </p:nvSpPr>
+        <p:spPr>
+          <a:xfrm>
+            <a:off x="9126735" y="539496"/>
+            <a:ext cx="2379159" cy="1152144"/>
+          </a:xfrm>
+          <a:prstGeom prst="roundRect">
+            <a:avLst>
+              <a:gd name="adj" fmla="val 14000"/>
+            </a:avLst>
+          </a:prstGeom>
+          <a:solidFill>
+            <a:srgbClr val="FFFFFF"/>
+          </a:solidFill>
+          <a:ln>
+            <a:noFill/>
+          </a:ln>
+          <a:effectLst/>
+        </p:spPr>
+        <p:style>
+          <a:lnRef idx="1">
+            <a:schemeClr val="accent1"/>
+          </a:lnRef>
+          <a:fillRef idx="3">
+            <a:schemeClr val="accent1"/>
+          </a:fillRef>
+          <a:effectRef idx="2">
+            <a:schemeClr val="accent1"/>
+          </a:effectRef>
+          <a:fontRef idx="minor">
+            <a:schemeClr val="lt1"/>
+          </a:fontRef>
+        </p:style>
+        <p:txBody>
+          <a:bodyPr rtlCol="0" anchor="ctr" wrap="square"/>
+          <a:lstStyle/>
+          <a:p>
+            <a:pPr algn="ctr"/>
+          </a:p>
+        </p:txBody>
+      </p:sp>
+      <p:pic>
+        <p:nvPicPr>
+          <p:cNvPr id="8" name="college-logo" descr="logo-full.png"/>
+          <p:cNvPicPr>
+            <a:picLocks noChangeAspect="1"/>
+          </p:cNvPicPr>
+          <p:nvPr/>
+        </p:nvPicPr>
+        <p:blipFill>
+          <a:blip r:embed="rId2"/>
+          <a:stretch>
+            <a:fillRect/>
+          </a:stretch>
+        </p:blipFill>
+        <p:spPr>
+          <a:xfrm>
+            <a:off x="9245607" y="658368"/>
+            <a:ext cx="2141415" cy="914400"/>
+          </a:xfrm>
+          <a:prstGeom prst="rect">
+            <a:avLst/>
+          </a:prstGeom>
+        </p:spPr>
+      </p:pic>
+      <p:sp>
+        <p:nvSpPr>
+          <p:cNvPr id="9" name="TextBox 8"/>
           <p:cNvSpPr txBox="1"/>
           <p:nvPr/>
         </p:nvSpPr>
@@ -3954,7 +4024,7 @@
       </p:sp>
       <p:sp>
         <p:nvSpPr>
-          <p:cNvPr id="8" name="Rounded Rectangle 7"/>
+          <p:cNvPr id="10" name="Rounded Rectangle 9"/>
           <p:cNvSpPr/>
           <p:nvPr/>
         </p:nvSpPr>
@@ -4021,7 +4091,7 @@
       </p:sp>
       <p:sp>
         <p:nvSpPr>
-          <p:cNvPr id="9" name="TextBox 8"/>
+          <p:cNvPr id="11" name="TextBox 10"/>
           <p:cNvSpPr txBox="1"/>
           <p:nvPr/>
         </p:nvSpPr>
@@ -4068,7 +4138,7 @@
       </p:sp>
       <p:sp>
         <p:nvSpPr>
-          <p:cNvPr id="10" name="Rectangle 9"/>
+          <p:cNvPr id="12" name="Rectangle 11"/>
           <p:cNvSpPr/>
           <p:nvPr/>
         </p:nvSpPr>
@@ -4112,7 +4182,7 @@
       </p:sp>
       <p:sp>
         <p:nvSpPr>
-          <p:cNvPr id="11" name="TextBox 10"/>
+          <p:cNvPr id="13" name="TextBox 12"/>
           <p:cNvSpPr txBox="1"/>
           <p:nvPr/>
         </p:nvSpPr>
@@ -4159,7 +4229,7 @@
       </p:sp>
       <p:sp>
         <p:nvSpPr>
-          <p:cNvPr id="12" name="Rounded Rectangle 11"/>
+          <p:cNvPr id="14" name="Rounded Rectangle 13"/>
           <p:cNvSpPr/>
           <p:nvPr/>
         </p:nvSpPr>
@@ -4226,7 +4296,7 @@
       </p:sp>
       <p:sp>
         <p:nvSpPr>
-          <p:cNvPr id="13" name="Rounded Rectangle 12"/>
+          <p:cNvPr id="15" name="Rounded Rectangle 14"/>
           <p:cNvSpPr/>
           <p:nvPr/>
         </p:nvSpPr>
@@ -4293,7 +4363,7 @@
       </p:sp>
       <p:sp>
         <p:nvSpPr>
-          <p:cNvPr id="14" name="Rounded Rectangle 13"/>
+          <p:cNvPr id="16" name="Rounded Rectangle 15"/>
           <p:cNvSpPr/>
           <p:nvPr/>
         </p:nvSpPr>
@@ -4360,7 +4430,7 @@
       </p:sp>
       <p:sp>
         <p:nvSpPr>
-          <p:cNvPr id="15" name="Rounded Rectangle 14"/>
+          <p:cNvPr id="17" name="Rounded Rectangle 16"/>
           <p:cNvSpPr/>
           <p:nvPr/>
         </p:nvSpPr>
@@ -4427,7 +4497,7 @@
       </p:sp>
       <p:sp>
         <p:nvSpPr>
-          <p:cNvPr id="16" name="Rectangle 15"/>
+          <p:cNvPr id="18" name="Rectangle 17"/>
           <p:cNvSpPr/>
           <p:nvPr/>
         </p:nvSpPr>
@@ -4471,7 +4541,7 @@
       </p:sp>
       <p:sp>
         <p:nvSpPr>
-          <p:cNvPr id="17" name="TextBox 16"/>
+          <p:cNvPr id="19" name="TextBox 18"/>
           <p:cNvSpPr txBox="1"/>
           <p:nvPr/>
         </p:nvSpPr>
@@ -4564,7 +4634,7 @@
       </p:sp>
       <p:sp>
         <p:nvSpPr>
-          <p:cNvPr id="18" name="TextBox 17"/>
+          <p:cNvPr id="20" name="TextBox 19"/>
           <p:cNvSpPr txBox="1"/>
           <p:nvPr/>
         </p:nvSpPr>
@@ -5047,6 +5117,76 @@
           </a:p>
         </p:txBody>
       </p:sp>
+      <p:sp>
+        <p:nvSpPr>
+          <p:cNvPr id="11" name="logo-plate"/>
+          <p:cNvSpPr/>
+          <p:nvPr/>
+        </p:nvSpPr>
+        <p:spPr>
+          <a:xfrm>
+            <a:off x="9512190" y="539496"/>
+            <a:ext cx="1993704" cy="987552"/>
+          </a:xfrm>
+          <a:prstGeom prst="roundRect">
+            <a:avLst>
+              <a:gd name="adj" fmla="val 14000"/>
+            </a:avLst>
+          </a:prstGeom>
+          <a:solidFill>
+            <a:srgbClr val="FFFFFF"/>
+          </a:solidFill>
+          <a:ln>
+            <a:noFill/>
+          </a:ln>
+          <a:effectLst/>
+        </p:spPr>
+        <p:style>
+          <a:lnRef idx="1">
+            <a:schemeClr val="accent1"/>
+          </a:lnRef>
+          <a:fillRef idx="3">
+            <a:schemeClr val="accent1"/>
+          </a:fillRef>
+          <a:effectRef idx="2">
+            <a:schemeClr val="accent1"/>
+          </a:effectRef>
+          <a:fontRef idx="minor">
+            <a:schemeClr val="lt1"/>
+          </a:fontRef>
+        </p:style>
+        <p:txBody>
+          <a:bodyPr rtlCol="0" anchor="ctr" wrap="square"/>
+          <a:lstStyle/>
+          <a:p>
+            <a:pPr algn="ctr"/>
+          </a:p>
+        </p:txBody>
+      </p:sp>
+      <p:pic>
+        <p:nvPicPr>
+          <p:cNvPr id="12" name="college-logo" descr="logo-full.png"/>
+          <p:cNvPicPr>
+            <a:picLocks noChangeAspect="1"/>
+          </p:cNvPicPr>
+          <p:nvPr/>
+        </p:nvPicPr>
+        <p:blipFill>
+          <a:blip r:embed="rId2"/>
+          <a:stretch>
+            <a:fillRect/>
+          </a:stretch>
+        </p:blipFill>
+        <p:spPr>
+          <a:xfrm>
+            <a:off x="9631062" y="658368"/>
+            <a:ext cx="1755961" cy="749808"/>
+          </a:xfrm>
+          <a:prstGeom prst="rect">
+            <a:avLst/>
+          </a:prstGeom>
+        </p:spPr>
+      </p:pic>
     </p:spTree>
   </p:cSld>
   <p:clrMapOvr>
@@ -5109,9 +5249,33 @@
           </a:p>
         </p:txBody>
       </p:sp>
-      <p:sp>
-        <p:nvSpPr>
-          <p:cNvPr id="3" name="TextBox 2"/>
+      <p:pic>
+        <p:nvPicPr>
+          <p:cNvPr id="3" name="college-logo" descr="logo-mark.png"/>
+          <p:cNvPicPr>
+            <a:picLocks noChangeAspect="1"/>
+          </p:cNvPicPr>
+          <p:nvPr/>
+        </p:nvPicPr>
+        <p:blipFill>
+          <a:blip r:embed="rId2"/>
+          <a:stretch>
+            <a:fillRect/>
+          </a:stretch>
+        </p:blipFill>
+        <p:spPr>
+          <a:xfrm>
+            <a:off x="11203333" y="6199632"/>
+            <a:ext cx="275129" cy="310896"/>
+          </a:xfrm>
+          <a:prstGeom prst="rect">
+            <a:avLst/>
+          </a:prstGeom>
+        </p:spPr>
+      </p:pic>
+      <p:sp>
+        <p:nvSpPr>
+          <p:cNvPr id="4" name="TextBox 3"/>
           <p:cNvSpPr txBox="1"/>
           <p:nvPr/>
         </p:nvSpPr>
@@ -5180,13 +5344,13 @@
       </p:sp>
       <p:sp>
         <p:nvSpPr>
-          <p:cNvPr id="4" name="TextBox 3"/>
+          <p:cNvPr id="5" name="TextBox 4"/>
           <p:cNvSpPr txBox="1"/>
           <p:nvPr/>
         </p:nvSpPr>
         <p:spPr>
           <a:xfrm>
-            <a:off x="8826703" y="6272784"/>
+            <a:off x="8240677" y="6272784"/>
             <a:ext cx="2651760" cy="219456"/>
           </a:xfrm>
           <a:prstGeom prst="rect">
@@ -5249,7 +5413,7 @@
       </p:sp>
       <p:sp>
         <p:nvSpPr>
-          <p:cNvPr id="5" name="TextBox 4"/>
+          <p:cNvPr id="6" name="TextBox 5"/>
           <p:cNvSpPr txBox="1"/>
           <p:nvPr/>
         </p:nvSpPr>
@@ -5296,7 +5460,7 @@
       </p:sp>
       <p:sp>
         <p:nvSpPr>
-          <p:cNvPr id="6" name="TextBox 5"/>
+          <p:cNvPr id="7" name="TextBox 6"/>
           <p:cNvSpPr txBox="1"/>
           <p:nvPr/>
         </p:nvSpPr>
@@ -5343,7 +5507,7 @@
       </p:sp>
       <p:sp>
         <p:nvSpPr>
-          <p:cNvPr id="7" name="Rectangle 6"/>
+          <p:cNvPr id="8" name="Rectangle 7"/>
           <p:cNvSpPr/>
           <p:nvPr/>
         </p:nvSpPr>
@@ -5387,7 +5551,7 @@
       </p:sp>
       <p:sp>
         <p:nvSpPr>
-          <p:cNvPr id="8" name="TextBox 7"/>
+          <p:cNvPr id="9" name="TextBox 8"/>
           <p:cNvSpPr txBox="1"/>
           <p:nvPr/>
         </p:nvSpPr>
@@ -5434,7 +5598,7 @@
       </p:sp>
       <p:sp>
         <p:nvSpPr>
-          <p:cNvPr id="9" name="Rectangle 8"/>
+          <p:cNvPr id="10" name="Rectangle 9"/>
           <p:cNvSpPr/>
           <p:nvPr/>
         </p:nvSpPr>
@@ -5478,7 +5642,7 @@
       </p:sp>
       <p:sp>
         <p:nvSpPr>
-          <p:cNvPr id="10" name="Rounded Rectangle 9"/>
+          <p:cNvPr id="11" name="Rounded Rectangle 10"/>
           <p:cNvSpPr/>
           <p:nvPr/>
         </p:nvSpPr>
@@ -5524,7 +5688,7 @@
       </p:sp>
       <p:sp>
         <p:nvSpPr>
-          <p:cNvPr id="11" name="TextBox 10"/>
+          <p:cNvPr id="12" name="TextBox 11"/>
           <p:cNvSpPr txBox="1"/>
           <p:nvPr/>
         </p:nvSpPr>
@@ -5571,7 +5735,7 @@
       </p:sp>
       <p:sp>
         <p:nvSpPr>
-          <p:cNvPr id="12" name="Rounded Rectangle 11"/>
+          <p:cNvPr id="13" name="Rounded Rectangle 12"/>
           <p:cNvSpPr/>
           <p:nvPr/>
         </p:nvSpPr>
@@ -5617,7 +5781,7 @@
       </p:sp>
       <p:sp>
         <p:nvSpPr>
-          <p:cNvPr id="13" name="TextBox 12"/>
+          <p:cNvPr id="14" name="TextBox 13"/>
           <p:cNvSpPr txBox="1"/>
           <p:nvPr/>
         </p:nvSpPr>
@@ -5664,7 +5828,7 @@
       </p:sp>
       <p:sp>
         <p:nvSpPr>
-          <p:cNvPr id="14" name="Rounded Rectangle 13"/>
+          <p:cNvPr id="15" name="Rounded Rectangle 14"/>
           <p:cNvSpPr/>
           <p:nvPr/>
         </p:nvSpPr>
@@ -5710,7 +5874,7 @@
       </p:sp>
       <p:sp>
         <p:nvSpPr>
-          <p:cNvPr id="15" name="TextBox 14"/>
+          <p:cNvPr id="16" name="TextBox 15"/>
           <p:cNvSpPr txBox="1"/>
           <p:nvPr/>
         </p:nvSpPr>
@@ -5757,7 +5921,7 @@
       </p:sp>
       <p:sp>
         <p:nvSpPr>
-          <p:cNvPr id="16" name="Rounded Rectangle 15"/>
+          <p:cNvPr id="17" name="Rounded Rectangle 16"/>
           <p:cNvSpPr/>
           <p:nvPr/>
         </p:nvSpPr>
@@ -5803,7 +5967,7 @@
       </p:sp>
       <p:sp>
         <p:nvSpPr>
-          <p:cNvPr id="17" name="TextBox 16"/>
+          <p:cNvPr id="18" name="TextBox 17"/>
           <p:cNvSpPr txBox="1"/>
           <p:nvPr/>
         </p:nvSpPr>
@@ -5850,7 +6014,7 @@
       </p:sp>
       <p:sp>
         <p:nvSpPr>
-          <p:cNvPr id="18" name="Rounded Rectangle 17"/>
+          <p:cNvPr id="19" name="Rounded Rectangle 18"/>
           <p:cNvSpPr/>
           <p:nvPr/>
         </p:nvSpPr>
@@ -5896,7 +6060,7 @@
       </p:sp>
       <p:sp>
         <p:nvSpPr>
-          <p:cNvPr id="19" name="TextBox 18"/>
+          <p:cNvPr id="20" name="TextBox 19"/>
           <p:cNvSpPr txBox="1"/>
           <p:nvPr/>
         </p:nvSpPr>
@@ -5943,7 +6107,7 @@
       </p:sp>
       <p:sp>
         <p:nvSpPr>
-          <p:cNvPr id="20" name="Rounded Rectangle 19"/>
+          <p:cNvPr id="21" name="Rounded Rectangle 20"/>
           <p:cNvSpPr/>
           <p:nvPr/>
         </p:nvSpPr>
@@ -5997,7 +6161,7 @@
       </p:sp>
       <p:sp>
         <p:nvSpPr>
-          <p:cNvPr id="21" name="Rectangle 20"/>
+          <p:cNvPr id="22" name="Rectangle 21"/>
           <p:cNvSpPr/>
           <p:nvPr/>
         </p:nvSpPr>
@@ -6041,7 +6205,7 @@
       </p:sp>
       <p:sp>
         <p:nvSpPr>
-          <p:cNvPr id="22" name="TextBox 21"/>
+          <p:cNvPr id="23" name="TextBox 22"/>
           <p:cNvSpPr txBox="1"/>
           <p:nvPr/>
         </p:nvSpPr>
@@ -6088,7 +6252,7 @@
       </p:sp>
       <p:sp>
         <p:nvSpPr>
-          <p:cNvPr id="23" name="TextBox 22"/>
+          <p:cNvPr id="24" name="TextBox 23"/>
           <p:cNvSpPr txBox="1"/>
           <p:nvPr/>
         </p:nvSpPr>
@@ -6135,7 +6299,7 @@
       </p:sp>
       <p:sp>
         <p:nvSpPr>
-          <p:cNvPr id="24" name="Rounded Rectangle 23"/>
+          <p:cNvPr id="25" name="Rounded Rectangle 24"/>
           <p:cNvSpPr/>
           <p:nvPr/>
         </p:nvSpPr>
@@ -6189,7 +6353,7 @@
       </p:sp>
       <p:sp>
         <p:nvSpPr>
-          <p:cNvPr id="25" name="Rectangle 24"/>
+          <p:cNvPr id="26" name="Rectangle 25"/>
           <p:cNvSpPr/>
           <p:nvPr/>
         </p:nvSpPr>
@@ -6233,7 +6397,7 @@
       </p:sp>
       <p:sp>
         <p:nvSpPr>
-          <p:cNvPr id="26" name="TextBox 25"/>
+          <p:cNvPr id="27" name="TextBox 26"/>
           <p:cNvSpPr txBox="1"/>
           <p:nvPr/>
         </p:nvSpPr>
@@ -6280,7 +6444,7 @@
       </p:sp>
       <p:sp>
         <p:nvSpPr>
-          <p:cNvPr id="27" name="TextBox 26"/>
+          <p:cNvPr id="28" name="TextBox 27"/>
           <p:cNvSpPr txBox="1"/>
           <p:nvPr/>
         </p:nvSpPr>
@@ -6327,7 +6491,7 @@
       </p:sp>
       <p:sp>
         <p:nvSpPr>
-          <p:cNvPr id="28" name="Rounded Rectangle 27"/>
+          <p:cNvPr id="29" name="Rounded Rectangle 28"/>
           <p:cNvSpPr/>
           <p:nvPr/>
         </p:nvSpPr>
@@ -6381,7 +6545,7 @@
       </p:sp>
       <p:sp>
         <p:nvSpPr>
-          <p:cNvPr id="29" name="Rectangle 28"/>
+          <p:cNvPr id="30" name="Rectangle 29"/>
           <p:cNvSpPr/>
           <p:nvPr/>
         </p:nvSpPr>
@@ -6425,7 +6589,7 @@
       </p:sp>
       <p:sp>
         <p:nvSpPr>
-          <p:cNvPr id="30" name="TextBox 29"/>
+          <p:cNvPr id="31" name="TextBox 30"/>
           <p:cNvSpPr txBox="1"/>
           <p:nvPr/>
         </p:nvSpPr>
@@ -6472,7 +6636,7 @@
       </p:sp>
       <p:sp>
         <p:nvSpPr>
-          <p:cNvPr id="31" name="TextBox 30"/>
+          <p:cNvPr id="32" name="TextBox 31"/>
           <p:cNvSpPr txBox="1"/>
           <p:nvPr/>
         </p:nvSpPr>
@@ -6579,9 +6743,33 @@
           </a:p>
         </p:txBody>
       </p:sp>
-      <p:sp>
-        <p:nvSpPr>
-          <p:cNvPr id="3" name="TextBox 2"/>
+      <p:pic>
+        <p:nvPicPr>
+          <p:cNvPr id="3" name="college-logo" descr="logo-mark.png"/>
+          <p:cNvPicPr>
+            <a:picLocks noChangeAspect="1"/>
+          </p:cNvPicPr>
+          <p:nvPr/>
+        </p:nvPicPr>
+        <p:blipFill>
+          <a:blip r:embed="rId2"/>
+          <a:stretch>
+            <a:fillRect/>
+          </a:stretch>
+        </p:blipFill>
+        <p:spPr>
+          <a:xfrm>
+            <a:off x="11203333" y="6199632"/>
+            <a:ext cx="275129" cy="310896"/>
+          </a:xfrm>
+          <a:prstGeom prst="rect">
+            <a:avLst/>
+          </a:prstGeom>
+        </p:spPr>
+      </p:pic>
+      <p:sp>
+        <p:nvSpPr>
+          <p:cNvPr id="4" name="TextBox 3"/>
           <p:cNvSpPr txBox="1"/>
           <p:nvPr/>
         </p:nvSpPr>
@@ -6650,13 +6838,13 @@
       </p:sp>
       <p:sp>
         <p:nvSpPr>
-          <p:cNvPr id="4" name="TextBox 3"/>
+          <p:cNvPr id="5" name="TextBox 4"/>
           <p:cNvSpPr txBox="1"/>
           <p:nvPr/>
         </p:nvSpPr>
         <p:spPr>
           <a:xfrm>
-            <a:off x="8826703" y="6272784"/>
+            <a:off x="8240677" y="6272784"/>
             <a:ext cx="2651760" cy="219456"/>
           </a:xfrm>
           <a:prstGeom prst="rect">
@@ -6719,7 +6907,7 @@
       </p:sp>
       <p:sp>
         <p:nvSpPr>
-          <p:cNvPr id="5" name="TextBox 4"/>
+          <p:cNvPr id="6" name="TextBox 5"/>
           <p:cNvSpPr txBox="1"/>
           <p:nvPr/>
         </p:nvSpPr>
@@ -6766,7 +6954,7 @@
       </p:sp>
       <p:sp>
         <p:nvSpPr>
-          <p:cNvPr id="6" name="TextBox 5"/>
+          <p:cNvPr id="7" name="TextBox 6"/>
           <p:cNvSpPr txBox="1"/>
           <p:nvPr/>
         </p:nvSpPr>
@@ -6813,7 +7001,7 @@
       </p:sp>
       <p:sp>
         <p:nvSpPr>
-          <p:cNvPr id="7" name="Rectangle 6"/>
+          <p:cNvPr id="8" name="Rectangle 7"/>
           <p:cNvSpPr/>
           <p:nvPr/>
         </p:nvSpPr>
@@ -6857,7 +7045,7 @@
       </p:sp>
       <p:sp>
         <p:nvSpPr>
-          <p:cNvPr id="8" name="TextBox 7"/>
+          <p:cNvPr id="9" name="TextBox 8"/>
           <p:cNvSpPr txBox="1"/>
           <p:nvPr/>
         </p:nvSpPr>
@@ -6904,7 +7092,7 @@
       </p:sp>
       <p:sp>
         <p:nvSpPr>
-          <p:cNvPr id="9" name="Rounded Rectangle 8"/>
+          <p:cNvPr id="10" name="Rounded Rectangle 9"/>
           <p:cNvSpPr/>
           <p:nvPr/>
         </p:nvSpPr>
@@ -6958,7 +7146,7 @@
       </p:sp>
       <p:sp>
         <p:nvSpPr>
-          <p:cNvPr id="10" name="Rectangle 9"/>
+          <p:cNvPr id="11" name="Rectangle 10"/>
           <p:cNvSpPr/>
           <p:nvPr/>
         </p:nvSpPr>
@@ -7002,7 +7190,7 @@
       </p:sp>
       <p:sp>
         <p:nvSpPr>
-          <p:cNvPr id="11" name="TextBox 10"/>
+          <p:cNvPr id="12" name="TextBox 11"/>
           <p:cNvSpPr txBox="1"/>
           <p:nvPr/>
         </p:nvSpPr>
@@ -7049,7 +7237,7 @@
       </p:sp>
       <p:sp>
         <p:nvSpPr>
-          <p:cNvPr id="12" name="Rounded Rectangle 11"/>
+          <p:cNvPr id="13" name="Rounded Rectangle 12"/>
           <p:cNvSpPr/>
           <p:nvPr/>
         </p:nvSpPr>
@@ -7095,7 +7283,7 @@
       </p:sp>
       <p:sp>
         <p:nvSpPr>
-          <p:cNvPr id="13" name="TextBox 12"/>
+          <p:cNvPr id="14" name="TextBox 13"/>
           <p:cNvSpPr txBox="1"/>
           <p:nvPr/>
         </p:nvSpPr>
@@ -7142,7 +7330,7 @@
       </p:sp>
       <p:sp>
         <p:nvSpPr>
-          <p:cNvPr id="14" name="Rounded Rectangle 13"/>
+          <p:cNvPr id="15" name="Rounded Rectangle 14"/>
           <p:cNvSpPr/>
           <p:nvPr/>
         </p:nvSpPr>
@@ -7188,7 +7376,7 @@
       </p:sp>
       <p:sp>
         <p:nvSpPr>
-          <p:cNvPr id="15" name="TextBox 14"/>
+          <p:cNvPr id="16" name="TextBox 15"/>
           <p:cNvSpPr txBox="1"/>
           <p:nvPr/>
         </p:nvSpPr>
@@ -7235,7 +7423,7 @@
       </p:sp>
       <p:sp>
         <p:nvSpPr>
-          <p:cNvPr id="16" name="Rounded Rectangle 15"/>
+          <p:cNvPr id="17" name="Rounded Rectangle 16"/>
           <p:cNvSpPr/>
           <p:nvPr/>
         </p:nvSpPr>
@@ -7281,7 +7469,7 @@
       </p:sp>
       <p:sp>
         <p:nvSpPr>
-          <p:cNvPr id="17" name="TextBox 16"/>
+          <p:cNvPr id="18" name="TextBox 17"/>
           <p:cNvSpPr txBox="1"/>
           <p:nvPr/>
         </p:nvSpPr>
@@ -7328,7 +7516,7 @@
       </p:sp>
       <p:sp>
         <p:nvSpPr>
-          <p:cNvPr id="18" name="Rounded Rectangle 17"/>
+          <p:cNvPr id="19" name="Rounded Rectangle 18"/>
           <p:cNvSpPr/>
           <p:nvPr/>
         </p:nvSpPr>
@@ -7382,7 +7570,7 @@
       </p:sp>
       <p:sp>
         <p:nvSpPr>
-          <p:cNvPr id="19" name="Rectangle 18"/>
+          <p:cNvPr id="20" name="Rectangle 19"/>
           <p:cNvSpPr/>
           <p:nvPr/>
         </p:nvSpPr>
@@ -7426,7 +7614,7 @@
       </p:sp>
       <p:sp>
         <p:nvSpPr>
-          <p:cNvPr id="20" name="TextBox 19"/>
+          <p:cNvPr id="21" name="TextBox 20"/>
           <p:cNvSpPr txBox="1"/>
           <p:nvPr/>
         </p:nvSpPr>
@@ -7473,7 +7661,7 @@
       </p:sp>
       <p:sp>
         <p:nvSpPr>
-          <p:cNvPr id="21" name="Rounded Rectangle 20"/>
+          <p:cNvPr id="22" name="Rounded Rectangle 21"/>
           <p:cNvSpPr/>
           <p:nvPr/>
         </p:nvSpPr>
@@ -7519,7 +7707,7 @@
       </p:sp>
       <p:sp>
         <p:nvSpPr>
-          <p:cNvPr id="22" name="TextBox 21"/>
+          <p:cNvPr id="23" name="TextBox 22"/>
           <p:cNvSpPr txBox="1"/>
           <p:nvPr/>
         </p:nvSpPr>
@@ -7566,7 +7754,7 @@
       </p:sp>
       <p:sp>
         <p:nvSpPr>
-          <p:cNvPr id="23" name="Rounded Rectangle 22"/>
+          <p:cNvPr id="24" name="Rounded Rectangle 23"/>
           <p:cNvSpPr/>
           <p:nvPr/>
         </p:nvSpPr>
@@ -7612,7 +7800,7 @@
       </p:sp>
       <p:sp>
         <p:nvSpPr>
-          <p:cNvPr id="24" name="TextBox 23"/>
+          <p:cNvPr id="25" name="TextBox 24"/>
           <p:cNvSpPr txBox="1"/>
           <p:nvPr/>
         </p:nvSpPr>
@@ -7659,7 +7847,7 @@
       </p:sp>
       <p:sp>
         <p:nvSpPr>
-          <p:cNvPr id="25" name="Rounded Rectangle 24"/>
+          <p:cNvPr id="26" name="Rounded Rectangle 25"/>
           <p:cNvSpPr/>
           <p:nvPr/>
         </p:nvSpPr>
@@ -7705,7 +7893,7 @@
       </p:sp>
       <p:sp>
         <p:nvSpPr>
-          <p:cNvPr id="26" name="TextBox 25"/>
+          <p:cNvPr id="27" name="TextBox 26"/>
           <p:cNvSpPr txBox="1"/>
           <p:nvPr/>
         </p:nvSpPr>
@@ -7752,7 +7940,7 @@
       </p:sp>
       <p:sp>
         <p:nvSpPr>
-          <p:cNvPr id="27" name="Rounded Rectangle 26"/>
+          <p:cNvPr id="28" name="Rounded Rectangle 27"/>
           <p:cNvSpPr/>
           <p:nvPr/>
         </p:nvSpPr>
@@ -7806,7 +7994,7 @@
       </p:sp>
       <p:sp>
         <p:nvSpPr>
-          <p:cNvPr id="28" name="Rectangle 27"/>
+          <p:cNvPr id="29" name="Rectangle 28"/>
           <p:cNvSpPr/>
           <p:nvPr/>
         </p:nvSpPr>
@@ -7850,7 +8038,7 @@
       </p:sp>
       <p:sp>
         <p:nvSpPr>
-          <p:cNvPr id="29" name="TextBox 28"/>
+          <p:cNvPr id="30" name="TextBox 29"/>
           <p:cNvSpPr txBox="1"/>
           <p:nvPr/>
         </p:nvSpPr>
@@ -7897,7 +8085,7 @@
       </p:sp>
       <p:sp>
         <p:nvSpPr>
-          <p:cNvPr id="30" name="Rounded Rectangle 29"/>
+          <p:cNvPr id="31" name="Rounded Rectangle 30"/>
           <p:cNvSpPr/>
           <p:nvPr/>
         </p:nvSpPr>
@@ -7943,7 +8131,7 @@
       </p:sp>
       <p:sp>
         <p:nvSpPr>
-          <p:cNvPr id="31" name="TextBox 30"/>
+          <p:cNvPr id="32" name="TextBox 31"/>
           <p:cNvSpPr txBox="1"/>
           <p:nvPr/>
         </p:nvSpPr>
@@ -7990,7 +8178,7 @@
       </p:sp>
       <p:sp>
         <p:nvSpPr>
-          <p:cNvPr id="32" name="Rounded Rectangle 31"/>
+          <p:cNvPr id="33" name="Rounded Rectangle 32"/>
           <p:cNvSpPr/>
           <p:nvPr/>
         </p:nvSpPr>
@@ -8036,7 +8224,7 @@
       </p:sp>
       <p:sp>
         <p:nvSpPr>
-          <p:cNvPr id="33" name="TextBox 32"/>
+          <p:cNvPr id="34" name="TextBox 33"/>
           <p:cNvSpPr txBox="1"/>
           <p:nvPr/>
         </p:nvSpPr>
@@ -8083,7 +8271,7 @@
       </p:sp>
       <p:sp>
         <p:nvSpPr>
-          <p:cNvPr id="34" name="Rounded Rectangle 33"/>
+          <p:cNvPr id="35" name="Rounded Rectangle 34"/>
           <p:cNvSpPr/>
           <p:nvPr/>
         </p:nvSpPr>
@@ -8129,7 +8317,7 @@
       </p:sp>
       <p:sp>
         <p:nvSpPr>
-          <p:cNvPr id="35" name="TextBox 34"/>
+          <p:cNvPr id="36" name="TextBox 35"/>
           <p:cNvSpPr txBox="1"/>
           <p:nvPr/>
         </p:nvSpPr>
@@ -8176,7 +8364,7 @@
       </p:sp>
       <p:sp>
         <p:nvSpPr>
-          <p:cNvPr id="36" name="Rounded Rectangle 35"/>
+          <p:cNvPr id="37" name="Rounded Rectangle 36"/>
           <p:cNvSpPr/>
           <p:nvPr/>
         </p:nvSpPr>
@@ -8230,7 +8418,7 @@
       </p:sp>
       <p:sp>
         <p:nvSpPr>
-          <p:cNvPr id="37" name="Rectangle 36"/>
+          <p:cNvPr id="38" name="Rectangle 37"/>
           <p:cNvSpPr/>
           <p:nvPr/>
         </p:nvSpPr>
@@ -8274,7 +8462,7 @@
       </p:sp>
       <p:sp>
         <p:nvSpPr>
-          <p:cNvPr id="38" name="TextBox 37"/>
+          <p:cNvPr id="39" name="TextBox 38"/>
           <p:cNvSpPr txBox="1"/>
           <p:nvPr/>
         </p:nvSpPr>
@@ -8321,7 +8509,7 @@
       </p:sp>
       <p:sp>
         <p:nvSpPr>
-          <p:cNvPr id="39" name="Rounded Rectangle 38"/>
+          <p:cNvPr id="40" name="Rounded Rectangle 39"/>
           <p:cNvSpPr/>
           <p:nvPr/>
         </p:nvSpPr>
@@ -8367,7 +8555,7 @@
       </p:sp>
       <p:sp>
         <p:nvSpPr>
-          <p:cNvPr id="40" name="TextBox 39"/>
+          <p:cNvPr id="41" name="TextBox 40"/>
           <p:cNvSpPr txBox="1"/>
           <p:nvPr/>
         </p:nvSpPr>
@@ -8414,7 +8602,7 @@
       </p:sp>
       <p:sp>
         <p:nvSpPr>
-          <p:cNvPr id="41" name="Rounded Rectangle 40"/>
+          <p:cNvPr id="42" name="Rounded Rectangle 41"/>
           <p:cNvSpPr/>
           <p:nvPr/>
         </p:nvSpPr>
@@ -8460,7 +8648,7 @@
       </p:sp>
       <p:sp>
         <p:nvSpPr>
-          <p:cNvPr id="42" name="TextBox 41"/>
+          <p:cNvPr id="43" name="TextBox 42"/>
           <p:cNvSpPr txBox="1"/>
           <p:nvPr/>
         </p:nvSpPr>
@@ -8507,7 +8695,7 @@
       </p:sp>
       <p:sp>
         <p:nvSpPr>
-          <p:cNvPr id="43" name="Rounded Rectangle 42"/>
+          <p:cNvPr id="44" name="Rounded Rectangle 43"/>
           <p:cNvSpPr/>
           <p:nvPr/>
         </p:nvSpPr>
@@ -8553,7 +8741,7 @@
       </p:sp>
       <p:sp>
         <p:nvSpPr>
-          <p:cNvPr id="44" name="TextBox 43"/>
+          <p:cNvPr id="45" name="TextBox 44"/>
           <p:cNvSpPr txBox="1"/>
           <p:nvPr/>
         </p:nvSpPr>
@@ -9036,6 +9224,76 @@
           </a:p>
         </p:txBody>
       </p:sp>
+      <p:sp>
+        <p:nvSpPr>
+          <p:cNvPr id="11" name="logo-plate"/>
+          <p:cNvSpPr/>
+          <p:nvPr/>
+        </p:nvSpPr>
+        <p:spPr>
+          <a:xfrm>
+            <a:off x="9512190" y="539496"/>
+            <a:ext cx="1993704" cy="987552"/>
+          </a:xfrm>
+          <a:prstGeom prst="roundRect">
+            <a:avLst>
+              <a:gd name="adj" fmla="val 14000"/>
+            </a:avLst>
+          </a:prstGeom>
+          <a:solidFill>
+            <a:srgbClr val="FFFFFF"/>
+          </a:solidFill>
+          <a:ln>
+            <a:noFill/>
+          </a:ln>
+          <a:effectLst/>
+        </p:spPr>
+        <p:style>
+          <a:lnRef idx="1">
+            <a:schemeClr val="accent1"/>
+          </a:lnRef>
+          <a:fillRef idx="3">
+            <a:schemeClr val="accent1"/>
+          </a:fillRef>
+          <a:effectRef idx="2">
+            <a:schemeClr val="accent1"/>
+          </a:effectRef>
+          <a:fontRef idx="minor">
+            <a:schemeClr val="lt1"/>
+          </a:fontRef>
+        </p:style>
+        <p:txBody>
+          <a:bodyPr rtlCol="0" anchor="ctr" wrap="square"/>
+          <a:lstStyle/>
+          <a:p>
+            <a:pPr algn="ctr"/>
+          </a:p>
+        </p:txBody>
+      </p:sp>
+      <p:pic>
+        <p:nvPicPr>
+          <p:cNvPr id="12" name="college-logo" descr="logo-full.png"/>
+          <p:cNvPicPr>
+            <a:picLocks noChangeAspect="1"/>
+          </p:cNvPicPr>
+          <p:nvPr/>
+        </p:nvPicPr>
+        <p:blipFill>
+          <a:blip r:embed="rId2"/>
+          <a:stretch>
+            <a:fillRect/>
+          </a:stretch>
+        </p:blipFill>
+        <p:spPr>
+          <a:xfrm>
+            <a:off x="9631062" y="658368"/>
+            <a:ext cx="1755961" cy="749808"/>
+          </a:xfrm>
+          <a:prstGeom prst="rect">
+            <a:avLst/>
+          </a:prstGeom>
+        </p:spPr>
+      </p:pic>
     </p:spTree>
   </p:cSld>
   <p:clrMapOvr>
@@ -9098,9 +9356,33 @@
           </a:p>
         </p:txBody>
       </p:sp>
-      <p:sp>
-        <p:nvSpPr>
-          <p:cNvPr id="3" name="TextBox 2"/>
+      <p:pic>
+        <p:nvPicPr>
+          <p:cNvPr id="3" name="college-logo" descr="logo-mark.png"/>
+          <p:cNvPicPr>
+            <a:picLocks noChangeAspect="1"/>
+          </p:cNvPicPr>
+          <p:nvPr/>
+        </p:nvPicPr>
+        <p:blipFill>
+          <a:blip r:embed="rId2"/>
+          <a:stretch>
+            <a:fillRect/>
+          </a:stretch>
+        </p:blipFill>
+        <p:spPr>
+          <a:xfrm>
+            <a:off x="11203333" y="6199632"/>
+            <a:ext cx="275129" cy="310896"/>
+          </a:xfrm>
+          <a:prstGeom prst="rect">
+            <a:avLst/>
+          </a:prstGeom>
+        </p:spPr>
+      </p:pic>
+      <p:sp>
+        <p:nvSpPr>
+          <p:cNvPr id="4" name="TextBox 3"/>
           <p:cNvSpPr txBox="1"/>
           <p:nvPr/>
         </p:nvSpPr>
@@ -9169,13 +9451,13 @@
       </p:sp>
       <p:sp>
         <p:nvSpPr>
-          <p:cNvPr id="4" name="TextBox 3"/>
+          <p:cNvPr id="5" name="TextBox 4"/>
           <p:cNvSpPr txBox="1"/>
           <p:nvPr/>
         </p:nvSpPr>
         <p:spPr>
           <a:xfrm>
-            <a:off x="8826703" y="6272784"/>
+            <a:off x="8240677" y="6272784"/>
             <a:ext cx="2651760" cy="219456"/>
           </a:xfrm>
           <a:prstGeom prst="rect">
@@ -9238,7 +9520,7 @@
       </p:sp>
       <p:sp>
         <p:nvSpPr>
-          <p:cNvPr id="5" name="TextBox 4"/>
+          <p:cNvPr id="6" name="TextBox 5"/>
           <p:cNvSpPr txBox="1"/>
           <p:nvPr/>
         </p:nvSpPr>
@@ -9285,7 +9567,7 @@
       </p:sp>
       <p:sp>
         <p:nvSpPr>
-          <p:cNvPr id="6" name="TextBox 5"/>
+          <p:cNvPr id="7" name="TextBox 6"/>
           <p:cNvSpPr txBox="1"/>
           <p:nvPr/>
         </p:nvSpPr>
@@ -9332,7 +9614,7 @@
       </p:sp>
       <p:sp>
         <p:nvSpPr>
-          <p:cNvPr id="7" name="Rectangle 6"/>
+          <p:cNvPr id="8" name="Rectangle 7"/>
           <p:cNvSpPr/>
           <p:nvPr/>
         </p:nvSpPr>
@@ -9376,7 +9658,7 @@
       </p:sp>
       <p:graphicFrame>
         <p:nvGraphicFramePr>
-          <p:cNvPr id="8" name="Table 7"/>
+          <p:cNvPr id="9" name="Table 8"/>
           <p:cNvGraphicFramePr>
             <a:graphicFrameLocks noGrp="1"/>
           </p:cNvGraphicFramePr>
@@ -10256,7 +10538,7 @@
       </p:graphicFrame>
       <p:sp>
         <p:nvSpPr>
-          <p:cNvPr id="9" name="Rounded Rectangle 8"/>
+          <p:cNvPr id="10" name="Rounded Rectangle 9"/>
           <p:cNvSpPr/>
           <p:nvPr/>
         </p:nvSpPr>
@@ -10323,7 +10605,7 @@
       </p:sp>
       <p:sp>
         <p:nvSpPr>
-          <p:cNvPr id="10" name="Rectangle 9"/>
+          <p:cNvPr id="11" name="Rectangle 10"/>
           <p:cNvSpPr/>
           <p:nvPr/>
         </p:nvSpPr>
@@ -10427,9 +10709,33 @@
           </a:p>
         </p:txBody>
       </p:sp>
-      <p:sp>
-        <p:nvSpPr>
-          <p:cNvPr id="3" name="TextBox 2"/>
+      <p:pic>
+        <p:nvPicPr>
+          <p:cNvPr id="3" name="college-logo" descr="logo-mark.png"/>
+          <p:cNvPicPr>
+            <a:picLocks noChangeAspect="1"/>
+          </p:cNvPicPr>
+          <p:nvPr/>
+        </p:nvPicPr>
+        <p:blipFill>
+          <a:blip r:embed="rId2"/>
+          <a:stretch>
+            <a:fillRect/>
+          </a:stretch>
+        </p:blipFill>
+        <p:spPr>
+          <a:xfrm>
+            <a:off x="11203333" y="6199632"/>
+            <a:ext cx="275129" cy="310896"/>
+          </a:xfrm>
+          <a:prstGeom prst="rect">
+            <a:avLst/>
+          </a:prstGeom>
+        </p:spPr>
+      </p:pic>
+      <p:sp>
+        <p:nvSpPr>
+          <p:cNvPr id="4" name="TextBox 3"/>
           <p:cNvSpPr txBox="1"/>
           <p:nvPr/>
         </p:nvSpPr>
@@ -10498,13 +10804,13 @@
       </p:sp>
       <p:sp>
         <p:nvSpPr>
-          <p:cNvPr id="4" name="TextBox 3"/>
+          <p:cNvPr id="5" name="TextBox 4"/>
           <p:cNvSpPr txBox="1"/>
           <p:nvPr/>
         </p:nvSpPr>
         <p:spPr>
           <a:xfrm>
-            <a:off x="8826703" y="6272784"/>
+            <a:off x="8240677" y="6272784"/>
             <a:ext cx="2651760" cy="219456"/>
           </a:xfrm>
           <a:prstGeom prst="rect">
@@ -10567,7 +10873,7 @@
       </p:sp>
       <p:sp>
         <p:nvSpPr>
-          <p:cNvPr id="5" name="TextBox 4"/>
+          <p:cNvPr id="6" name="TextBox 5"/>
           <p:cNvSpPr txBox="1"/>
           <p:nvPr/>
         </p:nvSpPr>
@@ -10614,7 +10920,7 @@
       </p:sp>
       <p:sp>
         <p:nvSpPr>
-          <p:cNvPr id="6" name="TextBox 5"/>
+          <p:cNvPr id="7" name="TextBox 6"/>
           <p:cNvSpPr txBox="1"/>
           <p:nvPr/>
         </p:nvSpPr>
@@ -10661,7 +10967,7 @@
       </p:sp>
       <p:sp>
         <p:nvSpPr>
-          <p:cNvPr id="7" name="Rectangle 6"/>
+          <p:cNvPr id="8" name="Rectangle 7"/>
           <p:cNvSpPr/>
           <p:nvPr/>
         </p:nvSpPr>
@@ -10705,7 +11011,7 @@
       </p:sp>
       <p:sp>
         <p:nvSpPr>
-          <p:cNvPr id="8" name="TextBox 7"/>
+          <p:cNvPr id="9" name="TextBox 8"/>
           <p:cNvSpPr txBox="1"/>
           <p:nvPr/>
         </p:nvSpPr>
@@ -10752,7 +11058,7 @@
       </p:sp>
       <p:sp>
         <p:nvSpPr>
-          <p:cNvPr id="9" name="Rounded Rectangle 8"/>
+          <p:cNvPr id="10" name="Rounded Rectangle 9"/>
           <p:cNvSpPr/>
           <p:nvPr/>
         </p:nvSpPr>
@@ -10806,7 +11112,7 @@
       </p:sp>
       <p:sp>
         <p:nvSpPr>
-          <p:cNvPr id="10" name="Rectangle 9"/>
+          <p:cNvPr id="11" name="Rectangle 10"/>
           <p:cNvSpPr/>
           <p:nvPr/>
         </p:nvSpPr>
@@ -10850,7 +11156,7 @@
       </p:sp>
       <p:sp>
         <p:nvSpPr>
-          <p:cNvPr id="11" name="Oval 10"/>
+          <p:cNvPr id="12" name="Oval 11"/>
           <p:cNvSpPr/>
           <p:nvPr/>
         </p:nvSpPr>
@@ -10894,7 +11200,7 @@
       </p:sp>
       <p:sp>
         <p:nvSpPr>
-          <p:cNvPr id="12" name="TextBox 11"/>
+          <p:cNvPr id="13" name="TextBox 12"/>
           <p:cNvSpPr txBox="1"/>
           <p:nvPr/>
         </p:nvSpPr>
@@ -10941,7 +11247,7 @@
       </p:sp>
       <p:sp>
         <p:nvSpPr>
-          <p:cNvPr id="13" name="TextBox 12"/>
+          <p:cNvPr id="14" name="TextBox 13"/>
           <p:cNvSpPr txBox="1"/>
           <p:nvPr/>
         </p:nvSpPr>
@@ -10988,7 +11294,7 @@
       </p:sp>
       <p:sp>
         <p:nvSpPr>
-          <p:cNvPr id="14" name="TextBox 13"/>
+          <p:cNvPr id="15" name="TextBox 14"/>
           <p:cNvSpPr txBox="1"/>
           <p:nvPr/>
         </p:nvSpPr>
@@ -11035,7 +11341,7 @@
       </p:sp>
       <p:sp>
         <p:nvSpPr>
-          <p:cNvPr id="15" name="Rounded Rectangle 14"/>
+          <p:cNvPr id="16" name="Rounded Rectangle 15"/>
           <p:cNvSpPr/>
           <p:nvPr/>
         </p:nvSpPr>
@@ -11089,7 +11395,7 @@
       </p:sp>
       <p:sp>
         <p:nvSpPr>
-          <p:cNvPr id="16" name="Rectangle 15"/>
+          <p:cNvPr id="17" name="Rectangle 16"/>
           <p:cNvSpPr/>
           <p:nvPr/>
         </p:nvSpPr>
@@ -11133,7 +11439,7 @@
       </p:sp>
       <p:sp>
         <p:nvSpPr>
-          <p:cNvPr id="17" name="Oval 16"/>
+          <p:cNvPr id="18" name="Oval 17"/>
           <p:cNvSpPr/>
           <p:nvPr/>
         </p:nvSpPr>
@@ -11177,7 +11483,7 @@
       </p:sp>
       <p:sp>
         <p:nvSpPr>
-          <p:cNvPr id="18" name="TextBox 17"/>
+          <p:cNvPr id="19" name="TextBox 18"/>
           <p:cNvSpPr txBox="1"/>
           <p:nvPr/>
         </p:nvSpPr>
@@ -11224,7 +11530,7 @@
       </p:sp>
       <p:sp>
         <p:nvSpPr>
-          <p:cNvPr id="19" name="TextBox 18"/>
+          <p:cNvPr id="20" name="TextBox 19"/>
           <p:cNvSpPr txBox="1"/>
           <p:nvPr/>
         </p:nvSpPr>
@@ -11271,7 +11577,7 @@
       </p:sp>
       <p:sp>
         <p:nvSpPr>
-          <p:cNvPr id="20" name="TextBox 19"/>
+          <p:cNvPr id="21" name="TextBox 20"/>
           <p:cNvSpPr txBox="1"/>
           <p:nvPr/>
         </p:nvSpPr>
@@ -11318,7 +11624,7 @@
       </p:sp>
       <p:sp>
         <p:nvSpPr>
-          <p:cNvPr id="21" name="Rounded Rectangle 20"/>
+          <p:cNvPr id="22" name="Rounded Rectangle 21"/>
           <p:cNvSpPr/>
           <p:nvPr/>
         </p:nvSpPr>
@@ -11372,7 +11678,7 @@
       </p:sp>
       <p:sp>
         <p:nvSpPr>
-          <p:cNvPr id="22" name="Rectangle 21"/>
+          <p:cNvPr id="23" name="Rectangle 22"/>
           <p:cNvSpPr/>
           <p:nvPr/>
         </p:nvSpPr>
@@ -11416,7 +11722,7 @@
       </p:sp>
       <p:sp>
         <p:nvSpPr>
-          <p:cNvPr id="23" name="Oval 22"/>
+          <p:cNvPr id="24" name="Oval 23"/>
           <p:cNvSpPr/>
           <p:nvPr/>
         </p:nvSpPr>
@@ -11460,7 +11766,7 @@
       </p:sp>
       <p:sp>
         <p:nvSpPr>
-          <p:cNvPr id="24" name="TextBox 23"/>
+          <p:cNvPr id="25" name="TextBox 24"/>
           <p:cNvSpPr txBox="1"/>
           <p:nvPr/>
         </p:nvSpPr>
@@ -11507,7 +11813,7 @@
       </p:sp>
       <p:sp>
         <p:nvSpPr>
-          <p:cNvPr id="25" name="TextBox 24"/>
+          <p:cNvPr id="26" name="TextBox 25"/>
           <p:cNvSpPr txBox="1"/>
           <p:nvPr/>
         </p:nvSpPr>
@@ -11554,7 +11860,7 @@
       </p:sp>
       <p:sp>
         <p:nvSpPr>
-          <p:cNvPr id="26" name="TextBox 25"/>
+          <p:cNvPr id="27" name="TextBox 26"/>
           <p:cNvSpPr txBox="1"/>
           <p:nvPr/>
         </p:nvSpPr>
@@ -11601,7 +11907,7 @@
       </p:sp>
       <p:sp>
         <p:nvSpPr>
-          <p:cNvPr id="27" name="Rounded Rectangle 26"/>
+          <p:cNvPr id="28" name="Rounded Rectangle 27"/>
           <p:cNvSpPr/>
           <p:nvPr/>
         </p:nvSpPr>
@@ -11655,7 +11961,7 @@
       </p:sp>
       <p:sp>
         <p:nvSpPr>
-          <p:cNvPr id="28" name="Rectangle 27"/>
+          <p:cNvPr id="29" name="Rectangle 28"/>
           <p:cNvSpPr/>
           <p:nvPr/>
         </p:nvSpPr>
@@ -11699,7 +12005,7 @@
       </p:sp>
       <p:sp>
         <p:nvSpPr>
-          <p:cNvPr id="29" name="Oval 28"/>
+          <p:cNvPr id="30" name="Oval 29"/>
           <p:cNvSpPr/>
           <p:nvPr/>
         </p:nvSpPr>
@@ -11743,7 +12049,7 @@
       </p:sp>
       <p:sp>
         <p:nvSpPr>
-          <p:cNvPr id="30" name="TextBox 29"/>
+          <p:cNvPr id="31" name="TextBox 30"/>
           <p:cNvSpPr txBox="1"/>
           <p:nvPr/>
         </p:nvSpPr>
@@ -11790,7 +12096,7 @@
       </p:sp>
       <p:sp>
         <p:nvSpPr>
-          <p:cNvPr id="31" name="TextBox 30"/>
+          <p:cNvPr id="32" name="TextBox 31"/>
           <p:cNvSpPr txBox="1"/>
           <p:nvPr/>
         </p:nvSpPr>
@@ -11837,7 +12143,7 @@
       </p:sp>
       <p:sp>
         <p:nvSpPr>
-          <p:cNvPr id="32" name="TextBox 31"/>
+          <p:cNvPr id="33" name="TextBox 32"/>
           <p:cNvSpPr txBox="1"/>
           <p:nvPr/>
         </p:nvSpPr>
@@ -11944,9 +12250,33 @@
           </a:p>
         </p:txBody>
       </p:sp>
-      <p:sp>
-        <p:nvSpPr>
-          <p:cNvPr id="3" name="TextBox 2"/>
+      <p:pic>
+        <p:nvPicPr>
+          <p:cNvPr id="3" name="college-logo" descr="logo-mark.png"/>
+          <p:cNvPicPr>
+            <a:picLocks noChangeAspect="1"/>
+          </p:cNvPicPr>
+          <p:nvPr/>
+        </p:nvPicPr>
+        <p:blipFill>
+          <a:blip r:embed="rId2"/>
+          <a:stretch>
+            <a:fillRect/>
+          </a:stretch>
+        </p:blipFill>
+        <p:spPr>
+          <a:xfrm>
+            <a:off x="11203333" y="6199632"/>
+            <a:ext cx="275129" cy="310896"/>
+          </a:xfrm>
+          <a:prstGeom prst="rect">
+            <a:avLst/>
+          </a:prstGeom>
+        </p:spPr>
+      </p:pic>
+      <p:sp>
+        <p:nvSpPr>
+          <p:cNvPr id="4" name="TextBox 3"/>
           <p:cNvSpPr txBox="1"/>
           <p:nvPr/>
         </p:nvSpPr>
@@ -12015,13 +12345,13 @@
       </p:sp>
       <p:sp>
         <p:nvSpPr>
-          <p:cNvPr id="4" name="TextBox 3"/>
+          <p:cNvPr id="5" name="TextBox 4"/>
           <p:cNvSpPr txBox="1"/>
           <p:nvPr/>
         </p:nvSpPr>
         <p:spPr>
           <a:xfrm>
-            <a:off x="8826703" y="6272784"/>
+            <a:off x="8240677" y="6272784"/>
             <a:ext cx="2651760" cy="219456"/>
           </a:xfrm>
           <a:prstGeom prst="rect">
@@ -12084,7 +12414,7 @@
       </p:sp>
       <p:sp>
         <p:nvSpPr>
-          <p:cNvPr id="5" name="TextBox 4"/>
+          <p:cNvPr id="6" name="TextBox 5"/>
           <p:cNvSpPr txBox="1"/>
           <p:nvPr/>
         </p:nvSpPr>
@@ -12131,7 +12461,7 @@
       </p:sp>
       <p:sp>
         <p:nvSpPr>
-          <p:cNvPr id="6" name="TextBox 5"/>
+          <p:cNvPr id="7" name="TextBox 6"/>
           <p:cNvSpPr txBox="1"/>
           <p:nvPr/>
         </p:nvSpPr>
@@ -12178,7 +12508,7 @@
       </p:sp>
       <p:sp>
         <p:nvSpPr>
-          <p:cNvPr id="7" name="Rectangle 6"/>
+          <p:cNvPr id="8" name="Rectangle 7"/>
           <p:cNvSpPr/>
           <p:nvPr/>
         </p:nvSpPr>
@@ -12222,7 +12552,7 @@
       </p:sp>
       <p:sp>
         <p:nvSpPr>
-          <p:cNvPr id="8" name="Rounded Rectangle 7"/>
+          <p:cNvPr id="9" name="Rounded Rectangle 8"/>
           <p:cNvSpPr/>
           <p:nvPr/>
         </p:nvSpPr>
@@ -12276,7 +12606,7 @@
       </p:sp>
       <p:sp>
         <p:nvSpPr>
-          <p:cNvPr id="9" name="Rectangle 8"/>
+          <p:cNvPr id="10" name="Rectangle 9"/>
           <p:cNvSpPr/>
           <p:nvPr/>
         </p:nvSpPr>
@@ -12320,7 +12650,7 @@
       </p:sp>
       <p:sp>
         <p:nvSpPr>
-          <p:cNvPr id="10" name="TextBox 9"/>
+          <p:cNvPr id="11" name="TextBox 10"/>
           <p:cNvSpPr txBox="1"/>
           <p:nvPr/>
         </p:nvSpPr>
@@ -12367,7 +12697,7 @@
       </p:sp>
       <p:sp>
         <p:nvSpPr>
-          <p:cNvPr id="11" name="TextBox 10"/>
+          <p:cNvPr id="12" name="TextBox 11"/>
           <p:cNvSpPr txBox="1"/>
           <p:nvPr/>
         </p:nvSpPr>
@@ -12414,7 +12744,7 @@
       </p:sp>
       <p:sp>
         <p:nvSpPr>
-          <p:cNvPr id="12" name="Rounded Rectangle 11"/>
+          <p:cNvPr id="13" name="Rounded Rectangle 12"/>
           <p:cNvSpPr/>
           <p:nvPr/>
         </p:nvSpPr>
@@ -12468,7 +12798,7 @@
       </p:sp>
       <p:sp>
         <p:nvSpPr>
-          <p:cNvPr id="13" name="Rectangle 12"/>
+          <p:cNvPr id="14" name="Rectangle 13"/>
           <p:cNvSpPr/>
           <p:nvPr/>
         </p:nvSpPr>
@@ -12512,7 +12842,7 @@
       </p:sp>
       <p:sp>
         <p:nvSpPr>
-          <p:cNvPr id="14" name="TextBox 13"/>
+          <p:cNvPr id="15" name="TextBox 14"/>
           <p:cNvSpPr txBox="1"/>
           <p:nvPr/>
         </p:nvSpPr>
@@ -12559,7 +12889,7 @@
       </p:sp>
       <p:sp>
         <p:nvSpPr>
-          <p:cNvPr id="15" name="TextBox 14"/>
+          <p:cNvPr id="16" name="TextBox 15"/>
           <p:cNvSpPr txBox="1"/>
           <p:nvPr/>
         </p:nvSpPr>
@@ -12606,7 +12936,7 @@
       </p:sp>
       <p:sp>
         <p:nvSpPr>
-          <p:cNvPr id="16" name="Rounded Rectangle 15"/>
+          <p:cNvPr id="17" name="Rounded Rectangle 16"/>
           <p:cNvSpPr/>
           <p:nvPr/>
         </p:nvSpPr>
@@ -12660,7 +12990,7 @@
       </p:sp>
       <p:sp>
         <p:nvSpPr>
-          <p:cNvPr id="17" name="Rectangle 16"/>
+          <p:cNvPr id="18" name="Rectangle 17"/>
           <p:cNvSpPr/>
           <p:nvPr/>
         </p:nvSpPr>
@@ -12704,7 +13034,7 @@
       </p:sp>
       <p:sp>
         <p:nvSpPr>
-          <p:cNvPr id="18" name="TextBox 17"/>
+          <p:cNvPr id="19" name="TextBox 18"/>
           <p:cNvSpPr txBox="1"/>
           <p:nvPr/>
         </p:nvSpPr>
@@ -12751,7 +13081,7 @@
       </p:sp>
       <p:sp>
         <p:nvSpPr>
-          <p:cNvPr id="19" name="TextBox 18"/>
+          <p:cNvPr id="20" name="TextBox 19"/>
           <p:cNvSpPr txBox="1"/>
           <p:nvPr/>
         </p:nvSpPr>
@@ -12798,7 +13128,7 @@
       </p:sp>
       <p:sp>
         <p:nvSpPr>
-          <p:cNvPr id="20" name="Rounded Rectangle 19"/>
+          <p:cNvPr id="21" name="Rounded Rectangle 20"/>
           <p:cNvSpPr/>
           <p:nvPr/>
         </p:nvSpPr>
@@ -12852,7 +13182,7 @@
       </p:sp>
       <p:sp>
         <p:nvSpPr>
-          <p:cNvPr id="21" name="Rectangle 20"/>
+          <p:cNvPr id="22" name="Rectangle 21"/>
           <p:cNvSpPr/>
           <p:nvPr/>
         </p:nvSpPr>
@@ -12896,7 +13226,7 @@
       </p:sp>
       <p:sp>
         <p:nvSpPr>
-          <p:cNvPr id="22" name="TextBox 21"/>
+          <p:cNvPr id="23" name="TextBox 22"/>
           <p:cNvSpPr txBox="1"/>
           <p:nvPr/>
         </p:nvSpPr>
@@ -12943,7 +13273,7 @@
       </p:sp>
       <p:sp>
         <p:nvSpPr>
-          <p:cNvPr id="23" name="TextBox 22"/>
+          <p:cNvPr id="24" name="TextBox 23"/>
           <p:cNvSpPr txBox="1"/>
           <p:nvPr/>
         </p:nvSpPr>
@@ -12990,7 +13320,7 @@
       </p:sp>
       <p:sp>
         <p:nvSpPr>
-          <p:cNvPr id="24" name="Rounded Rectangle 23"/>
+          <p:cNvPr id="25" name="Rounded Rectangle 24"/>
           <p:cNvSpPr/>
           <p:nvPr/>
         </p:nvSpPr>
@@ -13044,7 +13374,7 @@
       </p:sp>
       <p:sp>
         <p:nvSpPr>
-          <p:cNvPr id="25" name="Rectangle 24"/>
+          <p:cNvPr id="26" name="Rectangle 25"/>
           <p:cNvSpPr/>
           <p:nvPr/>
         </p:nvSpPr>
@@ -13088,7 +13418,7 @@
       </p:sp>
       <p:sp>
         <p:nvSpPr>
-          <p:cNvPr id="26" name="TextBox 25"/>
+          <p:cNvPr id="27" name="TextBox 26"/>
           <p:cNvSpPr txBox="1"/>
           <p:nvPr/>
         </p:nvSpPr>
@@ -13135,7 +13465,7 @@
       </p:sp>
       <p:sp>
         <p:nvSpPr>
-          <p:cNvPr id="27" name="TextBox 26"/>
+          <p:cNvPr id="28" name="TextBox 27"/>
           <p:cNvSpPr txBox="1"/>
           <p:nvPr/>
         </p:nvSpPr>
@@ -13182,7 +13512,7 @@
       </p:sp>
       <p:sp>
         <p:nvSpPr>
-          <p:cNvPr id="28" name="Rounded Rectangle 27"/>
+          <p:cNvPr id="29" name="Rounded Rectangle 28"/>
           <p:cNvSpPr/>
           <p:nvPr/>
         </p:nvSpPr>
@@ -13236,7 +13566,7 @@
       </p:sp>
       <p:sp>
         <p:nvSpPr>
-          <p:cNvPr id="29" name="Rectangle 28"/>
+          <p:cNvPr id="30" name="Rectangle 29"/>
           <p:cNvSpPr/>
           <p:nvPr/>
         </p:nvSpPr>
@@ -13280,7 +13610,7 @@
       </p:sp>
       <p:sp>
         <p:nvSpPr>
-          <p:cNvPr id="30" name="TextBox 29"/>
+          <p:cNvPr id="31" name="TextBox 30"/>
           <p:cNvSpPr txBox="1"/>
           <p:nvPr/>
         </p:nvSpPr>
@@ -13327,7 +13657,7 @@
       </p:sp>
       <p:sp>
         <p:nvSpPr>
-          <p:cNvPr id="31" name="TextBox 30"/>
+          <p:cNvPr id="32" name="TextBox 31"/>
           <p:cNvSpPr txBox="1"/>
           <p:nvPr/>
         </p:nvSpPr>
@@ -13810,6 +14140,76 @@
           </a:p>
         </p:txBody>
       </p:sp>
+      <p:sp>
+        <p:nvSpPr>
+          <p:cNvPr id="11" name="logo-plate"/>
+          <p:cNvSpPr/>
+          <p:nvPr/>
+        </p:nvSpPr>
+        <p:spPr>
+          <a:xfrm>
+            <a:off x="9512190" y="539496"/>
+            <a:ext cx="1993704" cy="987552"/>
+          </a:xfrm>
+          <a:prstGeom prst="roundRect">
+            <a:avLst>
+              <a:gd name="adj" fmla="val 14000"/>
+            </a:avLst>
+          </a:prstGeom>
+          <a:solidFill>
+            <a:srgbClr val="FFFFFF"/>
+          </a:solidFill>
+          <a:ln>
+            <a:noFill/>
+          </a:ln>
+          <a:effectLst/>
+        </p:spPr>
+        <p:style>
+          <a:lnRef idx="1">
+            <a:schemeClr val="accent1"/>
+          </a:lnRef>
+          <a:fillRef idx="3">
+            <a:schemeClr val="accent1"/>
+          </a:fillRef>
+          <a:effectRef idx="2">
+            <a:schemeClr val="accent1"/>
+          </a:effectRef>
+          <a:fontRef idx="minor">
+            <a:schemeClr val="lt1"/>
+          </a:fontRef>
+        </p:style>
+        <p:txBody>
+          <a:bodyPr rtlCol="0" anchor="ctr" wrap="square"/>
+          <a:lstStyle/>
+          <a:p>
+            <a:pPr algn="ctr"/>
+          </a:p>
+        </p:txBody>
+      </p:sp>
+      <p:pic>
+        <p:nvPicPr>
+          <p:cNvPr id="12" name="college-logo" descr="logo-full.png"/>
+          <p:cNvPicPr>
+            <a:picLocks noChangeAspect="1"/>
+          </p:cNvPicPr>
+          <p:nvPr/>
+        </p:nvPicPr>
+        <p:blipFill>
+          <a:blip r:embed="rId2"/>
+          <a:stretch>
+            <a:fillRect/>
+          </a:stretch>
+        </p:blipFill>
+        <p:spPr>
+          <a:xfrm>
+            <a:off x="9631062" y="658368"/>
+            <a:ext cx="1755961" cy="749808"/>
+          </a:xfrm>
+          <a:prstGeom prst="rect">
+            <a:avLst/>
+          </a:prstGeom>
+        </p:spPr>
+      </p:pic>
     </p:spTree>
   </p:cSld>
   <p:clrMapOvr>
@@ -13872,9 +14272,33 @@
           </a:p>
         </p:txBody>
       </p:sp>
-      <p:sp>
-        <p:nvSpPr>
-          <p:cNvPr id="3" name="TextBox 2"/>
+      <p:pic>
+        <p:nvPicPr>
+          <p:cNvPr id="3" name="college-logo" descr="logo-mark.png"/>
+          <p:cNvPicPr>
+            <a:picLocks noChangeAspect="1"/>
+          </p:cNvPicPr>
+          <p:nvPr/>
+        </p:nvPicPr>
+        <p:blipFill>
+          <a:blip r:embed="rId2"/>
+          <a:stretch>
+            <a:fillRect/>
+          </a:stretch>
+        </p:blipFill>
+        <p:spPr>
+          <a:xfrm>
+            <a:off x="11203333" y="6199632"/>
+            <a:ext cx="275129" cy="310896"/>
+          </a:xfrm>
+          <a:prstGeom prst="rect">
+            <a:avLst/>
+          </a:prstGeom>
+        </p:spPr>
+      </p:pic>
+      <p:sp>
+        <p:nvSpPr>
+          <p:cNvPr id="4" name="TextBox 3"/>
           <p:cNvSpPr txBox="1"/>
           <p:nvPr/>
         </p:nvSpPr>
@@ -13943,13 +14367,13 @@
       </p:sp>
       <p:sp>
         <p:nvSpPr>
-          <p:cNvPr id="4" name="TextBox 3"/>
+          <p:cNvPr id="5" name="TextBox 4"/>
           <p:cNvSpPr txBox="1"/>
           <p:nvPr/>
         </p:nvSpPr>
         <p:spPr>
           <a:xfrm>
-            <a:off x="8826703" y="6272784"/>
+            <a:off x="8240677" y="6272784"/>
             <a:ext cx="2651760" cy="219456"/>
           </a:xfrm>
           <a:prstGeom prst="rect">
@@ -14012,7 +14436,7 @@
       </p:sp>
       <p:sp>
         <p:nvSpPr>
-          <p:cNvPr id="5" name="TextBox 4"/>
+          <p:cNvPr id="6" name="TextBox 5"/>
           <p:cNvSpPr txBox="1"/>
           <p:nvPr/>
         </p:nvSpPr>
@@ -14059,7 +14483,7 @@
       </p:sp>
       <p:sp>
         <p:nvSpPr>
-          <p:cNvPr id="6" name="TextBox 5"/>
+          <p:cNvPr id="7" name="TextBox 6"/>
           <p:cNvSpPr txBox="1"/>
           <p:nvPr/>
         </p:nvSpPr>
@@ -14106,7 +14530,7 @@
       </p:sp>
       <p:sp>
         <p:nvSpPr>
-          <p:cNvPr id="7" name="Rectangle 6"/>
+          <p:cNvPr id="8" name="Rectangle 7"/>
           <p:cNvSpPr/>
           <p:nvPr/>
         </p:nvSpPr>
@@ -14150,7 +14574,7 @@
       </p:sp>
       <p:sp>
         <p:nvSpPr>
-          <p:cNvPr id="8" name="TextBox 7"/>
+          <p:cNvPr id="9" name="TextBox 8"/>
           <p:cNvSpPr txBox="1"/>
           <p:nvPr/>
         </p:nvSpPr>
@@ -14197,7 +14621,7 @@
       </p:sp>
       <p:sp>
         <p:nvSpPr>
-          <p:cNvPr id="9" name="Rectangle 8"/>
+          <p:cNvPr id="10" name="Rectangle 9"/>
           <p:cNvSpPr/>
           <p:nvPr/>
         </p:nvSpPr>
@@ -14241,7 +14665,7 @@
       </p:sp>
       <p:sp>
         <p:nvSpPr>
-          <p:cNvPr id="10" name="Oval 9"/>
+          <p:cNvPr id="11" name="Oval 10"/>
           <p:cNvSpPr/>
           <p:nvPr/>
         </p:nvSpPr>
@@ -14285,7 +14709,7 @@
       </p:sp>
       <p:sp>
         <p:nvSpPr>
-          <p:cNvPr id="11" name="TextBox 10"/>
+          <p:cNvPr id="12" name="TextBox 11"/>
           <p:cNvSpPr txBox="1"/>
           <p:nvPr/>
         </p:nvSpPr>
@@ -14332,7 +14756,7 @@
       </p:sp>
       <p:sp>
         <p:nvSpPr>
-          <p:cNvPr id="12" name="Rounded Rectangle 11"/>
+          <p:cNvPr id="13" name="Rounded Rectangle 12"/>
           <p:cNvSpPr/>
           <p:nvPr/>
         </p:nvSpPr>
@@ -14380,7 +14804,7 @@
       </p:sp>
       <p:sp>
         <p:nvSpPr>
-          <p:cNvPr id="13" name="TextBox 12"/>
+          <p:cNvPr id="14" name="TextBox 13"/>
           <p:cNvSpPr txBox="1"/>
           <p:nvPr/>
         </p:nvSpPr>
@@ -14427,7 +14851,7 @@
       </p:sp>
       <p:sp>
         <p:nvSpPr>
-          <p:cNvPr id="14" name="TextBox 13"/>
+          <p:cNvPr id="15" name="TextBox 14"/>
           <p:cNvSpPr txBox="1"/>
           <p:nvPr/>
         </p:nvSpPr>
@@ -14474,7 +14898,7 @@
       </p:sp>
       <p:sp>
         <p:nvSpPr>
-          <p:cNvPr id="15" name="Oval 14"/>
+          <p:cNvPr id="16" name="Oval 15"/>
           <p:cNvSpPr/>
           <p:nvPr/>
         </p:nvSpPr>
@@ -14518,7 +14942,7 @@
       </p:sp>
       <p:sp>
         <p:nvSpPr>
-          <p:cNvPr id="16" name="TextBox 15"/>
+          <p:cNvPr id="17" name="TextBox 16"/>
           <p:cNvSpPr txBox="1"/>
           <p:nvPr/>
         </p:nvSpPr>
@@ -14565,7 +14989,7 @@
       </p:sp>
       <p:sp>
         <p:nvSpPr>
-          <p:cNvPr id="17" name="Rounded Rectangle 16"/>
+          <p:cNvPr id="18" name="Rounded Rectangle 17"/>
           <p:cNvSpPr/>
           <p:nvPr/>
         </p:nvSpPr>
@@ -14613,7 +15037,7 @@
       </p:sp>
       <p:sp>
         <p:nvSpPr>
-          <p:cNvPr id="18" name="TextBox 17"/>
+          <p:cNvPr id="19" name="TextBox 18"/>
           <p:cNvSpPr txBox="1"/>
           <p:nvPr/>
         </p:nvSpPr>
@@ -14660,7 +15084,7 @@
       </p:sp>
       <p:sp>
         <p:nvSpPr>
-          <p:cNvPr id="19" name="TextBox 18"/>
+          <p:cNvPr id="20" name="TextBox 19"/>
           <p:cNvSpPr txBox="1"/>
           <p:nvPr/>
         </p:nvSpPr>
@@ -14707,7 +15131,7 @@
       </p:sp>
       <p:sp>
         <p:nvSpPr>
-          <p:cNvPr id="20" name="Oval 19"/>
+          <p:cNvPr id="21" name="Oval 20"/>
           <p:cNvSpPr/>
           <p:nvPr/>
         </p:nvSpPr>
@@ -14751,7 +15175,7 @@
       </p:sp>
       <p:sp>
         <p:nvSpPr>
-          <p:cNvPr id="21" name="TextBox 20"/>
+          <p:cNvPr id="22" name="TextBox 21"/>
           <p:cNvSpPr txBox="1"/>
           <p:nvPr/>
         </p:nvSpPr>
@@ -14798,7 +15222,7 @@
       </p:sp>
       <p:sp>
         <p:nvSpPr>
-          <p:cNvPr id="22" name="Rounded Rectangle 21"/>
+          <p:cNvPr id="23" name="Rounded Rectangle 22"/>
           <p:cNvSpPr/>
           <p:nvPr/>
         </p:nvSpPr>
@@ -14846,7 +15270,7 @@
       </p:sp>
       <p:sp>
         <p:nvSpPr>
-          <p:cNvPr id="23" name="TextBox 22"/>
+          <p:cNvPr id="24" name="TextBox 23"/>
           <p:cNvSpPr txBox="1"/>
           <p:nvPr/>
         </p:nvSpPr>
@@ -14893,7 +15317,7 @@
       </p:sp>
       <p:sp>
         <p:nvSpPr>
-          <p:cNvPr id="24" name="TextBox 23"/>
+          <p:cNvPr id="25" name="TextBox 24"/>
           <p:cNvSpPr txBox="1"/>
           <p:nvPr/>
         </p:nvSpPr>
@@ -14940,7 +15364,7 @@
       </p:sp>
       <p:sp>
         <p:nvSpPr>
-          <p:cNvPr id="25" name="Oval 24"/>
+          <p:cNvPr id="26" name="Oval 25"/>
           <p:cNvSpPr/>
           <p:nvPr/>
         </p:nvSpPr>
@@ -14984,7 +15408,7 @@
       </p:sp>
       <p:sp>
         <p:nvSpPr>
-          <p:cNvPr id="26" name="TextBox 25"/>
+          <p:cNvPr id="27" name="TextBox 26"/>
           <p:cNvSpPr txBox="1"/>
           <p:nvPr/>
         </p:nvSpPr>
@@ -15031,7 +15455,7 @@
       </p:sp>
       <p:sp>
         <p:nvSpPr>
-          <p:cNvPr id="27" name="Rounded Rectangle 26"/>
+          <p:cNvPr id="28" name="Rounded Rectangle 27"/>
           <p:cNvSpPr/>
           <p:nvPr/>
         </p:nvSpPr>
@@ -15079,7 +15503,7 @@
       </p:sp>
       <p:sp>
         <p:nvSpPr>
-          <p:cNvPr id="28" name="TextBox 27"/>
+          <p:cNvPr id="29" name="TextBox 28"/>
           <p:cNvSpPr txBox="1"/>
           <p:nvPr/>
         </p:nvSpPr>
@@ -15126,7 +15550,7 @@
       </p:sp>
       <p:sp>
         <p:nvSpPr>
-          <p:cNvPr id="29" name="TextBox 28"/>
+          <p:cNvPr id="30" name="TextBox 29"/>
           <p:cNvSpPr txBox="1"/>
           <p:nvPr/>
         </p:nvSpPr>
@@ -15173,7 +15597,7 @@
       </p:sp>
       <p:sp>
         <p:nvSpPr>
-          <p:cNvPr id="30" name="Rounded Rectangle 29"/>
+          <p:cNvPr id="31" name="Rounded Rectangle 30"/>
           <p:cNvSpPr/>
           <p:nvPr/>
         </p:nvSpPr>
@@ -15240,7 +15664,7 @@
       </p:sp>
       <p:sp>
         <p:nvSpPr>
-          <p:cNvPr id="31" name="Rectangle 30"/>
+          <p:cNvPr id="32" name="Rectangle 31"/>
           <p:cNvSpPr/>
           <p:nvPr/>
         </p:nvSpPr>
@@ -15344,9 +15768,33 @@
           </a:p>
         </p:txBody>
       </p:sp>
-      <p:sp>
-        <p:nvSpPr>
-          <p:cNvPr id="3" name="TextBox 2"/>
+      <p:pic>
+        <p:nvPicPr>
+          <p:cNvPr id="3" name="college-logo" descr="logo-mark.png"/>
+          <p:cNvPicPr>
+            <a:picLocks noChangeAspect="1"/>
+          </p:cNvPicPr>
+          <p:nvPr/>
+        </p:nvPicPr>
+        <p:blipFill>
+          <a:blip r:embed="rId2"/>
+          <a:stretch>
+            <a:fillRect/>
+          </a:stretch>
+        </p:blipFill>
+        <p:spPr>
+          <a:xfrm>
+            <a:off x="11203333" y="6199632"/>
+            <a:ext cx="275129" cy="310896"/>
+          </a:xfrm>
+          <a:prstGeom prst="rect">
+            <a:avLst/>
+          </a:prstGeom>
+        </p:spPr>
+      </p:pic>
+      <p:sp>
+        <p:nvSpPr>
+          <p:cNvPr id="4" name="TextBox 3"/>
           <p:cNvSpPr txBox="1"/>
           <p:nvPr/>
         </p:nvSpPr>
@@ -15415,13 +15863,13 @@
       </p:sp>
       <p:sp>
         <p:nvSpPr>
-          <p:cNvPr id="4" name="TextBox 3"/>
+          <p:cNvPr id="5" name="TextBox 4"/>
           <p:cNvSpPr txBox="1"/>
           <p:nvPr/>
         </p:nvSpPr>
         <p:spPr>
           <a:xfrm>
-            <a:off x="8826703" y="6272784"/>
+            <a:off x="8240677" y="6272784"/>
             <a:ext cx="2651760" cy="219456"/>
           </a:xfrm>
           <a:prstGeom prst="rect">
@@ -15484,7 +15932,7 @@
       </p:sp>
       <p:sp>
         <p:nvSpPr>
-          <p:cNvPr id="5" name="TextBox 4"/>
+          <p:cNvPr id="6" name="TextBox 5"/>
           <p:cNvSpPr txBox="1"/>
           <p:nvPr/>
         </p:nvSpPr>
@@ -15531,7 +15979,7 @@
       </p:sp>
       <p:sp>
         <p:nvSpPr>
-          <p:cNvPr id="6" name="TextBox 5"/>
+          <p:cNvPr id="7" name="TextBox 6"/>
           <p:cNvSpPr txBox="1"/>
           <p:nvPr/>
         </p:nvSpPr>
@@ -15578,7 +16026,7 @@
       </p:sp>
       <p:sp>
         <p:nvSpPr>
-          <p:cNvPr id="7" name="Rectangle 6"/>
+          <p:cNvPr id="8" name="Rectangle 7"/>
           <p:cNvSpPr/>
           <p:nvPr/>
         </p:nvSpPr>
@@ -15622,7 +16070,7 @@
       </p:sp>
       <p:sp>
         <p:nvSpPr>
-          <p:cNvPr id="8" name="Rounded Rectangle 7"/>
+          <p:cNvPr id="9" name="Rounded Rectangle 8"/>
           <p:cNvSpPr/>
           <p:nvPr/>
         </p:nvSpPr>
@@ -15676,7 +16124,7 @@
       </p:sp>
       <p:sp>
         <p:nvSpPr>
-          <p:cNvPr id="9" name="Rectangle 8"/>
+          <p:cNvPr id="10" name="Rectangle 9"/>
           <p:cNvSpPr/>
           <p:nvPr/>
         </p:nvSpPr>
@@ -15720,7 +16168,7 @@
       </p:sp>
       <p:sp>
         <p:nvSpPr>
-          <p:cNvPr id="10" name="Rounded Rectangle 9"/>
+          <p:cNvPr id="11" name="Rounded Rectangle 10"/>
           <p:cNvSpPr/>
           <p:nvPr/>
         </p:nvSpPr>
@@ -15787,7 +16235,7 @@
       </p:sp>
       <p:sp>
         <p:nvSpPr>
-          <p:cNvPr id="11" name="TextBox 10"/>
+          <p:cNvPr id="12" name="TextBox 11"/>
           <p:cNvSpPr txBox="1"/>
           <p:nvPr/>
         </p:nvSpPr>
@@ -15834,7 +16282,7 @@
       </p:sp>
       <p:sp>
         <p:nvSpPr>
-          <p:cNvPr id="12" name="Rectangle 11"/>
+          <p:cNvPr id="13" name="Rectangle 12"/>
           <p:cNvSpPr/>
           <p:nvPr/>
         </p:nvSpPr>
@@ -15878,7 +16326,7 @@
       </p:sp>
       <p:sp>
         <p:nvSpPr>
-          <p:cNvPr id="13" name="Rounded Rectangle 12"/>
+          <p:cNvPr id="14" name="Rounded Rectangle 13"/>
           <p:cNvSpPr/>
           <p:nvPr/>
         </p:nvSpPr>
@@ -15924,7 +16372,7 @@
       </p:sp>
       <p:sp>
         <p:nvSpPr>
-          <p:cNvPr id="14" name="TextBox 13"/>
+          <p:cNvPr id="15" name="TextBox 14"/>
           <p:cNvSpPr txBox="1"/>
           <p:nvPr/>
         </p:nvSpPr>
@@ -15971,7 +16419,7 @@
       </p:sp>
       <p:sp>
         <p:nvSpPr>
-          <p:cNvPr id="15" name="Rounded Rectangle 14"/>
+          <p:cNvPr id="16" name="Rounded Rectangle 15"/>
           <p:cNvSpPr/>
           <p:nvPr/>
         </p:nvSpPr>
@@ -16017,7 +16465,7 @@
       </p:sp>
       <p:sp>
         <p:nvSpPr>
-          <p:cNvPr id="16" name="TextBox 15"/>
+          <p:cNvPr id="17" name="TextBox 16"/>
           <p:cNvSpPr txBox="1"/>
           <p:nvPr/>
         </p:nvSpPr>
@@ -16064,7 +16512,7 @@
       </p:sp>
       <p:sp>
         <p:nvSpPr>
-          <p:cNvPr id="17" name="Rounded Rectangle 16"/>
+          <p:cNvPr id="18" name="Rounded Rectangle 17"/>
           <p:cNvSpPr/>
           <p:nvPr/>
         </p:nvSpPr>
@@ -16110,7 +16558,7 @@
       </p:sp>
       <p:sp>
         <p:nvSpPr>
-          <p:cNvPr id="18" name="TextBox 17"/>
+          <p:cNvPr id="19" name="TextBox 18"/>
           <p:cNvSpPr txBox="1"/>
           <p:nvPr/>
         </p:nvSpPr>
@@ -16157,7 +16605,7 @@
       </p:sp>
       <p:sp>
         <p:nvSpPr>
-          <p:cNvPr id="19" name="Rounded Rectangle 18"/>
+          <p:cNvPr id="20" name="Rounded Rectangle 19"/>
           <p:cNvSpPr/>
           <p:nvPr/>
         </p:nvSpPr>
@@ -16203,7 +16651,7 @@
       </p:sp>
       <p:sp>
         <p:nvSpPr>
-          <p:cNvPr id="20" name="TextBox 19"/>
+          <p:cNvPr id="21" name="TextBox 20"/>
           <p:cNvSpPr txBox="1"/>
           <p:nvPr/>
         </p:nvSpPr>
@@ -16250,7 +16698,7 @@
       </p:sp>
       <p:sp>
         <p:nvSpPr>
-          <p:cNvPr id="21" name="Rounded Rectangle 20"/>
+          <p:cNvPr id="22" name="Rounded Rectangle 21"/>
           <p:cNvSpPr/>
           <p:nvPr/>
         </p:nvSpPr>
@@ -16296,7 +16744,7 @@
       </p:sp>
       <p:sp>
         <p:nvSpPr>
-          <p:cNvPr id="22" name="TextBox 21"/>
+          <p:cNvPr id="23" name="TextBox 22"/>
           <p:cNvSpPr txBox="1"/>
           <p:nvPr/>
         </p:nvSpPr>
@@ -16343,7 +16791,7 @@
       </p:sp>
       <p:sp>
         <p:nvSpPr>
-          <p:cNvPr id="23" name="Rounded Rectangle 22"/>
+          <p:cNvPr id="24" name="Rounded Rectangle 23"/>
           <p:cNvSpPr/>
           <p:nvPr/>
         </p:nvSpPr>
@@ -16397,7 +16845,7 @@
       </p:sp>
       <p:sp>
         <p:nvSpPr>
-          <p:cNvPr id="24" name="Rectangle 23"/>
+          <p:cNvPr id="25" name="Rectangle 24"/>
           <p:cNvSpPr/>
           <p:nvPr/>
         </p:nvSpPr>
@@ -16441,7 +16889,7 @@
       </p:sp>
       <p:sp>
         <p:nvSpPr>
-          <p:cNvPr id="25" name="Rounded Rectangle 24"/>
+          <p:cNvPr id="26" name="Rounded Rectangle 25"/>
           <p:cNvSpPr/>
           <p:nvPr/>
         </p:nvSpPr>
@@ -16508,7 +16956,7 @@
       </p:sp>
       <p:sp>
         <p:nvSpPr>
-          <p:cNvPr id="26" name="TextBox 25"/>
+          <p:cNvPr id="27" name="TextBox 26"/>
           <p:cNvSpPr txBox="1"/>
           <p:nvPr/>
         </p:nvSpPr>
@@ -16555,7 +17003,7 @@
       </p:sp>
       <p:sp>
         <p:nvSpPr>
-          <p:cNvPr id="27" name="Rectangle 26"/>
+          <p:cNvPr id="28" name="Rectangle 27"/>
           <p:cNvSpPr/>
           <p:nvPr/>
         </p:nvSpPr>
@@ -16599,7 +17047,7 @@
       </p:sp>
       <p:sp>
         <p:nvSpPr>
-          <p:cNvPr id="28" name="Rounded Rectangle 27"/>
+          <p:cNvPr id="29" name="Rounded Rectangle 28"/>
           <p:cNvSpPr/>
           <p:nvPr/>
         </p:nvSpPr>
@@ -16645,7 +17093,7 @@
       </p:sp>
       <p:sp>
         <p:nvSpPr>
-          <p:cNvPr id="29" name="TextBox 28"/>
+          <p:cNvPr id="30" name="TextBox 29"/>
           <p:cNvSpPr txBox="1"/>
           <p:nvPr/>
         </p:nvSpPr>
@@ -16692,7 +17140,7 @@
       </p:sp>
       <p:sp>
         <p:nvSpPr>
-          <p:cNvPr id="30" name="Rounded Rectangle 29"/>
+          <p:cNvPr id="31" name="Rounded Rectangle 30"/>
           <p:cNvSpPr/>
           <p:nvPr/>
         </p:nvSpPr>
@@ -16738,7 +17186,7 @@
       </p:sp>
       <p:sp>
         <p:nvSpPr>
-          <p:cNvPr id="31" name="TextBox 30"/>
+          <p:cNvPr id="32" name="TextBox 31"/>
           <p:cNvSpPr txBox="1"/>
           <p:nvPr/>
         </p:nvSpPr>
@@ -16785,7 +17233,7 @@
       </p:sp>
       <p:sp>
         <p:nvSpPr>
-          <p:cNvPr id="32" name="Rounded Rectangle 31"/>
+          <p:cNvPr id="33" name="Rounded Rectangle 32"/>
           <p:cNvSpPr/>
           <p:nvPr/>
         </p:nvSpPr>
@@ -16831,7 +17279,7 @@
       </p:sp>
       <p:sp>
         <p:nvSpPr>
-          <p:cNvPr id="33" name="TextBox 32"/>
+          <p:cNvPr id="34" name="TextBox 33"/>
           <p:cNvSpPr txBox="1"/>
           <p:nvPr/>
         </p:nvSpPr>
@@ -16878,7 +17326,7 @@
       </p:sp>
       <p:sp>
         <p:nvSpPr>
-          <p:cNvPr id="34" name="Rounded Rectangle 33"/>
+          <p:cNvPr id="35" name="Rounded Rectangle 34"/>
           <p:cNvSpPr/>
           <p:nvPr/>
         </p:nvSpPr>
@@ -16924,7 +17372,7 @@
       </p:sp>
       <p:sp>
         <p:nvSpPr>
-          <p:cNvPr id="35" name="TextBox 34"/>
+          <p:cNvPr id="36" name="TextBox 35"/>
           <p:cNvSpPr txBox="1"/>
           <p:nvPr/>
         </p:nvSpPr>
@@ -16971,7 +17419,7 @@
       </p:sp>
       <p:sp>
         <p:nvSpPr>
-          <p:cNvPr id="36" name="Rounded Rectangle 35"/>
+          <p:cNvPr id="37" name="Rounded Rectangle 36"/>
           <p:cNvSpPr/>
           <p:nvPr/>
         </p:nvSpPr>
@@ -17017,7 +17465,7 @@
       </p:sp>
       <p:sp>
         <p:nvSpPr>
-          <p:cNvPr id="37" name="TextBox 36"/>
+          <p:cNvPr id="38" name="TextBox 37"/>
           <p:cNvSpPr txBox="1"/>
           <p:nvPr/>
         </p:nvSpPr>
@@ -17064,7 +17512,7 @@
       </p:sp>
       <p:sp>
         <p:nvSpPr>
-          <p:cNvPr id="38" name="Rounded Rectangle 37"/>
+          <p:cNvPr id="39" name="Rounded Rectangle 38"/>
           <p:cNvSpPr/>
           <p:nvPr/>
         </p:nvSpPr>
@@ -17202,9 +17650,33 @@
           </a:p>
         </p:txBody>
       </p:sp>
-      <p:sp>
-        <p:nvSpPr>
-          <p:cNvPr id="3" name="TextBox 2"/>
+      <p:pic>
+        <p:nvPicPr>
+          <p:cNvPr id="3" name="college-logo" descr="logo-mark.png"/>
+          <p:cNvPicPr>
+            <a:picLocks noChangeAspect="1"/>
+          </p:cNvPicPr>
+          <p:nvPr/>
+        </p:nvPicPr>
+        <p:blipFill>
+          <a:blip r:embed="rId2"/>
+          <a:stretch>
+            <a:fillRect/>
+          </a:stretch>
+        </p:blipFill>
+        <p:spPr>
+          <a:xfrm>
+            <a:off x="11203333" y="6199632"/>
+            <a:ext cx="275129" cy="310896"/>
+          </a:xfrm>
+          <a:prstGeom prst="rect">
+            <a:avLst/>
+          </a:prstGeom>
+        </p:spPr>
+      </p:pic>
+      <p:sp>
+        <p:nvSpPr>
+          <p:cNvPr id="4" name="TextBox 3"/>
           <p:cNvSpPr txBox="1"/>
           <p:nvPr/>
         </p:nvSpPr>
@@ -17273,13 +17745,13 @@
       </p:sp>
       <p:sp>
         <p:nvSpPr>
-          <p:cNvPr id="4" name="TextBox 3"/>
+          <p:cNvPr id="5" name="TextBox 4"/>
           <p:cNvSpPr txBox="1"/>
           <p:nvPr/>
         </p:nvSpPr>
         <p:spPr>
           <a:xfrm>
-            <a:off x="8826703" y="6272784"/>
+            <a:off x="8240677" y="6272784"/>
             <a:ext cx="2651760" cy="219456"/>
           </a:xfrm>
           <a:prstGeom prst="rect">
@@ -17342,7 +17814,7 @@
       </p:sp>
       <p:sp>
         <p:nvSpPr>
-          <p:cNvPr id="5" name="TextBox 4"/>
+          <p:cNvPr id="6" name="TextBox 5"/>
           <p:cNvSpPr txBox="1"/>
           <p:nvPr/>
         </p:nvSpPr>
@@ -17389,7 +17861,7 @@
       </p:sp>
       <p:sp>
         <p:nvSpPr>
-          <p:cNvPr id="6" name="TextBox 5"/>
+          <p:cNvPr id="7" name="TextBox 6"/>
           <p:cNvSpPr txBox="1"/>
           <p:nvPr/>
         </p:nvSpPr>
@@ -17436,7 +17908,7 @@
       </p:sp>
       <p:sp>
         <p:nvSpPr>
-          <p:cNvPr id="7" name="Rectangle 6"/>
+          <p:cNvPr id="8" name="Rectangle 7"/>
           <p:cNvSpPr/>
           <p:nvPr/>
         </p:nvSpPr>
@@ -17480,7 +17952,7 @@
       </p:sp>
       <p:sp>
         <p:nvSpPr>
-          <p:cNvPr id="8" name="TextBox 7"/>
+          <p:cNvPr id="9" name="TextBox 8"/>
           <p:cNvSpPr txBox="1"/>
           <p:nvPr/>
         </p:nvSpPr>
@@ -17527,7 +17999,7 @@
       </p:sp>
       <p:sp>
         <p:nvSpPr>
-          <p:cNvPr id="9" name="Rectangle 8"/>
+          <p:cNvPr id="10" name="Rectangle 9"/>
           <p:cNvSpPr/>
           <p:nvPr/>
         </p:nvSpPr>
@@ -17571,7 +18043,7 @@
       </p:sp>
       <p:sp>
         <p:nvSpPr>
-          <p:cNvPr id="10" name="TextBox 9"/>
+          <p:cNvPr id="11" name="TextBox 10"/>
           <p:cNvSpPr txBox="1"/>
           <p:nvPr/>
         </p:nvSpPr>
@@ -17618,7 +18090,7 @@
       </p:sp>
       <p:sp>
         <p:nvSpPr>
-          <p:cNvPr id="11" name="TextBox 10"/>
+          <p:cNvPr id="12" name="TextBox 11"/>
           <p:cNvSpPr txBox="1"/>
           <p:nvPr/>
         </p:nvSpPr>
@@ -17689,7 +18161,7 @@
       </p:sp>
       <p:sp>
         <p:nvSpPr>
-          <p:cNvPr id="12" name="Rectangle 11"/>
+          <p:cNvPr id="13" name="Rectangle 12"/>
           <p:cNvSpPr/>
           <p:nvPr/>
         </p:nvSpPr>
@@ -17733,7 +18205,7 @@
       </p:sp>
       <p:sp>
         <p:nvSpPr>
-          <p:cNvPr id="13" name="TextBox 12"/>
+          <p:cNvPr id="14" name="TextBox 13"/>
           <p:cNvSpPr txBox="1"/>
           <p:nvPr/>
         </p:nvSpPr>
@@ -17780,7 +18252,7 @@
       </p:sp>
       <p:sp>
         <p:nvSpPr>
-          <p:cNvPr id="14" name="TextBox 13"/>
+          <p:cNvPr id="15" name="TextBox 14"/>
           <p:cNvSpPr txBox="1"/>
           <p:nvPr/>
         </p:nvSpPr>
@@ -17851,7 +18323,7 @@
       </p:sp>
       <p:sp>
         <p:nvSpPr>
-          <p:cNvPr id="15" name="Rectangle 14"/>
+          <p:cNvPr id="16" name="Rectangle 15"/>
           <p:cNvSpPr/>
           <p:nvPr/>
         </p:nvSpPr>
@@ -17895,7 +18367,7 @@
       </p:sp>
       <p:sp>
         <p:nvSpPr>
-          <p:cNvPr id="16" name="TextBox 15"/>
+          <p:cNvPr id="17" name="TextBox 16"/>
           <p:cNvSpPr txBox="1"/>
           <p:nvPr/>
         </p:nvSpPr>
@@ -17942,7 +18414,7 @@
       </p:sp>
       <p:sp>
         <p:nvSpPr>
-          <p:cNvPr id="17" name="TextBox 16"/>
+          <p:cNvPr id="18" name="TextBox 17"/>
           <p:cNvSpPr txBox="1"/>
           <p:nvPr/>
         </p:nvSpPr>
@@ -18013,7 +18485,7 @@
       </p:sp>
       <p:sp>
         <p:nvSpPr>
-          <p:cNvPr id="18" name="Rectangle 17"/>
+          <p:cNvPr id="19" name="Rectangle 18"/>
           <p:cNvSpPr/>
           <p:nvPr/>
         </p:nvSpPr>
@@ -18057,7 +18529,7 @@
       </p:sp>
       <p:sp>
         <p:nvSpPr>
-          <p:cNvPr id="19" name="TextBox 18"/>
+          <p:cNvPr id="20" name="TextBox 19"/>
           <p:cNvSpPr txBox="1"/>
           <p:nvPr/>
         </p:nvSpPr>
@@ -18104,7 +18576,7 @@
       </p:sp>
       <p:sp>
         <p:nvSpPr>
-          <p:cNvPr id="20" name="TextBox 19"/>
+          <p:cNvPr id="21" name="TextBox 20"/>
           <p:cNvSpPr txBox="1"/>
           <p:nvPr/>
         </p:nvSpPr>
@@ -18175,7 +18647,7 @@
       </p:sp>
       <p:sp>
         <p:nvSpPr>
-          <p:cNvPr id="21" name="Rectangle 20"/>
+          <p:cNvPr id="22" name="Rectangle 21"/>
           <p:cNvSpPr/>
           <p:nvPr/>
         </p:nvSpPr>
@@ -18219,7 +18691,7 @@
       </p:sp>
       <p:sp>
         <p:nvSpPr>
-          <p:cNvPr id="22" name="TextBox 21"/>
+          <p:cNvPr id="23" name="TextBox 22"/>
           <p:cNvSpPr txBox="1"/>
           <p:nvPr/>
         </p:nvSpPr>
@@ -18266,7 +18738,7 @@
       </p:sp>
       <p:sp>
         <p:nvSpPr>
-          <p:cNvPr id="23" name="TextBox 22"/>
+          <p:cNvPr id="24" name="TextBox 23"/>
           <p:cNvSpPr txBox="1"/>
           <p:nvPr/>
         </p:nvSpPr>
@@ -18337,7 +18809,7 @@
       </p:sp>
       <p:sp>
         <p:nvSpPr>
-          <p:cNvPr id="24" name="Rectangle 23"/>
+          <p:cNvPr id="25" name="Rectangle 24"/>
           <p:cNvSpPr/>
           <p:nvPr/>
         </p:nvSpPr>
@@ -18381,7 +18853,7 @@
       </p:sp>
       <p:sp>
         <p:nvSpPr>
-          <p:cNvPr id="25" name="TextBox 24"/>
+          <p:cNvPr id="26" name="TextBox 25"/>
           <p:cNvSpPr txBox="1"/>
           <p:nvPr/>
         </p:nvSpPr>
@@ -18428,7 +18900,7 @@
       </p:sp>
       <p:sp>
         <p:nvSpPr>
-          <p:cNvPr id="26" name="TextBox 25"/>
+          <p:cNvPr id="27" name="TextBox 26"/>
           <p:cNvSpPr txBox="1"/>
           <p:nvPr/>
         </p:nvSpPr>
@@ -18499,7 +18971,7 @@
       </p:sp>
       <p:sp>
         <p:nvSpPr>
-          <p:cNvPr id="27" name="Rectangle 26"/>
+          <p:cNvPr id="28" name="Rectangle 27"/>
           <p:cNvSpPr/>
           <p:nvPr/>
         </p:nvSpPr>
@@ -18543,7 +19015,7 @@
       </p:sp>
       <p:sp>
         <p:nvSpPr>
-          <p:cNvPr id="28" name="TextBox 27"/>
+          <p:cNvPr id="29" name="TextBox 28"/>
           <p:cNvSpPr txBox="1"/>
           <p:nvPr/>
         </p:nvSpPr>
@@ -18590,7 +19062,7 @@
       </p:sp>
       <p:sp>
         <p:nvSpPr>
-          <p:cNvPr id="29" name="TextBox 28"/>
+          <p:cNvPr id="30" name="TextBox 29"/>
           <p:cNvSpPr txBox="1"/>
           <p:nvPr/>
         </p:nvSpPr>
@@ -18661,7 +19133,7 @@
       </p:sp>
       <p:sp>
         <p:nvSpPr>
-          <p:cNvPr id="30" name="Rectangle 29"/>
+          <p:cNvPr id="31" name="Rectangle 30"/>
           <p:cNvSpPr/>
           <p:nvPr/>
         </p:nvSpPr>
@@ -18705,7 +19177,7 @@
       </p:sp>
       <p:sp>
         <p:nvSpPr>
-          <p:cNvPr id="31" name="TextBox 30"/>
+          <p:cNvPr id="32" name="TextBox 31"/>
           <p:cNvSpPr txBox="1"/>
           <p:nvPr/>
         </p:nvSpPr>
@@ -18752,7 +19224,7 @@
       </p:sp>
       <p:sp>
         <p:nvSpPr>
-          <p:cNvPr id="32" name="TextBox 31"/>
+          <p:cNvPr id="33" name="TextBox 32"/>
           <p:cNvSpPr txBox="1"/>
           <p:nvPr/>
         </p:nvSpPr>
@@ -18883,9 +19355,33 @@
           </a:p>
         </p:txBody>
       </p:sp>
-      <p:sp>
-        <p:nvSpPr>
-          <p:cNvPr id="3" name="TextBox 2"/>
+      <p:pic>
+        <p:nvPicPr>
+          <p:cNvPr id="3" name="college-logo" descr="logo-mark.png"/>
+          <p:cNvPicPr>
+            <a:picLocks noChangeAspect="1"/>
+          </p:cNvPicPr>
+          <p:nvPr/>
+        </p:nvPicPr>
+        <p:blipFill>
+          <a:blip r:embed="rId2"/>
+          <a:stretch>
+            <a:fillRect/>
+          </a:stretch>
+        </p:blipFill>
+        <p:spPr>
+          <a:xfrm>
+            <a:off x="11203333" y="6199632"/>
+            <a:ext cx="275129" cy="310896"/>
+          </a:xfrm>
+          <a:prstGeom prst="rect">
+            <a:avLst/>
+          </a:prstGeom>
+        </p:spPr>
+      </p:pic>
+      <p:sp>
+        <p:nvSpPr>
+          <p:cNvPr id="4" name="TextBox 3"/>
           <p:cNvSpPr txBox="1"/>
           <p:nvPr/>
         </p:nvSpPr>
@@ -18954,13 +19450,13 @@
       </p:sp>
       <p:sp>
         <p:nvSpPr>
-          <p:cNvPr id="4" name="TextBox 3"/>
+          <p:cNvPr id="5" name="TextBox 4"/>
           <p:cNvSpPr txBox="1"/>
           <p:nvPr/>
         </p:nvSpPr>
         <p:spPr>
           <a:xfrm>
-            <a:off x="8826703" y="6272784"/>
+            <a:off x="8240677" y="6272784"/>
             <a:ext cx="2651760" cy="219456"/>
           </a:xfrm>
           <a:prstGeom prst="rect">
@@ -19023,7 +19519,7 @@
       </p:sp>
       <p:sp>
         <p:nvSpPr>
-          <p:cNvPr id="5" name="TextBox 4"/>
+          <p:cNvPr id="6" name="TextBox 5"/>
           <p:cNvSpPr txBox="1"/>
           <p:nvPr/>
         </p:nvSpPr>
@@ -19070,7 +19566,7 @@
       </p:sp>
       <p:sp>
         <p:nvSpPr>
-          <p:cNvPr id="6" name="TextBox 5"/>
+          <p:cNvPr id="7" name="TextBox 6"/>
           <p:cNvSpPr txBox="1"/>
           <p:nvPr/>
         </p:nvSpPr>
@@ -19117,7 +19613,7 @@
       </p:sp>
       <p:sp>
         <p:nvSpPr>
-          <p:cNvPr id="7" name="Rectangle 6"/>
+          <p:cNvPr id="8" name="Rectangle 7"/>
           <p:cNvSpPr/>
           <p:nvPr/>
         </p:nvSpPr>
@@ -19161,7 +19657,7 @@
       </p:sp>
       <p:sp>
         <p:nvSpPr>
-          <p:cNvPr id="8" name="TextBox 7"/>
+          <p:cNvPr id="9" name="TextBox 8"/>
           <p:cNvSpPr txBox="1"/>
           <p:nvPr/>
         </p:nvSpPr>
@@ -19208,7 +19704,7 @@
       </p:sp>
       <p:sp>
         <p:nvSpPr>
-          <p:cNvPr id="9" name="Rounded Rectangle 8"/>
+          <p:cNvPr id="10" name="Rounded Rectangle 9"/>
           <p:cNvSpPr/>
           <p:nvPr/>
         </p:nvSpPr>
@@ -19254,7 +19750,7 @@
       </p:sp>
       <p:sp>
         <p:nvSpPr>
-          <p:cNvPr id="10" name="TextBox 9"/>
+          <p:cNvPr id="11" name="TextBox 10"/>
           <p:cNvSpPr txBox="1"/>
           <p:nvPr/>
         </p:nvSpPr>
@@ -19325,7 +19821,7 @@
       </p:sp>
       <p:sp>
         <p:nvSpPr>
-          <p:cNvPr id="11" name="Rounded Rectangle 10"/>
+          <p:cNvPr id="12" name="Rounded Rectangle 11"/>
           <p:cNvSpPr/>
           <p:nvPr/>
         </p:nvSpPr>
@@ -19371,7 +19867,7 @@
       </p:sp>
       <p:sp>
         <p:nvSpPr>
-          <p:cNvPr id="12" name="TextBox 11"/>
+          <p:cNvPr id="13" name="TextBox 12"/>
           <p:cNvSpPr txBox="1"/>
           <p:nvPr/>
         </p:nvSpPr>
@@ -19442,7 +19938,7 @@
       </p:sp>
       <p:sp>
         <p:nvSpPr>
-          <p:cNvPr id="13" name="Rounded Rectangle 12"/>
+          <p:cNvPr id="14" name="Rounded Rectangle 13"/>
           <p:cNvSpPr/>
           <p:nvPr/>
         </p:nvSpPr>
@@ -19488,7 +19984,7 @@
       </p:sp>
       <p:sp>
         <p:nvSpPr>
-          <p:cNvPr id="14" name="TextBox 13"/>
+          <p:cNvPr id="15" name="TextBox 14"/>
           <p:cNvSpPr txBox="1"/>
           <p:nvPr/>
         </p:nvSpPr>
@@ -19559,7 +20055,7 @@
       </p:sp>
       <p:sp>
         <p:nvSpPr>
-          <p:cNvPr id="15" name="Rounded Rectangle 14"/>
+          <p:cNvPr id="16" name="Rounded Rectangle 15"/>
           <p:cNvSpPr/>
           <p:nvPr/>
         </p:nvSpPr>
@@ -19605,7 +20101,7 @@
       </p:sp>
       <p:sp>
         <p:nvSpPr>
-          <p:cNvPr id="16" name="TextBox 15"/>
+          <p:cNvPr id="17" name="TextBox 16"/>
           <p:cNvSpPr txBox="1"/>
           <p:nvPr/>
         </p:nvSpPr>
@@ -19676,7 +20172,7 @@
       </p:sp>
       <p:sp>
         <p:nvSpPr>
-          <p:cNvPr id="17" name="Rounded Rectangle 16"/>
+          <p:cNvPr id="18" name="Rounded Rectangle 17"/>
           <p:cNvSpPr/>
           <p:nvPr/>
         </p:nvSpPr>
@@ -19722,7 +20218,7 @@
       </p:sp>
       <p:sp>
         <p:nvSpPr>
-          <p:cNvPr id="18" name="TextBox 17"/>
+          <p:cNvPr id="19" name="TextBox 18"/>
           <p:cNvSpPr txBox="1"/>
           <p:nvPr/>
         </p:nvSpPr>
@@ -19793,7 +20289,7 @@
       </p:sp>
       <p:sp>
         <p:nvSpPr>
-          <p:cNvPr id="19" name="Rounded Rectangle 18"/>
+          <p:cNvPr id="20" name="Rounded Rectangle 19"/>
           <p:cNvSpPr/>
           <p:nvPr/>
         </p:nvSpPr>
@@ -19839,7 +20335,7 @@
       </p:sp>
       <p:sp>
         <p:nvSpPr>
-          <p:cNvPr id="20" name="TextBox 19"/>
+          <p:cNvPr id="21" name="TextBox 20"/>
           <p:cNvSpPr txBox="1"/>
           <p:nvPr/>
         </p:nvSpPr>
@@ -20072,7 +20568,77 @@
       </p:sp>
       <p:sp>
         <p:nvSpPr>
-          <p:cNvPr id="5" name="TextBox 4"/>
+          <p:cNvPr id="5" name="logo-plate"/>
+          <p:cNvSpPr/>
+          <p:nvPr/>
+        </p:nvSpPr>
+        <p:spPr>
+          <a:xfrm>
+            <a:off x="9769160" y="502920"/>
+            <a:ext cx="1736734" cy="877824"/>
+          </a:xfrm>
+          <a:prstGeom prst="roundRect">
+            <a:avLst>
+              <a:gd name="adj" fmla="val 14000"/>
+            </a:avLst>
+          </a:prstGeom>
+          <a:solidFill>
+            <a:srgbClr val="FFFFFF"/>
+          </a:solidFill>
+          <a:ln>
+            <a:noFill/>
+          </a:ln>
+          <a:effectLst/>
+        </p:spPr>
+        <p:style>
+          <a:lnRef idx="1">
+            <a:schemeClr val="accent1"/>
+          </a:lnRef>
+          <a:fillRef idx="3">
+            <a:schemeClr val="accent1"/>
+          </a:fillRef>
+          <a:effectRef idx="2">
+            <a:schemeClr val="accent1"/>
+          </a:effectRef>
+          <a:fontRef idx="minor">
+            <a:schemeClr val="lt1"/>
+          </a:fontRef>
+        </p:style>
+        <p:txBody>
+          <a:bodyPr rtlCol="0" anchor="ctr" wrap="square"/>
+          <a:lstStyle/>
+          <a:p>
+            <a:pPr algn="ctr"/>
+          </a:p>
+        </p:txBody>
+      </p:sp>
+      <p:pic>
+        <p:nvPicPr>
+          <p:cNvPr id="6" name="college-logo" descr="logo-full.png"/>
+          <p:cNvPicPr>
+            <a:picLocks noChangeAspect="1"/>
+          </p:cNvPicPr>
+          <p:nvPr/>
+        </p:nvPicPr>
+        <p:blipFill>
+          <a:blip r:embed="rId2"/>
+          <a:stretch>
+            <a:fillRect/>
+          </a:stretch>
+        </p:blipFill>
+        <p:spPr>
+          <a:xfrm>
+            <a:off x="9888032" y="621792"/>
+            <a:ext cx="1498991" cy="640080"/>
+          </a:xfrm>
+          <a:prstGeom prst="rect">
+            <a:avLst/>
+          </a:prstGeom>
+        </p:spPr>
+      </p:pic>
+      <p:sp>
+        <p:nvSpPr>
+          <p:cNvPr id="7" name="TextBox 6"/>
           <p:cNvSpPr txBox="1"/>
           <p:nvPr/>
         </p:nvSpPr>
@@ -20119,7 +20685,7 @@
       </p:sp>
       <p:sp>
         <p:nvSpPr>
-          <p:cNvPr id="6" name="TextBox 5"/>
+          <p:cNvPr id="8" name="TextBox 7"/>
           <p:cNvSpPr txBox="1"/>
           <p:nvPr/>
         </p:nvSpPr>
@@ -20166,7 +20732,7 @@
       </p:sp>
       <p:sp>
         <p:nvSpPr>
-          <p:cNvPr id="7" name="Rectangle 6"/>
+          <p:cNvPr id="9" name="Rectangle 8"/>
           <p:cNvSpPr/>
           <p:nvPr/>
         </p:nvSpPr>
@@ -20210,7 +20776,7 @@
       </p:sp>
       <p:sp>
         <p:nvSpPr>
-          <p:cNvPr id="8" name="TextBox 7"/>
+          <p:cNvPr id="10" name="TextBox 9"/>
           <p:cNvSpPr txBox="1"/>
           <p:nvPr/>
         </p:nvSpPr>
@@ -20317,9 +20883,33 @@
           </a:p>
         </p:txBody>
       </p:sp>
-      <p:sp>
-        <p:nvSpPr>
-          <p:cNvPr id="3" name="TextBox 2"/>
+      <p:pic>
+        <p:nvPicPr>
+          <p:cNvPr id="3" name="college-logo" descr="logo-mark.png"/>
+          <p:cNvPicPr>
+            <a:picLocks noChangeAspect="1"/>
+          </p:cNvPicPr>
+          <p:nvPr/>
+        </p:nvPicPr>
+        <p:blipFill>
+          <a:blip r:embed="rId2"/>
+          <a:stretch>
+            <a:fillRect/>
+          </a:stretch>
+        </p:blipFill>
+        <p:spPr>
+          <a:xfrm>
+            <a:off x="11203333" y="6199632"/>
+            <a:ext cx="275129" cy="310896"/>
+          </a:xfrm>
+          <a:prstGeom prst="rect">
+            <a:avLst/>
+          </a:prstGeom>
+        </p:spPr>
+      </p:pic>
+      <p:sp>
+        <p:nvSpPr>
+          <p:cNvPr id="4" name="TextBox 3"/>
           <p:cNvSpPr txBox="1"/>
           <p:nvPr/>
         </p:nvSpPr>
@@ -20388,13 +20978,13 @@
       </p:sp>
       <p:sp>
         <p:nvSpPr>
-          <p:cNvPr id="4" name="TextBox 3"/>
+          <p:cNvPr id="5" name="TextBox 4"/>
           <p:cNvSpPr txBox="1"/>
           <p:nvPr/>
         </p:nvSpPr>
         <p:spPr>
           <a:xfrm>
-            <a:off x="8826703" y="6272784"/>
+            <a:off x="8240677" y="6272784"/>
             <a:ext cx="2651760" cy="219456"/>
           </a:xfrm>
           <a:prstGeom prst="rect">
@@ -20457,7 +21047,7 @@
       </p:sp>
       <p:sp>
         <p:nvSpPr>
-          <p:cNvPr id="5" name="TextBox 4"/>
+          <p:cNvPr id="6" name="TextBox 5"/>
           <p:cNvSpPr txBox="1"/>
           <p:nvPr/>
         </p:nvSpPr>
@@ -20504,7 +21094,7 @@
       </p:sp>
       <p:sp>
         <p:nvSpPr>
-          <p:cNvPr id="6" name="TextBox 5"/>
+          <p:cNvPr id="7" name="TextBox 6"/>
           <p:cNvSpPr txBox="1"/>
           <p:nvPr/>
         </p:nvSpPr>
@@ -20551,7 +21141,7 @@
       </p:sp>
       <p:sp>
         <p:nvSpPr>
-          <p:cNvPr id="7" name="Rectangle 6"/>
+          <p:cNvPr id="8" name="Rectangle 7"/>
           <p:cNvSpPr/>
           <p:nvPr/>
         </p:nvSpPr>
@@ -20595,7 +21185,7 @@
       </p:sp>
       <p:sp>
         <p:nvSpPr>
-          <p:cNvPr id="8" name="TextBox 7"/>
+          <p:cNvPr id="9" name="TextBox 8"/>
           <p:cNvSpPr txBox="1"/>
           <p:nvPr/>
         </p:nvSpPr>
@@ -20642,7 +21232,7 @@
       </p:sp>
       <p:sp>
         <p:nvSpPr>
-          <p:cNvPr id="9" name="Rounded Rectangle 8"/>
+          <p:cNvPr id="10" name="Rounded Rectangle 9"/>
           <p:cNvSpPr/>
           <p:nvPr/>
         </p:nvSpPr>
@@ -20696,7 +21286,7 @@
       </p:sp>
       <p:sp>
         <p:nvSpPr>
-          <p:cNvPr id="10" name="Rectangle 9"/>
+          <p:cNvPr id="11" name="Rectangle 10"/>
           <p:cNvSpPr/>
           <p:nvPr/>
         </p:nvSpPr>
@@ -20740,7 +21330,7 @@
       </p:sp>
       <p:sp>
         <p:nvSpPr>
-          <p:cNvPr id="11" name="TextBox 10"/>
+          <p:cNvPr id="12" name="TextBox 11"/>
           <p:cNvSpPr txBox="1"/>
           <p:nvPr/>
         </p:nvSpPr>
@@ -20787,7 +21377,7 @@
       </p:sp>
       <p:sp>
         <p:nvSpPr>
-          <p:cNvPr id="12" name="TextBox 11"/>
+          <p:cNvPr id="13" name="TextBox 12"/>
           <p:cNvSpPr txBox="1"/>
           <p:nvPr/>
         </p:nvSpPr>
@@ -20834,7 +21424,7 @@
       </p:sp>
       <p:sp>
         <p:nvSpPr>
-          <p:cNvPr id="13" name="Rounded Rectangle 12"/>
+          <p:cNvPr id="14" name="Rounded Rectangle 13"/>
           <p:cNvSpPr/>
           <p:nvPr/>
         </p:nvSpPr>
@@ -20888,7 +21478,7 @@
       </p:sp>
       <p:sp>
         <p:nvSpPr>
-          <p:cNvPr id="14" name="Rectangle 13"/>
+          <p:cNvPr id="15" name="Rectangle 14"/>
           <p:cNvSpPr/>
           <p:nvPr/>
         </p:nvSpPr>
@@ -20932,7 +21522,7 @@
       </p:sp>
       <p:sp>
         <p:nvSpPr>
-          <p:cNvPr id="15" name="TextBox 14"/>
+          <p:cNvPr id="16" name="TextBox 15"/>
           <p:cNvSpPr txBox="1"/>
           <p:nvPr/>
         </p:nvSpPr>
@@ -20979,7 +21569,7 @@
       </p:sp>
       <p:sp>
         <p:nvSpPr>
-          <p:cNvPr id="16" name="TextBox 15"/>
+          <p:cNvPr id="17" name="TextBox 16"/>
           <p:cNvSpPr txBox="1"/>
           <p:nvPr/>
         </p:nvSpPr>
@@ -21026,7 +21616,7 @@
       </p:sp>
       <p:sp>
         <p:nvSpPr>
-          <p:cNvPr id="17" name="Rounded Rectangle 16"/>
+          <p:cNvPr id="18" name="Rounded Rectangle 17"/>
           <p:cNvSpPr/>
           <p:nvPr/>
         </p:nvSpPr>
@@ -21080,7 +21670,7 @@
       </p:sp>
       <p:sp>
         <p:nvSpPr>
-          <p:cNvPr id="18" name="Rectangle 17"/>
+          <p:cNvPr id="19" name="Rectangle 18"/>
           <p:cNvSpPr/>
           <p:nvPr/>
         </p:nvSpPr>
@@ -21124,7 +21714,7 @@
       </p:sp>
       <p:sp>
         <p:nvSpPr>
-          <p:cNvPr id="19" name="TextBox 18"/>
+          <p:cNvPr id="20" name="TextBox 19"/>
           <p:cNvSpPr txBox="1"/>
           <p:nvPr/>
         </p:nvSpPr>
@@ -21171,7 +21761,7 @@
       </p:sp>
       <p:sp>
         <p:nvSpPr>
-          <p:cNvPr id="20" name="TextBox 19"/>
+          <p:cNvPr id="21" name="TextBox 20"/>
           <p:cNvSpPr txBox="1"/>
           <p:nvPr/>
         </p:nvSpPr>
@@ -21218,7 +21808,7 @@
       </p:sp>
       <p:sp>
         <p:nvSpPr>
-          <p:cNvPr id="21" name="Rounded Rectangle 20"/>
+          <p:cNvPr id="22" name="Rounded Rectangle 21"/>
           <p:cNvSpPr/>
           <p:nvPr/>
         </p:nvSpPr>
@@ -21272,7 +21862,7 @@
       </p:sp>
       <p:sp>
         <p:nvSpPr>
-          <p:cNvPr id="22" name="Rectangle 21"/>
+          <p:cNvPr id="23" name="Rectangle 22"/>
           <p:cNvSpPr/>
           <p:nvPr/>
         </p:nvSpPr>
@@ -21316,7 +21906,7 @@
       </p:sp>
       <p:sp>
         <p:nvSpPr>
-          <p:cNvPr id="23" name="TextBox 22"/>
+          <p:cNvPr id="24" name="TextBox 23"/>
           <p:cNvSpPr txBox="1"/>
           <p:nvPr/>
         </p:nvSpPr>
@@ -21363,7 +21953,7 @@
       </p:sp>
       <p:sp>
         <p:nvSpPr>
-          <p:cNvPr id="24" name="TextBox 23"/>
+          <p:cNvPr id="25" name="TextBox 24"/>
           <p:cNvSpPr txBox="1"/>
           <p:nvPr/>
         </p:nvSpPr>
@@ -21410,7 +22000,7 @@
       </p:sp>
       <p:sp>
         <p:nvSpPr>
-          <p:cNvPr id="25" name="Rounded Rectangle 24"/>
+          <p:cNvPr id="26" name="Rounded Rectangle 25"/>
           <p:cNvSpPr/>
           <p:nvPr/>
         </p:nvSpPr>
@@ -21464,7 +22054,7 @@
       </p:sp>
       <p:sp>
         <p:nvSpPr>
-          <p:cNvPr id="26" name="Rectangle 25"/>
+          <p:cNvPr id="27" name="Rectangle 26"/>
           <p:cNvSpPr/>
           <p:nvPr/>
         </p:nvSpPr>
@@ -21508,7 +22098,7 @@
       </p:sp>
       <p:sp>
         <p:nvSpPr>
-          <p:cNvPr id="27" name="TextBox 26"/>
+          <p:cNvPr id="28" name="TextBox 27"/>
           <p:cNvSpPr txBox="1"/>
           <p:nvPr/>
         </p:nvSpPr>
@@ -21555,7 +22145,7 @@
       </p:sp>
       <p:sp>
         <p:nvSpPr>
-          <p:cNvPr id="28" name="TextBox 27"/>
+          <p:cNvPr id="29" name="TextBox 28"/>
           <p:cNvSpPr txBox="1"/>
           <p:nvPr/>
         </p:nvSpPr>
@@ -21602,7 +22192,7 @@
       </p:sp>
       <p:sp>
         <p:nvSpPr>
-          <p:cNvPr id="29" name="Rounded Rectangle 28"/>
+          <p:cNvPr id="30" name="Rounded Rectangle 29"/>
           <p:cNvSpPr/>
           <p:nvPr/>
         </p:nvSpPr>
@@ -21656,7 +22246,7 @@
       </p:sp>
       <p:sp>
         <p:nvSpPr>
-          <p:cNvPr id="30" name="Rectangle 29"/>
+          <p:cNvPr id="31" name="Rectangle 30"/>
           <p:cNvSpPr/>
           <p:nvPr/>
         </p:nvSpPr>
@@ -21700,7 +22290,7 @@
       </p:sp>
       <p:sp>
         <p:nvSpPr>
-          <p:cNvPr id="31" name="TextBox 30"/>
+          <p:cNvPr id="32" name="TextBox 31"/>
           <p:cNvSpPr txBox="1"/>
           <p:nvPr/>
         </p:nvSpPr>
@@ -21747,7 +22337,7 @@
       </p:sp>
       <p:sp>
         <p:nvSpPr>
-          <p:cNvPr id="32" name="TextBox 31"/>
+          <p:cNvPr id="33" name="TextBox 32"/>
           <p:cNvSpPr txBox="1"/>
           <p:nvPr/>
         </p:nvSpPr>
@@ -21854,9 +22444,33 @@
           </a:p>
         </p:txBody>
       </p:sp>
-      <p:sp>
-        <p:nvSpPr>
-          <p:cNvPr id="3" name="TextBox 2"/>
+      <p:pic>
+        <p:nvPicPr>
+          <p:cNvPr id="3" name="college-logo" descr="logo-mark.png"/>
+          <p:cNvPicPr>
+            <a:picLocks noChangeAspect="1"/>
+          </p:cNvPicPr>
+          <p:nvPr/>
+        </p:nvPicPr>
+        <p:blipFill>
+          <a:blip r:embed="rId2"/>
+          <a:stretch>
+            <a:fillRect/>
+          </a:stretch>
+        </p:blipFill>
+        <p:spPr>
+          <a:xfrm>
+            <a:off x="11203333" y="6199632"/>
+            <a:ext cx="275129" cy="310896"/>
+          </a:xfrm>
+          <a:prstGeom prst="rect">
+            <a:avLst/>
+          </a:prstGeom>
+        </p:spPr>
+      </p:pic>
+      <p:sp>
+        <p:nvSpPr>
+          <p:cNvPr id="4" name="TextBox 3"/>
           <p:cNvSpPr txBox="1"/>
           <p:nvPr/>
         </p:nvSpPr>
@@ -21925,13 +22539,13 @@
       </p:sp>
       <p:sp>
         <p:nvSpPr>
-          <p:cNvPr id="4" name="TextBox 3"/>
+          <p:cNvPr id="5" name="TextBox 4"/>
           <p:cNvSpPr txBox="1"/>
           <p:nvPr/>
         </p:nvSpPr>
         <p:spPr>
           <a:xfrm>
-            <a:off x="8826703" y="6272784"/>
+            <a:off x="8240677" y="6272784"/>
             <a:ext cx="2651760" cy="219456"/>
           </a:xfrm>
           <a:prstGeom prst="rect">
@@ -21994,7 +22608,7 @@
       </p:sp>
       <p:sp>
         <p:nvSpPr>
-          <p:cNvPr id="5" name="TextBox 4"/>
+          <p:cNvPr id="6" name="TextBox 5"/>
           <p:cNvSpPr txBox="1"/>
           <p:nvPr/>
         </p:nvSpPr>
@@ -22041,7 +22655,7 @@
       </p:sp>
       <p:sp>
         <p:nvSpPr>
-          <p:cNvPr id="6" name="TextBox 5"/>
+          <p:cNvPr id="7" name="TextBox 6"/>
           <p:cNvSpPr txBox="1"/>
           <p:nvPr/>
         </p:nvSpPr>
@@ -22088,7 +22702,7 @@
       </p:sp>
       <p:sp>
         <p:nvSpPr>
-          <p:cNvPr id="7" name="Rectangle 6"/>
+          <p:cNvPr id="8" name="Rectangle 7"/>
           <p:cNvSpPr/>
           <p:nvPr/>
         </p:nvSpPr>
@@ -22132,7 +22746,7 @@
       </p:sp>
       <p:sp>
         <p:nvSpPr>
-          <p:cNvPr id="8" name="TextBox 7"/>
+          <p:cNvPr id="9" name="TextBox 8"/>
           <p:cNvSpPr txBox="1"/>
           <p:nvPr/>
         </p:nvSpPr>
@@ -22179,7 +22793,7 @@
       </p:sp>
       <p:sp>
         <p:nvSpPr>
-          <p:cNvPr id="9" name="Rounded Rectangle 8"/>
+          <p:cNvPr id="10" name="Rounded Rectangle 9"/>
           <p:cNvSpPr/>
           <p:nvPr/>
         </p:nvSpPr>
@@ -22233,7 +22847,7 @@
       </p:sp>
       <p:sp>
         <p:nvSpPr>
-          <p:cNvPr id="10" name="Rectangle 9"/>
+          <p:cNvPr id="11" name="Rectangle 10"/>
           <p:cNvSpPr/>
           <p:nvPr/>
         </p:nvSpPr>
@@ -22277,7 +22891,7 @@
       </p:sp>
       <p:sp>
         <p:nvSpPr>
-          <p:cNvPr id="11" name="Oval 10"/>
+          <p:cNvPr id="12" name="Oval 11"/>
           <p:cNvSpPr/>
           <p:nvPr/>
         </p:nvSpPr>
@@ -22321,7 +22935,7 @@
       </p:sp>
       <p:sp>
         <p:nvSpPr>
-          <p:cNvPr id="12" name="TextBox 11"/>
+          <p:cNvPr id="13" name="TextBox 12"/>
           <p:cNvSpPr txBox="1"/>
           <p:nvPr/>
         </p:nvSpPr>
@@ -22368,7 +22982,7 @@
       </p:sp>
       <p:sp>
         <p:nvSpPr>
-          <p:cNvPr id="13" name="TextBox 12"/>
+          <p:cNvPr id="14" name="TextBox 13"/>
           <p:cNvSpPr txBox="1"/>
           <p:nvPr/>
         </p:nvSpPr>
@@ -22439,7 +23053,7 @@
       </p:sp>
       <p:sp>
         <p:nvSpPr>
-          <p:cNvPr id="14" name="Rounded Rectangle 13"/>
+          <p:cNvPr id="15" name="Rounded Rectangle 14"/>
           <p:cNvSpPr/>
           <p:nvPr/>
         </p:nvSpPr>
@@ -22493,7 +23107,7 @@
       </p:sp>
       <p:sp>
         <p:nvSpPr>
-          <p:cNvPr id="15" name="Rectangle 14"/>
+          <p:cNvPr id="16" name="Rectangle 15"/>
           <p:cNvSpPr/>
           <p:nvPr/>
         </p:nvSpPr>
@@ -22537,7 +23151,7 @@
       </p:sp>
       <p:sp>
         <p:nvSpPr>
-          <p:cNvPr id="16" name="Oval 15"/>
+          <p:cNvPr id="17" name="Oval 16"/>
           <p:cNvSpPr/>
           <p:nvPr/>
         </p:nvSpPr>
@@ -22581,7 +23195,7 @@
       </p:sp>
       <p:sp>
         <p:nvSpPr>
-          <p:cNvPr id="17" name="TextBox 16"/>
+          <p:cNvPr id="18" name="TextBox 17"/>
           <p:cNvSpPr txBox="1"/>
           <p:nvPr/>
         </p:nvSpPr>
@@ -22628,7 +23242,7 @@
       </p:sp>
       <p:sp>
         <p:nvSpPr>
-          <p:cNvPr id="18" name="TextBox 17"/>
+          <p:cNvPr id="19" name="TextBox 18"/>
           <p:cNvSpPr txBox="1"/>
           <p:nvPr/>
         </p:nvSpPr>
@@ -22699,7 +23313,7 @@
       </p:sp>
       <p:sp>
         <p:nvSpPr>
-          <p:cNvPr id="19" name="Rounded Rectangle 18"/>
+          <p:cNvPr id="20" name="Rounded Rectangle 19"/>
           <p:cNvSpPr/>
           <p:nvPr/>
         </p:nvSpPr>
@@ -22753,7 +23367,7 @@
       </p:sp>
       <p:sp>
         <p:nvSpPr>
-          <p:cNvPr id="20" name="Rectangle 19"/>
+          <p:cNvPr id="21" name="Rectangle 20"/>
           <p:cNvSpPr/>
           <p:nvPr/>
         </p:nvSpPr>
@@ -22797,7 +23411,7 @@
       </p:sp>
       <p:sp>
         <p:nvSpPr>
-          <p:cNvPr id="21" name="Oval 20"/>
+          <p:cNvPr id="22" name="Oval 21"/>
           <p:cNvSpPr/>
           <p:nvPr/>
         </p:nvSpPr>
@@ -22841,7 +23455,7 @@
       </p:sp>
       <p:sp>
         <p:nvSpPr>
-          <p:cNvPr id="22" name="TextBox 21"/>
+          <p:cNvPr id="23" name="TextBox 22"/>
           <p:cNvSpPr txBox="1"/>
           <p:nvPr/>
         </p:nvSpPr>
@@ -22888,7 +23502,7 @@
       </p:sp>
       <p:sp>
         <p:nvSpPr>
-          <p:cNvPr id="23" name="TextBox 22"/>
+          <p:cNvPr id="24" name="TextBox 23"/>
           <p:cNvSpPr txBox="1"/>
           <p:nvPr/>
         </p:nvSpPr>
@@ -22959,7 +23573,7 @@
       </p:sp>
       <p:sp>
         <p:nvSpPr>
-          <p:cNvPr id="24" name="Rounded Rectangle 23"/>
+          <p:cNvPr id="25" name="Rounded Rectangle 24"/>
           <p:cNvSpPr/>
           <p:nvPr/>
         </p:nvSpPr>
@@ -23013,7 +23627,7 @@
       </p:sp>
       <p:sp>
         <p:nvSpPr>
-          <p:cNvPr id="25" name="Rectangle 24"/>
+          <p:cNvPr id="26" name="Rectangle 25"/>
           <p:cNvSpPr/>
           <p:nvPr/>
         </p:nvSpPr>
@@ -23057,7 +23671,7 @@
       </p:sp>
       <p:sp>
         <p:nvSpPr>
-          <p:cNvPr id="26" name="Oval 25"/>
+          <p:cNvPr id="27" name="Oval 26"/>
           <p:cNvSpPr/>
           <p:nvPr/>
         </p:nvSpPr>
@@ -23101,7 +23715,7 @@
       </p:sp>
       <p:sp>
         <p:nvSpPr>
-          <p:cNvPr id="27" name="TextBox 26"/>
+          <p:cNvPr id="28" name="TextBox 27"/>
           <p:cNvSpPr txBox="1"/>
           <p:nvPr/>
         </p:nvSpPr>
@@ -23148,7 +23762,7 @@
       </p:sp>
       <p:sp>
         <p:nvSpPr>
-          <p:cNvPr id="28" name="TextBox 27"/>
+          <p:cNvPr id="29" name="TextBox 28"/>
           <p:cNvSpPr txBox="1"/>
           <p:nvPr/>
         </p:nvSpPr>
@@ -23219,7 +23833,7 @@
       </p:sp>
       <p:sp>
         <p:nvSpPr>
-          <p:cNvPr id="29" name="Rounded Rectangle 28"/>
+          <p:cNvPr id="30" name="Rounded Rectangle 29"/>
           <p:cNvSpPr/>
           <p:nvPr/>
         </p:nvSpPr>
@@ -23273,7 +23887,7 @@
       </p:sp>
       <p:sp>
         <p:nvSpPr>
-          <p:cNvPr id="30" name="Rectangle 29"/>
+          <p:cNvPr id="31" name="Rectangle 30"/>
           <p:cNvSpPr/>
           <p:nvPr/>
         </p:nvSpPr>
@@ -23317,7 +23931,7 @@
       </p:sp>
       <p:sp>
         <p:nvSpPr>
-          <p:cNvPr id="31" name="Oval 30"/>
+          <p:cNvPr id="32" name="Oval 31"/>
           <p:cNvSpPr/>
           <p:nvPr/>
         </p:nvSpPr>
@@ -23361,7 +23975,7 @@
       </p:sp>
       <p:sp>
         <p:nvSpPr>
-          <p:cNvPr id="32" name="TextBox 31"/>
+          <p:cNvPr id="33" name="TextBox 32"/>
           <p:cNvSpPr txBox="1"/>
           <p:nvPr/>
         </p:nvSpPr>
@@ -23408,7 +24022,7 @@
       </p:sp>
       <p:sp>
         <p:nvSpPr>
-          <p:cNvPr id="33" name="TextBox 32"/>
+          <p:cNvPr id="34" name="TextBox 33"/>
           <p:cNvSpPr txBox="1"/>
           <p:nvPr/>
         </p:nvSpPr>
@@ -23479,7 +24093,7 @@
       </p:sp>
       <p:sp>
         <p:nvSpPr>
-          <p:cNvPr id="34" name="Rounded Rectangle 33"/>
+          <p:cNvPr id="35" name="Rounded Rectangle 34"/>
           <p:cNvSpPr/>
           <p:nvPr/>
         </p:nvSpPr>
@@ -23533,7 +24147,7 @@
       </p:sp>
       <p:sp>
         <p:nvSpPr>
-          <p:cNvPr id="35" name="Rectangle 34"/>
+          <p:cNvPr id="36" name="Rectangle 35"/>
           <p:cNvSpPr/>
           <p:nvPr/>
         </p:nvSpPr>
@@ -23577,7 +24191,7 @@
       </p:sp>
       <p:sp>
         <p:nvSpPr>
-          <p:cNvPr id="36" name="Oval 35"/>
+          <p:cNvPr id="37" name="Oval 36"/>
           <p:cNvSpPr/>
           <p:nvPr/>
         </p:nvSpPr>
@@ -23621,7 +24235,7 @@
       </p:sp>
       <p:sp>
         <p:nvSpPr>
-          <p:cNvPr id="37" name="TextBox 36"/>
+          <p:cNvPr id="38" name="TextBox 37"/>
           <p:cNvSpPr txBox="1"/>
           <p:nvPr/>
         </p:nvSpPr>
@@ -23668,7 +24282,7 @@
       </p:sp>
       <p:sp>
         <p:nvSpPr>
-          <p:cNvPr id="38" name="TextBox 37"/>
+          <p:cNvPr id="39" name="TextBox 38"/>
           <p:cNvSpPr txBox="1"/>
           <p:nvPr/>
         </p:nvSpPr>
@@ -24249,7 +24863,77 @@
       </p:sp>
       <p:sp>
         <p:nvSpPr>
-          <p:cNvPr id="11" name="Rectangle 10"/>
+          <p:cNvPr id="11" name="logo-plate"/>
+          <p:cNvSpPr/>
+          <p:nvPr/>
+        </p:nvSpPr>
+        <p:spPr>
+          <a:xfrm>
+            <a:off x="9233806" y="539496"/>
+            <a:ext cx="2272088" cy="1106424"/>
+          </a:xfrm>
+          <a:prstGeom prst="roundRect">
+            <a:avLst>
+              <a:gd name="adj" fmla="val 14000"/>
+            </a:avLst>
+          </a:prstGeom>
+          <a:solidFill>
+            <a:srgbClr val="FFFFFF"/>
+          </a:solidFill>
+          <a:ln>
+            <a:noFill/>
+          </a:ln>
+          <a:effectLst/>
+        </p:spPr>
+        <p:style>
+          <a:lnRef idx="1">
+            <a:schemeClr val="accent1"/>
+          </a:lnRef>
+          <a:fillRef idx="3">
+            <a:schemeClr val="accent1"/>
+          </a:fillRef>
+          <a:effectRef idx="2">
+            <a:schemeClr val="accent1"/>
+          </a:effectRef>
+          <a:fontRef idx="minor">
+            <a:schemeClr val="lt1"/>
+          </a:fontRef>
+        </p:style>
+        <p:txBody>
+          <a:bodyPr rtlCol="0" anchor="ctr" wrap="square"/>
+          <a:lstStyle/>
+          <a:p>
+            <a:pPr algn="ctr"/>
+          </a:p>
+        </p:txBody>
+      </p:sp>
+      <p:pic>
+        <p:nvPicPr>
+          <p:cNvPr id="12" name="college-logo" descr="logo-full.png"/>
+          <p:cNvPicPr>
+            <a:picLocks noChangeAspect="1"/>
+          </p:cNvPicPr>
+          <p:nvPr/>
+        </p:nvPicPr>
+        <p:blipFill>
+          <a:blip r:embed="rId2"/>
+          <a:stretch>
+            <a:fillRect/>
+          </a:stretch>
+        </p:blipFill>
+        <p:spPr>
+          <a:xfrm>
+            <a:off x="9352678" y="658368"/>
+            <a:ext cx="2034345" cy="868680"/>
+          </a:xfrm>
+          <a:prstGeom prst="rect">
+            <a:avLst/>
+          </a:prstGeom>
+        </p:spPr>
+      </p:pic>
+      <p:sp>
+        <p:nvSpPr>
+          <p:cNvPr id="13" name="Rectangle 12"/>
           <p:cNvSpPr/>
           <p:nvPr/>
         </p:nvSpPr>
@@ -24293,7 +24977,7 @@
       </p:sp>
       <p:sp>
         <p:nvSpPr>
-          <p:cNvPr id="12" name="TextBox 11"/>
+          <p:cNvPr id="14" name="TextBox 13"/>
           <p:cNvSpPr txBox="1"/>
           <p:nvPr/>
         </p:nvSpPr>
@@ -24820,6 +25504,76 @@
           </a:p>
         </p:txBody>
       </p:sp>
+      <p:sp>
+        <p:nvSpPr>
+          <p:cNvPr id="11" name="logo-plate"/>
+          <p:cNvSpPr/>
+          <p:nvPr/>
+        </p:nvSpPr>
+        <p:spPr>
+          <a:xfrm>
+            <a:off x="9512190" y="539496"/>
+            <a:ext cx="1993704" cy="987552"/>
+          </a:xfrm>
+          <a:prstGeom prst="roundRect">
+            <a:avLst>
+              <a:gd name="adj" fmla="val 14000"/>
+            </a:avLst>
+          </a:prstGeom>
+          <a:solidFill>
+            <a:srgbClr val="FFFFFF"/>
+          </a:solidFill>
+          <a:ln>
+            <a:noFill/>
+          </a:ln>
+          <a:effectLst/>
+        </p:spPr>
+        <p:style>
+          <a:lnRef idx="1">
+            <a:schemeClr val="accent1"/>
+          </a:lnRef>
+          <a:fillRef idx="3">
+            <a:schemeClr val="accent1"/>
+          </a:fillRef>
+          <a:effectRef idx="2">
+            <a:schemeClr val="accent1"/>
+          </a:effectRef>
+          <a:fontRef idx="minor">
+            <a:schemeClr val="lt1"/>
+          </a:fontRef>
+        </p:style>
+        <p:txBody>
+          <a:bodyPr rtlCol="0" anchor="ctr" wrap="square"/>
+          <a:lstStyle/>
+          <a:p>
+            <a:pPr algn="ctr"/>
+          </a:p>
+        </p:txBody>
+      </p:sp>
+      <p:pic>
+        <p:nvPicPr>
+          <p:cNvPr id="12" name="college-logo" descr="logo-full.png"/>
+          <p:cNvPicPr>
+            <a:picLocks noChangeAspect="1"/>
+          </p:cNvPicPr>
+          <p:nvPr/>
+        </p:nvPicPr>
+        <p:blipFill>
+          <a:blip r:embed="rId2"/>
+          <a:stretch>
+            <a:fillRect/>
+          </a:stretch>
+        </p:blipFill>
+        <p:spPr>
+          <a:xfrm>
+            <a:off x="9631062" y="658368"/>
+            <a:ext cx="1755961" cy="749808"/>
+          </a:xfrm>
+          <a:prstGeom prst="rect">
+            <a:avLst/>
+          </a:prstGeom>
+        </p:spPr>
+      </p:pic>
     </p:spTree>
   </p:cSld>
   <p:clrMapOvr>
@@ -24882,9 +25636,33 @@
           </a:p>
         </p:txBody>
       </p:sp>
-      <p:sp>
-        <p:nvSpPr>
-          <p:cNvPr id="3" name="TextBox 2"/>
+      <p:pic>
+        <p:nvPicPr>
+          <p:cNvPr id="3" name="college-logo" descr="logo-mark.png"/>
+          <p:cNvPicPr>
+            <a:picLocks noChangeAspect="1"/>
+          </p:cNvPicPr>
+          <p:nvPr/>
+        </p:nvPicPr>
+        <p:blipFill>
+          <a:blip r:embed="rId2"/>
+          <a:stretch>
+            <a:fillRect/>
+          </a:stretch>
+        </p:blipFill>
+        <p:spPr>
+          <a:xfrm>
+            <a:off x="11203333" y="6199632"/>
+            <a:ext cx="275129" cy="310896"/>
+          </a:xfrm>
+          <a:prstGeom prst="rect">
+            <a:avLst/>
+          </a:prstGeom>
+        </p:spPr>
+      </p:pic>
+      <p:sp>
+        <p:nvSpPr>
+          <p:cNvPr id="4" name="TextBox 3"/>
           <p:cNvSpPr txBox="1"/>
           <p:nvPr/>
         </p:nvSpPr>
@@ -24953,13 +25731,13 @@
       </p:sp>
       <p:sp>
         <p:nvSpPr>
-          <p:cNvPr id="4" name="TextBox 3"/>
+          <p:cNvPr id="5" name="TextBox 4"/>
           <p:cNvSpPr txBox="1"/>
           <p:nvPr/>
         </p:nvSpPr>
         <p:spPr>
           <a:xfrm>
-            <a:off x="8826703" y="6272784"/>
+            <a:off x="8240677" y="6272784"/>
             <a:ext cx="2651760" cy="219456"/>
           </a:xfrm>
           <a:prstGeom prst="rect">
@@ -25022,7 +25800,7 @@
       </p:sp>
       <p:sp>
         <p:nvSpPr>
-          <p:cNvPr id="5" name="TextBox 4"/>
+          <p:cNvPr id="6" name="TextBox 5"/>
           <p:cNvSpPr txBox="1"/>
           <p:nvPr/>
         </p:nvSpPr>
@@ -25069,7 +25847,7 @@
       </p:sp>
       <p:sp>
         <p:nvSpPr>
-          <p:cNvPr id="6" name="TextBox 5"/>
+          <p:cNvPr id="7" name="TextBox 6"/>
           <p:cNvSpPr txBox="1"/>
           <p:nvPr/>
         </p:nvSpPr>
@@ -25116,7 +25894,7 @@
       </p:sp>
       <p:sp>
         <p:nvSpPr>
-          <p:cNvPr id="7" name="Rectangle 6"/>
+          <p:cNvPr id="8" name="Rectangle 7"/>
           <p:cNvSpPr/>
           <p:nvPr/>
         </p:nvSpPr>
@@ -25160,7 +25938,7 @@
       </p:sp>
       <p:sp>
         <p:nvSpPr>
-          <p:cNvPr id="8" name="TextBox 7"/>
+          <p:cNvPr id="9" name="TextBox 8"/>
           <p:cNvSpPr txBox="1"/>
           <p:nvPr/>
         </p:nvSpPr>
@@ -25207,7 +25985,7 @@
       </p:sp>
       <p:sp>
         <p:nvSpPr>
-          <p:cNvPr id="9" name="Rounded Rectangle 8"/>
+          <p:cNvPr id="10" name="Rounded Rectangle 9"/>
           <p:cNvSpPr/>
           <p:nvPr/>
         </p:nvSpPr>
@@ -25253,7 +26031,7 @@
       </p:sp>
       <p:sp>
         <p:nvSpPr>
-          <p:cNvPr id="10" name="Rectangle 9"/>
+          <p:cNvPr id="11" name="Rectangle 10"/>
           <p:cNvSpPr/>
           <p:nvPr/>
         </p:nvSpPr>
@@ -25297,7 +26075,7 @@
       </p:sp>
       <p:sp>
         <p:nvSpPr>
-          <p:cNvPr id="11" name="TextBox 10"/>
+          <p:cNvPr id="12" name="TextBox 11"/>
           <p:cNvSpPr txBox="1"/>
           <p:nvPr/>
         </p:nvSpPr>
@@ -25344,7 +26122,7 @@
       </p:sp>
       <p:sp>
         <p:nvSpPr>
-          <p:cNvPr id="12" name="TextBox 11"/>
+          <p:cNvPr id="13" name="TextBox 12"/>
           <p:cNvSpPr txBox="1"/>
           <p:nvPr/>
         </p:nvSpPr>
@@ -25391,7 +26169,7 @@
       </p:sp>
       <p:sp>
         <p:nvSpPr>
-          <p:cNvPr id="13" name="Rounded Rectangle 12"/>
+          <p:cNvPr id="14" name="Rounded Rectangle 13"/>
           <p:cNvSpPr/>
           <p:nvPr/>
         </p:nvSpPr>
@@ -25437,7 +26215,7 @@
       </p:sp>
       <p:sp>
         <p:nvSpPr>
-          <p:cNvPr id="14" name="Rectangle 13"/>
+          <p:cNvPr id="15" name="Rectangle 14"/>
           <p:cNvSpPr/>
           <p:nvPr/>
         </p:nvSpPr>
@@ -25481,7 +26259,7 @@
       </p:sp>
       <p:sp>
         <p:nvSpPr>
-          <p:cNvPr id="15" name="TextBox 14"/>
+          <p:cNvPr id="16" name="TextBox 15"/>
           <p:cNvSpPr txBox="1"/>
           <p:nvPr/>
         </p:nvSpPr>
@@ -25528,7 +26306,7 @@
       </p:sp>
       <p:sp>
         <p:nvSpPr>
-          <p:cNvPr id="16" name="TextBox 15"/>
+          <p:cNvPr id="17" name="TextBox 16"/>
           <p:cNvSpPr txBox="1"/>
           <p:nvPr/>
         </p:nvSpPr>
@@ -25575,7 +26353,7 @@
       </p:sp>
       <p:sp>
         <p:nvSpPr>
-          <p:cNvPr id="17" name="Rounded Rectangle 16"/>
+          <p:cNvPr id="18" name="Rounded Rectangle 17"/>
           <p:cNvSpPr/>
           <p:nvPr/>
         </p:nvSpPr>
@@ -25621,7 +26399,7 @@
       </p:sp>
       <p:sp>
         <p:nvSpPr>
-          <p:cNvPr id="18" name="Rectangle 17"/>
+          <p:cNvPr id="19" name="Rectangle 18"/>
           <p:cNvSpPr/>
           <p:nvPr/>
         </p:nvSpPr>
@@ -25665,7 +26443,7 @@
       </p:sp>
       <p:sp>
         <p:nvSpPr>
-          <p:cNvPr id="19" name="TextBox 18"/>
+          <p:cNvPr id="20" name="TextBox 19"/>
           <p:cNvSpPr txBox="1"/>
           <p:nvPr/>
         </p:nvSpPr>
@@ -25712,7 +26490,7 @@
       </p:sp>
       <p:sp>
         <p:nvSpPr>
-          <p:cNvPr id="20" name="TextBox 19"/>
+          <p:cNvPr id="21" name="TextBox 20"/>
           <p:cNvSpPr txBox="1"/>
           <p:nvPr/>
         </p:nvSpPr>
@@ -25759,7 +26537,7 @@
       </p:sp>
       <p:sp>
         <p:nvSpPr>
-          <p:cNvPr id="21" name="Rounded Rectangle 20"/>
+          <p:cNvPr id="22" name="Rounded Rectangle 21"/>
           <p:cNvSpPr/>
           <p:nvPr/>
         </p:nvSpPr>
@@ -25805,7 +26583,7 @@
       </p:sp>
       <p:sp>
         <p:nvSpPr>
-          <p:cNvPr id="22" name="Rectangle 21"/>
+          <p:cNvPr id="23" name="Rectangle 22"/>
           <p:cNvSpPr/>
           <p:nvPr/>
         </p:nvSpPr>
@@ -25849,7 +26627,7 @@
       </p:sp>
       <p:sp>
         <p:nvSpPr>
-          <p:cNvPr id="23" name="TextBox 22"/>
+          <p:cNvPr id="24" name="TextBox 23"/>
           <p:cNvSpPr txBox="1"/>
           <p:nvPr/>
         </p:nvSpPr>
@@ -25896,7 +26674,7 @@
       </p:sp>
       <p:sp>
         <p:nvSpPr>
-          <p:cNvPr id="24" name="TextBox 23"/>
+          <p:cNvPr id="25" name="TextBox 24"/>
           <p:cNvSpPr txBox="1"/>
           <p:nvPr/>
         </p:nvSpPr>
@@ -26379,6 +27157,76 @@
           </a:p>
         </p:txBody>
       </p:sp>
+      <p:sp>
+        <p:nvSpPr>
+          <p:cNvPr id="11" name="logo-plate"/>
+          <p:cNvSpPr/>
+          <p:nvPr/>
+        </p:nvSpPr>
+        <p:spPr>
+          <a:xfrm>
+            <a:off x="9512190" y="539496"/>
+            <a:ext cx="1993704" cy="987552"/>
+          </a:xfrm>
+          <a:prstGeom prst="roundRect">
+            <a:avLst>
+              <a:gd name="adj" fmla="val 14000"/>
+            </a:avLst>
+          </a:prstGeom>
+          <a:solidFill>
+            <a:srgbClr val="FFFFFF"/>
+          </a:solidFill>
+          <a:ln>
+            <a:noFill/>
+          </a:ln>
+          <a:effectLst/>
+        </p:spPr>
+        <p:style>
+          <a:lnRef idx="1">
+            <a:schemeClr val="accent1"/>
+          </a:lnRef>
+          <a:fillRef idx="3">
+            <a:schemeClr val="accent1"/>
+          </a:fillRef>
+          <a:effectRef idx="2">
+            <a:schemeClr val="accent1"/>
+          </a:effectRef>
+          <a:fontRef idx="minor">
+            <a:schemeClr val="lt1"/>
+          </a:fontRef>
+        </p:style>
+        <p:txBody>
+          <a:bodyPr rtlCol="0" anchor="ctr" wrap="square"/>
+          <a:lstStyle/>
+          <a:p>
+            <a:pPr algn="ctr"/>
+          </a:p>
+        </p:txBody>
+      </p:sp>
+      <p:pic>
+        <p:nvPicPr>
+          <p:cNvPr id="12" name="college-logo" descr="logo-full.png"/>
+          <p:cNvPicPr>
+            <a:picLocks noChangeAspect="1"/>
+          </p:cNvPicPr>
+          <p:nvPr/>
+        </p:nvPicPr>
+        <p:blipFill>
+          <a:blip r:embed="rId2"/>
+          <a:stretch>
+            <a:fillRect/>
+          </a:stretch>
+        </p:blipFill>
+        <p:spPr>
+          <a:xfrm>
+            <a:off x="9631062" y="658368"/>
+            <a:ext cx="1755961" cy="749808"/>
+          </a:xfrm>
+          <a:prstGeom prst="rect">
+            <a:avLst/>
+          </a:prstGeom>
+        </p:spPr>
+      </p:pic>
     </p:spTree>
   </p:cSld>
   <p:clrMapOvr>
@@ -26441,9 +27289,33 @@
           </a:p>
         </p:txBody>
       </p:sp>
-      <p:sp>
-        <p:nvSpPr>
-          <p:cNvPr id="3" name="TextBox 2"/>
+      <p:pic>
+        <p:nvPicPr>
+          <p:cNvPr id="3" name="college-logo" descr="logo-mark.png"/>
+          <p:cNvPicPr>
+            <a:picLocks noChangeAspect="1"/>
+          </p:cNvPicPr>
+          <p:nvPr/>
+        </p:nvPicPr>
+        <p:blipFill>
+          <a:blip r:embed="rId2"/>
+          <a:stretch>
+            <a:fillRect/>
+          </a:stretch>
+        </p:blipFill>
+        <p:spPr>
+          <a:xfrm>
+            <a:off x="11203333" y="6199632"/>
+            <a:ext cx="275129" cy="310896"/>
+          </a:xfrm>
+          <a:prstGeom prst="rect">
+            <a:avLst/>
+          </a:prstGeom>
+        </p:spPr>
+      </p:pic>
+      <p:sp>
+        <p:nvSpPr>
+          <p:cNvPr id="4" name="TextBox 3"/>
           <p:cNvSpPr txBox="1"/>
           <p:nvPr/>
         </p:nvSpPr>
@@ -26512,13 +27384,13 @@
       </p:sp>
       <p:sp>
         <p:nvSpPr>
-          <p:cNvPr id="4" name="TextBox 3"/>
+          <p:cNvPr id="5" name="TextBox 4"/>
           <p:cNvSpPr txBox="1"/>
           <p:nvPr/>
         </p:nvSpPr>
         <p:spPr>
           <a:xfrm>
-            <a:off x="8826703" y="6272784"/>
+            <a:off x="8240677" y="6272784"/>
             <a:ext cx="2651760" cy="219456"/>
           </a:xfrm>
           <a:prstGeom prst="rect">
@@ -26581,7 +27453,7 @@
       </p:sp>
       <p:sp>
         <p:nvSpPr>
-          <p:cNvPr id="5" name="TextBox 4"/>
+          <p:cNvPr id="6" name="TextBox 5"/>
           <p:cNvSpPr txBox="1"/>
           <p:nvPr/>
         </p:nvSpPr>
@@ -26628,7 +27500,7 @@
       </p:sp>
       <p:sp>
         <p:nvSpPr>
-          <p:cNvPr id="6" name="TextBox 5"/>
+          <p:cNvPr id="7" name="TextBox 6"/>
           <p:cNvSpPr txBox="1"/>
           <p:nvPr/>
         </p:nvSpPr>
@@ -26675,7 +27547,7 @@
       </p:sp>
       <p:sp>
         <p:nvSpPr>
-          <p:cNvPr id="7" name="Rectangle 6"/>
+          <p:cNvPr id="8" name="Rectangle 7"/>
           <p:cNvSpPr/>
           <p:nvPr/>
         </p:nvSpPr>
@@ -26719,7 +27591,7 @@
       </p:sp>
       <p:sp>
         <p:nvSpPr>
-          <p:cNvPr id="8" name="TextBox 7"/>
+          <p:cNvPr id="9" name="TextBox 8"/>
           <p:cNvSpPr txBox="1"/>
           <p:nvPr/>
         </p:nvSpPr>
@@ -26766,7 +27638,7 @@
       </p:sp>
       <p:sp>
         <p:nvSpPr>
-          <p:cNvPr id="9" name="Rounded Rectangle 8"/>
+          <p:cNvPr id="10" name="Rounded Rectangle 9"/>
           <p:cNvSpPr/>
           <p:nvPr/>
         </p:nvSpPr>
@@ -26820,7 +27692,7 @@
       </p:sp>
       <p:sp>
         <p:nvSpPr>
-          <p:cNvPr id="10" name="Rectangle 9"/>
+          <p:cNvPr id="11" name="Rectangle 10"/>
           <p:cNvSpPr/>
           <p:nvPr/>
         </p:nvSpPr>
@@ -26864,7 +27736,7 @@
       </p:sp>
       <p:sp>
         <p:nvSpPr>
-          <p:cNvPr id="11" name="TextBox 10"/>
+          <p:cNvPr id="12" name="TextBox 11"/>
           <p:cNvSpPr txBox="1"/>
           <p:nvPr/>
         </p:nvSpPr>
@@ -26911,7 +27783,7 @@
       </p:sp>
       <p:sp>
         <p:nvSpPr>
-          <p:cNvPr id="12" name="TextBox 11"/>
+          <p:cNvPr id="13" name="TextBox 12"/>
           <p:cNvSpPr txBox="1"/>
           <p:nvPr/>
         </p:nvSpPr>
@@ -26958,7 +27830,7 @@
       </p:sp>
       <p:sp>
         <p:nvSpPr>
-          <p:cNvPr id="13" name="Rounded Rectangle 12"/>
+          <p:cNvPr id="14" name="Rounded Rectangle 13"/>
           <p:cNvSpPr/>
           <p:nvPr/>
         </p:nvSpPr>
@@ -27012,7 +27884,7 @@
       </p:sp>
       <p:sp>
         <p:nvSpPr>
-          <p:cNvPr id="14" name="Rectangle 13"/>
+          <p:cNvPr id="15" name="Rectangle 14"/>
           <p:cNvSpPr/>
           <p:nvPr/>
         </p:nvSpPr>
@@ -27056,7 +27928,7 @@
       </p:sp>
       <p:sp>
         <p:nvSpPr>
-          <p:cNvPr id="15" name="TextBox 14"/>
+          <p:cNvPr id="16" name="TextBox 15"/>
           <p:cNvSpPr txBox="1"/>
           <p:nvPr/>
         </p:nvSpPr>
@@ -27103,7 +27975,7 @@
       </p:sp>
       <p:sp>
         <p:nvSpPr>
-          <p:cNvPr id="16" name="TextBox 15"/>
+          <p:cNvPr id="17" name="TextBox 16"/>
           <p:cNvSpPr txBox="1"/>
           <p:nvPr/>
         </p:nvSpPr>
@@ -27150,7 +28022,7 @@
       </p:sp>
       <p:sp>
         <p:nvSpPr>
-          <p:cNvPr id="17" name="Rounded Rectangle 16"/>
+          <p:cNvPr id="18" name="Rounded Rectangle 17"/>
           <p:cNvSpPr/>
           <p:nvPr/>
         </p:nvSpPr>
@@ -27204,7 +28076,7 @@
       </p:sp>
       <p:sp>
         <p:nvSpPr>
-          <p:cNvPr id="18" name="Rectangle 17"/>
+          <p:cNvPr id="19" name="Rectangle 18"/>
           <p:cNvSpPr/>
           <p:nvPr/>
         </p:nvSpPr>
@@ -27248,7 +28120,7 @@
       </p:sp>
       <p:sp>
         <p:nvSpPr>
-          <p:cNvPr id="19" name="TextBox 18"/>
+          <p:cNvPr id="20" name="TextBox 19"/>
           <p:cNvSpPr txBox="1"/>
           <p:nvPr/>
         </p:nvSpPr>
@@ -27295,7 +28167,7 @@
       </p:sp>
       <p:sp>
         <p:nvSpPr>
-          <p:cNvPr id="20" name="TextBox 19"/>
+          <p:cNvPr id="21" name="TextBox 20"/>
           <p:cNvSpPr txBox="1"/>
           <p:nvPr/>
         </p:nvSpPr>
@@ -27342,7 +28214,7 @@
       </p:sp>
       <p:sp>
         <p:nvSpPr>
-          <p:cNvPr id="21" name="Rounded Rectangle 20"/>
+          <p:cNvPr id="22" name="Rounded Rectangle 21"/>
           <p:cNvSpPr/>
           <p:nvPr/>
         </p:nvSpPr>
@@ -27396,7 +28268,7 @@
       </p:sp>
       <p:sp>
         <p:nvSpPr>
-          <p:cNvPr id="22" name="Rectangle 21"/>
+          <p:cNvPr id="23" name="Rectangle 22"/>
           <p:cNvSpPr/>
           <p:nvPr/>
         </p:nvSpPr>
@@ -27440,7 +28312,7 @@
       </p:sp>
       <p:sp>
         <p:nvSpPr>
-          <p:cNvPr id="23" name="TextBox 22"/>
+          <p:cNvPr id="24" name="TextBox 23"/>
           <p:cNvSpPr txBox="1"/>
           <p:nvPr/>
         </p:nvSpPr>
@@ -27487,7 +28359,7 @@
       </p:sp>
       <p:sp>
         <p:nvSpPr>
-          <p:cNvPr id="24" name="TextBox 23"/>
+          <p:cNvPr id="25" name="TextBox 24"/>
           <p:cNvSpPr txBox="1"/>
           <p:nvPr/>
         </p:nvSpPr>
@@ -27534,7 +28406,7 @@
       </p:sp>
       <p:sp>
         <p:nvSpPr>
-          <p:cNvPr id="25" name="Rounded Rectangle 24"/>
+          <p:cNvPr id="26" name="Rounded Rectangle 25"/>
           <p:cNvSpPr/>
           <p:nvPr/>
         </p:nvSpPr>
@@ -27588,7 +28460,7 @@
       </p:sp>
       <p:sp>
         <p:nvSpPr>
-          <p:cNvPr id="26" name="Rectangle 25"/>
+          <p:cNvPr id="27" name="Rectangle 26"/>
           <p:cNvSpPr/>
           <p:nvPr/>
         </p:nvSpPr>
@@ -27632,7 +28504,7 @@
       </p:sp>
       <p:sp>
         <p:nvSpPr>
-          <p:cNvPr id="27" name="TextBox 26"/>
+          <p:cNvPr id="28" name="TextBox 27"/>
           <p:cNvSpPr txBox="1"/>
           <p:nvPr/>
         </p:nvSpPr>
@@ -27679,7 +28551,7 @@
       </p:sp>
       <p:sp>
         <p:nvSpPr>
-          <p:cNvPr id="28" name="TextBox 27"/>
+          <p:cNvPr id="29" name="TextBox 28"/>
           <p:cNvSpPr txBox="1"/>
           <p:nvPr/>
         </p:nvSpPr>
@@ -27726,7 +28598,7 @@
       </p:sp>
       <p:sp>
         <p:nvSpPr>
-          <p:cNvPr id="29" name="Rounded Rectangle 28"/>
+          <p:cNvPr id="30" name="Rounded Rectangle 29"/>
           <p:cNvSpPr/>
           <p:nvPr/>
         </p:nvSpPr>
@@ -27780,7 +28652,7 @@
       </p:sp>
       <p:sp>
         <p:nvSpPr>
-          <p:cNvPr id="30" name="Rectangle 29"/>
+          <p:cNvPr id="31" name="Rectangle 30"/>
           <p:cNvSpPr/>
           <p:nvPr/>
         </p:nvSpPr>
@@ -27824,7 +28696,7 @@
       </p:sp>
       <p:sp>
         <p:nvSpPr>
-          <p:cNvPr id="31" name="TextBox 30"/>
+          <p:cNvPr id="32" name="TextBox 31"/>
           <p:cNvSpPr txBox="1"/>
           <p:nvPr/>
         </p:nvSpPr>
@@ -27871,7 +28743,7 @@
       </p:sp>
       <p:sp>
         <p:nvSpPr>
-          <p:cNvPr id="32" name="TextBox 31"/>
+          <p:cNvPr id="33" name="TextBox 32"/>
           <p:cNvSpPr txBox="1"/>
           <p:nvPr/>
         </p:nvSpPr>
@@ -27978,9 +28850,33 @@
           </a:p>
         </p:txBody>
       </p:sp>
-      <p:sp>
-        <p:nvSpPr>
-          <p:cNvPr id="3" name="TextBox 2"/>
+      <p:pic>
+        <p:nvPicPr>
+          <p:cNvPr id="3" name="college-logo" descr="logo-mark.png"/>
+          <p:cNvPicPr>
+            <a:picLocks noChangeAspect="1"/>
+          </p:cNvPicPr>
+          <p:nvPr/>
+        </p:nvPicPr>
+        <p:blipFill>
+          <a:blip r:embed="rId2"/>
+          <a:stretch>
+            <a:fillRect/>
+          </a:stretch>
+        </p:blipFill>
+        <p:spPr>
+          <a:xfrm>
+            <a:off x="11203333" y="6199632"/>
+            <a:ext cx="275129" cy="310896"/>
+          </a:xfrm>
+          <a:prstGeom prst="rect">
+            <a:avLst/>
+          </a:prstGeom>
+        </p:spPr>
+      </p:pic>
+      <p:sp>
+        <p:nvSpPr>
+          <p:cNvPr id="4" name="TextBox 3"/>
           <p:cNvSpPr txBox="1"/>
           <p:nvPr/>
         </p:nvSpPr>
@@ -28049,13 +28945,13 @@
       </p:sp>
       <p:sp>
         <p:nvSpPr>
-          <p:cNvPr id="4" name="TextBox 3"/>
+          <p:cNvPr id="5" name="TextBox 4"/>
           <p:cNvSpPr txBox="1"/>
           <p:nvPr/>
         </p:nvSpPr>
         <p:spPr>
           <a:xfrm>
-            <a:off x="8826703" y="6272784"/>
+            <a:off x="8240677" y="6272784"/>
             <a:ext cx="2651760" cy="219456"/>
           </a:xfrm>
           <a:prstGeom prst="rect">
@@ -28118,7 +29014,7 @@
       </p:sp>
       <p:sp>
         <p:nvSpPr>
-          <p:cNvPr id="5" name="TextBox 4"/>
+          <p:cNvPr id="6" name="TextBox 5"/>
           <p:cNvSpPr txBox="1"/>
           <p:nvPr/>
         </p:nvSpPr>
@@ -28165,7 +29061,7 @@
       </p:sp>
       <p:sp>
         <p:nvSpPr>
-          <p:cNvPr id="6" name="TextBox 5"/>
+          <p:cNvPr id="7" name="TextBox 6"/>
           <p:cNvSpPr txBox="1"/>
           <p:nvPr/>
         </p:nvSpPr>
@@ -28212,7 +29108,7 @@
       </p:sp>
       <p:sp>
         <p:nvSpPr>
-          <p:cNvPr id="7" name="Rectangle 6"/>
+          <p:cNvPr id="8" name="Rectangle 7"/>
           <p:cNvSpPr/>
           <p:nvPr/>
         </p:nvSpPr>
@@ -28256,7 +29152,7 @@
       </p:sp>
       <p:sp>
         <p:nvSpPr>
-          <p:cNvPr id="8" name="TextBox 7"/>
+          <p:cNvPr id="9" name="TextBox 8"/>
           <p:cNvSpPr txBox="1"/>
           <p:nvPr/>
         </p:nvSpPr>
@@ -28303,7 +29199,7 @@
       </p:sp>
       <p:sp>
         <p:nvSpPr>
-          <p:cNvPr id="9" name="Rounded Rectangle 8"/>
+          <p:cNvPr id="10" name="Rounded Rectangle 9"/>
           <p:cNvSpPr/>
           <p:nvPr/>
         </p:nvSpPr>
@@ -28370,7 +29266,7 @@
       </p:sp>
       <p:sp>
         <p:nvSpPr>
-          <p:cNvPr id="10" name="Rectangle 9"/>
+          <p:cNvPr id="11" name="Rectangle 10"/>
           <p:cNvSpPr/>
           <p:nvPr/>
         </p:nvSpPr>
@@ -28414,7 +29310,7 @@
       </p:sp>
       <p:sp>
         <p:nvSpPr>
-          <p:cNvPr id="11" name="Rounded Rectangle 10"/>
+          <p:cNvPr id="12" name="Rounded Rectangle 11"/>
           <p:cNvSpPr/>
           <p:nvPr/>
         </p:nvSpPr>
@@ -28460,7 +29356,7 @@
       </p:sp>
       <p:sp>
         <p:nvSpPr>
-          <p:cNvPr id="12" name="TextBox 11"/>
+          <p:cNvPr id="13" name="TextBox 12"/>
           <p:cNvSpPr txBox="1"/>
           <p:nvPr/>
         </p:nvSpPr>
@@ -28531,7 +29427,7 @@
       </p:sp>
       <p:sp>
         <p:nvSpPr>
-          <p:cNvPr id="13" name="Rounded Rectangle 12"/>
+          <p:cNvPr id="14" name="Rounded Rectangle 13"/>
           <p:cNvSpPr/>
           <p:nvPr/>
         </p:nvSpPr>
@@ -28577,7 +29473,7 @@
       </p:sp>
       <p:sp>
         <p:nvSpPr>
-          <p:cNvPr id="14" name="TextBox 13"/>
+          <p:cNvPr id="15" name="TextBox 14"/>
           <p:cNvSpPr txBox="1"/>
           <p:nvPr/>
         </p:nvSpPr>
@@ -28648,7 +29544,7 @@
       </p:sp>
       <p:sp>
         <p:nvSpPr>
-          <p:cNvPr id="15" name="Rounded Rectangle 14"/>
+          <p:cNvPr id="16" name="Rounded Rectangle 15"/>
           <p:cNvSpPr/>
           <p:nvPr/>
         </p:nvSpPr>
@@ -28694,7 +29590,7 @@
       </p:sp>
       <p:sp>
         <p:nvSpPr>
-          <p:cNvPr id="16" name="TextBox 15"/>
+          <p:cNvPr id="17" name="TextBox 16"/>
           <p:cNvSpPr txBox="1"/>
           <p:nvPr/>
         </p:nvSpPr>
@@ -28765,7 +29661,7 @@
       </p:sp>
       <p:sp>
         <p:nvSpPr>
-          <p:cNvPr id="17" name="Rounded Rectangle 16"/>
+          <p:cNvPr id="18" name="Rounded Rectangle 17"/>
           <p:cNvSpPr/>
           <p:nvPr/>
         </p:nvSpPr>
@@ -28811,7 +29707,7 @@
       </p:sp>
       <p:sp>
         <p:nvSpPr>
-          <p:cNvPr id="18" name="TextBox 17"/>
+          <p:cNvPr id="19" name="TextBox 18"/>
           <p:cNvSpPr txBox="1"/>
           <p:nvPr/>
         </p:nvSpPr>
@@ -28882,7 +29778,7 @@
       </p:sp>
       <p:sp>
         <p:nvSpPr>
-          <p:cNvPr id="19" name="Rounded Rectangle 18"/>
+          <p:cNvPr id="20" name="Rounded Rectangle 19"/>
           <p:cNvSpPr/>
           <p:nvPr/>
         </p:nvSpPr>
@@ -28928,7 +29824,7 @@
       </p:sp>
       <p:sp>
         <p:nvSpPr>
-          <p:cNvPr id="20" name="TextBox 19"/>
+          <p:cNvPr id="21" name="TextBox 20"/>
           <p:cNvSpPr txBox="1"/>
           <p:nvPr/>
         </p:nvSpPr>
@@ -28999,7 +29895,7 @@
       </p:sp>
       <p:sp>
         <p:nvSpPr>
-          <p:cNvPr id="21" name="Rounded Rectangle 20"/>
+          <p:cNvPr id="22" name="Rounded Rectangle 21"/>
           <p:cNvSpPr/>
           <p:nvPr/>
         </p:nvSpPr>
@@ -29045,7 +29941,7 @@
       </p:sp>
       <p:sp>
         <p:nvSpPr>
-          <p:cNvPr id="22" name="TextBox 21"/>
+          <p:cNvPr id="23" name="TextBox 22"/>
           <p:cNvSpPr txBox="1"/>
           <p:nvPr/>
         </p:nvSpPr>
@@ -29176,9 +30072,33 @@
           </a:p>
         </p:txBody>
       </p:sp>
-      <p:sp>
-        <p:nvSpPr>
-          <p:cNvPr id="3" name="TextBox 2"/>
+      <p:pic>
+        <p:nvPicPr>
+          <p:cNvPr id="3" name="college-logo" descr="logo-mark.png"/>
+          <p:cNvPicPr>
+            <a:picLocks noChangeAspect="1"/>
+          </p:cNvPicPr>
+          <p:nvPr/>
+        </p:nvPicPr>
+        <p:blipFill>
+          <a:blip r:embed="rId2"/>
+          <a:stretch>
+            <a:fillRect/>
+          </a:stretch>
+        </p:blipFill>
+        <p:spPr>
+          <a:xfrm>
+            <a:off x="11203333" y="6199632"/>
+            <a:ext cx="275129" cy="310896"/>
+          </a:xfrm>
+          <a:prstGeom prst="rect">
+            <a:avLst/>
+          </a:prstGeom>
+        </p:spPr>
+      </p:pic>
+      <p:sp>
+        <p:nvSpPr>
+          <p:cNvPr id="4" name="TextBox 3"/>
           <p:cNvSpPr txBox="1"/>
           <p:nvPr/>
         </p:nvSpPr>
@@ -29247,13 +30167,13 @@
       </p:sp>
       <p:sp>
         <p:nvSpPr>
-          <p:cNvPr id="4" name="TextBox 3"/>
+          <p:cNvPr id="5" name="TextBox 4"/>
           <p:cNvSpPr txBox="1"/>
           <p:nvPr/>
         </p:nvSpPr>
         <p:spPr>
           <a:xfrm>
-            <a:off x="8826703" y="6272784"/>
+            <a:off x="8240677" y="6272784"/>
             <a:ext cx="2651760" cy="219456"/>
           </a:xfrm>
           <a:prstGeom prst="rect">
@@ -29316,7 +30236,7 @@
       </p:sp>
       <p:sp>
         <p:nvSpPr>
-          <p:cNvPr id="5" name="TextBox 4"/>
+          <p:cNvPr id="6" name="TextBox 5"/>
           <p:cNvSpPr txBox="1"/>
           <p:nvPr/>
         </p:nvSpPr>
@@ -29363,7 +30283,7 @@
       </p:sp>
       <p:sp>
         <p:nvSpPr>
-          <p:cNvPr id="6" name="TextBox 5"/>
+          <p:cNvPr id="7" name="TextBox 6"/>
           <p:cNvSpPr txBox="1"/>
           <p:nvPr/>
         </p:nvSpPr>
@@ -29410,7 +30330,7 @@
       </p:sp>
       <p:sp>
         <p:nvSpPr>
-          <p:cNvPr id="7" name="Rectangle 6"/>
+          <p:cNvPr id="8" name="Rectangle 7"/>
           <p:cNvSpPr/>
           <p:nvPr/>
         </p:nvSpPr>
@@ -29454,7 +30374,7 @@
       </p:sp>
       <p:sp>
         <p:nvSpPr>
-          <p:cNvPr id="8" name="TextBox 7"/>
+          <p:cNvPr id="9" name="TextBox 8"/>
           <p:cNvSpPr txBox="1"/>
           <p:nvPr/>
         </p:nvSpPr>
@@ -29501,7 +30421,7 @@
       </p:sp>
       <p:sp>
         <p:nvSpPr>
-          <p:cNvPr id="9" name="Rounded Rectangle 8"/>
+          <p:cNvPr id="10" name="Rounded Rectangle 9"/>
           <p:cNvSpPr/>
           <p:nvPr/>
         </p:nvSpPr>
@@ -29555,7 +30475,7 @@
       </p:sp>
       <p:sp>
         <p:nvSpPr>
-          <p:cNvPr id="10" name="Rectangle 9"/>
+          <p:cNvPr id="11" name="Rectangle 10"/>
           <p:cNvSpPr/>
           <p:nvPr/>
         </p:nvSpPr>
@@ -29599,7 +30519,7 @@
       </p:sp>
       <p:sp>
         <p:nvSpPr>
-          <p:cNvPr id="11" name="TextBox 10"/>
+          <p:cNvPr id="12" name="TextBox 11"/>
           <p:cNvSpPr txBox="1"/>
           <p:nvPr/>
         </p:nvSpPr>
@@ -29646,7 +30566,7 @@
       </p:sp>
       <p:sp>
         <p:nvSpPr>
-          <p:cNvPr id="12" name="TextBox 11"/>
+          <p:cNvPr id="13" name="TextBox 12"/>
           <p:cNvSpPr txBox="1"/>
           <p:nvPr/>
         </p:nvSpPr>
@@ -29693,7 +30613,7 @@
       </p:sp>
       <p:sp>
         <p:nvSpPr>
-          <p:cNvPr id="13" name="Rounded Rectangle 12"/>
+          <p:cNvPr id="14" name="Rounded Rectangle 13"/>
           <p:cNvSpPr/>
           <p:nvPr/>
         </p:nvSpPr>
@@ -29747,7 +30667,7 @@
       </p:sp>
       <p:sp>
         <p:nvSpPr>
-          <p:cNvPr id="14" name="Rectangle 13"/>
+          <p:cNvPr id="15" name="Rectangle 14"/>
           <p:cNvSpPr/>
           <p:nvPr/>
         </p:nvSpPr>
@@ -29791,7 +30711,7 @@
       </p:sp>
       <p:sp>
         <p:nvSpPr>
-          <p:cNvPr id="15" name="TextBox 14"/>
+          <p:cNvPr id="16" name="TextBox 15"/>
           <p:cNvSpPr txBox="1"/>
           <p:nvPr/>
         </p:nvSpPr>
@@ -29838,7 +30758,7 @@
       </p:sp>
       <p:sp>
         <p:nvSpPr>
-          <p:cNvPr id="16" name="TextBox 15"/>
+          <p:cNvPr id="17" name="TextBox 16"/>
           <p:cNvSpPr txBox="1"/>
           <p:nvPr/>
         </p:nvSpPr>
@@ -29885,7 +30805,7 @@
       </p:sp>
       <p:sp>
         <p:nvSpPr>
-          <p:cNvPr id="17" name="Rounded Rectangle 16"/>
+          <p:cNvPr id="18" name="Rounded Rectangle 17"/>
           <p:cNvSpPr/>
           <p:nvPr/>
         </p:nvSpPr>
@@ -29939,7 +30859,7 @@
       </p:sp>
       <p:sp>
         <p:nvSpPr>
-          <p:cNvPr id="18" name="Rectangle 17"/>
+          <p:cNvPr id="19" name="Rectangle 18"/>
           <p:cNvSpPr/>
           <p:nvPr/>
         </p:nvSpPr>
@@ -29983,7 +30903,7 @@
       </p:sp>
       <p:sp>
         <p:nvSpPr>
-          <p:cNvPr id="19" name="TextBox 18"/>
+          <p:cNvPr id="20" name="TextBox 19"/>
           <p:cNvSpPr txBox="1"/>
           <p:nvPr/>
         </p:nvSpPr>
@@ -30030,7 +30950,7 @@
       </p:sp>
       <p:sp>
         <p:nvSpPr>
-          <p:cNvPr id="20" name="TextBox 19"/>
+          <p:cNvPr id="21" name="TextBox 20"/>
           <p:cNvSpPr txBox="1"/>
           <p:nvPr/>
         </p:nvSpPr>
@@ -30077,7 +30997,7 @@
       </p:sp>
       <p:sp>
         <p:nvSpPr>
-          <p:cNvPr id="21" name="Rounded Rectangle 20"/>
+          <p:cNvPr id="22" name="Rounded Rectangle 21"/>
           <p:cNvSpPr/>
           <p:nvPr/>
         </p:nvSpPr>
@@ -30131,7 +31051,7 @@
       </p:sp>
       <p:sp>
         <p:nvSpPr>
-          <p:cNvPr id="22" name="Rectangle 21"/>
+          <p:cNvPr id="23" name="Rectangle 22"/>
           <p:cNvSpPr/>
           <p:nvPr/>
         </p:nvSpPr>
@@ -30175,7 +31095,7 @@
       </p:sp>
       <p:sp>
         <p:nvSpPr>
-          <p:cNvPr id="23" name="TextBox 22"/>
+          <p:cNvPr id="24" name="TextBox 23"/>
           <p:cNvSpPr txBox="1"/>
           <p:nvPr/>
         </p:nvSpPr>
@@ -30222,7 +31142,7 @@
       </p:sp>
       <p:sp>
         <p:nvSpPr>
-          <p:cNvPr id="24" name="TextBox 23"/>
+          <p:cNvPr id="25" name="TextBox 24"/>
           <p:cNvSpPr txBox="1"/>
           <p:nvPr/>
         </p:nvSpPr>
@@ -30269,7 +31189,7 @@
       </p:sp>
       <p:sp>
         <p:nvSpPr>
-          <p:cNvPr id="25" name="Rounded Rectangle 24"/>
+          <p:cNvPr id="26" name="Rounded Rectangle 25"/>
           <p:cNvSpPr/>
           <p:nvPr/>
         </p:nvSpPr>
@@ -30323,7 +31243,7 @@
       </p:sp>
       <p:sp>
         <p:nvSpPr>
-          <p:cNvPr id="26" name="Rectangle 25"/>
+          <p:cNvPr id="27" name="Rectangle 26"/>
           <p:cNvSpPr/>
           <p:nvPr/>
         </p:nvSpPr>
@@ -30367,7 +31287,7 @@
       </p:sp>
       <p:sp>
         <p:nvSpPr>
-          <p:cNvPr id="27" name="TextBox 26"/>
+          <p:cNvPr id="28" name="TextBox 27"/>
           <p:cNvSpPr txBox="1"/>
           <p:nvPr/>
         </p:nvSpPr>
@@ -30414,7 +31334,7 @@
       </p:sp>
       <p:sp>
         <p:nvSpPr>
-          <p:cNvPr id="28" name="TextBox 27"/>
+          <p:cNvPr id="29" name="TextBox 28"/>
           <p:cNvSpPr txBox="1"/>
           <p:nvPr/>
         </p:nvSpPr>
@@ -30461,7 +31381,7 @@
       </p:sp>
       <p:sp>
         <p:nvSpPr>
-          <p:cNvPr id="29" name="Rounded Rectangle 28"/>
+          <p:cNvPr id="30" name="Rounded Rectangle 29"/>
           <p:cNvSpPr/>
           <p:nvPr/>
         </p:nvSpPr>
@@ -30515,7 +31435,7 @@
       </p:sp>
       <p:sp>
         <p:nvSpPr>
-          <p:cNvPr id="30" name="Rectangle 29"/>
+          <p:cNvPr id="31" name="Rectangle 30"/>
           <p:cNvSpPr/>
           <p:nvPr/>
         </p:nvSpPr>
@@ -30559,7 +31479,7 @@
       </p:sp>
       <p:sp>
         <p:nvSpPr>
-          <p:cNvPr id="31" name="TextBox 30"/>
+          <p:cNvPr id="32" name="TextBox 31"/>
           <p:cNvSpPr txBox="1"/>
           <p:nvPr/>
         </p:nvSpPr>
@@ -30606,7 +31526,7 @@
       </p:sp>
       <p:sp>
         <p:nvSpPr>
-          <p:cNvPr id="32" name="TextBox 31"/>
+          <p:cNvPr id="33" name="TextBox 32"/>
           <p:cNvSpPr txBox="1"/>
           <p:nvPr/>
         </p:nvSpPr>
@@ -30713,9 +31633,33 @@
           </a:p>
         </p:txBody>
       </p:sp>
-      <p:sp>
-        <p:nvSpPr>
-          <p:cNvPr id="3" name="TextBox 2"/>
+      <p:pic>
+        <p:nvPicPr>
+          <p:cNvPr id="3" name="college-logo" descr="logo-mark.png"/>
+          <p:cNvPicPr>
+            <a:picLocks noChangeAspect="1"/>
+          </p:cNvPicPr>
+          <p:nvPr/>
+        </p:nvPicPr>
+        <p:blipFill>
+          <a:blip r:embed="rId2"/>
+          <a:stretch>
+            <a:fillRect/>
+          </a:stretch>
+        </p:blipFill>
+        <p:spPr>
+          <a:xfrm>
+            <a:off x="11203333" y="6199632"/>
+            <a:ext cx="275129" cy="310896"/>
+          </a:xfrm>
+          <a:prstGeom prst="rect">
+            <a:avLst/>
+          </a:prstGeom>
+        </p:spPr>
+      </p:pic>
+      <p:sp>
+        <p:nvSpPr>
+          <p:cNvPr id="4" name="TextBox 3"/>
           <p:cNvSpPr txBox="1"/>
           <p:nvPr/>
         </p:nvSpPr>
@@ -30784,13 +31728,13 @@
       </p:sp>
       <p:sp>
         <p:nvSpPr>
-          <p:cNvPr id="4" name="TextBox 3"/>
+          <p:cNvPr id="5" name="TextBox 4"/>
           <p:cNvSpPr txBox="1"/>
           <p:nvPr/>
         </p:nvSpPr>
         <p:spPr>
           <a:xfrm>
-            <a:off x="8826703" y="6272784"/>
+            <a:off x="8240677" y="6272784"/>
             <a:ext cx="2651760" cy="219456"/>
           </a:xfrm>
           <a:prstGeom prst="rect">
@@ -30853,7 +31797,7 @@
       </p:sp>
       <p:sp>
         <p:nvSpPr>
-          <p:cNvPr id="5" name="TextBox 4"/>
+          <p:cNvPr id="6" name="TextBox 5"/>
           <p:cNvSpPr txBox="1"/>
           <p:nvPr/>
         </p:nvSpPr>
@@ -30900,7 +31844,7 @@
       </p:sp>
       <p:sp>
         <p:nvSpPr>
-          <p:cNvPr id="6" name="TextBox 5"/>
+          <p:cNvPr id="7" name="TextBox 6"/>
           <p:cNvSpPr txBox="1"/>
           <p:nvPr/>
         </p:nvSpPr>
@@ -30947,7 +31891,7 @@
       </p:sp>
       <p:sp>
         <p:nvSpPr>
-          <p:cNvPr id="7" name="Rectangle 6"/>
+          <p:cNvPr id="8" name="Rectangle 7"/>
           <p:cNvSpPr/>
           <p:nvPr/>
         </p:nvSpPr>
@@ -30991,7 +31935,7 @@
       </p:sp>
       <p:sp>
         <p:nvSpPr>
-          <p:cNvPr id="8" name="Rectangle 7"/>
+          <p:cNvPr id="9" name="Rectangle 8"/>
           <p:cNvSpPr/>
           <p:nvPr/>
         </p:nvSpPr>
@@ -31035,7 +31979,7 @@
       </p:sp>
       <p:sp>
         <p:nvSpPr>
-          <p:cNvPr id="9" name="Oval 8"/>
+          <p:cNvPr id="10" name="Oval 9"/>
           <p:cNvSpPr/>
           <p:nvPr/>
         </p:nvSpPr>
@@ -31079,7 +32023,7 @@
       </p:sp>
       <p:sp>
         <p:nvSpPr>
-          <p:cNvPr id="10" name="TextBox 9"/>
+          <p:cNvPr id="11" name="TextBox 10"/>
           <p:cNvSpPr txBox="1"/>
           <p:nvPr/>
         </p:nvSpPr>
@@ -31126,7 +32070,7 @@
       </p:sp>
       <p:sp>
         <p:nvSpPr>
-          <p:cNvPr id="11" name="Rounded Rectangle 10"/>
+          <p:cNvPr id="12" name="Rounded Rectangle 11"/>
           <p:cNvSpPr/>
           <p:nvPr/>
         </p:nvSpPr>
@@ -31174,7 +32118,7 @@
       </p:sp>
       <p:sp>
         <p:nvSpPr>
-          <p:cNvPr id="12" name="TextBox 11"/>
+          <p:cNvPr id="13" name="TextBox 12"/>
           <p:cNvSpPr txBox="1"/>
           <p:nvPr/>
         </p:nvSpPr>
@@ -31221,7 +32165,7 @@
       </p:sp>
       <p:sp>
         <p:nvSpPr>
-          <p:cNvPr id="13" name="TextBox 12"/>
+          <p:cNvPr id="14" name="TextBox 13"/>
           <p:cNvSpPr txBox="1"/>
           <p:nvPr/>
         </p:nvSpPr>
@@ -31268,7 +32212,7 @@
       </p:sp>
       <p:sp>
         <p:nvSpPr>
-          <p:cNvPr id="14" name="Oval 13"/>
+          <p:cNvPr id="15" name="Oval 14"/>
           <p:cNvSpPr/>
           <p:nvPr/>
         </p:nvSpPr>
@@ -31312,7 +32256,7 @@
       </p:sp>
       <p:sp>
         <p:nvSpPr>
-          <p:cNvPr id="15" name="TextBox 14"/>
+          <p:cNvPr id="16" name="TextBox 15"/>
           <p:cNvSpPr txBox="1"/>
           <p:nvPr/>
         </p:nvSpPr>
@@ -31359,7 +32303,7 @@
       </p:sp>
       <p:sp>
         <p:nvSpPr>
-          <p:cNvPr id="16" name="Rounded Rectangle 15"/>
+          <p:cNvPr id="17" name="Rounded Rectangle 16"/>
           <p:cNvSpPr/>
           <p:nvPr/>
         </p:nvSpPr>
@@ -31407,7 +32351,7 @@
       </p:sp>
       <p:sp>
         <p:nvSpPr>
-          <p:cNvPr id="17" name="TextBox 16"/>
+          <p:cNvPr id="18" name="TextBox 17"/>
           <p:cNvSpPr txBox="1"/>
           <p:nvPr/>
         </p:nvSpPr>
@@ -31454,7 +32398,7 @@
       </p:sp>
       <p:sp>
         <p:nvSpPr>
-          <p:cNvPr id="18" name="TextBox 17"/>
+          <p:cNvPr id="19" name="TextBox 18"/>
           <p:cNvSpPr txBox="1"/>
           <p:nvPr/>
         </p:nvSpPr>
@@ -31501,7 +32445,7 @@
       </p:sp>
       <p:sp>
         <p:nvSpPr>
-          <p:cNvPr id="19" name="Oval 18"/>
+          <p:cNvPr id="20" name="Oval 19"/>
           <p:cNvSpPr/>
           <p:nvPr/>
         </p:nvSpPr>
@@ -31545,7 +32489,7 @@
       </p:sp>
       <p:sp>
         <p:nvSpPr>
-          <p:cNvPr id="20" name="TextBox 19"/>
+          <p:cNvPr id="21" name="TextBox 20"/>
           <p:cNvSpPr txBox="1"/>
           <p:nvPr/>
         </p:nvSpPr>
@@ -31592,7 +32536,7 @@
       </p:sp>
       <p:sp>
         <p:nvSpPr>
-          <p:cNvPr id="21" name="Rounded Rectangle 20"/>
+          <p:cNvPr id="22" name="Rounded Rectangle 21"/>
           <p:cNvSpPr/>
           <p:nvPr/>
         </p:nvSpPr>
@@ -31640,7 +32584,7 @@
       </p:sp>
       <p:sp>
         <p:nvSpPr>
-          <p:cNvPr id="22" name="TextBox 21"/>
+          <p:cNvPr id="23" name="TextBox 22"/>
           <p:cNvSpPr txBox="1"/>
           <p:nvPr/>
         </p:nvSpPr>
@@ -31687,7 +32631,7 @@
       </p:sp>
       <p:sp>
         <p:nvSpPr>
-          <p:cNvPr id="23" name="TextBox 22"/>
+          <p:cNvPr id="24" name="TextBox 23"/>
           <p:cNvSpPr txBox="1"/>
           <p:nvPr/>
         </p:nvSpPr>
@@ -31734,7 +32678,7 @@
       </p:sp>
       <p:sp>
         <p:nvSpPr>
-          <p:cNvPr id="24" name="Oval 23"/>
+          <p:cNvPr id="25" name="Oval 24"/>
           <p:cNvSpPr/>
           <p:nvPr/>
         </p:nvSpPr>
@@ -31778,7 +32722,7 @@
       </p:sp>
       <p:sp>
         <p:nvSpPr>
-          <p:cNvPr id="25" name="TextBox 24"/>
+          <p:cNvPr id="26" name="TextBox 25"/>
           <p:cNvSpPr txBox="1"/>
           <p:nvPr/>
         </p:nvSpPr>
@@ -31825,7 +32769,7 @@
       </p:sp>
       <p:sp>
         <p:nvSpPr>
-          <p:cNvPr id="26" name="Rounded Rectangle 25"/>
+          <p:cNvPr id="27" name="Rounded Rectangle 26"/>
           <p:cNvSpPr/>
           <p:nvPr/>
         </p:nvSpPr>
@@ -31873,7 +32817,7 @@
       </p:sp>
       <p:sp>
         <p:nvSpPr>
-          <p:cNvPr id="27" name="TextBox 26"/>
+          <p:cNvPr id="28" name="TextBox 27"/>
           <p:cNvSpPr txBox="1"/>
           <p:nvPr/>
         </p:nvSpPr>
@@ -31920,7 +32864,7 @@
       </p:sp>
       <p:sp>
         <p:nvSpPr>
-          <p:cNvPr id="28" name="TextBox 27"/>
+          <p:cNvPr id="29" name="TextBox 28"/>
           <p:cNvSpPr txBox="1"/>
           <p:nvPr/>
         </p:nvSpPr>
@@ -31967,7 +32911,7 @@
       </p:sp>
       <p:sp>
         <p:nvSpPr>
-          <p:cNvPr id="29" name="Oval 28"/>
+          <p:cNvPr id="30" name="Oval 29"/>
           <p:cNvSpPr/>
           <p:nvPr/>
         </p:nvSpPr>
@@ -32011,7 +32955,7 @@
       </p:sp>
       <p:sp>
         <p:nvSpPr>
-          <p:cNvPr id="30" name="TextBox 29"/>
+          <p:cNvPr id="31" name="TextBox 30"/>
           <p:cNvSpPr txBox="1"/>
           <p:nvPr/>
         </p:nvSpPr>
@@ -32058,7 +33002,7 @@
       </p:sp>
       <p:sp>
         <p:nvSpPr>
-          <p:cNvPr id="31" name="Rounded Rectangle 30"/>
+          <p:cNvPr id="32" name="Rounded Rectangle 31"/>
           <p:cNvSpPr/>
           <p:nvPr/>
         </p:nvSpPr>
@@ -32106,7 +33050,7 @@
       </p:sp>
       <p:sp>
         <p:nvSpPr>
-          <p:cNvPr id="32" name="TextBox 31"/>
+          <p:cNvPr id="33" name="TextBox 32"/>
           <p:cNvSpPr txBox="1"/>
           <p:nvPr/>
         </p:nvSpPr>
@@ -32153,7 +33097,7 @@
       </p:sp>
       <p:sp>
         <p:nvSpPr>
-          <p:cNvPr id="33" name="TextBox 32"/>
+          <p:cNvPr id="34" name="TextBox 33"/>
           <p:cNvSpPr txBox="1"/>
           <p:nvPr/>
         </p:nvSpPr>
@@ -32200,7 +33144,7 @@
       </p:sp>
       <p:sp>
         <p:nvSpPr>
-          <p:cNvPr id="34" name="Rounded Rectangle 33"/>
+          <p:cNvPr id="35" name="Rounded Rectangle 34"/>
           <p:cNvSpPr/>
           <p:nvPr/>
         </p:nvSpPr>
@@ -32267,7 +33211,7 @@
       </p:sp>
       <p:sp>
         <p:nvSpPr>
-          <p:cNvPr id="35" name="Rectangle 34"/>
+          <p:cNvPr id="36" name="Rectangle 35"/>
           <p:cNvSpPr/>
           <p:nvPr/>
         </p:nvSpPr>

--- a/Unit 4 - Ethics, Legal and Social Implications.pptx
+++ b/Unit 4 - Ethics, Legal and Social Implications.pptx
@@ -3977,60 +3977,13 @@
       </p:pic>
       <p:sp>
         <p:nvSpPr>
-          <p:cNvPr id="9" name="TextBox 8"/>
-          <p:cNvSpPr txBox="1"/>
-          <p:nvPr/>
-        </p:nvSpPr>
-        <p:spPr>
-          <a:xfrm>
-            <a:off x="932688" y="1170432"/>
-            <a:ext cx="7223760" cy="274320"/>
-          </a:xfrm>
-          <a:prstGeom prst="rect">
-            <a:avLst/>
-          </a:prstGeom>
-          <a:noFill/>
-        </p:spPr>
-        <p:txBody>
-          <a:bodyPr wrap="square" lIns="0" rIns="0" tIns="0" bIns="0" anchor="t">
-            <a:spAutoFit/>
-          </a:bodyPr>
-          <a:lstStyle/>
-          <a:p>
-            <a:pPr algn="l">
-              <a:lnSpc>
-                <a:spcPct val="122000"/>
-              </a:lnSpc>
-              <a:spcBef>
-                <a:spcPts val="0"/>
-              </a:spcBef>
-              <a:spcAft>
-                <a:spcPts val="0"/>
-              </a:spcAft>
-            </a:pPr>
-            <a:r>
-              <a:rPr sz="1050" b="1" i="0" spc="220">
-                <a:solidFill>
-                  <a:srgbClr val="00B3A4"/>
-                </a:solidFill>
-                <a:latin typeface="Segoe UI"/>
-                <a:ea typeface="Segoe UI"/>
-                <a:cs typeface="Segoe UI"/>
-              </a:rPr>
-              <a:t>PGPM · SYSTEMS SPECIALISATION</a:t>
-            </a:r>
-          </a:p>
-        </p:txBody>
-      </p:sp>
-      <p:sp>
-        <p:nvSpPr>
-          <p:cNvPr id="10" name="Rounded Rectangle 9"/>
+          <p:cNvPr id="9" name="Rounded Rectangle 8"/>
           <p:cNvSpPr/>
           <p:nvPr/>
         </p:nvSpPr>
         <p:spPr>
           <a:xfrm>
-            <a:off x="932688" y="1627632"/>
+            <a:off x="932688" y="1572768"/>
             <a:ext cx="1481328" cy="384048"/>
           </a:xfrm>
           <a:prstGeom prst="roundRect">
@@ -4091,7 +4044,7 @@
       </p:sp>
       <p:sp>
         <p:nvSpPr>
-          <p:cNvPr id="11" name="TextBox 10"/>
+          <p:cNvPr id="10" name="TextBox 9"/>
           <p:cNvSpPr txBox="1"/>
           <p:nvPr/>
         </p:nvSpPr>
@@ -4138,7 +4091,7 @@
       </p:sp>
       <p:sp>
         <p:nvSpPr>
-          <p:cNvPr id="12" name="Rectangle 11"/>
+          <p:cNvPr id="11" name="Rectangle 10"/>
           <p:cNvSpPr/>
           <p:nvPr/>
         </p:nvSpPr>
@@ -4182,7 +4135,7 @@
       </p:sp>
       <p:sp>
         <p:nvSpPr>
-          <p:cNvPr id="13" name="TextBox 12"/>
+          <p:cNvPr id="12" name="TextBox 11"/>
           <p:cNvSpPr txBox="1"/>
           <p:nvPr/>
         </p:nvSpPr>
@@ -4229,7 +4182,7 @@
       </p:sp>
       <p:sp>
         <p:nvSpPr>
-          <p:cNvPr id="14" name="Rounded Rectangle 13"/>
+          <p:cNvPr id="13" name="Rounded Rectangle 12"/>
           <p:cNvSpPr/>
           <p:nvPr/>
         </p:nvSpPr>
@@ -4296,7 +4249,7 @@
       </p:sp>
       <p:sp>
         <p:nvSpPr>
-          <p:cNvPr id="15" name="Rounded Rectangle 14"/>
+          <p:cNvPr id="14" name="Rounded Rectangle 13"/>
           <p:cNvSpPr/>
           <p:nvPr/>
         </p:nvSpPr>
@@ -4363,7 +4316,7 @@
       </p:sp>
       <p:sp>
         <p:nvSpPr>
-          <p:cNvPr id="16" name="Rounded Rectangle 15"/>
+          <p:cNvPr id="15" name="Rounded Rectangle 14"/>
           <p:cNvSpPr/>
           <p:nvPr/>
         </p:nvSpPr>
@@ -4430,7 +4383,7 @@
       </p:sp>
       <p:sp>
         <p:nvSpPr>
-          <p:cNvPr id="17" name="Rounded Rectangle 16"/>
+          <p:cNvPr id="16" name="Rounded Rectangle 15"/>
           <p:cNvSpPr/>
           <p:nvPr/>
         </p:nvSpPr>
@@ -4497,7 +4450,7 @@
       </p:sp>
       <p:sp>
         <p:nvSpPr>
-          <p:cNvPr id="18" name="Rectangle 17"/>
+          <p:cNvPr id="17" name="Rectangle 16"/>
           <p:cNvSpPr/>
           <p:nvPr/>
         </p:nvSpPr>
@@ -4541,7 +4494,7 @@
       </p:sp>
       <p:sp>
         <p:nvSpPr>
-          <p:cNvPr id="19" name="TextBox 18"/>
+          <p:cNvPr id="18" name="TextBox 17"/>
           <p:cNvSpPr txBox="1"/>
           <p:nvPr/>
         </p:nvSpPr>
@@ -4628,53 +4581,6 @@
                 <a:cs typeface="Segoe UI"/>
               </a:rPr>
               <a:t>OSI2509030</a:t>
-            </a:r>
-          </a:p>
-        </p:txBody>
-      </p:sp>
-      <p:sp>
-        <p:nvSpPr>
-          <p:cNvPr id="20" name="TextBox 19"/>
-          <p:cNvSpPr txBox="1"/>
-          <p:nvPr/>
-        </p:nvSpPr>
-        <p:spPr>
-          <a:xfrm>
-            <a:off x="7180783" y="5870448"/>
-            <a:ext cx="4206240" cy="640080"/>
-          </a:xfrm>
-          <a:prstGeom prst="rect">
-            <a:avLst/>
-          </a:prstGeom>
-          <a:noFill/>
-        </p:spPr>
-        <p:txBody>
-          <a:bodyPr wrap="square" lIns="0" rIns="0" tIns="0" bIns="0" anchor="t">
-            <a:spAutoFit/>
-          </a:bodyPr>
-          <a:lstStyle/>
-          <a:p>
-            <a:pPr algn="r">
-              <a:lnSpc>
-                <a:spcPct val="134000"/>
-              </a:lnSpc>
-              <a:spcBef>
-                <a:spcPts val="0"/>
-              </a:spcBef>
-              <a:spcAft>
-                <a:spcPts val="0"/>
-              </a:spcAft>
-            </a:pPr>
-            <a:r>
-              <a:rPr sz="1000" b="1" i="0">
-                <a:solidFill>
-                  <a:srgbClr val="C5D2E8"/>
-                </a:solidFill>
-                <a:latin typeface="Segoe UI"/>
-                <a:ea typeface="Segoe UI"/>
-                <a:cs typeface="Segoe UI"/>
-              </a:rPr>
-              <a:t>Unit 4 of 5</a:t>
             </a:r>
           </a:p>
         </p:txBody>
@@ -5072,54 +4978,7 @@
       </p:sp>
       <p:sp>
         <p:nvSpPr>
-          <p:cNvPr id="10" name="TextBox 9"/>
-          <p:cNvSpPr txBox="1"/>
-          <p:nvPr/>
-        </p:nvSpPr>
-        <p:spPr>
-          <a:xfrm>
-            <a:off x="987552" y="5943600"/>
-            <a:ext cx="6400800" cy="274320"/>
-          </a:xfrm>
-          <a:prstGeom prst="rect">
-            <a:avLst/>
-          </a:prstGeom>
-          <a:noFill/>
-        </p:spPr>
-        <p:txBody>
-          <a:bodyPr wrap="square" lIns="0" rIns="0" tIns="0" bIns="0" anchor="t">
-            <a:spAutoFit/>
-          </a:bodyPr>
-          <a:lstStyle/>
-          <a:p>
-            <a:pPr algn="l">
-              <a:lnSpc>
-                <a:spcPct val="122000"/>
-              </a:lnSpc>
-              <a:spcBef>
-                <a:spcPts val="0"/>
-              </a:spcBef>
-              <a:spcAft>
-                <a:spcPts val="0"/>
-              </a:spcAft>
-            </a:pPr>
-            <a:r>
-              <a:rPr sz="900" b="1" i="0" spc="160">
-                <a:solidFill>
-                  <a:srgbClr val="6B7FA6"/>
-                </a:solidFill>
-                <a:latin typeface="Segoe UI"/>
-                <a:ea typeface="Segoe UI"/>
-                <a:cs typeface="Segoe UI"/>
-              </a:rPr>
-              <a:t>UNIT 4  ·  ETHICS, LEGAL AND SOCIAL IMPLICATIONS</a:t>
-            </a:r>
-          </a:p>
-        </p:txBody>
-      </p:sp>
-      <p:sp>
-        <p:nvSpPr>
-          <p:cNvPr id="11" name="logo-plate"/>
+          <p:cNvPr id="10" name="logo-plate"/>
           <p:cNvSpPr/>
           <p:nvPr/>
         </p:nvSpPr>
@@ -5165,7 +5024,7 @@
       </p:sp>
       <p:pic>
         <p:nvPicPr>
-          <p:cNvPr id="12" name="college-logo" descr="logo-full.png"/>
+          <p:cNvPr id="11" name="college-logo" descr="logo-full.png"/>
           <p:cNvPicPr>
             <a:picLocks noChangeAspect="1"/>
           </p:cNvPicPr>
@@ -5281,8 +5140,77 @@
         </p:nvSpPr>
         <p:spPr>
           <a:xfrm>
-            <a:off x="713232" y="6272784"/>
-            <a:ext cx="5597920" cy="219456"/>
+            <a:off x="8240677" y="6272784"/>
+            <a:ext cx="2651760" cy="219456"/>
+          </a:xfrm>
+          <a:prstGeom prst="rect">
+            <a:avLst/>
+          </a:prstGeom>
+          <a:noFill/>
+        </p:spPr>
+        <p:txBody>
+          <a:bodyPr wrap="square" lIns="0" rIns="0" tIns="0" bIns="0" anchor="t">
+            <a:spAutoFit/>
+          </a:bodyPr>
+          <a:lstStyle/>
+          <a:p>
+            <a:pPr algn="r">
+              <a:lnSpc>
+                <a:spcPct val="122000"/>
+              </a:lnSpc>
+              <a:spcBef>
+                <a:spcPts val="0"/>
+              </a:spcBef>
+              <a:spcAft>
+                <a:spcPts val="0"/>
+              </a:spcAft>
+            </a:pPr>
+            <a:r>
+              <a:rPr sz="900" b="0" i="0">
+                <a:solidFill>
+                  <a:srgbClr val="636E85"/>
+                </a:solidFill>
+                <a:latin typeface="Segoe UI"/>
+                <a:ea typeface="Segoe UI"/>
+                <a:cs typeface="Segoe UI"/>
+              </a:rPr>
+              <a:t>Lingesh K  ·  OSI2509030</a:t>
+            </a:r>
+            <a:r>
+              <a:rPr sz="900" b="0" i="0">
+                <a:solidFill>
+                  <a:srgbClr val="141C2E"/>
+                </a:solidFill>
+                <a:latin typeface="Segoe UI"/>
+                <a:ea typeface="Segoe UI"/>
+                <a:cs typeface="Segoe UI"/>
+              </a:rPr>
+              <a:t>     </a:t>
+            </a:r>
+            <a:r>
+              <a:rPr sz="900" b="1" i="0">
+                <a:solidFill>
+                  <a:srgbClr val="0E1E3C"/>
+                </a:solidFill>
+                <a:latin typeface="Segoe UI"/>
+                <a:ea typeface="Segoe UI"/>
+                <a:cs typeface="Segoe UI"/>
+              </a:rPr>
+              <a:t>11</a:t>
+            </a:r>
+          </a:p>
+        </p:txBody>
+      </p:sp>
+      <p:sp>
+        <p:nvSpPr>
+          <p:cNvPr id="5" name="TextBox 4"/>
+          <p:cNvSpPr txBox="1"/>
+          <p:nvPr/>
+        </p:nvSpPr>
+        <p:spPr>
+          <a:xfrm>
+            <a:off x="713232" y="566928"/>
+            <a:ext cx="10765231" cy="219456"/>
           </a:xfrm>
           <a:prstGeom prst="rect">
             <a:avLst/>
@@ -5307,106 +5235,15 @@
               </a:spcAft>
             </a:pPr>
             <a:r>
-              <a:rPr sz="900" b="1" i="0">
-                <a:solidFill>
-                  <a:srgbClr val="0E1E3C"/>
-                </a:solidFill>
-                <a:latin typeface="Segoe UI"/>
-                <a:ea typeface="Segoe UI"/>
-                <a:cs typeface="Segoe UI"/>
-              </a:rPr>
-              <a:t>Unit 4</a:t>
-            </a:r>
-            <a:r>
-              <a:rPr sz="900" b="0" i="0">
-                <a:solidFill>
-                  <a:srgbClr val="939EB3"/>
-                </a:solidFill>
-                <a:latin typeface="Segoe UI"/>
-                <a:ea typeface="Segoe UI"/>
-                <a:cs typeface="Segoe UI"/>
-              </a:rPr>
-              <a:t>  ·  </a:t>
-            </a:r>
-            <a:r>
-              <a:rPr sz="900" b="0" i="0">
-                <a:solidFill>
-                  <a:srgbClr val="636E85"/>
-                </a:solidFill>
-                <a:latin typeface="Segoe UI"/>
-                <a:ea typeface="Segoe UI"/>
-                <a:cs typeface="Segoe UI"/>
-              </a:rPr>
-              <a:t>Ethics, Legal and Social Implications</a:t>
-            </a:r>
-          </a:p>
-        </p:txBody>
-      </p:sp>
-      <p:sp>
-        <p:nvSpPr>
-          <p:cNvPr id="5" name="TextBox 4"/>
-          <p:cNvSpPr txBox="1"/>
-          <p:nvPr/>
-        </p:nvSpPr>
-        <p:spPr>
-          <a:xfrm>
-            <a:off x="8240677" y="6272784"/>
-            <a:ext cx="2651760" cy="219456"/>
-          </a:xfrm>
-          <a:prstGeom prst="rect">
-            <a:avLst/>
-          </a:prstGeom>
-          <a:noFill/>
-        </p:spPr>
-        <p:txBody>
-          <a:bodyPr wrap="square" lIns="0" rIns="0" tIns="0" bIns="0" anchor="t">
-            <a:spAutoFit/>
-          </a:bodyPr>
-          <a:lstStyle/>
-          <a:p>
-            <a:pPr algn="r">
-              <a:lnSpc>
-                <a:spcPct val="122000"/>
-              </a:lnSpc>
-              <a:spcBef>
-                <a:spcPts val="0"/>
-              </a:spcBef>
-              <a:spcAft>
-                <a:spcPts val="0"/>
-              </a:spcAft>
-            </a:pPr>
-            <a:r>
-              <a:rPr sz="900" b="0" i="0">
-                <a:solidFill>
-                  <a:srgbClr val="636E85"/>
-                </a:solidFill>
-                <a:latin typeface="Segoe UI"/>
-                <a:ea typeface="Segoe UI"/>
-                <a:cs typeface="Segoe UI"/>
-              </a:rPr>
-              <a:t>Lingesh K  ·  OSI2509030</a:t>
-            </a:r>
-            <a:r>
-              <a:rPr sz="900" b="0" i="0">
-                <a:solidFill>
-                  <a:srgbClr val="141C2E"/>
-                </a:solidFill>
-                <a:latin typeface="Segoe UI"/>
-                <a:ea typeface="Segoe UI"/>
-                <a:cs typeface="Segoe UI"/>
-              </a:rPr>
-              <a:t>     </a:t>
-            </a:r>
-            <a:r>
-              <a:rPr sz="900" b="1" i="0">
-                <a:solidFill>
-                  <a:srgbClr val="0E1E3C"/>
-                </a:solidFill>
-                <a:latin typeface="Segoe UI"/>
-                <a:ea typeface="Segoe UI"/>
-                <a:cs typeface="Segoe UI"/>
-              </a:rPr>
-              <a:t>11</a:t>
+              <a:rPr sz="950" b="1" i="0" spc="160">
+                <a:solidFill>
+                  <a:srgbClr val="F5A623"/>
+                </a:solidFill>
+                <a:latin typeface="Segoe UI"/>
+                <a:ea typeface="Segoe UI"/>
+                <a:cs typeface="Segoe UI"/>
+              </a:rPr>
+              <a:t>HOW IT HAPPENS</a:t>
             </a:r>
           </a:p>
         </p:txBody>
@@ -5414,53 +5251,6 @@
       <p:sp>
         <p:nvSpPr>
           <p:cNvPr id="6" name="TextBox 5"/>
-          <p:cNvSpPr txBox="1"/>
-          <p:nvPr/>
-        </p:nvSpPr>
-        <p:spPr>
-          <a:xfrm>
-            <a:off x="713232" y="566928"/>
-            <a:ext cx="10765231" cy="219456"/>
-          </a:xfrm>
-          <a:prstGeom prst="rect">
-            <a:avLst/>
-          </a:prstGeom>
-          <a:noFill/>
-        </p:spPr>
-        <p:txBody>
-          <a:bodyPr wrap="square" lIns="0" rIns="0" tIns="0" bIns="0" anchor="t">
-            <a:spAutoFit/>
-          </a:bodyPr>
-          <a:lstStyle/>
-          <a:p>
-            <a:pPr algn="l">
-              <a:lnSpc>
-                <a:spcPct val="122000"/>
-              </a:lnSpc>
-              <a:spcBef>
-                <a:spcPts val="0"/>
-              </a:spcBef>
-              <a:spcAft>
-                <a:spcPts val="0"/>
-              </a:spcAft>
-            </a:pPr>
-            <a:r>
-              <a:rPr sz="950" b="1" i="0" spc="160">
-                <a:solidFill>
-                  <a:srgbClr val="F5A623"/>
-                </a:solidFill>
-                <a:latin typeface="Segoe UI"/>
-                <a:ea typeface="Segoe UI"/>
-                <a:cs typeface="Segoe UI"/>
-              </a:rPr>
-              <a:t>HOW IT HAPPENS</a:t>
-            </a:r>
-          </a:p>
-        </p:txBody>
-      </p:sp>
-      <p:sp>
-        <p:nvSpPr>
-          <p:cNvPr id="7" name="TextBox 6"/>
           <p:cNvSpPr txBox="1"/>
           <p:nvPr/>
         </p:nvSpPr>
@@ -5507,7 +5297,7 @@
       </p:sp>
       <p:sp>
         <p:nvSpPr>
-          <p:cNvPr id="8" name="Rectangle 7"/>
+          <p:cNvPr id="7" name="Rectangle 6"/>
           <p:cNvSpPr/>
           <p:nvPr/>
         </p:nvSpPr>
@@ -5551,7 +5341,7 @@
       </p:sp>
       <p:sp>
         <p:nvSpPr>
-          <p:cNvPr id="9" name="TextBox 8"/>
+          <p:cNvPr id="8" name="TextBox 7"/>
           <p:cNvSpPr txBox="1"/>
           <p:nvPr/>
         </p:nvSpPr>
@@ -5598,7 +5388,7 @@
       </p:sp>
       <p:sp>
         <p:nvSpPr>
-          <p:cNvPr id="10" name="Rectangle 9"/>
+          <p:cNvPr id="9" name="Rectangle 8"/>
           <p:cNvSpPr/>
           <p:nvPr/>
         </p:nvSpPr>
@@ -5642,7 +5432,7 @@
       </p:sp>
       <p:sp>
         <p:nvSpPr>
-          <p:cNvPr id="11" name="Rounded Rectangle 10"/>
+          <p:cNvPr id="10" name="Rounded Rectangle 9"/>
           <p:cNvSpPr/>
           <p:nvPr/>
         </p:nvSpPr>
@@ -5688,7 +5478,7 @@
       </p:sp>
       <p:sp>
         <p:nvSpPr>
-          <p:cNvPr id="12" name="TextBox 11"/>
+          <p:cNvPr id="11" name="TextBox 10"/>
           <p:cNvSpPr txBox="1"/>
           <p:nvPr/>
         </p:nvSpPr>
@@ -5735,7 +5525,7 @@
       </p:sp>
       <p:sp>
         <p:nvSpPr>
-          <p:cNvPr id="13" name="Rounded Rectangle 12"/>
+          <p:cNvPr id="12" name="Rounded Rectangle 11"/>
           <p:cNvSpPr/>
           <p:nvPr/>
         </p:nvSpPr>
@@ -5781,7 +5571,7 @@
       </p:sp>
       <p:sp>
         <p:nvSpPr>
-          <p:cNvPr id="14" name="TextBox 13"/>
+          <p:cNvPr id="13" name="TextBox 12"/>
           <p:cNvSpPr txBox="1"/>
           <p:nvPr/>
         </p:nvSpPr>
@@ -5828,7 +5618,7 @@
       </p:sp>
       <p:sp>
         <p:nvSpPr>
-          <p:cNvPr id="15" name="Rounded Rectangle 14"/>
+          <p:cNvPr id="14" name="Rounded Rectangle 13"/>
           <p:cNvSpPr/>
           <p:nvPr/>
         </p:nvSpPr>
@@ -5874,7 +5664,7 @@
       </p:sp>
       <p:sp>
         <p:nvSpPr>
-          <p:cNvPr id="16" name="TextBox 15"/>
+          <p:cNvPr id="15" name="TextBox 14"/>
           <p:cNvSpPr txBox="1"/>
           <p:nvPr/>
         </p:nvSpPr>
@@ -5921,7 +5711,7 @@
       </p:sp>
       <p:sp>
         <p:nvSpPr>
-          <p:cNvPr id="17" name="Rounded Rectangle 16"/>
+          <p:cNvPr id="16" name="Rounded Rectangle 15"/>
           <p:cNvSpPr/>
           <p:nvPr/>
         </p:nvSpPr>
@@ -5967,7 +5757,7 @@
       </p:sp>
       <p:sp>
         <p:nvSpPr>
-          <p:cNvPr id="18" name="TextBox 17"/>
+          <p:cNvPr id="17" name="TextBox 16"/>
           <p:cNvSpPr txBox="1"/>
           <p:nvPr/>
         </p:nvSpPr>
@@ -6014,7 +5804,7 @@
       </p:sp>
       <p:sp>
         <p:nvSpPr>
-          <p:cNvPr id="19" name="Rounded Rectangle 18"/>
+          <p:cNvPr id="18" name="Rounded Rectangle 17"/>
           <p:cNvSpPr/>
           <p:nvPr/>
         </p:nvSpPr>
@@ -6060,7 +5850,7 @@
       </p:sp>
       <p:sp>
         <p:nvSpPr>
-          <p:cNvPr id="20" name="TextBox 19"/>
+          <p:cNvPr id="19" name="TextBox 18"/>
           <p:cNvSpPr txBox="1"/>
           <p:nvPr/>
         </p:nvSpPr>
@@ -6107,7 +5897,7 @@
       </p:sp>
       <p:sp>
         <p:nvSpPr>
-          <p:cNvPr id="21" name="Rounded Rectangle 20"/>
+          <p:cNvPr id="20" name="Rounded Rectangle 19"/>
           <p:cNvSpPr/>
           <p:nvPr/>
         </p:nvSpPr>
@@ -6161,7 +5951,7 @@
       </p:sp>
       <p:sp>
         <p:nvSpPr>
-          <p:cNvPr id="22" name="Rectangle 21"/>
+          <p:cNvPr id="21" name="Rectangle 20"/>
           <p:cNvSpPr/>
           <p:nvPr/>
         </p:nvSpPr>
@@ -6205,7 +5995,7 @@
       </p:sp>
       <p:sp>
         <p:nvSpPr>
-          <p:cNvPr id="23" name="TextBox 22"/>
+          <p:cNvPr id="22" name="TextBox 21"/>
           <p:cNvSpPr txBox="1"/>
           <p:nvPr/>
         </p:nvSpPr>
@@ -6252,7 +6042,7 @@
       </p:sp>
       <p:sp>
         <p:nvSpPr>
-          <p:cNvPr id="24" name="TextBox 23"/>
+          <p:cNvPr id="23" name="TextBox 22"/>
           <p:cNvSpPr txBox="1"/>
           <p:nvPr/>
         </p:nvSpPr>
@@ -6299,7 +6089,7 @@
       </p:sp>
       <p:sp>
         <p:nvSpPr>
-          <p:cNvPr id="25" name="Rounded Rectangle 24"/>
+          <p:cNvPr id="24" name="Rounded Rectangle 23"/>
           <p:cNvSpPr/>
           <p:nvPr/>
         </p:nvSpPr>
@@ -6353,7 +6143,7 @@
       </p:sp>
       <p:sp>
         <p:nvSpPr>
-          <p:cNvPr id="26" name="Rectangle 25"/>
+          <p:cNvPr id="25" name="Rectangle 24"/>
           <p:cNvSpPr/>
           <p:nvPr/>
         </p:nvSpPr>
@@ -6397,7 +6187,7 @@
       </p:sp>
       <p:sp>
         <p:nvSpPr>
-          <p:cNvPr id="27" name="TextBox 26"/>
+          <p:cNvPr id="26" name="TextBox 25"/>
           <p:cNvSpPr txBox="1"/>
           <p:nvPr/>
         </p:nvSpPr>
@@ -6444,7 +6234,7 @@
       </p:sp>
       <p:sp>
         <p:nvSpPr>
-          <p:cNvPr id="28" name="TextBox 27"/>
+          <p:cNvPr id="27" name="TextBox 26"/>
           <p:cNvSpPr txBox="1"/>
           <p:nvPr/>
         </p:nvSpPr>
@@ -6491,7 +6281,7 @@
       </p:sp>
       <p:sp>
         <p:nvSpPr>
-          <p:cNvPr id="29" name="Rounded Rectangle 28"/>
+          <p:cNvPr id="28" name="Rounded Rectangle 27"/>
           <p:cNvSpPr/>
           <p:nvPr/>
         </p:nvSpPr>
@@ -6545,7 +6335,7 @@
       </p:sp>
       <p:sp>
         <p:nvSpPr>
-          <p:cNvPr id="30" name="Rectangle 29"/>
+          <p:cNvPr id="29" name="Rectangle 28"/>
           <p:cNvSpPr/>
           <p:nvPr/>
         </p:nvSpPr>
@@ -6589,7 +6379,7 @@
       </p:sp>
       <p:sp>
         <p:nvSpPr>
-          <p:cNvPr id="31" name="TextBox 30"/>
+          <p:cNvPr id="30" name="TextBox 29"/>
           <p:cNvSpPr txBox="1"/>
           <p:nvPr/>
         </p:nvSpPr>
@@ -6636,7 +6426,7 @@
       </p:sp>
       <p:sp>
         <p:nvSpPr>
-          <p:cNvPr id="32" name="TextBox 31"/>
+          <p:cNvPr id="31" name="TextBox 30"/>
           <p:cNvSpPr txBox="1"/>
           <p:nvPr/>
         </p:nvSpPr>
@@ -6775,8 +6565,77 @@
         </p:nvSpPr>
         <p:spPr>
           <a:xfrm>
-            <a:off x="713232" y="6272784"/>
-            <a:ext cx="5597920" cy="219456"/>
+            <a:off x="8240677" y="6272784"/>
+            <a:ext cx="2651760" cy="219456"/>
+          </a:xfrm>
+          <a:prstGeom prst="rect">
+            <a:avLst/>
+          </a:prstGeom>
+          <a:noFill/>
+        </p:spPr>
+        <p:txBody>
+          <a:bodyPr wrap="square" lIns="0" rIns="0" tIns="0" bIns="0" anchor="t">
+            <a:spAutoFit/>
+          </a:bodyPr>
+          <a:lstStyle/>
+          <a:p>
+            <a:pPr algn="r">
+              <a:lnSpc>
+                <a:spcPct val="122000"/>
+              </a:lnSpc>
+              <a:spcBef>
+                <a:spcPts val="0"/>
+              </a:spcBef>
+              <a:spcAft>
+                <a:spcPts val="0"/>
+              </a:spcAft>
+            </a:pPr>
+            <a:r>
+              <a:rPr sz="900" b="0" i="0">
+                <a:solidFill>
+                  <a:srgbClr val="636E85"/>
+                </a:solidFill>
+                <a:latin typeface="Segoe UI"/>
+                <a:ea typeface="Segoe UI"/>
+                <a:cs typeface="Segoe UI"/>
+              </a:rPr>
+              <a:t>Lingesh K  ·  OSI2509030</a:t>
+            </a:r>
+            <a:r>
+              <a:rPr sz="900" b="0" i="0">
+                <a:solidFill>
+                  <a:srgbClr val="141C2E"/>
+                </a:solidFill>
+                <a:latin typeface="Segoe UI"/>
+                <a:ea typeface="Segoe UI"/>
+                <a:cs typeface="Segoe UI"/>
+              </a:rPr>
+              <a:t>     </a:t>
+            </a:r>
+            <a:r>
+              <a:rPr sz="900" b="1" i="0">
+                <a:solidFill>
+                  <a:srgbClr val="0E1E3C"/>
+                </a:solidFill>
+                <a:latin typeface="Segoe UI"/>
+                <a:ea typeface="Segoe UI"/>
+                <a:cs typeface="Segoe UI"/>
+              </a:rPr>
+              <a:t>12</a:t>
+            </a:r>
+          </a:p>
+        </p:txBody>
+      </p:sp>
+      <p:sp>
+        <p:nvSpPr>
+          <p:cNvPr id="5" name="TextBox 4"/>
+          <p:cNvSpPr txBox="1"/>
+          <p:nvPr/>
+        </p:nvSpPr>
+        <p:spPr>
+          <a:xfrm>
+            <a:off x="713232" y="566928"/>
+            <a:ext cx="10765231" cy="219456"/>
           </a:xfrm>
           <a:prstGeom prst="rect">
             <a:avLst/>
@@ -6801,106 +6660,15 @@
               </a:spcAft>
             </a:pPr>
             <a:r>
-              <a:rPr sz="900" b="1" i="0">
-                <a:solidFill>
-                  <a:srgbClr val="0E1E3C"/>
-                </a:solidFill>
-                <a:latin typeface="Segoe UI"/>
-                <a:ea typeface="Segoe UI"/>
-                <a:cs typeface="Segoe UI"/>
-              </a:rPr>
-              <a:t>Unit 4</a:t>
-            </a:r>
-            <a:r>
-              <a:rPr sz="900" b="0" i="0">
-                <a:solidFill>
-                  <a:srgbClr val="939EB3"/>
-                </a:solidFill>
-                <a:latin typeface="Segoe UI"/>
-                <a:ea typeface="Segoe UI"/>
-                <a:cs typeface="Segoe UI"/>
-              </a:rPr>
-              <a:t>  ·  </a:t>
-            </a:r>
-            <a:r>
-              <a:rPr sz="900" b="0" i="0">
-                <a:solidFill>
-                  <a:srgbClr val="636E85"/>
-                </a:solidFill>
-                <a:latin typeface="Segoe UI"/>
-                <a:ea typeface="Segoe UI"/>
-                <a:cs typeface="Segoe UI"/>
-              </a:rPr>
-              <a:t>Ethics, Legal and Social Implications</a:t>
-            </a:r>
-          </a:p>
-        </p:txBody>
-      </p:sp>
-      <p:sp>
-        <p:nvSpPr>
-          <p:cNvPr id="5" name="TextBox 4"/>
-          <p:cNvSpPr txBox="1"/>
-          <p:nvPr/>
-        </p:nvSpPr>
-        <p:spPr>
-          <a:xfrm>
-            <a:off x="8240677" y="6272784"/>
-            <a:ext cx="2651760" cy="219456"/>
-          </a:xfrm>
-          <a:prstGeom prst="rect">
-            <a:avLst/>
-          </a:prstGeom>
-          <a:noFill/>
-        </p:spPr>
-        <p:txBody>
-          <a:bodyPr wrap="square" lIns="0" rIns="0" tIns="0" bIns="0" anchor="t">
-            <a:spAutoFit/>
-          </a:bodyPr>
-          <a:lstStyle/>
-          <a:p>
-            <a:pPr algn="r">
-              <a:lnSpc>
-                <a:spcPct val="122000"/>
-              </a:lnSpc>
-              <a:spcBef>
-                <a:spcPts val="0"/>
-              </a:spcBef>
-              <a:spcAft>
-                <a:spcPts val="0"/>
-              </a:spcAft>
-            </a:pPr>
-            <a:r>
-              <a:rPr sz="900" b="0" i="0">
-                <a:solidFill>
-                  <a:srgbClr val="636E85"/>
-                </a:solidFill>
-                <a:latin typeface="Segoe UI"/>
-                <a:ea typeface="Segoe UI"/>
-                <a:cs typeface="Segoe UI"/>
-              </a:rPr>
-              <a:t>Lingesh K  ·  OSI2509030</a:t>
-            </a:r>
-            <a:r>
-              <a:rPr sz="900" b="0" i="0">
-                <a:solidFill>
-                  <a:srgbClr val="141C2E"/>
-                </a:solidFill>
-                <a:latin typeface="Segoe UI"/>
-                <a:ea typeface="Segoe UI"/>
-                <a:cs typeface="Segoe UI"/>
-              </a:rPr>
-              <a:t>     </a:t>
-            </a:r>
-            <a:r>
-              <a:rPr sz="900" b="1" i="0">
-                <a:solidFill>
-                  <a:srgbClr val="0E1E3C"/>
-                </a:solidFill>
-                <a:latin typeface="Segoe UI"/>
-                <a:ea typeface="Segoe UI"/>
-                <a:cs typeface="Segoe UI"/>
-              </a:rPr>
-              <a:t>12</a:t>
+              <a:rPr sz="950" b="1" i="0" spc="160">
+                <a:solidFill>
+                  <a:srgbClr val="F5A623"/>
+                </a:solidFill>
+                <a:latin typeface="Segoe UI"/>
+                <a:ea typeface="Segoe UI"/>
+                <a:cs typeface="Segoe UI"/>
+              </a:rPr>
+              <a:t>MANAGING IT</a:t>
             </a:r>
           </a:p>
         </p:txBody>
@@ -6908,53 +6676,6 @@
       <p:sp>
         <p:nvSpPr>
           <p:cNvPr id="6" name="TextBox 5"/>
-          <p:cNvSpPr txBox="1"/>
-          <p:nvPr/>
-        </p:nvSpPr>
-        <p:spPr>
-          <a:xfrm>
-            <a:off x="713232" y="566928"/>
-            <a:ext cx="10765231" cy="219456"/>
-          </a:xfrm>
-          <a:prstGeom prst="rect">
-            <a:avLst/>
-          </a:prstGeom>
-          <a:noFill/>
-        </p:spPr>
-        <p:txBody>
-          <a:bodyPr wrap="square" lIns="0" rIns="0" tIns="0" bIns="0" anchor="t">
-            <a:spAutoFit/>
-          </a:bodyPr>
-          <a:lstStyle/>
-          <a:p>
-            <a:pPr algn="l">
-              <a:lnSpc>
-                <a:spcPct val="122000"/>
-              </a:lnSpc>
-              <a:spcBef>
-                <a:spcPts val="0"/>
-              </a:spcBef>
-              <a:spcAft>
-                <a:spcPts val="0"/>
-              </a:spcAft>
-            </a:pPr>
-            <a:r>
-              <a:rPr sz="950" b="1" i="0" spc="160">
-                <a:solidFill>
-                  <a:srgbClr val="F5A623"/>
-                </a:solidFill>
-                <a:latin typeface="Segoe UI"/>
-                <a:ea typeface="Segoe UI"/>
-                <a:cs typeface="Segoe UI"/>
-              </a:rPr>
-              <a:t>MANAGING IT</a:t>
-            </a:r>
-          </a:p>
-        </p:txBody>
-      </p:sp>
-      <p:sp>
-        <p:nvSpPr>
-          <p:cNvPr id="7" name="TextBox 6"/>
           <p:cNvSpPr txBox="1"/>
           <p:nvPr/>
         </p:nvSpPr>
@@ -7001,7 +6722,7 @@
       </p:sp>
       <p:sp>
         <p:nvSpPr>
-          <p:cNvPr id="8" name="Rectangle 7"/>
+          <p:cNvPr id="7" name="Rectangle 6"/>
           <p:cNvSpPr/>
           <p:nvPr/>
         </p:nvSpPr>
@@ -7045,7 +6766,7 @@
       </p:sp>
       <p:sp>
         <p:nvSpPr>
-          <p:cNvPr id="9" name="TextBox 8"/>
+          <p:cNvPr id="8" name="TextBox 7"/>
           <p:cNvSpPr txBox="1"/>
           <p:nvPr/>
         </p:nvSpPr>
@@ -7092,7 +6813,7 @@
       </p:sp>
       <p:sp>
         <p:nvSpPr>
-          <p:cNvPr id="10" name="Rounded Rectangle 9"/>
+          <p:cNvPr id="9" name="Rounded Rectangle 8"/>
           <p:cNvSpPr/>
           <p:nvPr/>
         </p:nvSpPr>
@@ -7146,7 +6867,7 @@
       </p:sp>
       <p:sp>
         <p:nvSpPr>
-          <p:cNvPr id="11" name="Rectangle 10"/>
+          <p:cNvPr id="10" name="Rectangle 9"/>
           <p:cNvSpPr/>
           <p:nvPr/>
         </p:nvSpPr>
@@ -7190,7 +6911,7 @@
       </p:sp>
       <p:sp>
         <p:nvSpPr>
-          <p:cNvPr id="12" name="TextBox 11"/>
+          <p:cNvPr id="11" name="TextBox 10"/>
           <p:cNvSpPr txBox="1"/>
           <p:nvPr/>
         </p:nvSpPr>
@@ -7237,7 +6958,7 @@
       </p:sp>
       <p:sp>
         <p:nvSpPr>
-          <p:cNvPr id="13" name="Rounded Rectangle 12"/>
+          <p:cNvPr id="12" name="Rounded Rectangle 11"/>
           <p:cNvSpPr/>
           <p:nvPr/>
         </p:nvSpPr>
@@ -7283,7 +7004,7 @@
       </p:sp>
       <p:sp>
         <p:nvSpPr>
-          <p:cNvPr id="14" name="TextBox 13"/>
+          <p:cNvPr id="13" name="TextBox 12"/>
           <p:cNvSpPr txBox="1"/>
           <p:nvPr/>
         </p:nvSpPr>
@@ -7330,7 +7051,7 @@
       </p:sp>
       <p:sp>
         <p:nvSpPr>
-          <p:cNvPr id="15" name="Rounded Rectangle 14"/>
+          <p:cNvPr id="14" name="Rounded Rectangle 13"/>
           <p:cNvSpPr/>
           <p:nvPr/>
         </p:nvSpPr>
@@ -7376,7 +7097,7 @@
       </p:sp>
       <p:sp>
         <p:nvSpPr>
-          <p:cNvPr id="16" name="TextBox 15"/>
+          <p:cNvPr id="15" name="TextBox 14"/>
           <p:cNvSpPr txBox="1"/>
           <p:nvPr/>
         </p:nvSpPr>
@@ -7423,7 +7144,7 @@
       </p:sp>
       <p:sp>
         <p:nvSpPr>
-          <p:cNvPr id="17" name="Rounded Rectangle 16"/>
+          <p:cNvPr id="16" name="Rounded Rectangle 15"/>
           <p:cNvSpPr/>
           <p:nvPr/>
         </p:nvSpPr>
@@ -7469,7 +7190,7 @@
       </p:sp>
       <p:sp>
         <p:nvSpPr>
-          <p:cNvPr id="18" name="TextBox 17"/>
+          <p:cNvPr id="17" name="TextBox 16"/>
           <p:cNvSpPr txBox="1"/>
           <p:nvPr/>
         </p:nvSpPr>
@@ -7516,7 +7237,7 @@
       </p:sp>
       <p:sp>
         <p:nvSpPr>
-          <p:cNvPr id="19" name="Rounded Rectangle 18"/>
+          <p:cNvPr id="18" name="Rounded Rectangle 17"/>
           <p:cNvSpPr/>
           <p:nvPr/>
         </p:nvSpPr>
@@ -7570,7 +7291,7 @@
       </p:sp>
       <p:sp>
         <p:nvSpPr>
-          <p:cNvPr id="20" name="Rectangle 19"/>
+          <p:cNvPr id="19" name="Rectangle 18"/>
           <p:cNvSpPr/>
           <p:nvPr/>
         </p:nvSpPr>
@@ -7614,7 +7335,7 @@
       </p:sp>
       <p:sp>
         <p:nvSpPr>
-          <p:cNvPr id="21" name="TextBox 20"/>
+          <p:cNvPr id="20" name="TextBox 19"/>
           <p:cNvSpPr txBox="1"/>
           <p:nvPr/>
         </p:nvSpPr>
@@ -7661,7 +7382,7 @@
       </p:sp>
       <p:sp>
         <p:nvSpPr>
-          <p:cNvPr id="22" name="Rounded Rectangle 21"/>
+          <p:cNvPr id="21" name="Rounded Rectangle 20"/>
           <p:cNvSpPr/>
           <p:nvPr/>
         </p:nvSpPr>
@@ -7707,7 +7428,7 @@
       </p:sp>
       <p:sp>
         <p:nvSpPr>
-          <p:cNvPr id="23" name="TextBox 22"/>
+          <p:cNvPr id="22" name="TextBox 21"/>
           <p:cNvSpPr txBox="1"/>
           <p:nvPr/>
         </p:nvSpPr>
@@ -7754,7 +7475,7 @@
       </p:sp>
       <p:sp>
         <p:nvSpPr>
-          <p:cNvPr id="24" name="Rounded Rectangle 23"/>
+          <p:cNvPr id="23" name="Rounded Rectangle 22"/>
           <p:cNvSpPr/>
           <p:nvPr/>
         </p:nvSpPr>
@@ -7800,7 +7521,7 @@
       </p:sp>
       <p:sp>
         <p:nvSpPr>
-          <p:cNvPr id="25" name="TextBox 24"/>
+          <p:cNvPr id="24" name="TextBox 23"/>
           <p:cNvSpPr txBox="1"/>
           <p:nvPr/>
         </p:nvSpPr>
@@ -7847,7 +7568,7 @@
       </p:sp>
       <p:sp>
         <p:nvSpPr>
-          <p:cNvPr id="26" name="Rounded Rectangle 25"/>
+          <p:cNvPr id="25" name="Rounded Rectangle 24"/>
           <p:cNvSpPr/>
           <p:nvPr/>
         </p:nvSpPr>
@@ -7893,7 +7614,7 @@
       </p:sp>
       <p:sp>
         <p:nvSpPr>
-          <p:cNvPr id="27" name="TextBox 26"/>
+          <p:cNvPr id="26" name="TextBox 25"/>
           <p:cNvSpPr txBox="1"/>
           <p:nvPr/>
         </p:nvSpPr>
@@ -7940,7 +7661,7 @@
       </p:sp>
       <p:sp>
         <p:nvSpPr>
-          <p:cNvPr id="28" name="Rounded Rectangle 27"/>
+          <p:cNvPr id="27" name="Rounded Rectangle 26"/>
           <p:cNvSpPr/>
           <p:nvPr/>
         </p:nvSpPr>
@@ -7994,7 +7715,7 @@
       </p:sp>
       <p:sp>
         <p:nvSpPr>
-          <p:cNvPr id="29" name="Rectangle 28"/>
+          <p:cNvPr id="28" name="Rectangle 27"/>
           <p:cNvSpPr/>
           <p:nvPr/>
         </p:nvSpPr>
@@ -8038,7 +7759,7 @@
       </p:sp>
       <p:sp>
         <p:nvSpPr>
-          <p:cNvPr id="30" name="TextBox 29"/>
+          <p:cNvPr id="29" name="TextBox 28"/>
           <p:cNvSpPr txBox="1"/>
           <p:nvPr/>
         </p:nvSpPr>
@@ -8085,7 +7806,7 @@
       </p:sp>
       <p:sp>
         <p:nvSpPr>
-          <p:cNvPr id="31" name="Rounded Rectangle 30"/>
+          <p:cNvPr id="30" name="Rounded Rectangle 29"/>
           <p:cNvSpPr/>
           <p:nvPr/>
         </p:nvSpPr>
@@ -8131,7 +7852,7 @@
       </p:sp>
       <p:sp>
         <p:nvSpPr>
-          <p:cNvPr id="32" name="TextBox 31"/>
+          <p:cNvPr id="31" name="TextBox 30"/>
           <p:cNvSpPr txBox="1"/>
           <p:nvPr/>
         </p:nvSpPr>
@@ -8178,7 +7899,7 @@
       </p:sp>
       <p:sp>
         <p:nvSpPr>
-          <p:cNvPr id="33" name="Rounded Rectangle 32"/>
+          <p:cNvPr id="32" name="Rounded Rectangle 31"/>
           <p:cNvSpPr/>
           <p:nvPr/>
         </p:nvSpPr>
@@ -8224,7 +7945,7 @@
       </p:sp>
       <p:sp>
         <p:nvSpPr>
-          <p:cNvPr id="34" name="TextBox 33"/>
+          <p:cNvPr id="33" name="TextBox 32"/>
           <p:cNvSpPr txBox="1"/>
           <p:nvPr/>
         </p:nvSpPr>
@@ -8271,7 +7992,7 @@
       </p:sp>
       <p:sp>
         <p:nvSpPr>
-          <p:cNvPr id="35" name="Rounded Rectangle 34"/>
+          <p:cNvPr id="34" name="Rounded Rectangle 33"/>
           <p:cNvSpPr/>
           <p:nvPr/>
         </p:nvSpPr>
@@ -8317,7 +8038,7 @@
       </p:sp>
       <p:sp>
         <p:nvSpPr>
-          <p:cNvPr id="36" name="TextBox 35"/>
+          <p:cNvPr id="35" name="TextBox 34"/>
           <p:cNvSpPr txBox="1"/>
           <p:nvPr/>
         </p:nvSpPr>
@@ -8364,7 +8085,7 @@
       </p:sp>
       <p:sp>
         <p:nvSpPr>
-          <p:cNvPr id="37" name="Rounded Rectangle 36"/>
+          <p:cNvPr id="36" name="Rounded Rectangle 35"/>
           <p:cNvSpPr/>
           <p:nvPr/>
         </p:nvSpPr>
@@ -8418,7 +8139,7 @@
       </p:sp>
       <p:sp>
         <p:nvSpPr>
-          <p:cNvPr id="38" name="Rectangle 37"/>
+          <p:cNvPr id="37" name="Rectangle 36"/>
           <p:cNvSpPr/>
           <p:nvPr/>
         </p:nvSpPr>
@@ -8462,7 +8183,7 @@
       </p:sp>
       <p:sp>
         <p:nvSpPr>
-          <p:cNvPr id="39" name="TextBox 38"/>
+          <p:cNvPr id="38" name="TextBox 37"/>
           <p:cNvSpPr txBox="1"/>
           <p:nvPr/>
         </p:nvSpPr>
@@ -8509,7 +8230,7 @@
       </p:sp>
       <p:sp>
         <p:nvSpPr>
-          <p:cNvPr id="40" name="Rounded Rectangle 39"/>
+          <p:cNvPr id="39" name="Rounded Rectangle 38"/>
           <p:cNvSpPr/>
           <p:nvPr/>
         </p:nvSpPr>
@@ -8555,7 +8276,7 @@
       </p:sp>
       <p:sp>
         <p:nvSpPr>
-          <p:cNvPr id="41" name="TextBox 40"/>
+          <p:cNvPr id="40" name="TextBox 39"/>
           <p:cNvSpPr txBox="1"/>
           <p:nvPr/>
         </p:nvSpPr>
@@ -8602,7 +8323,7 @@
       </p:sp>
       <p:sp>
         <p:nvSpPr>
-          <p:cNvPr id="42" name="Rounded Rectangle 41"/>
+          <p:cNvPr id="41" name="Rounded Rectangle 40"/>
           <p:cNvSpPr/>
           <p:nvPr/>
         </p:nvSpPr>
@@ -8648,7 +8369,7 @@
       </p:sp>
       <p:sp>
         <p:nvSpPr>
-          <p:cNvPr id="43" name="TextBox 42"/>
+          <p:cNvPr id="42" name="TextBox 41"/>
           <p:cNvSpPr txBox="1"/>
           <p:nvPr/>
         </p:nvSpPr>
@@ -8695,7 +8416,7 @@
       </p:sp>
       <p:sp>
         <p:nvSpPr>
-          <p:cNvPr id="44" name="Rounded Rectangle 43"/>
+          <p:cNvPr id="43" name="Rounded Rectangle 42"/>
           <p:cNvSpPr/>
           <p:nvPr/>
         </p:nvSpPr>
@@ -8741,7 +8462,7 @@
       </p:sp>
       <p:sp>
         <p:nvSpPr>
-          <p:cNvPr id="45" name="TextBox 44"/>
+          <p:cNvPr id="44" name="TextBox 43"/>
           <p:cNvSpPr txBox="1"/>
           <p:nvPr/>
         </p:nvSpPr>
@@ -9179,54 +8900,7 @@
       </p:sp>
       <p:sp>
         <p:nvSpPr>
-          <p:cNvPr id="10" name="TextBox 9"/>
-          <p:cNvSpPr txBox="1"/>
-          <p:nvPr/>
-        </p:nvSpPr>
-        <p:spPr>
-          <a:xfrm>
-            <a:off x="987552" y="5943600"/>
-            <a:ext cx="6400800" cy="274320"/>
-          </a:xfrm>
-          <a:prstGeom prst="rect">
-            <a:avLst/>
-          </a:prstGeom>
-          <a:noFill/>
-        </p:spPr>
-        <p:txBody>
-          <a:bodyPr wrap="square" lIns="0" rIns="0" tIns="0" bIns="0" anchor="t">
-            <a:spAutoFit/>
-          </a:bodyPr>
-          <a:lstStyle/>
-          <a:p>
-            <a:pPr algn="l">
-              <a:lnSpc>
-                <a:spcPct val="122000"/>
-              </a:lnSpc>
-              <a:spcBef>
-                <a:spcPts val="0"/>
-              </a:spcBef>
-              <a:spcAft>
-                <a:spcPts val="0"/>
-              </a:spcAft>
-            </a:pPr>
-            <a:r>
-              <a:rPr sz="900" b="1" i="0" spc="160">
-                <a:solidFill>
-                  <a:srgbClr val="6B7FA6"/>
-                </a:solidFill>
-                <a:latin typeface="Segoe UI"/>
-                <a:ea typeface="Segoe UI"/>
-                <a:cs typeface="Segoe UI"/>
-              </a:rPr>
-              <a:t>UNIT 4  ·  ETHICS, LEGAL AND SOCIAL IMPLICATIONS</a:t>
-            </a:r>
-          </a:p>
-        </p:txBody>
-      </p:sp>
-      <p:sp>
-        <p:nvSpPr>
-          <p:cNvPr id="11" name="logo-plate"/>
+          <p:cNvPr id="10" name="logo-plate"/>
           <p:cNvSpPr/>
           <p:nvPr/>
         </p:nvSpPr>
@@ -9272,7 +8946,7 @@
       </p:sp>
       <p:pic>
         <p:nvPicPr>
-          <p:cNvPr id="12" name="college-logo" descr="logo-full.png"/>
+          <p:cNvPr id="11" name="college-logo" descr="logo-full.png"/>
           <p:cNvPicPr>
             <a:picLocks noChangeAspect="1"/>
           </p:cNvPicPr>
@@ -9388,8 +9062,77 @@
         </p:nvSpPr>
         <p:spPr>
           <a:xfrm>
-            <a:off x="713232" y="6272784"/>
-            <a:ext cx="5597920" cy="219456"/>
+            <a:off x="8240677" y="6272784"/>
+            <a:ext cx="2651760" cy="219456"/>
+          </a:xfrm>
+          <a:prstGeom prst="rect">
+            <a:avLst/>
+          </a:prstGeom>
+          <a:noFill/>
+        </p:spPr>
+        <p:txBody>
+          <a:bodyPr wrap="square" lIns="0" rIns="0" tIns="0" bIns="0" anchor="t">
+            <a:spAutoFit/>
+          </a:bodyPr>
+          <a:lstStyle/>
+          <a:p>
+            <a:pPr algn="r">
+              <a:lnSpc>
+                <a:spcPct val="122000"/>
+              </a:lnSpc>
+              <a:spcBef>
+                <a:spcPts val="0"/>
+              </a:spcBef>
+              <a:spcAft>
+                <a:spcPts val="0"/>
+              </a:spcAft>
+            </a:pPr>
+            <a:r>
+              <a:rPr sz="900" b="0" i="0">
+                <a:solidFill>
+                  <a:srgbClr val="636E85"/>
+                </a:solidFill>
+                <a:latin typeface="Segoe UI"/>
+                <a:ea typeface="Segoe UI"/>
+                <a:cs typeface="Segoe UI"/>
+              </a:rPr>
+              <a:t>Lingesh K  ·  OSI2509030</a:t>
+            </a:r>
+            <a:r>
+              <a:rPr sz="900" b="0" i="0">
+                <a:solidFill>
+                  <a:srgbClr val="141C2E"/>
+                </a:solidFill>
+                <a:latin typeface="Segoe UI"/>
+                <a:ea typeface="Segoe UI"/>
+                <a:cs typeface="Segoe UI"/>
+              </a:rPr>
+              <a:t>     </a:t>
+            </a:r>
+            <a:r>
+              <a:rPr sz="900" b="1" i="0">
+                <a:solidFill>
+                  <a:srgbClr val="0E1E3C"/>
+                </a:solidFill>
+                <a:latin typeface="Segoe UI"/>
+                <a:ea typeface="Segoe UI"/>
+                <a:cs typeface="Segoe UI"/>
+              </a:rPr>
+              <a:t>14</a:t>
+            </a:r>
+          </a:p>
+        </p:txBody>
+      </p:sp>
+      <p:sp>
+        <p:nvSpPr>
+          <p:cNvPr id="5" name="TextBox 4"/>
+          <p:cNvSpPr txBox="1"/>
+          <p:nvPr/>
+        </p:nvSpPr>
+        <p:spPr>
+          <a:xfrm>
+            <a:off x="713232" y="566928"/>
+            <a:ext cx="10765231" cy="219456"/>
           </a:xfrm>
           <a:prstGeom prst="rect">
             <a:avLst/>
@@ -9414,106 +9157,15 @@
               </a:spcAft>
             </a:pPr>
             <a:r>
-              <a:rPr sz="900" b="1" i="0">
-                <a:solidFill>
-                  <a:srgbClr val="0E1E3C"/>
-                </a:solidFill>
-                <a:latin typeface="Segoe UI"/>
-                <a:ea typeface="Segoe UI"/>
-                <a:cs typeface="Segoe UI"/>
-              </a:rPr>
-              <a:t>Unit 4</a:t>
-            </a:r>
-            <a:r>
-              <a:rPr sz="900" b="0" i="0">
-                <a:solidFill>
-                  <a:srgbClr val="939EB3"/>
-                </a:solidFill>
-                <a:latin typeface="Segoe UI"/>
-                <a:ea typeface="Segoe UI"/>
-                <a:cs typeface="Segoe UI"/>
-              </a:rPr>
-              <a:t>  ·  </a:t>
-            </a:r>
-            <a:r>
-              <a:rPr sz="900" b="0" i="0">
-                <a:solidFill>
-                  <a:srgbClr val="636E85"/>
-                </a:solidFill>
-                <a:latin typeface="Segoe UI"/>
-                <a:ea typeface="Segoe UI"/>
-                <a:cs typeface="Segoe UI"/>
-              </a:rPr>
-              <a:t>Ethics, Legal and Social Implications</a:t>
-            </a:r>
-          </a:p>
-        </p:txBody>
-      </p:sp>
-      <p:sp>
-        <p:nvSpPr>
-          <p:cNvPr id="5" name="TextBox 4"/>
-          <p:cNvSpPr txBox="1"/>
-          <p:nvPr/>
-        </p:nvSpPr>
-        <p:spPr>
-          <a:xfrm>
-            <a:off x="8240677" y="6272784"/>
-            <a:ext cx="2651760" cy="219456"/>
-          </a:xfrm>
-          <a:prstGeom prst="rect">
-            <a:avLst/>
-          </a:prstGeom>
-          <a:noFill/>
-        </p:spPr>
-        <p:txBody>
-          <a:bodyPr wrap="square" lIns="0" rIns="0" tIns="0" bIns="0" anchor="t">
-            <a:spAutoFit/>
-          </a:bodyPr>
-          <a:lstStyle/>
-          <a:p>
-            <a:pPr algn="r">
-              <a:lnSpc>
-                <a:spcPct val="122000"/>
-              </a:lnSpc>
-              <a:spcBef>
-                <a:spcPts val="0"/>
-              </a:spcBef>
-              <a:spcAft>
-                <a:spcPts val="0"/>
-              </a:spcAft>
-            </a:pPr>
-            <a:r>
-              <a:rPr sz="900" b="0" i="0">
-                <a:solidFill>
-                  <a:srgbClr val="636E85"/>
-                </a:solidFill>
-                <a:latin typeface="Segoe UI"/>
-                <a:ea typeface="Segoe UI"/>
-                <a:cs typeface="Segoe UI"/>
-              </a:rPr>
-              <a:t>Lingesh K  ·  OSI2509030</a:t>
-            </a:r>
-            <a:r>
-              <a:rPr sz="900" b="0" i="0">
-                <a:solidFill>
-                  <a:srgbClr val="141C2E"/>
-                </a:solidFill>
-                <a:latin typeface="Segoe UI"/>
-                <a:ea typeface="Segoe UI"/>
-                <a:cs typeface="Segoe UI"/>
-              </a:rPr>
-              <a:t>     </a:t>
-            </a:r>
-            <a:r>
-              <a:rPr sz="900" b="1" i="0">
-                <a:solidFill>
-                  <a:srgbClr val="0E1E3C"/>
-                </a:solidFill>
-                <a:latin typeface="Segoe UI"/>
-                <a:ea typeface="Segoe UI"/>
-                <a:cs typeface="Segoe UI"/>
-              </a:rPr>
-              <a:t>14</a:t>
+              <a:rPr sz="950" b="1" i="0" spc="160">
+                <a:solidFill>
+                  <a:srgbClr val="27A06A"/>
+                </a:solidFill>
+                <a:latin typeface="Segoe UI"/>
+                <a:ea typeface="Segoe UI"/>
+                <a:cs typeface="Segoe UI"/>
+              </a:rPr>
+              <a:t>THE GLOBAL PICTURE</a:t>
             </a:r>
           </a:p>
         </p:txBody>
@@ -9521,53 +9173,6 @@
       <p:sp>
         <p:nvSpPr>
           <p:cNvPr id="6" name="TextBox 5"/>
-          <p:cNvSpPr txBox="1"/>
-          <p:nvPr/>
-        </p:nvSpPr>
-        <p:spPr>
-          <a:xfrm>
-            <a:off x="713232" y="566928"/>
-            <a:ext cx="10765231" cy="219456"/>
-          </a:xfrm>
-          <a:prstGeom prst="rect">
-            <a:avLst/>
-          </a:prstGeom>
-          <a:noFill/>
-        </p:spPr>
-        <p:txBody>
-          <a:bodyPr wrap="square" lIns="0" rIns="0" tIns="0" bIns="0" anchor="t">
-            <a:spAutoFit/>
-          </a:bodyPr>
-          <a:lstStyle/>
-          <a:p>
-            <a:pPr algn="l">
-              <a:lnSpc>
-                <a:spcPct val="122000"/>
-              </a:lnSpc>
-              <a:spcBef>
-                <a:spcPts val="0"/>
-              </a:spcBef>
-              <a:spcAft>
-                <a:spcPts val="0"/>
-              </a:spcAft>
-            </a:pPr>
-            <a:r>
-              <a:rPr sz="950" b="1" i="0" spc="160">
-                <a:solidFill>
-                  <a:srgbClr val="27A06A"/>
-                </a:solidFill>
-                <a:latin typeface="Segoe UI"/>
-                <a:ea typeface="Segoe UI"/>
-                <a:cs typeface="Segoe UI"/>
-              </a:rPr>
-              <a:t>THE GLOBAL PICTURE</a:t>
-            </a:r>
-          </a:p>
-        </p:txBody>
-      </p:sp>
-      <p:sp>
-        <p:nvSpPr>
-          <p:cNvPr id="7" name="TextBox 6"/>
           <p:cNvSpPr txBox="1"/>
           <p:nvPr/>
         </p:nvSpPr>
@@ -9614,7 +9219,7 @@
       </p:sp>
       <p:sp>
         <p:nvSpPr>
-          <p:cNvPr id="8" name="Rectangle 7"/>
+          <p:cNvPr id="7" name="Rectangle 6"/>
           <p:cNvSpPr/>
           <p:nvPr/>
         </p:nvSpPr>
@@ -9658,7 +9263,7 @@
       </p:sp>
       <p:graphicFrame>
         <p:nvGraphicFramePr>
-          <p:cNvPr id="9" name="Table 8"/>
+          <p:cNvPr id="8" name="Table 7"/>
           <p:cNvGraphicFramePr>
             <a:graphicFrameLocks noGrp="1"/>
           </p:cNvGraphicFramePr>
@@ -10538,7 +10143,7 @@
       </p:graphicFrame>
       <p:sp>
         <p:nvSpPr>
-          <p:cNvPr id="10" name="Rounded Rectangle 9"/>
+          <p:cNvPr id="9" name="Rounded Rectangle 8"/>
           <p:cNvSpPr/>
           <p:nvPr/>
         </p:nvSpPr>
@@ -10605,7 +10210,7 @@
       </p:sp>
       <p:sp>
         <p:nvSpPr>
-          <p:cNvPr id="11" name="Rectangle 10"/>
+          <p:cNvPr id="10" name="Rectangle 9"/>
           <p:cNvSpPr/>
           <p:nvPr/>
         </p:nvSpPr>
@@ -10741,8 +10346,77 @@
         </p:nvSpPr>
         <p:spPr>
           <a:xfrm>
-            <a:off x="713232" y="6272784"/>
-            <a:ext cx="5597920" cy="219456"/>
+            <a:off x="8240677" y="6272784"/>
+            <a:ext cx="2651760" cy="219456"/>
+          </a:xfrm>
+          <a:prstGeom prst="rect">
+            <a:avLst/>
+          </a:prstGeom>
+          <a:noFill/>
+        </p:spPr>
+        <p:txBody>
+          <a:bodyPr wrap="square" lIns="0" rIns="0" tIns="0" bIns="0" anchor="t">
+            <a:spAutoFit/>
+          </a:bodyPr>
+          <a:lstStyle/>
+          <a:p>
+            <a:pPr algn="r">
+              <a:lnSpc>
+                <a:spcPct val="122000"/>
+              </a:lnSpc>
+              <a:spcBef>
+                <a:spcPts val="0"/>
+              </a:spcBef>
+              <a:spcAft>
+                <a:spcPts val="0"/>
+              </a:spcAft>
+            </a:pPr>
+            <a:r>
+              <a:rPr sz="900" b="0" i="0">
+                <a:solidFill>
+                  <a:srgbClr val="636E85"/>
+                </a:solidFill>
+                <a:latin typeface="Segoe UI"/>
+                <a:ea typeface="Segoe UI"/>
+                <a:cs typeface="Segoe UI"/>
+              </a:rPr>
+              <a:t>Lingesh K  ·  OSI2509030</a:t>
+            </a:r>
+            <a:r>
+              <a:rPr sz="900" b="0" i="0">
+                <a:solidFill>
+                  <a:srgbClr val="141C2E"/>
+                </a:solidFill>
+                <a:latin typeface="Segoe UI"/>
+                <a:ea typeface="Segoe UI"/>
+                <a:cs typeface="Segoe UI"/>
+              </a:rPr>
+              <a:t>     </a:t>
+            </a:r>
+            <a:r>
+              <a:rPr sz="900" b="1" i="0">
+                <a:solidFill>
+                  <a:srgbClr val="0E1E3C"/>
+                </a:solidFill>
+                <a:latin typeface="Segoe UI"/>
+                <a:ea typeface="Segoe UI"/>
+                <a:cs typeface="Segoe UI"/>
+              </a:rPr>
+              <a:t>15</a:t>
+            </a:r>
+          </a:p>
+        </p:txBody>
+      </p:sp>
+      <p:sp>
+        <p:nvSpPr>
+          <p:cNvPr id="5" name="TextBox 4"/>
+          <p:cNvSpPr txBox="1"/>
+          <p:nvPr/>
+        </p:nvSpPr>
+        <p:spPr>
+          <a:xfrm>
+            <a:off x="713232" y="566928"/>
+            <a:ext cx="10765231" cy="219456"/>
           </a:xfrm>
           <a:prstGeom prst="rect">
             <a:avLst/>
@@ -10767,106 +10441,15 @@
               </a:spcAft>
             </a:pPr>
             <a:r>
-              <a:rPr sz="900" b="1" i="0">
-                <a:solidFill>
-                  <a:srgbClr val="0E1E3C"/>
-                </a:solidFill>
-                <a:latin typeface="Segoe UI"/>
-                <a:ea typeface="Segoe UI"/>
-                <a:cs typeface="Segoe UI"/>
-              </a:rPr>
-              <a:t>Unit 4</a:t>
-            </a:r>
-            <a:r>
-              <a:rPr sz="900" b="0" i="0">
-                <a:solidFill>
-                  <a:srgbClr val="939EB3"/>
-                </a:solidFill>
-                <a:latin typeface="Segoe UI"/>
-                <a:ea typeface="Segoe UI"/>
-                <a:cs typeface="Segoe UI"/>
-              </a:rPr>
-              <a:t>  ·  </a:t>
-            </a:r>
-            <a:r>
-              <a:rPr sz="900" b="0" i="0">
-                <a:solidFill>
-                  <a:srgbClr val="636E85"/>
-                </a:solidFill>
-                <a:latin typeface="Segoe UI"/>
-                <a:ea typeface="Segoe UI"/>
-                <a:cs typeface="Segoe UI"/>
-              </a:rPr>
-              <a:t>Ethics, Legal and Social Implications</a:t>
-            </a:r>
-          </a:p>
-        </p:txBody>
-      </p:sp>
-      <p:sp>
-        <p:nvSpPr>
-          <p:cNvPr id="5" name="TextBox 4"/>
-          <p:cNvSpPr txBox="1"/>
-          <p:nvPr/>
-        </p:nvSpPr>
-        <p:spPr>
-          <a:xfrm>
-            <a:off x="8240677" y="6272784"/>
-            <a:ext cx="2651760" cy="219456"/>
-          </a:xfrm>
-          <a:prstGeom prst="rect">
-            <a:avLst/>
-          </a:prstGeom>
-          <a:noFill/>
-        </p:spPr>
-        <p:txBody>
-          <a:bodyPr wrap="square" lIns="0" rIns="0" tIns="0" bIns="0" anchor="t">
-            <a:spAutoFit/>
-          </a:bodyPr>
-          <a:lstStyle/>
-          <a:p>
-            <a:pPr algn="r">
-              <a:lnSpc>
-                <a:spcPct val="122000"/>
-              </a:lnSpc>
-              <a:spcBef>
-                <a:spcPts val="0"/>
-              </a:spcBef>
-              <a:spcAft>
-                <a:spcPts val="0"/>
-              </a:spcAft>
-            </a:pPr>
-            <a:r>
-              <a:rPr sz="900" b="0" i="0">
-                <a:solidFill>
-                  <a:srgbClr val="636E85"/>
-                </a:solidFill>
-                <a:latin typeface="Segoe UI"/>
-                <a:ea typeface="Segoe UI"/>
-                <a:cs typeface="Segoe UI"/>
-              </a:rPr>
-              <a:t>Lingesh K  ·  OSI2509030</a:t>
-            </a:r>
-            <a:r>
-              <a:rPr sz="900" b="0" i="0">
-                <a:solidFill>
-                  <a:srgbClr val="141C2E"/>
-                </a:solidFill>
-                <a:latin typeface="Segoe UI"/>
-                <a:ea typeface="Segoe UI"/>
-                <a:cs typeface="Segoe UI"/>
-              </a:rPr>
-              <a:t>     </a:t>
-            </a:r>
-            <a:r>
-              <a:rPr sz="900" b="1" i="0">
-                <a:solidFill>
-                  <a:srgbClr val="0E1E3C"/>
-                </a:solidFill>
-                <a:latin typeface="Segoe UI"/>
-                <a:ea typeface="Segoe UI"/>
-                <a:cs typeface="Segoe UI"/>
-              </a:rPr>
-              <a:t>15</a:t>
+              <a:rPr sz="950" b="1" i="0" spc="160">
+                <a:solidFill>
+                  <a:srgbClr val="27A06A"/>
+                </a:solidFill>
+                <a:latin typeface="Segoe UI"/>
+                <a:ea typeface="Segoe UI"/>
+                <a:cs typeface="Segoe UI"/>
+              </a:rPr>
+              <a:t>THE CORE IDEA</a:t>
             </a:r>
           </a:p>
         </p:txBody>
@@ -10874,53 +10457,6 @@
       <p:sp>
         <p:nvSpPr>
           <p:cNvPr id="6" name="TextBox 5"/>
-          <p:cNvSpPr txBox="1"/>
-          <p:nvPr/>
-        </p:nvSpPr>
-        <p:spPr>
-          <a:xfrm>
-            <a:off x="713232" y="566928"/>
-            <a:ext cx="10765231" cy="219456"/>
-          </a:xfrm>
-          <a:prstGeom prst="rect">
-            <a:avLst/>
-          </a:prstGeom>
-          <a:noFill/>
-        </p:spPr>
-        <p:txBody>
-          <a:bodyPr wrap="square" lIns="0" rIns="0" tIns="0" bIns="0" anchor="t">
-            <a:spAutoFit/>
-          </a:bodyPr>
-          <a:lstStyle/>
-          <a:p>
-            <a:pPr algn="l">
-              <a:lnSpc>
-                <a:spcPct val="122000"/>
-              </a:lnSpc>
-              <a:spcBef>
-                <a:spcPts val="0"/>
-              </a:spcBef>
-              <a:spcAft>
-                <a:spcPts val="0"/>
-              </a:spcAft>
-            </a:pPr>
-            <a:r>
-              <a:rPr sz="950" b="1" i="0" spc="160">
-                <a:solidFill>
-                  <a:srgbClr val="27A06A"/>
-                </a:solidFill>
-                <a:latin typeface="Segoe UI"/>
-                <a:ea typeface="Segoe UI"/>
-                <a:cs typeface="Segoe UI"/>
-              </a:rPr>
-              <a:t>THE CORE IDEA</a:t>
-            </a:r>
-          </a:p>
-        </p:txBody>
-      </p:sp>
-      <p:sp>
-        <p:nvSpPr>
-          <p:cNvPr id="7" name="TextBox 6"/>
           <p:cNvSpPr txBox="1"/>
           <p:nvPr/>
         </p:nvSpPr>
@@ -10967,7 +10503,7 @@
       </p:sp>
       <p:sp>
         <p:nvSpPr>
-          <p:cNvPr id="8" name="Rectangle 7"/>
+          <p:cNvPr id="7" name="Rectangle 6"/>
           <p:cNvSpPr/>
           <p:nvPr/>
         </p:nvSpPr>
@@ -11011,7 +10547,7 @@
       </p:sp>
       <p:sp>
         <p:nvSpPr>
-          <p:cNvPr id="9" name="TextBox 8"/>
+          <p:cNvPr id="8" name="TextBox 7"/>
           <p:cNvSpPr txBox="1"/>
           <p:nvPr/>
         </p:nvSpPr>
@@ -11058,7 +10594,7 @@
       </p:sp>
       <p:sp>
         <p:nvSpPr>
-          <p:cNvPr id="10" name="Rounded Rectangle 9"/>
+          <p:cNvPr id="9" name="Rounded Rectangle 8"/>
           <p:cNvSpPr/>
           <p:nvPr/>
         </p:nvSpPr>
@@ -11112,7 +10648,7 @@
       </p:sp>
       <p:sp>
         <p:nvSpPr>
-          <p:cNvPr id="11" name="Rectangle 10"/>
+          <p:cNvPr id="10" name="Rectangle 9"/>
           <p:cNvSpPr/>
           <p:nvPr/>
         </p:nvSpPr>
@@ -11156,7 +10692,7 @@
       </p:sp>
       <p:sp>
         <p:nvSpPr>
-          <p:cNvPr id="12" name="Oval 11"/>
+          <p:cNvPr id="11" name="Oval 10"/>
           <p:cNvSpPr/>
           <p:nvPr/>
         </p:nvSpPr>
@@ -11200,7 +10736,7 @@
       </p:sp>
       <p:sp>
         <p:nvSpPr>
-          <p:cNvPr id="13" name="TextBox 12"/>
+          <p:cNvPr id="12" name="TextBox 11"/>
           <p:cNvSpPr txBox="1"/>
           <p:nvPr/>
         </p:nvSpPr>
@@ -11247,7 +10783,7 @@
       </p:sp>
       <p:sp>
         <p:nvSpPr>
-          <p:cNvPr id="14" name="TextBox 13"/>
+          <p:cNvPr id="13" name="TextBox 12"/>
           <p:cNvSpPr txBox="1"/>
           <p:nvPr/>
         </p:nvSpPr>
@@ -11294,7 +10830,7 @@
       </p:sp>
       <p:sp>
         <p:nvSpPr>
-          <p:cNvPr id="15" name="TextBox 14"/>
+          <p:cNvPr id="14" name="TextBox 13"/>
           <p:cNvSpPr txBox="1"/>
           <p:nvPr/>
         </p:nvSpPr>
@@ -11341,7 +10877,7 @@
       </p:sp>
       <p:sp>
         <p:nvSpPr>
-          <p:cNvPr id="16" name="Rounded Rectangle 15"/>
+          <p:cNvPr id="15" name="Rounded Rectangle 14"/>
           <p:cNvSpPr/>
           <p:nvPr/>
         </p:nvSpPr>
@@ -11395,7 +10931,7 @@
       </p:sp>
       <p:sp>
         <p:nvSpPr>
-          <p:cNvPr id="17" name="Rectangle 16"/>
+          <p:cNvPr id="16" name="Rectangle 15"/>
           <p:cNvSpPr/>
           <p:nvPr/>
         </p:nvSpPr>
@@ -11439,7 +10975,7 @@
       </p:sp>
       <p:sp>
         <p:nvSpPr>
-          <p:cNvPr id="18" name="Oval 17"/>
+          <p:cNvPr id="17" name="Oval 16"/>
           <p:cNvSpPr/>
           <p:nvPr/>
         </p:nvSpPr>
@@ -11483,7 +11019,7 @@
       </p:sp>
       <p:sp>
         <p:nvSpPr>
-          <p:cNvPr id="19" name="TextBox 18"/>
+          <p:cNvPr id="18" name="TextBox 17"/>
           <p:cNvSpPr txBox="1"/>
           <p:nvPr/>
         </p:nvSpPr>
@@ -11530,7 +11066,7 @@
       </p:sp>
       <p:sp>
         <p:nvSpPr>
-          <p:cNvPr id="20" name="TextBox 19"/>
+          <p:cNvPr id="19" name="TextBox 18"/>
           <p:cNvSpPr txBox="1"/>
           <p:nvPr/>
         </p:nvSpPr>
@@ -11577,7 +11113,7 @@
       </p:sp>
       <p:sp>
         <p:nvSpPr>
-          <p:cNvPr id="21" name="TextBox 20"/>
+          <p:cNvPr id="20" name="TextBox 19"/>
           <p:cNvSpPr txBox="1"/>
           <p:nvPr/>
         </p:nvSpPr>
@@ -11624,7 +11160,7 @@
       </p:sp>
       <p:sp>
         <p:nvSpPr>
-          <p:cNvPr id="22" name="Rounded Rectangle 21"/>
+          <p:cNvPr id="21" name="Rounded Rectangle 20"/>
           <p:cNvSpPr/>
           <p:nvPr/>
         </p:nvSpPr>
@@ -11678,7 +11214,7 @@
       </p:sp>
       <p:sp>
         <p:nvSpPr>
-          <p:cNvPr id="23" name="Rectangle 22"/>
+          <p:cNvPr id="22" name="Rectangle 21"/>
           <p:cNvSpPr/>
           <p:nvPr/>
         </p:nvSpPr>
@@ -11722,7 +11258,7 @@
       </p:sp>
       <p:sp>
         <p:nvSpPr>
-          <p:cNvPr id="24" name="Oval 23"/>
+          <p:cNvPr id="23" name="Oval 22"/>
           <p:cNvSpPr/>
           <p:nvPr/>
         </p:nvSpPr>
@@ -11766,7 +11302,7 @@
       </p:sp>
       <p:sp>
         <p:nvSpPr>
-          <p:cNvPr id="25" name="TextBox 24"/>
+          <p:cNvPr id="24" name="TextBox 23"/>
           <p:cNvSpPr txBox="1"/>
           <p:nvPr/>
         </p:nvSpPr>
@@ -11813,7 +11349,7 @@
       </p:sp>
       <p:sp>
         <p:nvSpPr>
-          <p:cNvPr id="26" name="TextBox 25"/>
+          <p:cNvPr id="25" name="TextBox 24"/>
           <p:cNvSpPr txBox="1"/>
           <p:nvPr/>
         </p:nvSpPr>
@@ -11860,7 +11396,7 @@
       </p:sp>
       <p:sp>
         <p:nvSpPr>
-          <p:cNvPr id="27" name="TextBox 26"/>
+          <p:cNvPr id="26" name="TextBox 25"/>
           <p:cNvSpPr txBox="1"/>
           <p:nvPr/>
         </p:nvSpPr>
@@ -11907,7 +11443,7 @@
       </p:sp>
       <p:sp>
         <p:nvSpPr>
-          <p:cNvPr id="28" name="Rounded Rectangle 27"/>
+          <p:cNvPr id="27" name="Rounded Rectangle 26"/>
           <p:cNvSpPr/>
           <p:nvPr/>
         </p:nvSpPr>
@@ -11961,7 +11497,7 @@
       </p:sp>
       <p:sp>
         <p:nvSpPr>
-          <p:cNvPr id="29" name="Rectangle 28"/>
+          <p:cNvPr id="28" name="Rectangle 27"/>
           <p:cNvSpPr/>
           <p:nvPr/>
         </p:nvSpPr>
@@ -12005,7 +11541,7 @@
       </p:sp>
       <p:sp>
         <p:nvSpPr>
-          <p:cNvPr id="30" name="Oval 29"/>
+          <p:cNvPr id="29" name="Oval 28"/>
           <p:cNvSpPr/>
           <p:nvPr/>
         </p:nvSpPr>
@@ -12049,7 +11585,7 @@
       </p:sp>
       <p:sp>
         <p:nvSpPr>
-          <p:cNvPr id="31" name="TextBox 30"/>
+          <p:cNvPr id="30" name="TextBox 29"/>
           <p:cNvSpPr txBox="1"/>
           <p:nvPr/>
         </p:nvSpPr>
@@ -12096,7 +11632,7 @@
       </p:sp>
       <p:sp>
         <p:nvSpPr>
-          <p:cNvPr id="32" name="TextBox 31"/>
+          <p:cNvPr id="31" name="TextBox 30"/>
           <p:cNvSpPr txBox="1"/>
           <p:nvPr/>
         </p:nvSpPr>
@@ -12143,7 +11679,7 @@
       </p:sp>
       <p:sp>
         <p:nvSpPr>
-          <p:cNvPr id="33" name="TextBox 32"/>
+          <p:cNvPr id="32" name="TextBox 31"/>
           <p:cNvSpPr txBox="1"/>
           <p:nvPr/>
         </p:nvSpPr>
@@ -12282,8 +11818,77 @@
         </p:nvSpPr>
         <p:spPr>
           <a:xfrm>
-            <a:off x="713232" y="6272784"/>
-            <a:ext cx="5597920" cy="219456"/>
+            <a:off x="8240677" y="6272784"/>
+            <a:ext cx="2651760" cy="219456"/>
+          </a:xfrm>
+          <a:prstGeom prst="rect">
+            <a:avLst/>
+          </a:prstGeom>
+          <a:noFill/>
+        </p:spPr>
+        <p:txBody>
+          <a:bodyPr wrap="square" lIns="0" rIns="0" tIns="0" bIns="0" anchor="t">
+            <a:spAutoFit/>
+          </a:bodyPr>
+          <a:lstStyle/>
+          <a:p>
+            <a:pPr algn="r">
+              <a:lnSpc>
+                <a:spcPct val="122000"/>
+              </a:lnSpc>
+              <a:spcBef>
+                <a:spcPts val="0"/>
+              </a:spcBef>
+              <a:spcAft>
+                <a:spcPts val="0"/>
+              </a:spcAft>
+            </a:pPr>
+            <a:r>
+              <a:rPr sz="900" b="0" i="0">
+                <a:solidFill>
+                  <a:srgbClr val="636E85"/>
+                </a:solidFill>
+                <a:latin typeface="Segoe UI"/>
+                <a:ea typeface="Segoe UI"/>
+                <a:cs typeface="Segoe UI"/>
+              </a:rPr>
+              <a:t>Lingesh K  ·  OSI2509030</a:t>
+            </a:r>
+            <a:r>
+              <a:rPr sz="900" b="0" i="0">
+                <a:solidFill>
+                  <a:srgbClr val="141C2E"/>
+                </a:solidFill>
+                <a:latin typeface="Segoe UI"/>
+                <a:ea typeface="Segoe UI"/>
+                <a:cs typeface="Segoe UI"/>
+              </a:rPr>
+              <a:t>     </a:t>
+            </a:r>
+            <a:r>
+              <a:rPr sz="900" b="1" i="0">
+                <a:solidFill>
+                  <a:srgbClr val="0E1E3C"/>
+                </a:solidFill>
+                <a:latin typeface="Segoe UI"/>
+                <a:ea typeface="Segoe UI"/>
+                <a:cs typeface="Segoe UI"/>
+              </a:rPr>
+              <a:t>16</a:t>
+            </a:r>
+          </a:p>
+        </p:txBody>
+      </p:sp>
+      <p:sp>
+        <p:nvSpPr>
+          <p:cNvPr id="5" name="TextBox 4"/>
+          <p:cNvSpPr txBox="1"/>
+          <p:nvPr/>
+        </p:nvSpPr>
+        <p:spPr>
+          <a:xfrm>
+            <a:off x="713232" y="566928"/>
+            <a:ext cx="10765231" cy="219456"/>
           </a:xfrm>
           <a:prstGeom prst="rect">
             <a:avLst/>
@@ -12308,106 +11913,15 @@
               </a:spcAft>
             </a:pPr>
             <a:r>
-              <a:rPr sz="900" b="1" i="0">
-                <a:solidFill>
-                  <a:srgbClr val="0E1E3C"/>
-                </a:solidFill>
-                <a:latin typeface="Segoe UI"/>
-                <a:ea typeface="Segoe UI"/>
-                <a:cs typeface="Segoe UI"/>
-              </a:rPr>
-              <a:t>Unit 4</a:t>
-            </a:r>
-            <a:r>
-              <a:rPr sz="900" b="0" i="0">
-                <a:solidFill>
-                  <a:srgbClr val="939EB3"/>
-                </a:solidFill>
-                <a:latin typeface="Segoe UI"/>
-                <a:ea typeface="Segoe UI"/>
-                <a:cs typeface="Segoe UI"/>
-              </a:rPr>
-              <a:t>  ·  </a:t>
-            </a:r>
-            <a:r>
-              <a:rPr sz="900" b="0" i="0">
-                <a:solidFill>
-                  <a:srgbClr val="636E85"/>
-                </a:solidFill>
-                <a:latin typeface="Segoe UI"/>
-                <a:ea typeface="Segoe UI"/>
-                <a:cs typeface="Segoe UI"/>
-              </a:rPr>
-              <a:t>Ethics, Legal and Social Implications</a:t>
-            </a:r>
-          </a:p>
-        </p:txBody>
-      </p:sp>
-      <p:sp>
-        <p:nvSpPr>
-          <p:cNvPr id="5" name="TextBox 4"/>
-          <p:cNvSpPr txBox="1"/>
-          <p:nvPr/>
-        </p:nvSpPr>
-        <p:spPr>
-          <a:xfrm>
-            <a:off x="8240677" y="6272784"/>
-            <a:ext cx="2651760" cy="219456"/>
-          </a:xfrm>
-          <a:prstGeom prst="rect">
-            <a:avLst/>
-          </a:prstGeom>
-          <a:noFill/>
-        </p:spPr>
-        <p:txBody>
-          <a:bodyPr wrap="square" lIns="0" rIns="0" tIns="0" bIns="0" anchor="t">
-            <a:spAutoFit/>
-          </a:bodyPr>
-          <a:lstStyle/>
-          <a:p>
-            <a:pPr algn="r">
-              <a:lnSpc>
-                <a:spcPct val="122000"/>
-              </a:lnSpc>
-              <a:spcBef>
-                <a:spcPts val="0"/>
-              </a:spcBef>
-              <a:spcAft>
-                <a:spcPts val="0"/>
-              </a:spcAft>
-            </a:pPr>
-            <a:r>
-              <a:rPr sz="900" b="0" i="0">
-                <a:solidFill>
-                  <a:srgbClr val="636E85"/>
-                </a:solidFill>
-                <a:latin typeface="Segoe UI"/>
-                <a:ea typeface="Segoe UI"/>
-                <a:cs typeface="Segoe UI"/>
-              </a:rPr>
-              <a:t>Lingesh K  ·  OSI2509030</a:t>
-            </a:r>
-            <a:r>
-              <a:rPr sz="900" b="0" i="0">
-                <a:solidFill>
-                  <a:srgbClr val="141C2E"/>
-                </a:solidFill>
-                <a:latin typeface="Segoe UI"/>
-                <a:ea typeface="Segoe UI"/>
-                <a:cs typeface="Segoe UI"/>
-              </a:rPr>
-              <a:t>     </a:t>
-            </a:r>
-            <a:r>
-              <a:rPr sz="900" b="1" i="0">
-                <a:solidFill>
-                  <a:srgbClr val="0E1E3C"/>
-                </a:solidFill>
-                <a:latin typeface="Segoe UI"/>
-                <a:ea typeface="Segoe UI"/>
-                <a:cs typeface="Segoe UI"/>
-              </a:rPr>
-              <a:t>16</a:t>
+              <a:rPr sz="950" b="1" i="0" spc="160">
+                <a:solidFill>
+                  <a:srgbClr val="3B7AF7"/>
+                </a:solidFill>
+                <a:latin typeface="Segoe UI"/>
+                <a:ea typeface="Segoe UI"/>
+                <a:cs typeface="Segoe UI"/>
+              </a:rPr>
+              <a:t>COMPLIANCE IN PRACTICE</a:t>
             </a:r>
           </a:p>
         </p:txBody>
@@ -12415,53 +11929,6 @@
       <p:sp>
         <p:nvSpPr>
           <p:cNvPr id="6" name="TextBox 5"/>
-          <p:cNvSpPr txBox="1"/>
-          <p:nvPr/>
-        </p:nvSpPr>
-        <p:spPr>
-          <a:xfrm>
-            <a:off x="713232" y="566928"/>
-            <a:ext cx="10765231" cy="219456"/>
-          </a:xfrm>
-          <a:prstGeom prst="rect">
-            <a:avLst/>
-          </a:prstGeom>
-          <a:noFill/>
-        </p:spPr>
-        <p:txBody>
-          <a:bodyPr wrap="square" lIns="0" rIns="0" tIns="0" bIns="0" anchor="t">
-            <a:spAutoFit/>
-          </a:bodyPr>
-          <a:lstStyle/>
-          <a:p>
-            <a:pPr algn="l">
-              <a:lnSpc>
-                <a:spcPct val="122000"/>
-              </a:lnSpc>
-              <a:spcBef>
-                <a:spcPts val="0"/>
-              </a:spcBef>
-              <a:spcAft>
-                <a:spcPts val="0"/>
-              </a:spcAft>
-            </a:pPr>
-            <a:r>
-              <a:rPr sz="950" b="1" i="0" spc="160">
-                <a:solidFill>
-                  <a:srgbClr val="3B7AF7"/>
-                </a:solidFill>
-                <a:latin typeface="Segoe UI"/>
-                <a:ea typeface="Segoe UI"/>
-                <a:cs typeface="Segoe UI"/>
-              </a:rPr>
-              <a:t>COMPLIANCE IN PRACTICE</a:t>
-            </a:r>
-          </a:p>
-        </p:txBody>
-      </p:sp>
-      <p:sp>
-        <p:nvSpPr>
-          <p:cNvPr id="7" name="TextBox 6"/>
           <p:cNvSpPr txBox="1"/>
           <p:nvPr/>
         </p:nvSpPr>
@@ -12508,7 +11975,7 @@
       </p:sp>
       <p:sp>
         <p:nvSpPr>
-          <p:cNvPr id="8" name="Rectangle 7"/>
+          <p:cNvPr id="7" name="Rectangle 6"/>
           <p:cNvSpPr/>
           <p:nvPr/>
         </p:nvSpPr>
@@ -12552,7 +12019,7 @@
       </p:sp>
       <p:sp>
         <p:nvSpPr>
-          <p:cNvPr id="9" name="Rounded Rectangle 8"/>
+          <p:cNvPr id="8" name="Rounded Rectangle 7"/>
           <p:cNvSpPr/>
           <p:nvPr/>
         </p:nvSpPr>
@@ -12606,7 +12073,7 @@
       </p:sp>
       <p:sp>
         <p:nvSpPr>
-          <p:cNvPr id="10" name="Rectangle 9"/>
+          <p:cNvPr id="9" name="Rectangle 8"/>
           <p:cNvSpPr/>
           <p:nvPr/>
         </p:nvSpPr>
@@ -12650,7 +12117,7 @@
       </p:sp>
       <p:sp>
         <p:nvSpPr>
-          <p:cNvPr id="11" name="TextBox 10"/>
+          <p:cNvPr id="10" name="TextBox 9"/>
           <p:cNvSpPr txBox="1"/>
           <p:nvPr/>
         </p:nvSpPr>
@@ -12697,7 +12164,7 @@
       </p:sp>
       <p:sp>
         <p:nvSpPr>
-          <p:cNvPr id="12" name="TextBox 11"/>
+          <p:cNvPr id="11" name="TextBox 10"/>
           <p:cNvSpPr txBox="1"/>
           <p:nvPr/>
         </p:nvSpPr>
@@ -12744,7 +12211,7 @@
       </p:sp>
       <p:sp>
         <p:nvSpPr>
-          <p:cNvPr id="13" name="Rounded Rectangle 12"/>
+          <p:cNvPr id="12" name="Rounded Rectangle 11"/>
           <p:cNvSpPr/>
           <p:nvPr/>
         </p:nvSpPr>
@@ -12798,7 +12265,7 @@
       </p:sp>
       <p:sp>
         <p:nvSpPr>
-          <p:cNvPr id="14" name="Rectangle 13"/>
+          <p:cNvPr id="13" name="Rectangle 12"/>
           <p:cNvSpPr/>
           <p:nvPr/>
         </p:nvSpPr>
@@ -12842,7 +12309,7 @@
       </p:sp>
       <p:sp>
         <p:nvSpPr>
-          <p:cNvPr id="15" name="TextBox 14"/>
+          <p:cNvPr id="14" name="TextBox 13"/>
           <p:cNvSpPr txBox="1"/>
           <p:nvPr/>
         </p:nvSpPr>
@@ -12889,7 +12356,7 @@
       </p:sp>
       <p:sp>
         <p:nvSpPr>
-          <p:cNvPr id="16" name="TextBox 15"/>
+          <p:cNvPr id="15" name="TextBox 14"/>
           <p:cNvSpPr txBox="1"/>
           <p:nvPr/>
         </p:nvSpPr>
@@ -12936,7 +12403,7 @@
       </p:sp>
       <p:sp>
         <p:nvSpPr>
-          <p:cNvPr id="17" name="Rounded Rectangle 16"/>
+          <p:cNvPr id="16" name="Rounded Rectangle 15"/>
           <p:cNvSpPr/>
           <p:nvPr/>
         </p:nvSpPr>
@@ -12990,7 +12457,7 @@
       </p:sp>
       <p:sp>
         <p:nvSpPr>
-          <p:cNvPr id="18" name="Rectangle 17"/>
+          <p:cNvPr id="17" name="Rectangle 16"/>
           <p:cNvSpPr/>
           <p:nvPr/>
         </p:nvSpPr>
@@ -13034,7 +12501,7 @@
       </p:sp>
       <p:sp>
         <p:nvSpPr>
-          <p:cNvPr id="19" name="TextBox 18"/>
+          <p:cNvPr id="18" name="TextBox 17"/>
           <p:cNvSpPr txBox="1"/>
           <p:nvPr/>
         </p:nvSpPr>
@@ -13081,7 +12548,7 @@
       </p:sp>
       <p:sp>
         <p:nvSpPr>
-          <p:cNvPr id="20" name="TextBox 19"/>
+          <p:cNvPr id="19" name="TextBox 18"/>
           <p:cNvSpPr txBox="1"/>
           <p:nvPr/>
         </p:nvSpPr>
@@ -13128,7 +12595,7 @@
       </p:sp>
       <p:sp>
         <p:nvSpPr>
-          <p:cNvPr id="21" name="Rounded Rectangle 20"/>
+          <p:cNvPr id="20" name="Rounded Rectangle 19"/>
           <p:cNvSpPr/>
           <p:nvPr/>
         </p:nvSpPr>
@@ -13182,7 +12649,7 @@
       </p:sp>
       <p:sp>
         <p:nvSpPr>
-          <p:cNvPr id="22" name="Rectangle 21"/>
+          <p:cNvPr id="21" name="Rectangle 20"/>
           <p:cNvSpPr/>
           <p:nvPr/>
         </p:nvSpPr>
@@ -13226,7 +12693,7 @@
       </p:sp>
       <p:sp>
         <p:nvSpPr>
-          <p:cNvPr id="23" name="TextBox 22"/>
+          <p:cNvPr id="22" name="TextBox 21"/>
           <p:cNvSpPr txBox="1"/>
           <p:nvPr/>
         </p:nvSpPr>
@@ -13273,7 +12740,7 @@
       </p:sp>
       <p:sp>
         <p:nvSpPr>
-          <p:cNvPr id="24" name="TextBox 23"/>
+          <p:cNvPr id="23" name="TextBox 22"/>
           <p:cNvSpPr txBox="1"/>
           <p:nvPr/>
         </p:nvSpPr>
@@ -13320,7 +12787,7 @@
       </p:sp>
       <p:sp>
         <p:nvSpPr>
-          <p:cNvPr id="25" name="Rounded Rectangle 24"/>
+          <p:cNvPr id="24" name="Rounded Rectangle 23"/>
           <p:cNvSpPr/>
           <p:nvPr/>
         </p:nvSpPr>
@@ -13374,7 +12841,7 @@
       </p:sp>
       <p:sp>
         <p:nvSpPr>
-          <p:cNvPr id="26" name="Rectangle 25"/>
+          <p:cNvPr id="25" name="Rectangle 24"/>
           <p:cNvSpPr/>
           <p:nvPr/>
         </p:nvSpPr>
@@ -13418,7 +12885,7 @@
       </p:sp>
       <p:sp>
         <p:nvSpPr>
-          <p:cNvPr id="27" name="TextBox 26"/>
+          <p:cNvPr id="26" name="TextBox 25"/>
           <p:cNvSpPr txBox="1"/>
           <p:nvPr/>
         </p:nvSpPr>
@@ -13465,7 +12932,7 @@
       </p:sp>
       <p:sp>
         <p:nvSpPr>
-          <p:cNvPr id="28" name="TextBox 27"/>
+          <p:cNvPr id="27" name="TextBox 26"/>
           <p:cNvSpPr txBox="1"/>
           <p:nvPr/>
         </p:nvSpPr>
@@ -13512,7 +12979,7 @@
       </p:sp>
       <p:sp>
         <p:nvSpPr>
-          <p:cNvPr id="29" name="Rounded Rectangle 28"/>
+          <p:cNvPr id="28" name="Rounded Rectangle 27"/>
           <p:cNvSpPr/>
           <p:nvPr/>
         </p:nvSpPr>
@@ -13566,7 +13033,7 @@
       </p:sp>
       <p:sp>
         <p:nvSpPr>
-          <p:cNvPr id="30" name="Rectangle 29"/>
+          <p:cNvPr id="29" name="Rectangle 28"/>
           <p:cNvSpPr/>
           <p:nvPr/>
         </p:nvSpPr>
@@ -13610,7 +13077,7 @@
       </p:sp>
       <p:sp>
         <p:nvSpPr>
-          <p:cNvPr id="31" name="TextBox 30"/>
+          <p:cNvPr id="30" name="TextBox 29"/>
           <p:cNvSpPr txBox="1"/>
           <p:nvPr/>
         </p:nvSpPr>
@@ -13657,7 +13124,7 @@
       </p:sp>
       <p:sp>
         <p:nvSpPr>
-          <p:cNvPr id="32" name="TextBox 31"/>
+          <p:cNvPr id="31" name="TextBox 30"/>
           <p:cNvSpPr txBox="1"/>
           <p:nvPr/>
         </p:nvSpPr>
@@ -14095,54 +13562,7 @@
       </p:sp>
       <p:sp>
         <p:nvSpPr>
-          <p:cNvPr id="10" name="TextBox 9"/>
-          <p:cNvSpPr txBox="1"/>
-          <p:nvPr/>
-        </p:nvSpPr>
-        <p:spPr>
-          <a:xfrm>
-            <a:off x="987552" y="5943600"/>
-            <a:ext cx="6400800" cy="274320"/>
-          </a:xfrm>
-          <a:prstGeom prst="rect">
-            <a:avLst/>
-          </a:prstGeom>
-          <a:noFill/>
-        </p:spPr>
-        <p:txBody>
-          <a:bodyPr wrap="square" lIns="0" rIns="0" tIns="0" bIns="0" anchor="t">
-            <a:spAutoFit/>
-          </a:bodyPr>
-          <a:lstStyle/>
-          <a:p>
-            <a:pPr algn="l">
-              <a:lnSpc>
-                <a:spcPct val="122000"/>
-              </a:lnSpc>
-              <a:spcBef>
-                <a:spcPts val="0"/>
-              </a:spcBef>
-              <a:spcAft>
-                <a:spcPts val="0"/>
-              </a:spcAft>
-            </a:pPr>
-            <a:r>
-              <a:rPr sz="900" b="1" i="0" spc="160">
-                <a:solidFill>
-                  <a:srgbClr val="6B7FA6"/>
-                </a:solidFill>
-                <a:latin typeface="Segoe UI"/>
-                <a:ea typeface="Segoe UI"/>
-                <a:cs typeface="Segoe UI"/>
-              </a:rPr>
-              <a:t>UNIT 4  ·  ETHICS, LEGAL AND SOCIAL IMPLICATIONS</a:t>
-            </a:r>
-          </a:p>
-        </p:txBody>
-      </p:sp>
-      <p:sp>
-        <p:nvSpPr>
-          <p:cNvPr id="11" name="logo-plate"/>
+          <p:cNvPr id="10" name="logo-plate"/>
           <p:cNvSpPr/>
           <p:nvPr/>
         </p:nvSpPr>
@@ -14188,7 +13608,7 @@
       </p:sp>
       <p:pic>
         <p:nvPicPr>
-          <p:cNvPr id="12" name="college-logo" descr="logo-full.png"/>
+          <p:cNvPr id="11" name="college-logo" descr="logo-full.png"/>
           <p:cNvPicPr>
             <a:picLocks noChangeAspect="1"/>
           </p:cNvPicPr>
@@ -14304,8 +13724,77 @@
         </p:nvSpPr>
         <p:spPr>
           <a:xfrm>
-            <a:off x="713232" y="6272784"/>
-            <a:ext cx="5597920" cy="219456"/>
+            <a:off x="8240677" y="6272784"/>
+            <a:ext cx="2651760" cy="219456"/>
+          </a:xfrm>
+          <a:prstGeom prst="rect">
+            <a:avLst/>
+          </a:prstGeom>
+          <a:noFill/>
+        </p:spPr>
+        <p:txBody>
+          <a:bodyPr wrap="square" lIns="0" rIns="0" tIns="0" bIns="0" anchor="t">
+            <a:spAutoFit/>
+          </a:bodyPr>
+          <a:lstStyle/>
+          <a:p>
+            <a:pPr algn="r">
+              <a:lnSpc>
+                <a:spcPct val="122000"/>
+              </a:lnSpc>
+              <a:spcBef>
+                <a:spcPts val="0"/>
+              </a:spcBef>
+              <a:spcAft>
+                <a:spcPts val="0"/>
+              </a:spcAft>
+            </a:pPr>
+            <a:r>
+              <a:rPr sz="900" b="0" i="0">
+                <a:solidFill>
+                  <a:srgbClr val="636E85"/>
+                </a:solidFill>
+                <a:latin typeface="Segoe UI"/>
+                <a:ea typeface="Segoe UI"/>
+                <a:cs typeface="Segoe UI"/>
+              </a:rPr>
+              <a:t>Lingesh K  ·  OSI2509030</a:t>
+            </a:r>
+            <a:r>
+              <a:rPr sz="900" b="0" i="0">
+                <a:solidFill>
+                  <a:srgbClr val="141C2E"/>
+                </a:solidFill>
+                <a:latin typeface="Segoe UI"/>
+                <a:ea typeface="Segoe UI"/>
+                <a:cs typeface="Segoe UI"/>
+              </a:rPr>
+              <a:t>     </a:t>
+            </a:r>
+            <a:r>
+              <a:rPr sz="900" b="1" i="0">
+                <a:solidFill>
+                  <a:srgbClr val="0E1E3C"/>
+                </a:solidFill>
+                <a:latin typeface="Segoe UI"/>
+                <a:ea typeface="Segoe UI"/>
+                <a:cs typeface="Segoe UI"/>
+              </a:rPr>
+              <a:t>18</a:t>
+            </a:r>
+          </a:p>
+        </p:txBody>
+      </p:sp>
+      <p:sp>
+        <p:nvSpPr>
+          <p:cNvPr id="5" name="TextBox 4"/>
+          <p:cNvSpPr txBox="1"/>
+          <p:nvPr/>
+        </p:nvSpPr>
+        <p:spPr>
+          <a:xfrm>
+            <a:off x="713232" y="566928"/>
+            <a:ext cx="10765231" cy="219456"/>
           </a:xfrm>
           <a:prstGeom prst="rect">
             <a:avLst/>
@@ -14330,106 +13819,15 @@
               </a:spcAft>
             </a:pPr>
             <a:r>
-              <a:rPr sz="900" b="1" i="0">
-                <a:solidFill>
-                  <a:srgbClr val="0E1E3C"/>
-                </a:solidFill>
-                <a:latin typeface="Segoe UI"/>
-                <a:ea typeface="Segoe UI"/>
-                <a:cs typeface="Segoe UI"/>
-              </a:rPr>
-              <a:t>Unit 4</a:t>
-            </a:r>
-            <a:r>
-              <a:rPr sz="900" b="0" i="0">
-                <a:solidFill>
-                  <a:srgbClr val="939EB3"/>
-                </a:solidFill>
-                <a:latin typeface="Segoe UI"/>
-                <a:ea typeface="Segoe UI"/>
-                <a:cs typeface="Segoe UI"/>
-              </a:rPr>
-              <a:t>  ·  </a:t>
-            </a:r>
-            <a:r>
-              <a:rPr sz="900" b="0" i="0">
-                <a:solidFill>
-                  <a:srgbClr val="636E85"/>
-                </a:solidFill>
-                <a:latin typeface="Segoe UI"/>
-                <a:ea typeface="Segoe UI"/>
-                <a:cs typeface="Segoe UI"/>
-              </a:rPr>
-              <a:t>Ethics, Legal and Social Implications</a:t>
-            </a:r>
-          </a:p>
-        </p:txBody>
-      </p:sp>
-      <p:sp>
-        <p:nvSpPr>
-          <p:cNvPr id="5" name="TextBox 4"/>
-          <p:cNvSpPr txBox="1"/>
-          <p:nvPr/>
-        </p:nvSpPr>
-        <p:spPr>
-          <a:xfrm>
-            <a:off x="8240677" y="6272784"/>
-            <a:ext cx="2651760" cy="219456"/>
-          </a:xfrm>
-          <a:prstGeom prst="rect">
-            <a:avLst/>
-          </a:prstGeom>
-          <a:noFill/>
-        </p:spPr>
-        <p:txBody>
-          <a:bodyPr wrap="square" lIns="0" rIns="0" tIns="0" bIns="0" anchor="t">
-            <a:spAutoFit/>
-          </a:bodyPr>
-          <a:lstStyle/>
-          <a:p>
-            <a:pPr algn="r">
-              <a:lnSpc>
-                <a:spcPct val="122000"/>
-              </a:lnSpc>
-              <a:spcBef>
-                <a:spcPts val="0"/>
-              </a:spcBef>
-              <a:spcAft>
-                <a:spcPts val="0"/>
-              </a:spcAft>
-            </a:pPr>
-            <a:r>
-              <a:rPr sz="900" b="0" i="0">
-                <a:solidFill>
-                  <a:srgbClr val="636E85"/>
-                </a:solidFill>
-                <a:latin typeface="Segoe UI"/>
-                <a:ea typeface="Segoe UI"/>
-                <a:cs typeface="Segoe UI"/>
-              </a:rPr>
-              <a:t>Lingesh K  ·  OSI2509030</a:t>
-            </a:r>
-            <a:r>
-              <a:rPr sz="900" b="0" i="0">
-                <a:solidFill>
-                  <a:srgbClr val="141C2E"/>
-                </a:solidFill>
-                <a:latin typeface="Segoe UI"/>
-                <a:ea typeface="Segoe UI"/>
-                <a:cs typeface="Segoe UI"/>
-              </a:rPr>
-              <a:t>     </a:t>
-            </a:r>
-            <a:r>
-              <a:rPr sz="900" b="1" i="0">
-                <a:solidFill>
-                  <a:srgbClr val="0E1E3C"/>
-                </a:solidFill>
-                <a:latin typeface="Segoe UI"/>
-                <a:ea typeface="Segoe UI"/>
-                <a:cs typeface="Segoe UI"/>
-              </a:rPr>
-              <a:t>18</a:t>
+              <a:rPr sz="950" b="1" i="0" spc="160">
+                <a:solidFill>
+                  <a:srgbClr val="3B7AF7"/>
+                </a:solidFill>
+                <a:latin typeface="Segoe UI"/>
+                <a:ea typeface="Segoe UI"/>
+                <a:cs typeface="Segoe UI"/>
+              </a:rPr>
+              <a:t>LEVELS OF AUTOMATION</a:t>
             </a:r>
           </a:p>
         </p:txBody>
@@ -14437,53 +13835,6 @@
       <p:sp>
         <p:nvSpPr>
           <p:cNvPr id="6" name="TextBox 5"/>
-          <p:cNvSpPr txBox="1"/>
-          <p:nvPr/>
-        </p:nvSpPr>
-        <p:spPr>
-          <a:xfrm>
-            <a:off x="713232" y="566928"/>
-            <a:ext cx="10765231" cy="219456"/>
-          </a:xfrm>
-          <a:prstGeom prst="rect">
-            <a:avLst/>
-          </a:prstGeom>
-          <a:noFill/>
-        </p:spPr>
-        <p:txBody>
-          <a:bodyPr wrap="square" lIns="0" rIns="0" tIns="0" bIns="0" anchor="t">
-            <a:spAutoFit/>
-          </a:bodyPr>
-          <a:lstStyle/>
-          <a:p>
-            <a:pPr algn="l">
-              <a:lnSpc>
-                <a:spcPct val="122000"/>
-              </a:lnSpc>
-              <a:spcBef>
-                <a:spcPts val="0"/>
-              </a:spcBef>
-              <a:spcAft>
-                <a:spcPts val="0"/>
-              </a:spcAft>
-            </a:pPr>
-            <a:r>
-              <a:rPr sz="950" b="1" i="0" spc="160">
-                <a:solidFill>
-                  <a:srgbClr val="3B7AF7"/>
-                </a:solidFill>
-                <a:latin typeface="Segoe UI"/>
-                <a:ea typeface="Segoe UI"/>
-                <a:cs typeface="Segoe UI"/>
-              </a:rPr>
-              <a:t>LEVELS OF AUTOMATION</a:t>
-            </a:r>
-          </a:p>
-        </p:txBody>
-      </p:sp>
-      <p:sp>
-        <p:nvSpPr>
-          <p:cNvPr id="7" name="TextBox 6"/>
           <p:cNvSpPr txBox="1"/>
           <p:nvPr/>
         </p:nvSpPr>
@@ -14530,7 +13881,7 @@
       </p:sp>
       <p:sp>
         <p:nvSpPr>
-          <p:cNvPr id="8" name="Rectangle 7"/>
+          <p:cNvPr id="7" name="Rectangle 6"/>
           <p:cNvSpPr/>
           <p:nvPr/>
         </p:nvSpPr>
@@ -14574,7 +13925,7 @@
       </p:sp>
       <p:sp>
         <p:nvSpPr>
-          <p:cNvPr id="9" name="TextBox 8"/>
+          <p:cNvPr id="8" name="TextBox 7"/>
           <p:cNvSpPr txBox="1"/>
           <p:nvPr/>
         </p:nvSpPr>
@@ -14621,7 +13972,7 @@
       </p:sp>
       <p:sp>
         <p:nvSpPr>
-          <p:cNvPr id="10" name="Rectangle 9"/>
+          <p:cNvPr id="9" name="Rectangle 8"/>
           <p:cNvSpPr/>
           <p:nvPr/>
         </p:nvSpPr>
@@ -14665,7 +14016,7 @@
       </p:sp>
       <p:sp>
         <p:nvSpPr>
-          <p:cNvPr id="11" name="Oval 10"/>
+          <p:cNvPr id="10" name="Oval 9"/>
           <p:cNvSpPr/>
           <p:nvPr/>
         </p:nvSpPr>
@@ -14709,7 +14060,7 @@
       </p:sp>
       <p:sp>
         <p:nvSpPr>
-          <p:cNvPr id="12" name="TextBox 11"/>
+          <p:cNvPr id="11" name="TextBox 10"/>
           <p:cNvSpPr txBox="1"/>
           <p:nvPr/>
         </p:nvSpPr>
@@ -14756,7 +14107,7 @@
       </p:sp>
       <p:sp>
         <p:nvSpPr>
-          <p:cNvPr id="13" name="Rounded Rectangle 12"/>
+          <p:cNvPr id="12" name="Rounded Rectangle 11"/>
           <p:cNvSpPr/>
           <p:nvPr/>
         </p:nvSpPr>
@@ -14804,7 +14155,7 @@
       </p:sp>
       <p:sp>
         <p:nvSpPr>
-          <p:cNvPr id="14" name="TextBox 13"/>
+          <p:cNvPr id="13" name="TextBox 12"/>
           <p:cNvSpPr txBox="1"/>
           <p:nvPr/>
         </p:nvSpPr>
@@ -14851,7 +14202,7 @@
       </p:sp>
       <p:sp>
         <p:nvSpPr>
-          <p:cNvPr id="15" name="TextBox 14"/>
+          <p:cNvPr id="14" name="TextBox 13"/>
           <p:cNvSpPr txBox="1"/>
           <p:nvPr/>
         </p:nvSpPr>
@@ -14898,7 +14249,7 @@
       </p:sp>
       <p:sp>
         <p:nvSpPr>
-          <p:cNvPr id="16" name="Oval 15"/>
+          <p:cNvPr id="15" name="Oval 14"/>
           <p:cNvSpPr/>
           <p:nvPr/>
         </p:nvSpPr>
@@ -14942,7 +14293,7 @@
       </p:sp>
       <p:sp>
         <p:nvSpPr>
-          <p:cNvPr id="17" name="TextBox 16"/>
+          <p:cNvPr id="16" name="TextBox 15"/>
           <p:cNvSpPr txBox="1"/>
           <p:nvPr/>
         </p:nvSpPr>
@@ -14989,7 +14340,7 @@
       </p:sp>
       <p:sp>
         <p:nvSpPr>
-          <p:cNvPr id="18" name="Rounded Rectangle 17"/>
+          <p:cNvPr id="17" name="Rounded Rectangle 16"/>
           <p:cNvSpPr/>
           <p:nvPr/>
         </p:nvSpPr>
@@ -15037,7 +14388,7 @@
       </p:sp>
       <p:sp>
         <p:nvSpPr>
-          <p:cNvPr id="19" name="TextBox 18"/>
+          <p:cNvPr id="18" name="TextBox 17"/>
           <p:cNvSpPr txBox="1"/>
           <p:nvPr/>
         </p:nvSpPr>
@@ -15084,7 +14435,7 @@
       </p:sp>
       <p:sp>
         <p:nvSpPr>
-          <p:cNvPr id="20" name="TextBox 19"/>
+          <p:cNvPr id="19" name="TextBox 18"/>
           <p:cNvSpPr txBox="1"/>
           <p:nvPr/>
         </p:nvSpPr>
@@ -15131,7 +14482,7 @@
       </p:sp>
       <p:sp>
         <p:nvSpPr>
-          <p:cNvPr id="21" name="Oval 20"/>
+          <p:cNvPr id="20" name="Oval 19"/>
           <p:cNvSpPr/>
           <p:nvPr/>
         </p:nvSpPr>
@@ -15175,7 +14526,7 @@
       </p:sp>
       <p:sp>
         <p:nvSpPr>
-          <p:cNvPr id="22" name="TextBox 21"/>
+          <p:cNvPr id="21" name="TextBox 20"/>
           <p:cNvSpPr txBox="1"/>
           <p:nvPr/>
         </p:nvSpPr>
@@ -15222,7 +14573,7 @@
       </p:sp>
       <p:sp>
         <p:nvSpPr>
-          <p:cNvPr id="23" name="Rounded Rectangle 22"/>
+          <p:cNvPr id="22" name="Rounded Rectangle 21"/>
           <p:cNvSpPr/>
           <p:nvPr/>
         </p:nvSpPr>
@@ -15270,7 +14621,7 @@
       </p:sp>
       <p:sp>
         <p:nvSpPr>
-          <p:cNvPr id="24" name="TextBox 23"/>
+          <p:cNvPr id="23" name="TextBox 22"/>
           <p:cNvSpPr txBox="1"/>
           <p:nvPr/>
         </p:nvSpPr>
@@ -15317,7 +14668,7 @@
       </p:sp>
       <p:sp>
         <p:nvSpPr>
-          <p:cNvPr id="25" name="TextBox 24"/>
+          <p:cNvPr id="24" name="TextBox 23"/>
           <p:cNvSpPr txBox="1"/>
           <p:nvPr/>
         </p:nvSpPr>
@@ -15364,7 +14715,7 @@
       </p:sp>
       <p:sp>
         <p:nvSpPr>
-          <p:cNvPr id="26" name="Oval 25"/>
+          <p:cNvPr id="25" name="Oval 24"/>
           <p:cNvSpPr/>
           <p:nvPr/>
         </p:nvSpPr>
@@ -15408,7 +14759,7 @@
       </p:sp>
       <p:sp>
         <p:nvSpPr>
-          <p:cNvPr id="27" name="TextBox 26"/>
+          <p:cNvPr id="26" name="TextBox 25"/>
           <p:cNvSpPr txBox="1"/>
           <p:nvPr/>
         </p:nvSpPr>
@@ -15455,7 +14806,7 @@
       </p:sp>
       <p:sp>
         <p:nvSpPr>
-          <p:cNvPr id="28" name="Rounded Rectangle 27"/>
+          <p:cNvPr id="27" name="Rounded Rectangle 26"/>
           <p:cNvSpPr/>
           <p:nvPr/>
         </p:nvSpPr>
@@ -15503,7 +14854,7 @@
       </p:sp>
       <p:sp>
         <p:nvSpPr>
-          <p:cNvPr id="29" name="TextBox 28"/>
+          <p:cNvPr id="28" name="TextBox 27"/>
           <p:cNvSpPr txBox="1"/>
           <p:nvPr/>
         </p:nvSpPr>
@@ -15550,7 +14901,7 @@
       </p:sp>
       <p:sp>
         <p:nvSpPr>
-          <p:cNvPr id="30" name="TextBox 29"/>
+          <p:cNvPr id="29" name="TextBox 28"/>
           <p:cNvSpPr txBox="1"/>
           <p:nvPr/>
         </p:nvSpPr>
@@ -15597,7 +14948,7 @@
       </p:sp>
       <p:sp>
         <p:nvSpPr>
-          <p:cNvPr id="31" name="Rounded Rectangle 30"/>
+          <p:cNvPr id="30" name="Rounded Rectangle 29"/>
           <p:cNvSpPr/>
           <p:nvPr/>
         </p:nvSpPr>
@@ -15664,7 +15015,7 @@
       </p:sp>
       <p:sp>
         <p:nvSpPr>
-          <p:cNvPr id="32" name="Rectangle 31"/>
+          <p:cNvPr id="31" name="Rectangle 30"/>
           <p:cNvSpPr/>
           <p:nvPr/>
         </p:nvSpPr>
@@ -15800,8 +15151,77 @@
         </p:nvSpPr>
         <p:spPr>
           <a:xfrm>
-            <a:off x="713232" y="6272784"/>
-            <a:ext cx="5597920" cy="219456"/>
+            <a:off x="8240677" y="6272784"/>
+            <a:ext cx="2651760" cy="219456"/>
+          </a:xfrm>
+          <a:prstGeom prst="rect">
+            <a:avLst/>
+          </a:prstGeom>
+          <a:noFill/>
+        </p:spPr>
+        <p:txBody>
+          <a:bodyPr wrap="square" lIns="0" rIns="0" tIns="0" bIns="0" anchor="t">
+            <a:spAutoFit/>
+          </a:bodyPr>
+          <a:lstStyle/>
+          <a:p>
+            <a:pPr algn="r">
+              <a:lnSpc>
+                <a:spcPct val="122000"/>
+              </a:lnSpc>
+              <a:spcBef>
+                <a:spcPts val="0"/>
+              </a:spcBef>
+              <a:spcAft>
+                <a:spcPts val="0"/>
+              </a:spcAft>
+            </a:pPr>
+            <a:r>
+              <a:rPr sz="900" b="0" i="0">
+                <a:solidFill>
+                  <a:srgbClr val="636E85"/>
+                </a:solidFill>
+                <a:latin typeface="Segoe UI"/>
+                <a:ea typeface="Segoe UI"/>
+                <a:cs typeface="Segoe UI"/>
+              </a:rPr>
+              <a:t>Lingesh K  ·  OSI2509030</a:t>
+            </a:r>
+            <a:r>
+              <a:rPr sz="900" b="0" i="0">
+                <a:solidFill>
+                  <a:srgbClr val="141C2E"/>
+                </a:solidFill>
+                <a:latin typeface="Segoe UI"/>
+                <a:ea typeface="Segoe UI"/>
+                <a:cs typeface="Segoe UI"/>
+              </a:rPr>
+              <a:t>     </a:t>
+            </a:r>
+            <a:r>
+              <a:rPr sz="900" b="1" i="0">
+                <a:solidFill>
+                  <a:srgbClr val="0E1E3C"/>
+                </a:solidFill>
+                <a:latin typeface="Segoe UI"/>
+                <a:ea typeface="Segoe UI"/>
+                <a:cs typeface="Segoe UI"/>
+              </a:rPr>
+              <a:t>19</a:t>
+            </a:r>
+          </a:p>
+        </p:txBody>
+      </p:sp>
+      <p:sp>
+        <p:nvSpPr>
+          <p:cNvPr id="5" name="TextBox 4"/>
+          <p:cNvSpPr txBox="1"/>
+          <p:nvPr/>
+        </p:nvSpPr>
+        <p:spPr>
+          <a:xfrm>
+            <a:off x="713232" y="566928"/>
+            <a:ext cx="10765231" cy="219456"/>
           </a:xfrm>
           <a:prstGeom prst="rect">
             <a:avLst/>
@@ -15826,106 +15246,15 @@
               </a:spcAft>
             </a:pPr>
             <a:r>
-              <a:rPr sz="900" b="1" i="0">
-                <a:solidFill>
-                  <a:srgbClr val="0E1E3C"/>
-                </a:solidFill>
-                <a:latin typeface="Segoe UI"/>
-                <a:ea typeface="Segoe UI"/>
-                <a:cs typeface="Segoe UI"/>
-              </a:rPr>
-              <a:t>Unit 4</a:t>
-            </a:r>
-            <a:r>
-              <a:rPr sz="900" b="0" i="0">
-                <a:solidFill>
-                  <a:srgbClr val="939EB3"/>
-                </a:solidFill>
-                <a:latin typeface="Segoe UI"/>
-                <a:ea typeface="Segoe UI"/>
-                <a:cs typeface="Segoe UI"/>
-              </a:rPr>
-              <a:t>  ·  </a:t>
-            </a:r>
-            <a:r>
-              <a:rPr sz="900" b="0" i="0">
-                <a:solidFill>
-                  <a:srgbClr val="636E85"/>
-                </a:solidFill>
-                <a:latin typeface="Segoe UI"/>
-                <a:ea typeface="Segoe UI"/>
-                <a:cs typeface="Segoe UI"/>
-              </a:rPr>
-              <a:t>Ethics, Legal and Social Implications</a:t>
-            </a:r>
-          </a:p>
-        </p:txBody>
-      </p:sp>
-      <p:sp>
-        <p:nvSpPr>
-          <p:cNvPr id="5" name="TextBox 4"/>
-          <p:cNvSpPr txBox="1"/>
-          <p:nvPr/>
-        </p:nvSpPr>
-        <p:spPr>
-          <a:xfrm>
-            <a:off x="8240677" y="6272784"/>
-            <a:ext cx="2651760" cy="219456"/>
-          </a:xfrm>
-          <a:prstGeom prst="rect">
-            <a:avLst/>
-          </a:prstGeom>
-          <a:noFill/>
-        </p:spPr>
-        <p:txBody>
-          <a:bodyPr wrap="square" lIns="0" rIns="0" tIns="0" bIns="0" anchor="t">
-            <a:spAutoFit/>
-          </a:bodyPr>
-          <a:lstStyle/>
-          <a:p>
-            <a:pPr algn="r">
-              <a:lnSpc>
-                <a:spcPct val="122000"/>
-              </a:lnSpc>
-              <a:spcBef>
-                <a:spcPts val="0"/>
-              </a:spcBef>
-              <a:spcAft>
-                <a:spcPts val="0"/>
-              </a:spcAft>
-            </a:pPr>
-            <a:r>
-              <a:rPr sz="900" b="0" i="0">
-                <a:solidFill>
-                  <a:srgbClr val="636E85"/>
-                </a:solidFill>
-                <a:latin typeface="Segoe UI"/>
-                <a:ea typeface="Segoe UI"/>
-                <a:cs typeface="Segoe UI"/>
-              </a:rPr>
-              <a:t>Lingesh K  ·  OSI2509030</a:t>
-            </a:r>
-            <a:r>
-              <a:rPr sz="900" b="0" i="0">
-                <a:solidFill>
-                  <a:srgbClr val="141C2E"/>
-                </a:solidFill>
-                <a:latin typeface="Segoe UI"/>
-                <a:ea typeface="Segoe UI"/>
-                <a:cs typeface="Segoe UI"/>
-              </a:rPr>
-              <a:t>     </a:t>
-            </a:r>
-            <a:r>
-              <a:rPr sz="900" b="1" i="0">
-                <a:solidFill>
-                  <a:srgbClr val="0E1E3C"/>
-                </a:solidFill>
-                <a:latin typeface="Segoe UI"/>
-                <a:ea typeface="Segoe UI"/>
-                <a:cs typeface="Segoe UI"/>
-              </a:rPr>
-              <a:t>19</a:t>
+              <a:rPr sz="950" b="1" i="0" spc="160">
+                <a:solidFill>
+                  <a:srgbClr val="27A06A"/>
+                </a:solidFill>
+                <a:latin typeface="Segoe UI"/>
+                <a:ea typeface="Segoe UI"/>
+                <a:cs typeface="Segoe UI"/>
+              </a:rPr>
+              <a:t>CHOOSING THE LEVEL</a:t>
             </a:r>
           </a:p>
         </p:txBody>
@@ -15933,53 +15262,6 @@
       <p:sp>
         <p:nvSpPr>
           <p:cNvPr id="6" name="TextBox 5"/>
-          <p:cNvSpPr txBox="1"/>
-          <p:nvPr/>
-        </p:nvSpPr>
-        <p:spPr>
-          <a:xfrm>
-            <a:off x="713232" y="566928"/>
-            <a:ext cx="10765231" cy="219456"/>
-          </a:xfrm>
-          <a:prstGeom prst="rect">
-            <a:avLst/>
-          </a:prstGeom>
-          <a:noFill/>
-        </p:spPr>
-        <p:txBody>
-          <a:bodyPr wrap="square" lIns="0" rIns="0" tIns="0" bIns="0" anchor="t">
-            <a:spAutoFit/>
-          </a:bodyPr>
-          <a:lstStyle/>
-          <a:p>
-            <a:pPr algn="l">
-              <a:lnSpc>
-                <a:spcPct val="122000"/>
-              </a:lnSpc>
-              <a:spcBef>
-                <a:spcPts val="0"/>
-              </a:spcBef>
-              <a:spcAft>
-                <a:spcPts val="0"/>
-              </a:spcAft>
-            </a:pPr>
-            <a:r>
-              <a:rPr sz="950" b="1" i="0" spc="160">
-                <a:solidFill>
-                  <a:srgbClr val="27A06A"/>
-                </a:solidFill>
-                <a:latin typeface="Segoe UI"/>
-                <a:ea typeface="Segoe UI"/>
-                <a:cs typeface="Segoe UI"/>
-              </a:rPr>
-              <a:t>CHOOSING THE LEVEL</a:t>
-            </a:r>
-          </a:p>
-        </p:txBody>
-      </p:sp>
-      <p:sp>
-        <p:nvSpPr>
-          <p:cNvPr id="7" name="TextBox 6"/>
           <p:cNvSpPr txBox="1"/>
           <p:nvPr/>
         </p:nvSpPr>
@@ -16026,7 +15308,7 @@
       </p:sp>
       <p:sp>
         <p:nvSpPr>
-          <p:cNvPr id="8" name="Rectangle 7"/>
+          <p:cNvPr id="7" name="Rectangle 6"/>
           <p:cNvSpPr/>
           <p:nvPr/>
         </p:nvSpPr>
@@ -16070,7 +15352,7 @@
       </p:sp>
       <p:sp>
         <p:nvSpPr>
-          <p:cNvPr id="9" name="Rounded Rectangle 8"/>
+          <p:cNvPr id="8" name="Rounded Rectangle 7"/>
           <p:cNvSpPr/>
           <p:nvPr/>
         </p:nvSpPr>
@@ -16124,7 +15406,7 @@
       </p:sp>
       <p:sp>
         <p:nvSpPr>
-          <p:cNvPr id="10" name="Rectangle 9"/>
+          <p:cNvPr id="9" name="Rectangle 8"/>
           <p:cNvSpPr/>
           <p:nvPr/>
         </p:nvSpPr>
@@ -16168,7 +15450,7 @@
       </p:sp>
       <p:sp>
         <p:nvSpPr>
-          <p:cNvPr id="11" name="Rounded Rectangle 10"/>
+          <p:cNvPr id="10" name="Rounded Rectangle 9"/>
           <p:cNvSpPr/>
           <p:nvPr/>
         </p:nvSpPr>
@@ -16235,7 +15517,7 @@
       </p:sp>
       <p:sp>
         <p:nvSpPr>
-          <p:cNvPr id="12" name="TextBox 11"/>
+          <p:cNvPr id="11" name="TextBox 10"/>
           <p:cNvSpPr txBox="1"/>
           <p:nvPr/>
         </p:nvSpPr>
@@ -16282,7 +15564,7 @@
       </p:sp>
       <p:sp>
         <p:nvSpPr>
-          <p:cNvPr id="13" name="Rectangle 12"/>
+          <p:cNvPr id="12" name="Rectangle 11"/>
           <p:cNvSpPr/>
           <p:nvPr/>
         </p:nvSpPr>
@@ -16326,7 +15608,7 @@
       </p:sp>
       <p:sp>
         <p:nvSpPr>
-          <p:cNvPr id="14" name="Rounded Rectangle 13"/>
+          <p:cNvPr id="13" name="Rounded Rectangle 12"/>
           <p:cNvSpPr/>
           <p:nvPr/>
         </p:nvSpPr>
@@ -16372,7 +15654,7 @@
       </p:sp>
       <p:sp>
         <p:nvSpPr>
-          <p:cNvPr id="15" name="TextBox 14"/>
+          <p:cNvPr id="14" name="TextBox 13"/>
           <p:cNvSpPr txBox="1"/>
           <p:nvPr/>
         </p:nvSpPr>
@@ -16419,7 +15701,7 @@
       </p:sp>
       <p:sp>
         <p:nvSpPr>
-          <p:cNvPr id="16" name="Rounded Rectangle 15"/>
+          <p:cNvPr id="15" name="Rounded Rectangle 14"/>
           <p:cNvSpPr/>
           <p:nvPr/>
         </p:nvSpPr>
@@ -16465,7 +15747,7 @@
       </p:sp>
       <p:sp>
         <p:nvSpPr>
-          <p:cNvPr id="17" name="TextBox 16"/>
+          <p:cNvPr id="16" name="TextBox 15"/>
           <p:cNvSpPr txBox="1"/>
           <p:nvPr/>
         </p:nvSpPr>
@@ -16512,7 +15794,7 @@
       </p:sp>
       <p:sp>
         <p:nvSpPr>
-          <p:cNvPr id="18" name="Rounded Rectangle 17"/>
+          <p:cNvPr id="17" name="Rounded Rectangle 16"/>
           <p:cNvSpPr/>
           <p:nvPr/>
         </p:nvSpPr>
@@ -16558,7 +15840,7 @@
       </p:sp>
       <p:sp>
         <p:nvSpPr>
-          <p:cNvPr id="19" name="TextBox 18"/>
+          <p:cNvPr id="18" name="TextBox 17"/>
           <p:cNvSpPr txBox="1"/>
           <p:nvPr/>
         </p:nvSpPr>
@@ -16605,7 +15887,7 @@
       </p:sp>
       <p:sp>
         <p:nvSpPr>
-          <p:cNvPr id="20" name="Rounded Rectangle 19"/>
+          <p:cNvPr id="19" name="Rounded Rectangle 18"/>
           <p:cNvSpPr/>
           <p:nvPr/>
         </p:nvSpPr>
@@ -16651,7 +15933,7 @@
       </p:sp>
       <p:sp>
         <p:nvSpPr>
-          <p:cNvPr id="21" name="TextBox 20"/>
+          <p:cNvPr id="20" name="TextBox 19"/>
           <p:cNvSpPr txBox="1"/>
           <p:nvPr/>
         </p:nvSpPr>
@@ -16698,7 +15980,7 @@
       </p:sp>
       <p:sp>
         <p:nvSpPr>
-          <p:cNvPr id="22" name="Rounded Rectangle 21"/>
+          <p:cNvPr id="21" name="Rounded Rectangle 20"/>
           <p:cNvSpPr/>
           <p:nvPr/>
         </p:nvSpPr>
@@ -16744,7 +16026,7 @@
       </p:sp>
       <p:sp>
         <p:nvSpPr>
-          <p:cNvPr id="23" name="TextBox 22"/>
+          <p:cNvPr id="22" name="TextBox 21"/>
           <p:cNvSpPr txBox="1"/>
           <p:nvPr/>
         </p:nvSpPr>
@@ -16791,7 +16073,7 @@
       </p:sp>
       <p:sp>
         <p:nvSpPr>
-          <p:cNvPr id="24" name="Rounded Rectangle 23"/>
+          <p:cNvPr id="23" name="Rounded Rectangle 22"/>
           <p:cNvSpPr/>
           <p:nvPr/>
         </p:nvSpPr>
@@ -16845,7 +16127,7 @@
       </p:sp>
       <p:sp>
         <p:nvSpPr>
-          <p:cNvPr id="25" name="Rectangle 24"/>
+          <p:cNvPr id="24" name="Rectangle 23"/>
           <p:cNvSpPr/>
           <p:nvPr/>
         </p:nvSpPr>
@@ -16889,7 +16171,7 @@
       </p:sp>
       <p:sp>
         <p:nvSpPr>
-          <p:cNvPr id="26" name="Rounded Rectangle 25"/>
+          <p:cNvPr id="25" name="Rounded Rectangle 24"/>
           <p:cNvSpPr/>
           <p:nvPr/>
         </p:nvSpPr>
@@ -16956,7 +16238,7 @@
       </p:sp>
       <p:sp>
         <p:nvSpPr>
-          <p:cNvPr id="27" name="TextBox 26"/>
+          <p:cNvPr id="26" name="TextBox 25"/>
           <p:cNvSpPr txBox="1"/>
           <p:nvPr/>
         </p:nvSpPr>
@@ -17003,7 +16285,7 @@
       </p:sp>
       <p:sp>
         <p:nvSpPr>
-          <p:cNvPr id="28" name="Rectangle 27"/>
+          <p:cNvPr id="27" name="Rectangle 26"/>
           <p:cNvSpPr/>
           <p:nvPr/>
         </p:nvSpPr>
@@ -17047,7 +16329,7 @@
       </p:sp>
       <p:sp>
         <p:nvSpPr>
-          <p:cNvPr id="29" name="Rounded Rectangle 28"/>
+          <p:cNvPr id="28" name="Rounded Rectangle 27"/>
           <p:cNvSpPr/>
           <p:nvPr/>
         </p:nvSpPr>
@@ -17093,7 +16375,7 @@
       </p:sp>
       <p:sp>
         <p:nvSpPr>
-          <p:cNvPr id="30" name="TextBox 29"/>
+          <p:cNvPr id="29" name="TextBox 28"/>
           <p:cNvSpPr txBox="1"/>
           <p:nvPr/>
         </p:nvSpPr>
@@ -17140,7 +16422,7 @@
       </p:sp>
       <p:sp>
         <p:nvSpPr>
-          <p:cNvPr id="31" name="Rounded Rectangle 30"/>
+          <p:cNvPr id="30" name="Rounded Rectangle 29"/>
           <p:cNvSpPr/>
           <p:nvPr/>
         </p:nvSpPr>
@@ -17186,7 +16468,7 @@
       </p:sp>
       <p:sp>
         <p:nvSpPr>
-          <p:cNvPr id="32" name="TextBox 31"/>
+          <p:cNvPr id="31" name="TextBox 30"/>
           <p:cNvSpPr txBox="1"/>
           <p:nvPr/>
         </p:nvSpPr>
@@ -17233,7 +16515,7 @@
       </p:sp>
       <p:sp>
         <p:nvSpPr>
-          <p:cNvPr id="33" name="Rounded Rectangle 32"/>
+          <p:cNvPr id="32" name="Rounded Rectangle 31"/>
           <p:cNvSpPr/>
           <p:nvPr/>
         </p:nvSpPr>
@@ -17279,7 +16561,7 @@
       </p:sp>
       <p:sp>
         <p:nvSpPr>
-          <p:cNvPr id="34" name="TextBox 33"/>
+          <p:cNvPr id="33" name="TextBox 32"/>
           <p:cNvSpPr txBox="1"/>
           <p:nvPr/>
         </p:nvSpPr>
@@ -17326,7 +16608,7 @@
       </p:sp>
       <p:sp>
         <p:nvSpPr>
-          <p:cNvPr id="35" name="Rounded Rectangle 34"/>
+          <p:cNvPr id="34" name="Rounded Rectangle 33"/>
           <p:cNvSpPr/>
           <p:nvPr/>
         </p:nvSpPr>
@@ -17372,7 +16654,7 @@
       </p:sp>
       <p:sp>
         <p:nvSpPr>
-          <p:cNvPr id="36" name="TextBox 35"/>
+          <p:cNvPr id="35" name="TextBox 34"/>
           <p:cNvSpPr txBox="1"/>
           <p:nvPr/>
         </p:nvSpPr>
@@ -17419,7 +16701,7 @@
       </p:sp>
       <p:sp>
         <p:nvSpPr>
-          <p:cNvPr id="37" name="Rounded Rectangle 36"/>
+          <p:cNvPr id="36" name="Rounded Rectangle 35"/>
           <p:cNvSpPr/>
           <p:nvPr/>
         </p:nvSpPr>
@@ -17465,7 +16747,7 @@
       </p:sp>
       <p:sp>
         <p:nvSpPr>
-          <p:cNvPr id="38" name="TextBox 37"/>
+          <p:cNvPr id="37" name="TextBox 36"/>
           <p:cNvSpPr txBox="1"/>
           <p:nvPr/>
         </p:nvSpPr>
@@ -17512,7 +16794,7 @@
       </p:sp>
       <p:sp>
         <p:nvSpPr>
-          <p:cNvPr id="39" name="Rounded Rectangle 38"/>
+          <p:cNvPr id="38" name="Rounded Rectangle 37"/>
           <p:cNvSpPr/>
           <p:nvPr/>
         </p:nvSpPr>
@@ -17682,8 +16964,77 @@
         </p:nvSpPr>
         <p:spPr>
           <a:xfrm>
-            <a:off x="713232" y="6272784"/>
-            <a:ext cx="5597920" cy="219456"/>
+            <a:off x="8240677" y="6272784"/>
+            <a:ext cx="2651760" cy="219456"/>
+          </a:xfrm>
+          <a:prstGeom prst="rect">
+            <a:avLst/>
+          </a:prstGeom>
+          <a:noFill/>
+        </p:spPr>
+        <p:txBody>
+          <a:bodyPr wrap="square" lIns="0" rIns="0" tIns="0" bIns="0" anchor="t">
+            <a:spAutoFit/>
+          </a:bodyPr>
+          <a:lstStyle/>
+          <a:p>
+            <a:pPr algn="r">
+              <a:lnSpc>
+                <a:spcPct val="122000"/>
+              </a:lnSpc>
+              <a:spcBef>
+                <a:spcPts val="0"/>
+              </a:spcBef>
+              <a:spcAft>
+                <a:spcPts val="0"/>
+              </a:spcAft>
+            </a:pPr>
+            <a:r>
+              <a:rPr sz="900" b="0" i="0">
+                <a:solidFill>
+                  <a:srgbClr val="636E85"/>
+                </a:solidFill>
+                <a:latin typeface="Segoe UI"/>
+                <a:ea typeface="Segoe UI"/>
+                <a:cs typeface="Segoe UI"/>
+              </a:rPr>
+              <a:t>Lingesh K  ·  OSI2509030</a:t>
+            </a:r>
+            <a:r>
+              <a:rPr sz="900" b="0" i="0">
+                <a:solidFill>
+                  <a:srgbClr val="141C2E"/>
+                </a:solidFill>
+                <a:latin typeface="Segoe UI"/>
+                <a:ea typeface="Segoe UI"/>
+                <a:cs typeface="Segoe UI"/>
+              </a:rPr>
+              <a:t>     </a:t>
+            </a:r>
+            <a:r>
+              <a:rPr sz="900" b="1" i="0">
+                <a:solidFill>
+                  <a:srgbClr val="0E1E3C"/>
+                </a:solidFill>
+                <a:latin typeface="Segoe UI"/>
+                <a:ea typeface="Segoe UI"/>
+                <a:cs typeface="Segoe UI"/>
+              </a:rPr>
+              <a:t>02</a:t>
+            </a:r>
+          </a:p>
+        </p:txBody>
+      </p:sp>
+      <p:sp>
+        <p:nvSpPr>
+          <p:cNvPr id="5" name="TextBox 4"/>
+          <p:cNvSpPr txBox="1"/>
+          <p:nvPr/>
+        </p:nvSpPr>
+        <p:spPr>
+          <a:xfrm>
+            <a:off x="713232" y="566928"/>
+            <a:ext cx="10765231" cy="219456"/>
           </a:xfrm>
           <a:prstGeom prst="rect">
             <a:avLst/>
@@ -17708,106 +17059,15 @@
               </a:spcAft>
             </a:pPr>
             <a:r>
-              <a:rPr sz="900" b="1" i="0">
-                <a:solidFill>
-                  <a:srgbClr val="0E1E3C"/>
-                </a:solidFill>
-                <a:latin typeface="Segoe UI"/>
-                <a:ea typeface="Segoe UI"/>
-                <a:cs typeface="Segoe UI"/>
-              </a:rPr>
-              <a:t>Unit 4</a:t>
-            </a:r>
-            <a:r>
-              <a:rPr sz="900" b="0" i="0">
-                <a:solidFill>
-                  <a:srgbClr val="939EB3"/>
-                </a:solidFill>
-                <a:latin typeface="Segoe UI"/>
-                <a:ea typeface="Segoe UI"/>
-                <a:cs typeface="Segoe UI"/>
-              </a:rPr>
-              <a:t>  ·  </a:t>
-            </a:r>
-            <a:r>
-              <a:rPr sz="900" b="0" i="0">
-                <a:solidFill>
-                  <a:srgbClr val="636E85"/>
-                </a:solidFill>
-                <a:latin typeface="Segoe UI"/>
-                <a:ea typeface="Segoe UI"/>
-                <a:cs typeface="Segoe UI"/>
-              </a:rPr>
-              <a:t>Ethics, Legal and Social Implications</a:t>
-            </a:r>
-          </a:p>
-        </p:txBody>
-      </p:sp>
-      <p:sp>
-        <p:nvSpPr>
-          <p:cNvPr id="5" name="TextBox 4"/>
-          <p:cNvSpPr txBox="1"/>
-          <p:nvPr/>
-        </p:nvSpPr>
-        <p:spPr>
-          <a:xfrm>
-            <a:off x="8240677" y="6272784"/>
-            <a:ext cx="2651760" cy="219456"/>
-          </a:xfrm>
-          <a:prstGeom prst="rect">
-            <a:avLst/>
-          </a:prstGeom>
-          <a:noFill/>
-        </p:spPr>
-        <p:txBody>
-          <a:bodyPr wrap="square" lIns="0" rIns="0" tIns="0" bIns="0" anchor="t">
-            <a:spAutoFit/>
-          </a:bodyPr>
-          <a:lstStyle/>
-          <a:p>
-            <a:pPr algn="r">
-              <a:lnSpc>
-                <a:spcPct val="122000"/>
-              </a:lnSpc>
-              <a:spcBef>
-                <a:spcPts val="0"/>
-              </a:spcBef>
-              <a:spcAft>
-                <a:spcPts val="0"/>
-              </a:spcAft>
-            </a:pPr>
-            <a:r>
-              <a:rPr sz="900" b="0" i="0">
-                <a:solidFill>
-                  <a:srgbClr val="636E85"/>
-                </a:solidFill>
-                <a:latin typeface="Segoe UI"/>
-                <a:ea typeface="Segoe UI"/>
-                <a:cs typeface="Segoe UI"/>
-              </a:rPr>
-              <a:t>Lingesh K  ·  OSI2509030</a:t>
-            </a:r>
-            <a:r>
-              <a:rPr sz="900" b="0" i="0">
-                <a:solidFill>
-                  <a:srgbClr val="141C2E"/>
-                </a:solidFill>
-                <a:latin typeface="Segoe UI"/>
-                <a:ea typeface="Segoe UI"/>
-                <a:cs typeface="Segoe UI"/>
-              </a:rPr>
-              <a:t>     </a:t>
-            </a:r>
-            <a:r>
-              <a:rPr sz="900" b="1" i="0">
-                <a:solidFill>
-                  <a:srgbClr val="0E1E3C"/>
-                </a:solidFill>
-                <a:latin typeface="Segoe UI"/>
-                <a:ea typeface="Segoe UI"/>
-                <a:cs typeface="Segoe UI"/>
-              </a:rPr>
-              <a:t>02</a:t>
+              <a:rPr sz="950" b="1" i="0" spc="160">
+                <a:solidFill>
+                  <a:srgbClr val="3B7AF7"/>
+                </a:solidFill>
+                <a:latin typeface="Segoe UI"/>
+                <a:ea typeface="Segoe UI"/>
+                <a:cs typeface="Segoe UI"/>
+              </a:rPr>
+              <a:t>AGENDA</a:t>
             </a:r>
           </a:p>
         </p:txBody>
@@ -17815,53 +17075,6 @@
       <p:sp>
         <p:nvSpPr>
           <p:cNvPr id="6" name="TextBox 5"/>
-          <p:cNvSpPr txBox="1"/>
-          <p:nvPr/>
-        </p:nvSpPr>
-        <p:spPr>
-          <a:xfrm>
-            <a:off x="713232" y="566928"/>
-            <a:ext cx="10765231" cy="219456"/>
-          </a:xfrm>
-          <a:prstGeom prst="rect">
-            <a:avLst/>
-          </a:prstGeom>
-          <a:noFill/>
-        </p:spPr>
-        <p:txBody>
-          <a:bodyPr wrap="square" lIns="0" rIns="0" tIns="0" bIns="0" anchor="t">
-            <a:spAutoFit/>
-          </a:bodyPr>
-          <a:lstStyle/>
-          <a:p>
-            <a:pPr algn="l">
-              <a:lnSpc>
-                <a:spcPct val="122000"/>
-              </a:lnSpc>
-              <a:spcBef>
-                <a:spcPts val="0"/>
-              </a:spcBef>
-              <a:spcAft>
-                <a:spcPts val="0"/>
-              </a:spcAft>
-            </a:pPr>
-            <a:r>
-              <a:rPr sz="950" b="1" i="0" spc="160">
-                <a:solidFill>
-                  <a:srgbClr val="3B7AF7"/>
-                </a:solidFill>
-                <a:latin typeface="Segoe UI"/>
-                <a:ea typeface="Segoe UI"/>
-                <a:cs typeface="Segoe UI"/>
-              </a:rPr>
-              <a:t>AGENDA</a:t>
-            </a:r>
-          </a:p>
-        </p:txBody>
-      </p:sp>
-      <p:sp>
-        <p:nvSpPr>
-          <p:cNvPr id="7" name="TextBox 6"/>
           <p:cNvSpPr txBox="1"/>
           <p:nvPr/>
         </p:nvSpPr>
@@ -17908,7 +17121,7 @@
       </p:sp>
       <p:sp>
         <p:nvSpPr>
-          <p:cNvPr id="8" name="Rectangle 7"/>
+          <p:cNvPr id="7" name="Rectangle 6"/>
           <p:cNvSpPr/>
           <p:nvPr/>
         </p:nvSpPr>
@@ -17952,7 +17165,7 @@
       </p:sp>
       <p:sp>
         <p:nvSpPr>
-          <p:cNvPr id="9" name="TextBox 8"/>
+          <p:cNvPr id="8" name="TextBox 7"/>
           <p:cNvSpPr txBox="1"/>
           <p:nvPr/>
         </p:nvSpPr>
@@ -17999,7 +17212,7 @@
       </p:sp>
       <p:sp>
         <p:nvSpPr>
-          <p:cNvPr id="10" name="Rectangle 9"/>
+          <p:cNvPr id="9" name="Rectangle 8"/>
           <p:cNvSpPr/>
           <p:nvPr/>
         </p:nvSpPr>
@@ -18043,7 +17256,7 @@
       </p:sp>
       <p:sp>
         <p:nvSpPr>
-          <p:cNvPr id="11" name="TextBox 10"/>
+          <p:cNvPr id="10" name="TextBox 9"/>
           <p:cNvSpPr txBox="1"/>
           <p:nvPr/>
         </p:nvSpPr>
@@ -18090,7 +17303,7 @@
       </p:sp>
       <p:sp>
         <p:nvSpPr>
-          <p:cNvPr id="12" name="TextBox 11"/>
+          <p:cNvPr id="11" name="TextBox 10"/>
           <p:cNvSpPr txBox="1"/>
           <p:nvPr/>
         </p:nvSpPr>
@@ -18161,7 +17374,7 @@
       </p:sp>
       <p:sp>
         <p:nvSpPr>
-          <p:cNvPr id="13" name="Rectangle 12"/>
+          <p:cNvPr id="12" name="Rectangle 11"/>
           <p:cNvSpPr/>
           <p:nvPr/>
         </p:nvSpPr>
@@ -18205,7 +17418,7 @@
       </p:sp>
       <p:sp>
         <p:nvSpPr>
-          <p:cNvPr id="14" name="TextBox 13"/>
+          <p:cNvPr id="13" name="TextBox 12"/>
           <p:cNvSpPr txBox="1"/>
           <p:nvPr/>
         </p:nvSpPr>
@@ -18252,7 +17465,7 @@
       </p:sp>
       <p:sp>
         <p:nvSpPr>
-          <p:cNvPr id="15" name="TextBox 14"/>
+          <p:cNvPr id="14" name="TextBox 13"/>
           <p:cNvSpPr txBox="1"/>
           <p:nvPr/>
         </p:nvSpPr>
@@ -18323,7 +17536,7 @@
       </p:sp>
       <p:sp>
         <p:nvSpPr>
-          <p:cNvPr id="16" name="Rectangle 15"/>
+          <p:cNvPr id="15" name="Rectangle 14"/>
           <p:cNvSpPr/>
           <p:nvPr/>
         </p:nvSpPr>
@@ -18367,7 +17580,7 @@
       </p:sp>
       <p:sp>
         <p:nvSpPr>
-          <p:cNvPr id="17" name="TextBox 16"/>
+          <p:cNvPr id="16" name="TextBox 15"/>
           <p:cNvSpPr txBox="1"/>
           <p:nvPr/>
         </p:nvSpPr>
@@ -18414,7 +17627,7 @@
       </p:sp>
       <p:sp>
         <p:nvSpPr>
-          <p:cNvPr id="18" name="TextBox 17"/>
+          <p:cNvPr id="17" name="TextBox 16"/>
           <p:cNvSpPr txBox="1"/>
           <p:nvPr/>
         </p:nvSpPr>
@@ -18485,7 +17698,7 @@
       </p:sp>
       <p:sp>
         <p:nvSpPr>
-          <p:cNvPr id="19" name="Rectangle 18"/>
+          <p:cNvPr id="18" name="Rectangle 17"/>
           <p:cNvSpPr/>
           <p:nvPr/>
         </p:nvSpPr>
@@ -18529,7 +17742,7 @@
       </p:sp>
       <p:sp>
         <p:nvSpPr>
-          <p:cNvPr id="20" name="TextBox 19"/>
+          <p:cNvPr id="19" name="TextBox 18"/>
           <p:cNvSpPr txBox="1"/>
           <p:nvPr/>
         </p:nvSpPr>
@@ -18576,7 +17789,7 @@
       </p:sp>
       <p:sp>
         <p:nvSpPr>
-          <p:cNvPr id="21" name="TextBox 20"/>
+          <p:cNvPr id="20" name="TextBox 19"/>
           <p:cNvSpPr txBox="1"/>
           <p:nvPr/>
         </p:nvSpPr>
@@ -18647,7 +17860,7 @@
       </p:sp>
       <p:sp>
         <p:nvSpPr>
-          <p:cNvPr id="22" name="Rectangle 21"/>
+          <p:cNvPr id="21" name="Rectangle 20"/>
           <p:cNvSpPr/>
           <p:nvPr/>
         </p:nvSpPr>
@@ -18691,7 +17904,7 @@
       </p:sp>
       <p:sp>
         <p:nvSpPr>
-          <p:cNvPr id="23" name="TextBox 22"/>
+          <p:cNvPr id="22" name="TextBox 21"/>
           <p:cNvSpPr txBox="1"/>
           <p:nvPr/>
         </p:nvSpPr>
@@ -18738,7 +17951,7 @@
       </p:sp>
       <p:sp>
         <p:nvSpPr>
-          <p:cNvPr id="24" name="TextBox 23"/>
+          <p:cNvPr id="23" name="TextBox 22"/>
           <p:cNvSpPr txBox="1"/>
           <p:nvPr/>
         </p:nvSpPr>
@@ -18809,7 +18022,7 @@
       </p:sp>
       <p:sp>
         <p:nvSpPr>
-          <p:cNvPr id="25" name="Rectangle 24"/>
+          <p:cNvPr id="24" name="Rectangle 23"/>
           <p:cNvSpPr/>
           <p:nvPr/>
         </p:nvSpPr>
@@ -18853,7 +18066,7 @@
       </p:sp>
       <p:sp>
         <p:nvSpPr>
-          <p:cNvPr id="26" name="TextBox 25"/>
+          <p:cNvPr id="25" name="TextBox 24"/>
           <p:cNvSpPr txBox="1"/>
           <p:nvPr/>
         </p:nvSpPr>
@@ -18900,7 +18113,7 @@
       </p:sp>
       <p:sp>
         <p:nvSpPr>
-          <p:cNvPr id="27" name="TextBox 26"/>
+          <p:cNvPr id="26" name="TextBox 25"/>
           <p:cNvSpPr txBox="1"/>
           <p:nvPr/>
         </p:nvSpPr>
@@ -18971,7 +18184,7 @@
       </p:sp>
       <p:sp>
         <p:nvSpPr>
-          <p:cNvPr id="28" name="Rectangle 27"/>
+          <p:cNvPr id="27" name="Rectangle 26"/>
           <p:cNvSpPr/>
           <p:nvPr/>
         </p:nvSpPr>
@@ -19015,7 +18228,7 @@
       </p:sp>
       <p:sp>
         <p:nvSpPr>
-          <p:cNvPr id="29" name="TextBox 28"/>
+          <p:cNvPr id="28" name="TextBox 27"/>
           <p:cNvSpPr txBox="1"/>
           <p:nvPr/>
         </p:nvSpPr>
@@ -19062,7 +18275,7 @@
       </p:sp>
       <p:sp>
         <p:nvSpPr>
-          <p:cNvPr id="30" name="TextBox 29"/>
+          <p:cNvPr id="29" name="TextBox 28"/>
           <p:cNvSpPr txBox="1"/>
           <p:nvPr/>
         </p:nvSpPr>
@@ -19133,7 +18346,7 @@
       </p:sp>
       <p:sp>
         <p:nvSpPr>
-          <p:cNvPr id="31" name="Rectangle 30"/>
+          <p:cNvPr id="30" name="Rectangle 29"/>
           <p:cNvSpPr/>
           <p:nvPr/>
         </p:nvSpPr>
@@ -19177,7 +18390,7 @@
       </p:sp>
       <p:sp>
         <p:nvSpPr>
-          <p:cNvPr id="32" name="TextBox 31"/>
+          <p:cNvPr id="31" name="TextBox 30"/>
           <p:cNvSpPr txBox="1"/>
           <p:nvPr/>
         </p:nvSpPr>
@@ -19224,7 +18437,7 @@
       </p:sp>
       <p:sp>
         <p:nvSpPr>
-          <p:cNvPr id="33" name="TextBox 32"/>
+          <p:cNvPr id="32" name="TextBox 31"/>
           <p:cNvSpPr txBox="1"/>
           <p:nvPr/>
         </p:nvSpPr>
@@ -19387,8 +18600,77 @@
         </p:nvSpPr>
         <p:spPr>
           <a:xfrm>
-            <a:off x="713232" y="6272784"/>
-            <a:ext cx="5597920" cy="219456"/>
+            <a:off x="8240677" y="6272784"/>
+            <a:ext cx="2651760" cy="219456"/>
+          </a:xfrm>
+          <a:prstGeom prst="rect">
+            <a:avLst/>
+          </a:prstGeom>
+          <a:noFill/>
+        </p:spPr>
+        <p:txBody>
+          <a:bodyPr wrap="square" lIns="0" rIns="0" tIns="0" bIns="0" anchor="t">
+            <a:spAutoFit/>
+          </a:bodyPr>
+          <a:lstStyle/>
+          <a:p>
+            <a:pPr algn="r">
+              <a:lnSpc>
+                <a:spcPct val="122000"/>
+              </a:lnSpc>
+              <a:spcBef>
+                <a:spcPts val="0"/>
+              </a:spcBef>
+              <a:spcAft>
+                <a:spcPts val="0"/>
+              </a:spcAft>
+            </a:pPr>
+            <a:r>
+              <a:rPr sz="900" b="0" i="0">
+                <a:solidFill>
+                  <a:srgbClr val="636E85"/>
+                </a:solidFill>
+                <a:latin typeface="Segoe UI"/>
+                <a:ea typeface="Segoe UI"/>
+                <a:cs typeface="Segoe UI"/>
+              </a:rPr>
+              <a:t>Lingesh K  ·  OSI2509030</a:t>
+            </a:r>
+            <a:r>
+              <a:rPr sz="900" b="0" i="0">
+                <a:solidFill>
+                  <a:srgbClr val="141C2E"/>
+                </a:solidFill>
+                <a:latin typeface="Segoe UI"/>
+                <a:ea typeface="Segoe UI"/>
+                <a:cs typeface="Segoe UI"/>
+              </a:rPr>
+              <a:t>     </a:t>
+            </a:r>
+            <a:r>
+              <a:rPr sz="900" b="1" i="0">
+                <a:solidFill>
+                  <a:srgbClr val="0E1E3C"/>
+                </a:solidFill>
+                <a:latin typeface="Segoe UI"/>
+                <a:ea typeface="Segoe UI"/>
+                <a:cs typeface="Segoe UI"/>
+              </a:rPr>
+              <a:t>20</a:t>
+            </a:r>
+          </a:p>
+        </p:txBody>
+      </p:sp>
+      <p:sp>
+        <p:nvSpPr>
+          <p:cNvPr id="5" name="TextBox 4"/>
+          <p:cNvSpPr txBox="1"/>
+          <p:nvPr/>
+        </p:nvSpPr>
+        <p:spPr>
+          <a:xfrm>
+            <a:off x="713232" y="566928"/>
+            <a:ext cx="10765231" cy="219456"/>
           </a:xfrm>
           <a:prstGeom prst="rect">
             <a:avLst/>
@@ -19413,106 +18695,15 @@
               </a:spcAft>
             </a:pPr>
             <a:r>
-              <a:rPr sz="900" b="1" i="0">
-                <a:solidFill>
-                  <a:srgbClr val="0E1E3C"/>
-                </a:solidFill>
-                <a:latin typeface="Segoe UI"/>
-                <a:ea typeface="Segoe UI"/>
-                <a:cs typeface="Segoe UI"/>
-              </a:rPr>
-              <a:t>Unit 4</a:t>
-            </a:r>
-            <a:r>
-              <a:rPr sz="900" b="0" i="0">
-                <a:solidFill>
-                  <a:srgbClr val="939EB3"/>
-                </a:solidFill>
-                <a:latin typeface="Segoe UI"/>
-                <a:ea typeface="Segoe UI"/>
-                <a:cs typeface="Segoe UI"/>
-              </a:rPr>
-              <a:t>  ·  </a:t>
-            </a:r>
-            <a:r>
-              <a:rPr sz="900" b="0" i="0">
-                <a:solidFill>
-                  <a:srgbClr val="636E85"/>
-                </a:solidFill>
-                <a:latin typeface="Segoe UI"/>
-                <a:ea typeface="Segoe UI"/>
-                <a:cs typeface="Segoe UI"/>
-              </a:rPr>
-              <a:t>Ethics, Legal and Social Implications</a:t>
-            </a:r>
-          </a:p>
-        </p:txBody>
-      </p:sp>
-      <p:sp>
-        <p:nvSpPr>
-          <p:cNvPr id="5" name="TextBox 4"/>
-          <p:cNvSpPr txBox="1"/>
-          <p:nvPr/>
-        </p:nvSpPr>
-        <p:spPr>
-          <a:xfrm>
-            <a:off x="8240677" y="6272784"/>
-            <a:ext cx="2651760" cy="219456"/>
-          </a:xfrm>
-          <a:prstGeom prst="rect">
-            <a:avLst/>
-          </a:prstGeom>
-          <a:noFill/>
-        </p:spPr>
-        <p:txBody>
-          <a:bodyPr wrap="square" lIns="0" rIns="0" tIns="0" bIns="0" anchor="t">
-            <a:spAutoFit/>
-          </a:bodyPr>
-          <a:lstStyle/>
-          <a:p>
-            <a:pPr algn="r">
-              <a:lnSpc>
-                <a:spcPct val="122000"/>
-              </a:lnSpc>
-              <a:spcBef>
-                <a:spcPts val="0"/>
-              </a:spcBef>
-              <a:spcAft>
-                <a:spcPts val="0"/>
-              </a:spcAft>
-            </a:pPr>
-            <a:r>
-              <a:rPr sz="900" b="0" i="0">
-                <a:solidFill>
-                  <a:srgbClr val="636E85"/>
-                </a:solidFill>
-                <a:latin typeface="Segoe UI"/>
-                <a:ea typeface="Segoe UI"/>
-                <a:cs typeface="Segoe UI"/>
-              </a:rPr>
-              <a:t>Lingesh K  ·  OSI2509030</a:t>
-            </a:r>
-            <a:r>
-              <a:rPr sz="900" b="0" i="0">
-                <a:solidFill>
-                  <a:srgbClr val="141C2E"/>
-                </a:solidFill>
-                <a:latin typeface="Segoe UI"/>
-                <a:ea typeface="Segoe UI"/>
-                <a:cs typeface="Segoe UI"/>
-              </a:rPr>
-              <a:t>     </a:t>
-            </a:r>
-            <a:r>
-              <a:rPr sz="900" b="1" i="0">
-                <a:solidFill>
-                  <a:srgbClr val="0E1E3C"/>
-                </a:solidFill>
-                <a:latin typeface="Segoe UI"/>
-                <a:ea typeface="Segoe UI"/>
-                <a:cs typeface="Segoe UI"/>
-              </a:rPr>
-              <a:t>20</a:t>
+              <a:rPr sz="950" b="1" i="0" spc="160">
+                <a:solidFill>
+                  <a:srgbClr val="00B3A4"/>
+                </a:solidFill>
+                <a:latin typeface="Segoe UI"/>
+                <a:ea typeface="Segoe UI"/>
+                <a:cs typeface="Segoe UI"/>
+              </a:rPr>
+              <a:t>HUMAN OVERSIGHT</a:t>
             </a:r>
           </a:p>
         </p:txBody>
@@ -19520,53 +18711,6 @@
       <p:sp>
         <p:nvSpPr>
           <p:cNvPr id="6" name="TextBox 5"/>
-          <p:cNvSpPr txBox="1"/>
-          <p:nvPr/>
-        </p:nvSpPr>
-        <p:spPr>
-          <a:xfrm>
-            <a:off x="713232" y="566928"/>
-            <a:ext cx="10765231" cy="219456"/>
-          </a:xfrm>
-          <a:prstGeom prst="rect">
-            <a:avLst/>
-          </a:prstGeom>
-          <a:noFill/>
-        </p:spPr>
-        <p:txBody>
-          <a:bodyPr wrap="square" lIns="0" rIns="0" tIns="0" bIns="0" anchor="t">
-            <a:spAutoFit/>
-          </a:bodyPr>
-          <a:lstStyle/>
-          <a:p>
-            <a:pPr algn="l">
-              <a:lnSpc>
-                <a:spcPct val="122000"/>
-              </a:lnSpc>
-              <a:spcBef>
-                <a:spcPts val="0"/>
-              </a:spcBef>
-              <a:spcAft>
-                <a:spcPts val="0"/>
-              </a:spcAft>
-            </a:pPr>
-            <a:r>
-              <a:rPr sz="950" b="1" i="0" spc="160">
-                <a:solidFill>
-                  <a:srgbClr val="00B3A4"/>
-                </a:solidFill>
-                <a:latin typeface="Segoe UI"/>
-                <a:ea typeface="Segoe UI"/>
-                <a:cs typeface="Segoe UI"/>
-              </a:rPr>
-              <a:t>HUMAN OVERSIGHT</a:t>
-            </a:r>
-          </a:p>
-        </p:txBody>
-      </p:sp>
-      <p:sp>
-        <p:nvSpPr>
-          <p:cNvPr id="7" name="TextBox 6"/>
           <p:cNvSpPr txBox="1"/>
           <p:nvPr/>
         </p:nvSpPr>
@@ -19613,7 +18757,7 @@
       </p:sp>
       <p:sp>
         <p:nvSpPr>
-          <p:cNvPr id="8" name="Rectangle 7"/>
+          <p:cNvPr id="7" name="Rectangle 6"/>
           <p:cNvSpPr/>
           <p:nvPr/>
         </p:nvSpPr>
@@ -19657,7 +18801,7 @@
       </p:sp>
       <p:sp>
         <p:nvSpPr>
-          <p:cNvPr id="9" name="TextBox 8"/>
+          <p:cNvPr id="8" name="TextBox 7"/>
           <p:cNvSpPr txBox="1"/>
           <p:nvPr/>
         </p:nvSpPr>
@@ -19704,7 +18848,7 @@
       </p:sp>
       <p:sp>
         <p:nvSpPr>
-          <p:cNvPr id="10" name="Rounded Rectangle 9"/>
+          <p:cNvPr id="9" name="Rounded Rectangle 8"/>
           <p:cNvSpPr/>
           <p:nvPr/>
         </p:nvSpPr>
@@ -19750,7 +18894,7 @@
       </p:sp>
       <p:sp>
         <p:nvSpPr>
-          <p:cNvPr id="11" name="TextBox 10"/>
+          <p:cNvPr id="10" name="TextBox 9"/>
           <p:cNvSpPr txBox="1"/>
           <p:nvPr/>
         </p:nvSpPr>
@@ -19821,7 +18965,7 @@
       </p:sp>
       <p:sp>
         <p:nvSpPr>
-          <p:cNvPr id="12" name="Rounded Rectangle 11"/>
+          <p:cNvPr id="11" name="Rounded Rectangle 10"/>
           <p:cNvSpPr/>
           <p:nvPr/>
         </p:nvSpPr>
@@ -19867,7 +19011,7 @@
       </p:sp>
       <p:sp>
         <p:nvSpPr>
-          <p:cNvPr id="13" name="TextBox 12"/>
+          <p:cNvPr id="12" name="TextBox 11"/>
           <p:cNvSpPr txBox="1"/>
           <p:nvPr/>
         </p:nvSpPr>
@@ -19938,7 +19082,7 @@
       </p:sp>
       <p:sp>
         <p:nvSpPr>
-          <p:cNvPr id="14" name="Rounded Rectangle 13"/>
+          <p:cNvPr id="13" name="Rounded Rectangle 12"/>
           <p:cNvSpPr/>
           <p:nvPr/>
         </p:nvSpPr>
@@ -19984,7 +19128,7 @@
       </p:sp>
       <p:sp>
         <p:nvSpPr>
-          <p:cNvPr id="15" name="TextBox 14"/>
+          <p:cNvPr id="14" name="TextBox 13"/>
           <p:cNvSpPr txBox="1"/>
           <p:nvPr/>
         </p:nvSpPr>
@@ -20055,7 +19199,7 @@
       </p:sp>
       <p:sp>
         <p:nvSpPr>
-          <p:cNvPr id="16" name="Rounded Rectangle 15"/>
+          <p:cNvPr id="15" name="Rounded Rectangle 14"/>
           <p:cNvSpPr/>
           <p:nvPr/>
         </p:nvSpPr>
@@ -20101,7 +19245,7 @@
       </p:sp>
       <p:sp>
         <p:nvSpPr>
-          <p:cNvPr id="17" name="TextBox 16"/>
+          <p:cNvPr id="16" name="TextBox 15"/>
           <p:cNvSpPr txBox="1"/>
           <p:nvPr/>
         </p:nvSpPr>
@@ -20172,7 +19316,7 @@
       </p:sp>
       <p:sp>
         <p:nvSpPr>
-          <p:cNvPr id="18" name="Rounded Rectangle 17"/>
+          <p:cNvPr id="17" name="Rounded Rectangle 16"/>
           <p:cNvSpPr/>
           <p:nvPr/>
         </p:nvSpPr>
@@ -20218,7 +19362,7 @@
       </p:sp>
       <p:sp>
         <p:nvSpPr>
-          <p:cNvPr id="19" name="TextBox 18"/>
+          <p:cNvPr id="18" name="TextBox 17"/>
           <p:cNvSpPr txBox="1"/>
           <p:nvPr/>
         </p:nvSpPr>
@@ -20289,7 +19433,7 @@
       </p:sp>
       <p:sp>
         <p:nvSpPr>
-          <p:cNvPr id="20" name="Rounded Rectangle 19"/>
+          <p:cNvPr id="19" name="Rounded Rectangle 18"/>
           <p:cNvSpPr/>
           <p:nvPr/>
         </p:nvSpPr>
@@ -20335,7 +19479,7 @@
       </p:sp>
       <p:sp>
         <p:nvSpPr>
-          <p:cNvPr id="21" name="TextBox 20"/>
+          <p:cNvPr id="20" name="TextBox 19"/>
           <p:cNvSpPr txBox="1"/>
           <p:nvPr/>
         </p:nvSpPr>
@@ -20915,8 +20059,77 @@
         </p:nvSpPr>
         <p:spPr>
           <a:xfrm>
-            <a:off x="713232" y="6272784"/>
-            <a:ext cx="5597920" cy="219456"/>
+            <a:off x="8240677" y="6272784"/>
+            <a:ext cx="2651760" cy="219456"/>
+          </a:xfrm>
+          <a:prstGeom prst="rect">
+            <a:avLst/>
+          </a:prstGeom>
+          <a:noFill/>
+        </p:spPr>
+        <p:txBody>
+          <a:bodyPr wrap="square" lIns="0" rIns="0" tIns="0" bIns="0" anchor="t">
+            <a:spAutoFit/>
+          </a:bodyPr>
+          <a:lstStyle/>
+          <a:p>
+            <a:pPr algn="r">
+              <a:lnSpc>
+                <a:spcPct val="122000"/>
+              </a:lnSpc>
+              <a:spcBef>
+                <a:spcPts val="0"/>
+              </a:spcBef>
+              <a:spcAft>
+                <a:spcPts val="0"/>
+              </a:spcAft>
+            </a:pPr>
+            <a:r>
+              <a:rPr sz="900" b="0" i="0">
+                <a:solidFill>
+                  <a:srgbClr val="636E85"/>
+                </a:solidFill>
+                <a:latin typeface="Segoe UI"/>
+                <a:ea typeface="Segoe UI"/>
+                <a:cs typeface="Segoe UI"/>
+              </a:rPr>
+              <a:t>Lingesh K  ·  OSI2509030</a:t>
+            </a:r>
+            <a:r>
+              <a:rPr sz="900" b="0" i="0">
+                <a:solidFill>
+                  <a:srgbClr val="141C2E"/>
+                </a:solidFill>
+                <a:latin typeface="Segoe UI"/>
+                <a:ea typeface="Segoe UI"/>
+                <a:cs typeface="Segoe UI"/>
+              </a:rPr>
+              <a:t>     </a:t>
+            </a:r>
+            <a:r>
+              <a:rPr sz="900" b="1" i="0">
+                <a:solidFill>
+                  <a:srgbClr val="0E1E3C"/>
+                </a:solidFill>
+                <a:latin typeface="Segoe UI"/>
+                <a:ea typeface="Segoe UI"/>
+                <a:cs typeface="Segoe UI"/>
+              </a:rPr>
+              <a:t>22</a:t>
+            </a:r>
+          </a:p>
+        </p:txBody>
+      </p:sp>
+      <p:sp>
+        <p:nvSpPr>
+          <p:cNvPr id="5" name="TextBox 4"/>
+          <p:cNvSpPr txBox="1"/>
+          <p:nvPr/>
+        </p:nvSpPr>
+        <p:spPr>
+          <a:xfrm>
+            <a:off x="713232" y="566928"/>
+            <a:ext cx="10765231" cy="219456"/>
           </a:xfrm>
           <a:prstGeom prst="rect">
             <a:avLst/>
@@ -20941,106 +20154,15 @@
               </a:spcAft>
             </a:pPr>
             <a:r>
-              <a:rPr sz="900" b="1" i="0">
-                <a:solidFill>
-                  <a:srgbClr val="0E1E3C"/>
-                </a:solidFill>
-                <a:latin typeface="Segoe UI"/>
-                <a:ea typeface="Segoe UI"/>
-                <a:cs typeface="Segoe UI"/>
-              </a:rPr>
-              <a:t>Unit 4</a:t>
-            </a:r>
-            <a:r>
-              <a:rPr sz="900" b="0" i="0">
-                <a:solidFill>
-                  <a:srgbClr val="939EB3"/>
-                </a:solidFill>
-                <a:latin typeface="Segoe UI"/>
-                <a:ea typeface="Segoe UI"/>
-                <a:cs typeface="Segoe UI"/>
-              </a:rPr>
-              <a:t>  ·  </a:t>
-            </a:r>
-            <a:r>
-              <a:rPr sz="900" b="0" i="0">
-                <a:solidFill>
-                  <a:srgbClr val="636E85"/>
-                </a:solidFill>
-                <a:latin typeface="Segoe UI"/>
-                <a:ea typeface="Segoe UI"/>
-                <a:cs typeface="Segoe UI"/>
-              </a:rPr>
-              <a:t>Ethics, Legal and Social Implications</a:t>
-            </a:r>
-          </a:p>
-        </p:txBody>
-      </p:sp>
-      <p:sp>
-        <p:nvSpPr>
-          <p:cNvPr id="5" name="TextBox 4"/>
-          <p:cNvSpPr txBox="1"/>
-          <p:nvPr/>
-        </p:nvSpPr>
-        <p:spPr>
-          <a:xfrm>
-            <a:off x="8240677" y="6272784"/>
-            <a:ext cx="2651760" cy="219456"/>
-          </a:xfrm>
-          <a:prstGeom prst="rect">
-            <a:avLst/>
-          </a:prstGeom>
-          <a:noFill/>
-        </p:spPr>
-        <p:txBody>
-          <a:bodyPr wrap="square" lIns="0" rIns="0" tIns="0" bIns="0" anchor="t">
-            <a:spAutoFit/>
-          </a:bodyPr>
-          <a:lstStyle/>
-          <a:p>
-            <a:pPr algn="r">
-              <a:lnSpc>
-                <a:spcPct val="122000"/>
-              </a:lnSpc>
-              <a:spcBef>
-                <a:spcPts val="0"/>
-              </a:spcBef>
-              <a:spcAft>
-                <a:spcPts val="0"/>
-              </a:spcAft>
-            </a:pPr>
-            <a:r>
-              <a:rPr sz="900" b="0" i="0">
-                <a:solidFill>
-                  <a:srgbClr val="636E85"/>
-                </a:solidFill>
-                <a:latin typeface="Segoe UI"/>
-                <a:ea typeface="Segoe UI"/>
-                <a:cs typeface="Segoe UI"/>
-              </a:rPr>
-              <a:t>Lingesh K  ·  OSI2509030</a:t>
-            </a:r>
-            <a:r>
-              <a:rPr sz="900" b="0" i="0">
-                <a:solidFill>
-                  <a:srgbClr val="141C2E"/>
-                </a:solidFill>
-                <a:latin typeface="Segoe UI"/>
-                <a:ea typeface="Segoe UI"/>
-                <a:cs typeface="Segoe UI"/>
-              </a:rPr>
-              <a:t>     </a:t>
-            </a:r>
-            <a:r>
-              <a:rPr sz="900" b="1" i="0">
-                <a:solidFill>
-                  <a:srgbClr val="0E1E3C"/>
-                </a:solidFill>
-                <a:latin typeface="Segoe UI"/>
-                <a:ea typeface="Segoe UI"/>
-                <a:cs typeface="Segoe UI"/>
-              </a:rPr>
-              <a:t>22</a:t>
+              <a:rPr sz="950" b="1" i="0" spc="160">
+                <a:solidFill>
+                  <a:srgbClr val="3B7AF7"/>
+                </a:solidFill>
+                <a:latin typeface="Segoe UI"/>
+                <a:ea typeface="Segoe UI"/>
+                <a:cs typeface="Segoe UI"/>
+              </a:rPr>
+              <a:t>GOVERNANCE</a:t>
             </a:r>
           </a:p>
         </p:txBody>
@@ -21048,53 +20170,6 @@
       <p:sp>
         <p:nvSpPr>
           <p:cNvPr id="6" name="TextBox 5"/>
-          <p:cNvSpPr txBox="1"/>
-          <p:nvPr/>
-        </p:nvSpPr>
-        <p:spPr>
-          <a:xfrm>
-            <a:off x="713232" y="566928"/>
-            <a:ext cx="10765231" cy="219456"/>
-          </a:xfrm>
-          <a:prstGeom prst="rect">
-            <a:avLst/>
-          </a:prstGeom>
-          <a:noFill/>
-        </p:spPr>
-        <p:txBody>
-          <a:bodyPr wrap="square" lIns="0" rIns="0" tIns="0" bIns="0" anchor="t">
-            <a:spAutoFit/>
-          </a:bodyPr>
-          <a:lstStyle/>
-          <a:p>
-            <a:pPr algn="l">
-              <a:lnSpc>
-                <a:spcPct val="122000"/>
-              </a:lnSpc>
-              <a:spcBef>
-                <a:spcPts val="0"/>
-              </a:spcBef>
-              <a:spcAft>
-                <a:spcPts val="0"/>
-              </a:spcAft>
-            </a:pPr>
-            <a:r>
-              <a:rPr sz="950" b="1" i="0" spc="160">
-                <a:solidFill>
-                  <a:srgbClr val="3B7AF7"/>
-                </a:solidFill>
-                <a:latin typeface="Segoe UI"/>
-                <a:ea typeface="Segoe UI"/>
-                <a:cs typeface="Segoe UI"/>
-              </a:rPr>
-              <a:t>GOVERNANCE</a:t>
-            </a:r>
-          </a:p>
-        </p:txBody>
-      </p:sp>
-      <p:sp>
-        <p:nvSpPr>
-          <p:cNvPr id="7" name="TextBox 6"/>
           <p:cNvSpPr txBox="1"/>
           <p:nvPr/>
         </p:nvSpPr>
@@ -21141,7 +20216,7 @@
       </p:sp>
       <p:sp>
         <p:nvSpPr>
-          <p:cNvPr id="8" name="Rectangle 7"/>
+          <p:cNvPr id="7" name="Rectangle 6"/>
           <p:cNvSpPr/>
           <p:nvPr/>
         </p:nvSpPr>
@@ -21185,7 +20260,7 @@
       </p:sp>
       <p:sp>
         <p:nvSpPr>
-          <p:cNvPr id="9" name="TextBox 8"/>
+          <p:cNvPr id="8" name="TextBox 7"/>
           <p:cNvSpPr txBox="1"/>
           <p:nvPr/>
         </p:nvSpPr>
@@ -21232,7 +20307,7 @@
       </p:sp>
       <p:sp>
         <p:nvSpPr>
-          <p:cNvPr id="10" name="Rounded Rectangle 9"/>
+          <p:cNvPr id="9" name="Rounded Rectangle 8"/>
           <p:cNvSpPr/>
           <p:nvPr/>
         </p:nvSpPr>
@@ -21286,7 +20361,7 @@
       </p:sp>
       <p:sp>
         <p:nvSpPr>
-          <p:cNvPr id="11" name="Rectangle 10"/>
+          <p:cNvPr id="10" name="Rectangle 9"/>
           <p:cNvSpPr/>
           <p:nvPr/>
         </p:nvSpPr>
@@ -21330,7 +20405,7 @@
       </p:sp>
       <p:sp>
         <p:nvSpPr>
-          <p:cNvPr id="12" name="TextBox 11"/>
+          <p:cNvPr id="11" name="TextBox 10"/>
           <p:cNvSpPr txBox="1"/>
           <p:nvPr/>
         </p:nvSpPr>
@@ -21377,7 +20452,7 @@
       </p:sp>
       <p:sp>
         <p:nvSpPr>
-          <p:cNvPr id="13" name="TextBox 12"/>
+          <p:cNvPr id="12" name="TextBox 11"/>
           <p:cNvSpPr txBox="1"/>
           <p:nvPr/>
         </p:nvSpPr>
@@ -21424,7 +20499,7 @@
       </p:sp>
       <p:sp>
         <p:nvSpPr>
-          <p:cNvPr id="14" name="Rounded Rectangle 13"/>
+          <p:cNvPr id="13" name="Rounded Rectangle 12"/>
           <p:cNvSpPr/>
           <p:nvPr/>
         </p:nvSpPr>
@@ -21478,7 +20553,7 @@
       </p:sp>
       <p:sp>
         <p:nvSpPr>
-          <p:cNvPr id="15" name="Rectangle 14"/>
+          <p:cNvPr id="14" name="Rectangle 13"/>
           <p:cNvSpPr/>
           <p:nvPr/>
         </p:nvSpPr>
@@ -21522,7 +20597,7 @@
       </p:sp>
       <p:sp>
         <p:nvSpPr>
-          <p:cNvPr id="16" name="TextBox 15"/>
+          <p:cNvPr id="15" name="TextBox 14"/>
           <p:cNvSpPr txBox="1"/>
           <p:nvPr/>
         </p:nvSpPr>
@@ -21569,7 +20644,7 @@
       </p:sp>
       <p:sp>
         <p:nvSpPr>
-          <p:cNvPr id="17" name="TextBox 16"/>
+          <p:cNvPr id="16" name="TextBox 15"/>
           <p:cNvSpPr txBox="1"/>
           <p:nvPr/>
         </p:nvSpPr>
@@ -21616,7 +20691,7 @@
       </p:sp>
       <p:sp>
         <p:nvSpPr>
-          <p:cNvPr id="18" name="Rounded Rectangle 17"/>
+          <p:cNvPr id="17" name="Rounded Rectangle 16"/>
           <p:cNvSpPr/>
           <p:nvPr/>
         </p:nvSpPr>
@@ -21670,7 +20745,7 @@
       </p:sp>
       <p:sp>
         <p:nvSpPr>
-          <p:cNvPr id="19" name="Rectangle 18"/>
+          <p:cNvPr id="18" name="Rectangle 17"/>
           <p:cNvSpPr/>
           <p:nvPr/>
         </p:nvSpPr>
@@ -21714,7 +20789,7 @@
       </p:sp>
       <p:sp>
         <p:nvSpPr>
-          <p:cNvPr id="20" name="TextBox 19"/>
+          <p:cNvPr id="19" name="TextBox 18"/>
           <p:cNvSpPr txBox="1"/>
           <p:nvPr/>
         </p:nvSpPr>
@@ -21761,7 +20836,7 @@
       </p:sp>
       <p:sp>
         <p:nvSpPr>
-          <p:cNvPr id="21" name="TextBox 20"/>
+          <p:cNvPr id="20" name="TextBox 19"/>
           <p:cNvSpPr txBox="1"/>
           <p:nvPr/>
         </p:nvSpPr>
@@ -21808,7 +20883,7 @@
       </p:sp>
       <p:sp>
         <p:nvSpPr>
-          <p:cNvPr id="22" name="Rounded Rectangle 21"/>
+          <p:cNvPr id="21" name="Rounded Rectangle 20"/>
           <p:cNvSpPr/>
           <p:nvPr/>
         </p:nvSpPr>
@@ -21862,7 +20937,7 @@
       </p:sp>
       <p:sp>
         <p:nvSpPr>
-          <p:cNvPr id="23" name="Rectangle 22"/>
+          <p:cNvPr id="22" name="Rectangle 21"/>
           <p:cNvSpPr/>
           <p:nvPr/>
         </p:nvSpPr>
@@ -21906,7 +20981,7 @@
       </p:sp>
       <p:sp>
         <p:nvSpPr>
-          <p:cNvPr id="24" name="TextBox 23"/>
+          <p:cNvPr id="23" name="TextBox 22"/>
           <p:cNvSpPr txBox="1"/>
           <p:nvPr/>
         </p:nvSpPr>
@@ -21953,7 +21028,7 @@
       </p:sp>
       <p:sp>
         <p:nvSpPr>
-          <p:cNvPr id="25" name="TextBox 24"/>
+          <p:cNvPr id="24" name="TextBox 23"/>
           <p:cNvSpPr txBox="1"/>
           <p:nvPr/>
         </p:nvSpPr>
@@ -22000,7 +21075,7 @@
       </p:sp>
       <p:sp>
         <p:nvSpPr>
-          <p:cNvPr id="26" name="Rounded Rectangle 25"/>
+          <p:cNvPr id="25" name="Rounded Rectangle 24"/>
           <p:cNvSpPr/>
           <p:nvPr/>
         </p:nvSpPr>
@@ -22054,7 +21129,7 @@
       </p:sp>
       <p:sp>
         <p:nvSpPr>
-          <p:cNvPr id="27" name="Rectangle 26"/>
+          <p:cNvPr id="26" name="Rectangle 25"/>
           <p:cNvSpPr/>
           <p:nvPr/>
         </p:nvSpPr>
@@ -22098,7 +21173,7 @@
       </p:sp>
       <p:sp>
         <p:nvSpPr>
-          <p:cNvPr id="28" name="TextBox 27"/>
+          <p:cNvPr id="27" name="TextBox 26"/>
           <p:cNvSpPr txBox="1"/>
           <p:nvPr/>
         </p:nvSpPr>
@@ -22145,7 +21220,7 @@
       </p:sp>
       <p:sp>
         <p:nvSpPr>
-          <p:cNvPr id="29" name="TextBox 28"/>
+          <p:cNvPr id="28" name="TextBox 27"/>
           <p:cNvSpPr txBox="1"/>
           <p:nvPr/>
         </p:nvSpPr>
@@ -22192,7 +21267,7 @@
       </p:sp>
       <p:sp>
         <p:nvSpPr>
-          <p:cNvPr id="30" name="Rounded Rectangle 29"/>
+          <p:cNvPr id="29" name="Rounded Rectangle 28"/>
           <p:cNvSpPr/>
           <p:nvPr/>
         </p:nvSpPr>
@@ -22246,7 +21321,7 @@
       </p:sp>
       <p:sp>
         <p:nvSpPr>
-          <p:cNvPr id="31" name="Rectangle 30"/>
+          <p:cNvPr id="30" name="Rectangle 29"/>
           <p:cNvSpPr/>
           <p:nvPr/>
         </p:nvSpPr>
@@ -22290,7 +21365,7 @@
       </p:sp>
       <p:sp>
         <p:nvSpPr>
-          <p:cNvPr id="32" name="TextBox 31"/>
+          <p:cNvPr id="31" name="TextBox 30"/>
           <p:cNvSpPr txBox="1"/>
           <p:nvPr/>
         </p:nvSpPr>
@@ -22337,7 +21412,7 @@
       </p:sp>
       <p:sp>
         <p:nvSpPr>
-          <p:cNvPr id="33" name="TextBox 32"/>
+          <p:cNvPr id="32" name="TextBox 31"/>
           <p:cNvSpPr txBox="1"/>
           <p:nvPr/>
         </p:nvSpPr>
@@ -22476,8 +21551,77 @@
         </p:nvSpPr>
         <p:spPr>
           <a:xfrm>
-            <a:off x="713232" y="6272784"/>
-            <a:ext cx="5597920" cy="219456"/>
+            <a:off x="8240677" y="6272784"/>
+            <a:ext cx="2651760" cy="219456"/>
+          </a:xfrm>
+          <a:prstGeom prst="rect">
+            <a:avLst/>
+          </a:prstGeom>
+          <a:noFill/>
+        </p:spPr>
+        <p:txBody>
+          <a:bodyPr wrap="square" lIns="0" rIns="0" tIns="0" bIns="0" anchor="t">
+            <a:spAutoFit/>
+          </a:bodyPr>
+          <a:lstStyle/>
+          <a:p>
+            <a:pPr algn="r">
+              <a:lnSpc>
+                <a:spcPct val="122000"/>
+              </a:lnSpc>
+              <a:spcBef>
+                <a:spcPts val="0"/>
+              </a:spcBef>
+              <a:spcAft>
+                <a:spcPts val="0"/>
+              </a:spcAft>
+            </a:pPr>
+            <a:r>
+              <a:rPr sz="900" b="0" i="0">
+                <a:solidFill>
+                  <a:srgbClr val="636E85"/>
+                </a:solidFill>
+                <a:latin typeface="Segoe UI"/>
+                <a:ea typeface="Segoe UI"/>
+                <a:cs typeface="Segoe UI"/>
+              </a:rPr>
+              <a:t>Lingesh K  ·  OSI2509030</a:t>
+            </a:r>
+            <a:r>
+              <a:rPr sz="900" b="0" i="0">
+                <a:solidFill>
+                  <a:srgbClr val="141C2E"/>
+                </a:solidFill>
+                <a:latin typeface="Segoe UI"/>
+                <a:ea typeface="Segoe UI"/>
+                <a:cs typeface="Segoe UI"/>
+              </a:rPr>
+              <a:t>     </a:t>
+            </a:r>
+            <a:r>
+              <a:rPr sz="900" b="1" i="0">
+                <a:solidFill>
+                  <a:srgbClr val="0E1E3C"/>
+                </a:solidFill>
+                <a:latin typeface="Segoe UI"/>
+                <a:ea typeface="Segoe UI"/>
+                <a:cs typeface="Segoe UI"/>
+              </a:rPr>
+              <a:t>23</a:t>
+            </a:r>
+          </a:p>
+        </p:txBody>
+      </p:sp>
+      <p:sp>
+        <p:nvSpPr>
+          <p:cNvPr id="5" name="TextBox 4"/>
+          <p:cNvSpPr txBox="1"/>
+          <p:nvPr/>
+        </p:nvSpPr>
+        <p:spPr>
+          <a:xfrm>
+            <a:off x="713232" y="566928"/>
+            <a:ext cx="10765231" cy="219456"/>
           </a:xfrm>
           <a:prstGeom prst="rect">
             <a:avLst/>
@@ -22502,106 +21646,15 @@
               </a:spcAft>
             </a:pPr>
             <a:r>
-              <a:rPr sz="900" b="1" i="0">
-                <a:solidFill>
-                  <a:srgbClr val="0E1E3C"/>
-                </a:solidFill>
-                <a:latin typeface="Segoe UI"/>
-                <a:ea typeface="Segoe UI"/>
-                <a:cs typeface="Segoe UI"/>
-              </a:rPr>
-              <a:t>Unit 4</a:t>
-            </a:r>
-            <a:r>
-              <a:rPr sz="900" b="0" i="0">
-                <a:solidFill>
-                  <a:srgbClr val="939EB3"/>
-                </a:solidFill>
-                <a:latin typeface="Segoe UI"/>
-                <a:ea typeface="Segoe UI"/>
-                <a:cs typeface="Segoe UI"/>
-              </a:rPr>
-              <a:t>  ·  </a:t>
-            </a:r>
-            <a:r>
-              <a:rPr sz="900" b="0" i="0">
-                <a:solidFill>
-                  <a:srgbClr val="636E85"/>
-                </a:solidFill>
-                <a:latin typeface="Segoe UI"/>
-                <a:ea typeface="Segoe UI"/>
-                <a:cs typeface="Segoe UI"/>
-              </a:rPr>
-              <a:t>Ethics, Legal and Social Implications</a:t>
-            </a:r>
-          </a:p>
-        </p:txBody>
-      </p:sp>
-      <p:sp>
-        <p:nvSpPr>
-          <p:cNvPr id="5" name="TextBox 4"/>
-          <p:cNvSpPr txBox="1"/>
-          <p:nvPr/>
-        </p:nvSpPr>
-        <p:spPr>
-          <a:xfrm>
-            <a:off x="8240677" y="6272784"/>
-            <a:ext cx="2651760" cy="219456"/>
-          </a:xfrm>
-          <a:prstGeom prst="rect">
-            <a:avLst/>
-          </a:prstGeom>
-          <a:noFill/>
-        </p:spPr>
-        <p:txBody>
-          <a:bodyPr wrap="square" lIns="0" rIns="0" tIns="0" bIns="0" anchor="t">
-            <a:spAutoFit/>
-          </a:bodyPr>
-          <a:lstStyle/>
-          <a:p>
-            <a:pPr algn="r">
-              <a:lnSpc>
-                <a:spcPct val="122000"/>
-              </a:lnSpc>
-              <a:spcBef>
-                <a:spcPts val="0"/>
-              </a:spcBef>
-              <a:spcAft>
-                <a:spcPts val="0"/>
-              </a:spcAft>
-            </a:pPr>
-            <a:r>
-              <a:rPr sz="900" b="0" i="0">
-                <a:solidFill>
-                  <a:srgbClr val="636E85"/>
-                </a:solidFill>
-                <a:latin typeface="Segoe UI"/>
-                <a:ea typeface="Segoe UI"/>
-                <a:cs typeface="Segoe UI"/>
-              </a:rPr>
-              <a:t>Lingesh K  ·  OSI2509030</a:t>
-            </a:r>
-            <a:r>
-              <a:rPr sz="900" b="0" i="0">
-                <a:solidFill>
-                  <a:srgbClr val="141C2E"/>
-                </a:solidFill>
-                <a:latin typeface="Segoe UI"/>
-                <a:ea typeface="Segoe UI"/>
-                <a:cs typeface="Segoe UI"/>
-              </a:rPr>
-              <a:t>     </a:t>
-            </a:r>
-            <a:r>
-              <a:rPr sz="900" b="1" i="0">
-                <a:solidFill>
-                  <a:srgbClr val="0E1E3C"/>
-                </a:solidFill>
-                <a:latin typeface="Segoe UI"/>
-                <a:ea typeface="Segoe UI"/>
-                <a:cs typeface="Segoe UI"/>
-              </a:rPr>
-              <a:t>23</a:t>
+              <a:rPr sz="950" b="1" i="0" spc="160">
+                <a:solidFill>
+                  <a:srgbClr val="00B3A4"/>
+                </a:solidFill>
+                <a:latin typeface="Segoe UI"/>
+                <a:ea typeface="Segoe UI"/>
+                <a:cs typeface="Segoe UI"/>
+              </a:rPr>
+              <a:t>RECAP</a:t>
             </a:r>
           </a:p>
         </p:txBody>
@@ -22609,53 +21662,6 @@
       <p:sp>
         <p:nvSpPr>
           <p:cNvPr id="6" name="TextBox 5"/>
-          <p:cNvSpPr txBox="1"/>
-          <p:nvPr/>
-        </p:nvSpPr>
-        <p:spPr>
-          <a:xfrm>
-            <a:off x="713232" y="566928"/>
-            <a:ext cx="10765231" cy="219456"/>
-          </a:xfrm>
-          <a:prstGeom prst="rect">
-            <a:avLst/>
-          </a:prstGeom>
-          <a:noFill/>
-        </p:spPr>
-        <p:txBody>
-          <a:bodyPr wrap="square" lIns="0" rIns="0" tIns="0" bIns="0" anchor="t">
-            <a:spAutoFit/>
-          </a:bodyPr>
-          <a:lstStyle/>
-          <a:p>
-            <a:pPr algn="l">
-              <a:lnSpc>
-                <a:spcPct val="122000"/>
-              </a:lnSpc>
-              <a:spcBef>
-                <a:spcPts val="0"/>
-              </a:spcBef>
-              <a:spcAft>
-                <a:spcPts val="0"/>
-              </a:spcAft>
-            </a:pPr>
-            <a:r>
-              <a:rPr sz="950" b="1" i="0" spc="160">
-                <a:solidFill>
-                  <a:srgbClr val="00B3A4"/>
-                </a:solidFill>
-                <a:latin typeface="Segoe UI"/>
-                <a:ea typeface="Segoe UI"/>
-                <a:cs typeface="Segoe UI"/>
-              </a:rPr>
-              <a:t>RECAP</a:t>
-            </a:r>
-          </a:p>
-        </p:txBody>
-      </p:sp>
-      <p:sp>
-        <p:nvSpPr>
-          <p:cNvPr id="7" name="TextBox 6"/>
           <p:cNvSpPr txBox="1"/>
           <p:nvPr/>
         </p:nvSpPr>
@@ -22702,7 +21708,7 @@
       </p:sp>
       <p:sp>
         <p:nvSpPr>
-          <p:cNvPr id="8" name="Rectangle 7"/>
+          <p:cNvPr id="7" name="Rectangle 6"/>
           <p:cNvSpPr/>
           <p:nvPr/>
         </p:nvSpPr>
@@ -22746,7 +21752,7 @@
       </p:sp>
       <p:sp>
         <p:nvSpPr>
-          <p:cNvPr id="9" name="TextBox 8"/>
+          <p:cNvPr id="8" name="TextBox 7"/>
           <p:cNvSpPr txBox="1"/>
           <p:nvPr/>
         </p:nvSpPr>
@@ -22793,7 +21799,7 @@
       </p:sp>
       <p:sp>
         <p:nvSpPr>
-          <p:cNvPr id="10" name="Rounded Rectangle 9"/>
+          <p:cNvPr id="9" name="Rounded Rectangle 8"/>
           <p:cNvSpPr/>
           <p:nvPr/>
         </p:nvSpPr>
@@ -22847,7 +21853,7 @@
       </p:sp>
       <p:sp>
         <p:nvSpPr>
-          <p:cNvPr id="11" name="Rectangle 10"/>
+          <p:cNvPr id="10" name="Rectangle 9"/>
           <p:cNvSpPr/>
           <p:nvPr/>
         </p:nvSpPr>
@@ -22891,7 +21897,7 @@
       </p:sp>
       <p:sp>
         <p:nvSpPr>
-          <p:cNvPr id="12" name="Oval 11"/>
+          <p:cNvPr id="11" name="Oval 10"/>
           <p:cNvSpPr/>
           <p:nvPr/>
         </p:nvSpPr>
@@ -22935,7 +21941,7 @@
       </p:sp>
       <p:sp>
         <p:nvSpPr>
-          <p:cNvPr id="13" name="TextBox 12"/>
+          <p:cNvPr id="12" name="TextBox 11"/>
           <p:cNvSpPr txBox="1"/>
           <p:nvPr/>
         </p:nvSpPr>
@@ -22982,7 +21988,7 @@
       </p:sp>
       <p:sp>
         <p:nvSpPr>
-          <p:cNvPr id="14" name="TextBox 13"/>
+          <p:cNvPr id="13" name="TextBox 12"/>
           <p:cNvSpPr txBox="1"/>
           <p:nvPr/>
         </p:nvSpPr>
@@ -23053,7 +22059,7 @@
       </p:sp>
       <p:sp>
         <p:nvSpPr>
-          <p:cNvPr id="15" name="Rounded Rectangle 14"/>
+          <p:cNvPr id="14" name="Rounded Rectangle 13"/>
           <p:cNvSpPr/>
           <p:nvPr/>
         </p:nvSpPr>
@@ -23107,7 +22113,7 @@
       </p:sp>
       <p:sp>
         <p:nvSpPr>
-          <p:cNvPr id="16" name="Rectangle 15"/>
+          <p:cNvPr id="15" name="Rectangle 14"/>
           <p:cNvSpPr/>
           <p:nvPr/>
         </p:nvSpPr>
@@ -23151,7 +22157,7 @@
       </p:sp>
       <p:sp>
         <p:nvSpPr>
-          <p:cNvPr id="17" name="Oval 16"/>
+          <p:cNvPr id="16" name="Oval 15"/>
           <p:cNvSpPr/>
           <p:nvPr/>
         </p:nvSpPr>
@@ -23195,7 +22201,7 @@
       </p:sp>
       <p:sp>
         <p:nvSpPr>
-          <p:cNvPr id="18" name="TextBox 17"/>
+          <p:cNvPr id="17" name="TextBox 16"/>
           <p:cNvSpPr txBox="1"/>
           <p:nvPr/>
         </p:nvSpPr>
@@ -23242,7 +22248,7 @@
       </p:sp>
       <p:sp>
         <p:nvSpPr>
-          <p:cNvPr id="19" name="TextBox 18"/>
+          <p:cNvPr id="18" name="TextBox 17"/>
           <p:cNvSpPr txBox="1"/>
           <p:nvPr/>
         </p:nvSpPr>
@@ -23313,7 +22319,7 @@
       </p:sp>
       <p:sp>
         <p:nvSpPr>
-          <p:cNvPr id="20" name="Rounded Rectangle 19"/>
+          <p:cNvPr id="19" name="Rounded Rectangle 18"/>
           <p:cNvSpPr/>
           <p:nvPr/>
         </p:nvSpPr>
@@ -23367,7 +22373,7 @@
       </p:sp>
       <p:sp>
         <p:nvSpPr>
-          <p:cNvPr id="21" name="Rectangle 20"/>
+          <p:cNvPr id="20" name="Rectangle 19"/>
           <p:cNvSpPr/>
           <p:nvPr/>
         </p:nvSpPr>
@@ -23411,7 +22417,7 @@
       </p:sp>
       <p:sp>
         <p:nvSpPr>
-          <p:cNvPr id="22" name="Oval 21"/>
+          <p:cNvPr id="21" name="Oval 20"/>
           <p:cNvSpPr/>
           <p:nvPr/>
         </p:nvSpPr>
@@ -23455,7 +22461,7 @@
       </p:sp>
       <p:sp>
         <p:nvSpPr>
-          <p:cNvPr id="23" name="TextBox 22"/>
+          <p:cNvPr id="22" name="TextBox 21"/>
           <p:cNvSpPr txBox="1"/>
           <p:nvPr/>
         </p:nvSpPr>
@@ -23502,7 +22508,7 @@
       </p:sp>
       <p:sp>
         <p:nvSpPr>
-          <p:cNvPr id="24" name="TextBox 23"/>
+          <p:cNvPr id="23" name="TextBox 22"/>
           <p:cNvSpPr txBox="1"/>
           <p:nvPr/>
         </p:nvSpPr>
@@ -23573,7 +22579,7 @@
       </p:sp>
       <p:sp>
         <p:nvSpPr>
-          <p:cNvPr id="25" name="Rounded Rectangle 24"/>
+          <p:cNvPr id="24" name="Rounded Rectangle 23"/>
           <p:cNvSpPr/>
           <p:nvPr/>
         </p:nvSpPr>
@@ -23627,7 +22633,7 @@
       </p:sp>
       <p:sp>
         <p:nvSpPr>
-          <p:cNvPr id="26" name="Rectangle 25"/>
+          <p:cNvPr id="25" name="Rectangle 24"/>
           <p:cNvSpPr/>
           <p:nvPr/>
         </p:nvSpPr>
@@ -23671,7 +22677,7 @@
       </p:sp>
       <p:sp>
         <p:nvSpPr>
-          <p:cNvPr id="27" name="Oval 26"/>
+          <p:cNvPr id="26" name="Oval 25"/>
           <p:cNvSpPr/>
           <p:nvPr/>
         </p:nvSpPr>
@@ -23715,7 +22721,7 @@
       </p:sp>
       <p:sp>
         <p:nvSpPr>
-          <p:cNvPr id="28" name="TextBox 27"/>
+          <p:cNvPr id="27" name="TextBox 26"/>
           <p:cNvSpPr txBox="1"/>
           <p:nvPr/>
         </p:nvSpPr>
@@ -23762,7 +22768,7 @@
       </p:sp>
       <p:sp>
         <p:nvSpPr>
-          <p:cNvPr id="29" name="TextBox 28"/>
+          <p:cNvPr id="28" name="TextBox 27"/>
           <p:cNvSpPr txBox="1"/>
           <p:nvPr/>
         </p:nvSpPr>
@@ -23833,7 +22839,7 @@
       </p:sp>
       <p:sp>
         <p:nvSpPr>
-          <p:cNvPr id="30" name="Rounded Rectangle 29"/>
+          <p:cNvPr id="29" name="Rounded Rectangle 28"/>
           <p:cNvSpPr/>
           <p:nvPr/>
         </p:nvSpPr>
@@ -23887,7 +22893,7 @@
       </p:sp>
       <p:sp>
         <p:nvSpPr>
-          <p:cNvPr id="31" name="Rectangle 30"/>
+          <p:cNvPr id="30" name="Rectangle 29"/>
           <p:cNvSpPr/>
           <p:nvPr/>
         </p:nvSpPr>
@@ -23931,7 +22937,7 @@
       </p:sp>
       <p:sp>
         <p:nvSpPr>
-          <p:cNvPr id="32" name="Oval 31"/>
+          <p:cNvPr id="31" name="Oval 30"/>
           <p:cNvSpPr/>
           <p:nvPr/>
         </p:nvSpPr>
@@ -23975,7 +22981,7 @@
       </p:sp>
       <p:sp>
         <p:nvSpPr>
-          <p:cNvPr id="33" name="TextBox 32"/>
+          <p:cNvPr id="32" name="TextBox 31"/>
           <p:cNvSpPr txBox="1"/>
           <p:nvPr/>
         </p:nvSpPr>
@@ -24022,7 +23028,7 @@
       </p:sp>
       <p:sp>
         <p:nvSpPr>
-          <p:cNvPr id="34" name="TextBox 33"/>
+          <p:cNvPr id="33" name="TextBox 32"/>
           <p:cNvSpPr txBox="1"/>
           <p:nvPr/>
         </p:nvSpPr>
@@ -24093,7 +23099,7 @@
       </p:sp>
       <p:sp>
         <p:nvSpPr>
-          <p:cNvPr id="35" name="Rounded Rectangle 34"/>
+          <p:cNvPr id="34" name="Rounded Rectangle 33"/>
           <p:cNvSpPr/>
           <p:nvPr/>
         </p:nvSpPr>
@@ -24147,7 +23153,7 @@
       </p:sp>
       <p:sp>
         <p:nvSpPr>
-          <p:cNvPr id="36" name="Rectangle 35"/>
+          <p:cNvPr id="35" name="Rectangle 34"/>
           <p:cNvSpPr/>
           <p:nvPr/>
         </p:nvSpPr>
@@ -24191,7 +23197,7 @@
       </p:sp>
       <p:sp>
         <p:nvSpPr>
-          <p:cNvPr id="37" name="Oval 36"/>
+          <p:cNvPr id="36" name="Oval 35"/>
           <p:cNvSpPr/>
           <p:nvPr/>
         </p:nvSpPr>
@@ -24235,7 +23241,7 @@
       </p:sp>
       <p:sp>
         <p:nvSpPr>
-          <p:cNvPr id="38" name="TextBox 37"/>
+          <p:cNvPr id="37" name="TextBox 36"/>
           <p:cNvSpPr txBox="1"/>
           <p:nvPr/>
         </p:nvSpPr>
@@ -24282,7 +23288,7 @@
       </p:sp>
       <p:sp>
         <p:nvSpPr>
-          <p:cNvPr id="39" name="TextBox 38"/>
+          <p:cNvPr id="38" name="TextBox 37"/>
           <p:cNvSpPr txBox="1"/>
           <p:nvPr/>
         </p:nvSpPr>
@@ -24565,53 +23571,6 @@
         </p:nvSpPr>
         <p:spPr>
           <a:xfrm>
-            <a:off x="987552" y="2157984"/>
-            <a:ext cx="6766560" cy="274320"/>
-          </a:xfrm>
-          <a:prstGeom prst="rect">
-            <a:avLst/>
-          </a:prstGeom>
-          <a:noFill/>
-        </p:spPr>
-        <p:txBody>
-          <a:bodyPr wrap="square" lIns="0" rIns="0" tIns="0" bIns="0" anchor="t">
-            <a:spAutoFit/>
-          </a:bodyPr>
-          <a:lstStyle/>
-          <a:p>
-            <a:pPr algn="l">
-              <a:lnSpc>
-                <a:spcPct val="122000"/>
-              </a:lnSpc>
-              <a:spcBef>
-                <a:spcPts val="0"/>
-              </a:spcBef>
-              <a:spcAft>
-                <a:spcPts val="0"/>
-              </a:spcAft>
-            </a:pPr>
-            <a:r>
-              <a:rPr sz="1000" b="1" i="0" spc="200">
-                <a:solidFill>
-                  <a:srgbClr val="00B3A4"/>
-                </a:solidFill>
-                <a:latin typeface="Segoe UI"/>
-                <a:ea typeface="Segoe UI"/>
-                <a:cs typeface="Segoe UI"/>
-              </a:rPr>
-              <a:t>UNIT 04  ·  ETHICS, LEGAL AND SOCIAL IMPLICATIONS</a:t>
-            </a:r>
-          </a:p>
-        </p:txBody>
-      </p:sp>
-      <p:sp>
-        <p:nvSpPr>
-          <p:cNvPr id="7" name="TextBox 6"/>
-          <p:cNvSpPr txBox="1"/>
-          <p:nvPr/>
-        </p:nvSpPr>
-        <p:spPr>
-          <a:xfrm>
             <a:off x="987552" y="2542032"/>
             <a:ext cx="7315200" cy="1005840"/>
           </a:xfrm>
@@ -24653,7 +23612,7 @@
       </p:sp>
       <p:sp>
         <p:nvSpPr>
-          <p:cNvPr id="8" name="Rectangle 7"/>
+          <p:cNvPr id="7" name="Rectangle 6"/>
           <p:cNvSpPr/>
           <p:nvPr/>
         </p:nvSpPr>
@@ -24697,7 +23656,7 @@
       </p:sp>
       <p:sp>
         <p:nvSpPr>
-          <p:cNvPr id="9" name="TextBox 8"/>
+          <p:cNvPr id="8" name="TextBox 7"/>
           <p:cNvSpPr txBox="1"/>
           <p:nvPr/>
         </p:nvSpPr>
@@ -24744,7 +23703,7 @@
       </p:sp>
       <p:sp>
         <p:nvSpPr>
-          <p:cNvPr id="10" name="TextBox 9"/>
+          <p:cNvPr id="9" name="TextBox 8"/>
           <p:cNvSpPr txBox="1"/>
           <p:nvPr/>
         </p:nvSpPr>
@@ -24863,7 +23822,7 @@
       </p:sp>
       <p:sp>
         <p:nvSpPr>
-          <p:cNvPr id="11" name="logo-plate"/>
+          <p:cNvPr id="10" name="logo-plate"/>
           <p:cNvSpPr/>
           <p:nvPr/>
         </p:nvSpPr>
@@ -24909,7 +23868,7 @@
       </p:sp>
       <p:pic>
         <p:nvPicPr>
-          <p:cNvPr id="12" name="college-logo" descr="logo-full.png"/>
+          <p:cNvPr id="11" name="college-logo" descr="logo-full.png"/>
           <p:cNvPicPr>
             <a:picLocks noChangeAspect="1"/>
           </p:cNvPicPr>
@@ -24933,7 +23892,7 @@
       </p:pic>
       <p:sp>
         <p:nvSpPr>
-          <p:cNvPr id="13" name="Rectangle 12"/>
+          <p:cNvPr id="12" name="Rectangle 11"/>
           <p:cNvSpPr/>
           <p:nvPr/>
         </p:nvSpPr>
@@ -24977,7 +23936,7 @@
       </p:sp>
       <p:sp>
         <p:nvSpPr>
-          <p:cNvPr id="14" name="TextBox 13"/>
+          <p:cNvPr id="13" name="TextBox 12"/>
           <p:cNvSpPr txBox="1"/>
           <p:nvPr/>
         </p:nvSpPr>
@@ -25040,28 +23999,6 @@
                 <a:cs typeface="Segoe UI"/>
               </a:rPr>
               <a:t>OSI2509030</a:t>
-            </a:r>
-            <a:r>
-              <a:rPr sz="1000" b="0" i="0">
-                <a:solidFill>
-                  <a:srgbClr val="4A5E86"/>
-                </a:solidFill>
-                <a:latin typeface="Segoe UI"/>
-                <a:ea typeface="Segoe UI"/>
-                <a:cs typeface="Segoe UI"/>
-              </a:rPr>
-              <a:t>   ·   </a:t>
-            </a:r>
-            <a:r>
-              <a:rPr sz="1000" b="0" i="0">
-                <a:solidFill>
-                  <a:srgbClr val="7E91B4"/>
-                </a:solidFill>
-                <a:latin typeface="Segoe UI"/>
-                <a:ea typeface="Segoe UI"/>
-                <a:cs typeface="Segoe UI"/>
-              </a:rPr>
-              <a:t>PGPM · Systems Specialisation</a:t>
             </a:r>
           </a:p>
         </p:txBody>
@@ -25459,54 +24396,7 @@
       </p:sp>
       <p:sp>
         <p:nvSpPr>
-          <p:cNvPr id="10" name="TextBox 9"/>
-          <p:cNvSpPr txBox="1"/>
-          <p:nvPr/>
-        </p:nvSpPr>
-        <p:spPr>
-          <a:xfrm>
-            <a:off x="987552" y="5943600"/>
-            <a:ext cx="6400800" cy="274320"/>
-          </a:xfrm>
-          <a:prstGeom prst="rect">
-            <a:avLst/>
-          </a:prstGeom>
-          <a:noFill/>
-        </p:spPr>
-        <p:txBody>
-          <a:bodyPr wrap="square" lIns="0" rIns="0" tIns="0" bIns="0" anchor="t">
-            <a:spAutoFit/>
-          </a:bodyPr>
-          <a:lstStyle/>
-          <a:p>
-            <a:pPr algn="l">
-              <a:lnSpc>
-                <a:spcPct val="122000"/>
-              </a:lnSpc>
-              <a:spcBef>
-                <a:spcPts val="0"/>
-              </a:spcBef>
-              <a:spcAft>
-                <a:spcPts val="0"/>
-              </a:spcAft>
-            </a:pPr>
-            <a:r>
-              <a:rPr sz="900" b="1" i="0" spc="160">
-                <a:solidFill>
-                  <a:srgbClr val="6B7FA6"/>
-                </a:solidFill>
-                <a:latin typeface="Segoe UI"/>
-                <a:ea typeface="Segoe UI"/>
-                <a:cs typeface="Segoe UI"/>
-              </a:rPr>
-              <a:t>UNIT 4  ·  ETHICS, LEGAL AND SOCIAL IMPLICATIONS</a:t>
-            </a:r>
-          </a:p>
-        </p:txBody>
-      </p:sp>
-      <p:sp>
-        <p:nvSpPr>
-          <p:cNvPr id="11" name="logo-plate"/>
+          <p:cNvPr id="10" name="logo-plate"/>
           <p:cNvSpPr/>
           <p:nvPr/>
         </p:nvSpPr>
@@ -25552,7 +24442,7 @@
       </p:sp>
       <p:pic>
         <p:nvPicPr>
-          <p:cNvPr id="12" name="college-logo" descr="logo-full.png"/>
+          <p:cNvPr id="11" name="college-logo" descr="logo-full.png"/>
           <p:cNvPicPr>
             <a:picLocks noChangeAspect="1"/>
           </p:cNvPicPr>
@@ -25668,8 +24558,77 @@
         </p:nvSpPr>
         <p:spPr>
           <a:xfrm>
-            <a:off x="713232" y="6272784"/>
-            <a:ext cx="5597920" cy="219456"/>
+            <a:off x="8240677" y="6272784"/>
+            <a:ext cx="2651760" cy="219456"/>
+          </a:xfrm>
+          <a:prstGeom prst="rect">
+            <a:avLst/>
+          </a:prstGeom>
+          <a:noFill/>
+        </p:spPr>
+        <p:txBody>
+          <a:bodyPr wrap="square" lIns="0" rIns="0" tIns="0" bIns="0" anchor="t">
+            <a:spAutoFit/>
+          </a:bodyPr>
+          <a:lstStyle/>
+          <a:p>
+            <a:pPr algn="r">
+              <a:lnSpc>
+                <a:spcPct val="122000"/>
+              </a:lnSpc>
+              <a:spcBef>
+                <a:spcPts val="0"/>
+              </a:spcBef>
+              <a:spcAft>
+                <a:spcPts val="0"/>
+              </a:spcAft>
+            </a:pPr>
+            <a:r>
+              <a:rPr sz="900" b="0" i="0">
+                <a:solidFill>
+                  <a:srgbClr val="636E85"/>
+                </a:solidFill>
+                <a:latin typeface="Segoe UI"/>
+                <a:ea typeface="Segoe UI"/>
+                <a:cs typeface="Segoe UI"/>
+              </a:rPr>
+              <a:t>Lingesh K  ·  OSI2509030</a:t>
+            </a:r>
+            <a:r>
+              <a:rPr sz="900" b="0" i="0">
+                <a:solidFill>
+                  <a:srgbClr val="141C2E"/>
+                </a:solidFill>
+                <a:latin typeface="Segoe UI"/>
+                <a:ea typeface="Segoe UI"/>
+                <a:cs typeface="Segoe UI"/>
+              </a:rPr>
+              <a:t>     </a:t>
+            </a:r>
+            <a:r>
+              <a:rPr sz="900" b="1" i="0">
+                <a:solidFill>
+                  <a:srgbClr val="0E1E3C"/>
+                </a:solidFill>
+                <a:latin typeface="Segoe UI"/>
+                <a:ea typeface="Segoe UI"/>
+                <a:cs typeface="Segoe UI"/>
+              </a:rPr>
+              <a:t>04</a:t>
+            </a:r>
+          </a:p>
+        </p:txBody>
+      </p:sp>
+      <p:sp>
+        <p:nvSpPr>
+          <p:cNvPr id="5" name="TextBox 4"/>
+          <p:cNvSpPr txBox="1"/>
+          <p:nvPr/>
+        </p:nvSpPr>
+        <p:spPr>
+          <a:xfrm>
+            <a:off x="713232" y="566928"/>
+            <a:ext cx="10765231" cy="219456"/>
           </a:xfrm>
           <a:prstGeom prst="rect">
             <a:avLst/>
@@ -25694,106 +24653,15 @@
               </a:spcAft>
             </a:pPr>
             <a:r>
-              <a:rPr sz="900" b="1" i="0">
-                <a:solidFill>
-                  <a:srgbClr val="0E1E3C"/>
-                </a:solidFill>
-                <a:latin typeface="Segoe UI"/>
-                <a:ea typeface="Segoe UI"/>
-                <a:cs typeface="Segoe UI"/>
-              </a:rPr>
-              <a:t>Unit 4</a:t>
-            </a:r>
-            <a:r>
-              <a:rPr sz="900" b="0" i="0">
-                <a:solidFill>
-                  <a:srgbClr val="939EB3"/>
-                </a:solidFill>
-                <a:latin typeface="Segoe UI"/>
-                <a:ea typeface="Segoe UI"/>
-                <a:cs typeface="Segoe UI"/>
-              </a:rPr>
-              <a:t>  ·  </a:t>
-            </a:r>
-            <a:r>
-              <a:rPr sz="900" b="0" i="0">
-                <a:solidFill>
-                  <a:srgbClr val="636E85"/>
-                </a:solidFill>
-                <a:latin typeface="Segoe UI"/>
-                <a:ea typeface="Segoe UI"/>
-                <a:cs typeface="Segoe UI"/>
-              </a:rPr>
-              <a:t>Ethics, Legal and Social Implications</a:t>
-            </a:r>
-          </a:p>
-        </p:txBody>
-      </p:sp>
-      <p:sp>
-        <p:nvSpPr>
-          <p:cNvPr id="5" name="TextBox 4"/>
-          <p:cNvSpPr txBox="1"/>
-          <p:nvPr/>
-        </p:nvSpPr>
-        <p:spPr>
-          <a:xfrm>
-            <a:off x="8240677" y="6272784"/>
-            <a:ext cx="2651760" cy="219456"/>
-          </a:xfrm>
-          <a:prstGeom prst="rect">
-            <a:avLst/>
-          </a:prstGeom>
-          <a:noFill/>
-        </p:spPr>
-        <p:txBody>
-          <a:bodyPr wrap="square" lIns="0" rIns="0" tIns="0" bIns="0" anchor="t">
-            <a:spAutoFit/>
-          </a:bodyPr>
-          <a:lstStyle/>
-          <a:p>
-            <a:pPr algn="r">
-              <a:lnSpc>
-                <a:spcPct val="122000"/>
-              </a:lnSpc>
-              <a:spcBef>
-                <a:spcPts val="0"/>
-              </a:spcBef>
-              <a:spcAft>
-                <a:spcPts val="0"/>
-              </a:spcAft>
-            </a:pPr>
-            <a:r>
-              <a:rPr sz="900" b="0" i="0">
-                <a:solidFill>
-                  <a:srgbClr val="636E85"/>
-                </a:solidFill>
-                <a:latin typeface="Segoe UI"/>
-                <a:ea typeface="Segoe UI"/>
-                <a:cs typeface="Segoe UI"/>
-              </a:rPr>
-              <a:t>Lingesh K  ·  OSI2509030</a:t>
-            </a:r>
-            <a:r>
-              <a:rPr sz="900" b="0" i="0">
-                <a:solidFill>
-                  <a:srgbClr val="141C2E"/>
-                </a:solidFill>
-                <a:latin typeface="Segoe UI"/>
-                <a:ea typeface="Segoe UI"/>
-                <a:cs typeface="Segoe UI"/>
-              </a:rPr>
-              <a:t>     </a:t>
-            </a:r>
-            <a:r>
-              <a:rPr sz="900" b="1" i="0">
-                <a:solidFill>
-                  <a:srgbClr val="0E1E3C"/>
-                </a:solidFill>
-                <a:latin typeface="Segoe UI"/>
-                <a:ea typeface="Segoe UI"/>
-                <a:cs typeface="Segoe UI"/>
-              </a:rPr>
-              <a:t>04</a:t>
+              <a:rPr sz="950" b="1" i="0" spc="160">
+                <a:solidFill>
+                  <a:srgbClr val="3B7AF7"/>
+                </a:solidFill>
+                <a:latin typeface="Segoe UI"/>
+                <a:ea typeface="Segoe UI"/>
+                <a:cs typeface="Segoe UI"/>
+              </a:rPr>
+              <a:t>THE BUSINESS CASE</a:t>
             </a:r>
           </a:p>
         </p:txBody>
@@ -25801,53 +24669,6 @@
       <p:sp>
         <p:nvSpPr>
           <p:cNvPr id="6" name="TextBox 5"/>
-          <p:cNvSpPr txBox="1"/>
-          <p:nvPr/>
-        </p:nvSpPr>
-        <p:spPr>
-          <a:xfrm>
-            <a:off x="713232" y="566928"/>
-            <a:ext cx="10765231" cy="219456"/>
-          </a:xfrm>
-          <a:prstGeom prst="rect">
-            <a:avLst/>
-          </a:prstGeom>
-          <a:noFill/>
-        </p:spPr>
-        <p:txBody>
-          <a:bodyPr wrap="square" lIns="0" rIns="0" tIns="0" bIns="0" anchor="t">
-            <a:spAutoFit/>
-          </a:bodyPr>
-          <a:lstStyle/>
-          <a:p>
-            <a:pPr algn="l">
-              <a:lnSpc>
-                <a:spcPct val="122000"/>
-              </a:lnSpc>
-              <a:spcBef>
-                <a:spcPts val="0"/>
-              </a:spcBef>
-              <a:spcAft>
-                <a:spcPts val="0"/>
-              </a:spcAft>
-            </a:pPr>
-            <a:r>
-              <a:rPr sz="950" b="1" i="0" spc="160">
-                <a:solidFill>
-                  <a:srgbClr val="3B7AF7"/>
-                </a:solidFill>
-                <a:latin typeface="Segoe UI"/>
-                <a:ea typeface="Segoe UI"/>
-                <a:cs typeface="Segoe UI"/>
-              </a:rPr>
-              <a:t>THE BUSINESS CASE</a:t>
-            </a:r>
-          </a:p>
-        </p:txBody>
-      </p:sp>
-      <p:sp>
-        <p:nvSpPr>
-          <p:cNvPr id="7" name="TextBox 6"/>
           <p:cNvSpPr txBox="1"/>
           <p:nvPr/>
         </p:nvSpPr>
@@ -25894,7 +24715,7 @@
       </p:sp>
       <p:sp>
         <p:nvSpPr>
-          <p:cNvPr id="8" name="Rectangle 7"/>
+          <p:cNvPr id="7" name="Rectangle 6"/>
           <p:cNvSpPr/>
           <p:nvPr/>
         </p:nvSpPr>
@@ -25938,7 +24759,7 @@
       </p:sp>
       <p:sp>
         <p:nvSpPr>
-          <p:cNvPr id="9" name="TextBox 8"/>
+          <p:cNvPr id="8" name="TextBox 7"/>
           <p:cNvSpPr txBox="1"/>
           <p:nvPr/>
         </p:nvSpPr>
@@ -25985,7 +24806,7 @@
       </p:sp>
       <p:sp>
         <p:nvSpPr>
-          <p:cNvPr id="10" name="Rounded Rectangle 9"/>
+          <p:cNvPr id="9" name="Rounded Rectangle 8"/>
           <p:cNvSpPr/>
           <p:nvPr/>
         </p:nvSpPr>
@@ -26031,7 +24852,7 @@
       </p:sp>
       <p:sp>
         <p:nvSpPr>
-          <p:cNvPr id="11" name="Rectangle 10"/>
+          <p:cNvPr id="10" name="Rectangle 9"/>
           <p:cNvSpPr/>
           <p:nvPr/>
         </p:nvSpPr>
@@ -26075,7 +24896,7 @@
       </p:sp>
       <p:sp>
         <p:nvSpPr>
-          <p:cNvPr id="12" name="TextBox 11"/>
+          <p:cNvPr id="11" name="TextBox 10"/>
           <p:cNvSpPr txBox="1"/>
           <p:nvPr/>
         </p:nvSpPr>
@@ -26122,7 +24943,7 @@
       </p:sp>
       <p:sp>
         <p:nvSpPr>
-          <p:cNvPr id="13" name="TextBox 12"/>
+          <p:cNvPr id="12" name="TextBox 11"/>
           <p:cNvSpPr txBox="1"/>
           <p:nvPr/>
         </p:nvSpPr>
@@ -26169,7 +24990,7 @@
       </p:sp>
       <p:sp>
         <p:nvSpPr>
-          <p:cNvPr id="14" name="Rounded Rectangle 13"/>
+          <p:cNvPr id="13" name="Rounded Rectangle 12"/>
           <p:cNvSpPr/>
           <p:nvPr/>
         </p:nvSpPr>
@@ -26215,7 +25036,7 @@
       </p:sp>
       <p:sp>
         <p:nvSpPr>
-          <p:cNvPr id="15" name="Rectangle 14"/>
+          <p:cNvPr id="14" name="Rectangle 13"/>
           <p:cNvSpPr/>
           <p:nvPr/>
         </p:nvSpPr>
@@ -26259,7 +25080,7 @@
       </p:sp>
       <p:sp>
         <p:nvSpPr>
-          <p:cNvPr id="16" name="TextBox 15"/>
+          <p:cNvPr id="15" name="TextBox 14"/>
           <p:cNvSpPr txBox="1"/>
           <p:nvPr/>
         </p:nvSpPr>
@@ -26306,7 +25127,7 @@
       </p:sp>
       <p:sp>
         <p:nvSpPr>
-          <p:cNvPr id="17" name="TextBox 16"/>
+          <p:cNvPr id="16" name="TextBox 15"/>
           <p:cNvSpPr txBox="1"/>
           <p:nvPr/>
         </p:nvSpPr>
@@ -26353,7 +25174,7 @@
       </p:sp>
       <p:sp>
         <p:nvSpPr>
-          <p:cNvPr id="18" name="Rounded Rectangle 17"/>
+          <p:cNvPr id="17" name="Rounded Rectangle 16"/>
           <p:cNvSpPr/>
           <p:nvPr/>
         </p:nvSpPr>
@@ -26399,7 +25220,7 @@
       </p:sp>
       <p:sp>
         <p:nvSpPr>
-          <p:cNvPr id="19" name="Rectangle 18"/>
+          <p:cNvPr id="18" name="Rectangle 17"/>
           <p:cNvSpPr/>
           <p:nvPr/>
         </p:nvSpPr>
@@ -26443,7 +25264,7 @@
       </p:sp>
       <p:sp>
         <p:nvSpPr>
-          <p:cNvPr id="20" name="TextBox 19"/>
+          <p:cNvPr id="19" name="TextBox 18"/>
           <p:cNvSpPr txBox="1"/>
           <p:nvPr/>
         </p:nvSpPr>
@@ -26490,7 +25311,7 @@
       </p:sp>
       <p:sp>
         <p:nvSpPr>
-          <p:cNvPr id="21" name="TextBox 20"/>
+          <p:cNvPr id="20" name="TextBox 19"/>
           <p:cNvSpPr txBox="1"/>
           <p:nvPr/>
         </p:nvSpPr>
@@ -26537,7 +25358,7 @@
       </p:sp>
       <p:sp>
         <p:nvSpPr>
-          <p:cNvPr id="22" name="Rounded Rectangle 21"/>
+          <p:cNvPr id="21" name="Rounded Rectangle 20"/>
           <p:cNvSpPr/>
           <p:nvPr/>
         </p:nvSpPr>
@@ -26583,7 +25404,7 @@
       </p:sp>
       <p:sp>
         <p:nvSpPr>
-          <p:cNvPr id="23" name="Rectangle 22"/>
+          <p:cNvPr id="22" name="Rectangle 21"/>
           <p:cNvSpPr/>
           <p:nvPr/>
         </p:nvSpPr>
@@ -26627,7 +25448,7 @@
       </p:sp>
       <p:sp>
         <p:nvSpPr>
-          <p:cNvPr id="24" name="TextBox 23"/>
+          <p:cNvPr id="23" name="TextBox 22"/>
           <p:cNvSpPr txBox="1"/>
           <p:nvPr/>
         </p:nvSpPr>
@@ -26674,7 +25495,7 @@
       </p:sp>
       <p:sp>
         <p:nvSpPr>
-          <p:cNvPr id="25" name="TextBox 24"/>
+          <p:cNvPr id="24" name="TextBox 23"/>
           <p:cNvSpPr txBox="1"/>
           <p:nvPr/>
         </p:nvSpPr>
@@ -27112,54 +25933,7 @@
       </p:sp>
       <p:sp>
         <p:nvSpPr>
-          <p:cNvPr id="10" name="TextBox 9"/>
-          <p:cNvSpPr txBox="1"/>
-          <p:nvPr/>
-        </p:nvSpPr>
-        <p:spPr>
-          <a:xfrm>
-            <a:off x="987552" y="5943600"/>
-            <a:ext cx="6400800" cy="274320"/>
-          </a:xfrm>
-          <a:prstGeom prst="rect">
-            <a:avLst/>
-          </a:prstGeom>
-          <a:noFill/>
-        </p:spPr>
-        <p:txBody>
-          <a:bodyPr wrap="square" lIns="0" rIns="0" tIns="0" bIns="0" anchor="t">
-            <a:spAutoFit/>
-          </a:bodyPr>
-          <a:lstStyle/>
-          <a:p>
-            <a:pPr algn="l">
-              <a:lnSpc>
-                <a:spcPct val="122000"/>
-              </a:lnSpc>
-              <a:spcBef>
-                <a:spcPts val="0"/>
-              </a:spcBef>
-              <a:spcAft>
-                <a:spcPts val="0"/>
-              </a:spcAft>
-            </a:pPr>
-            <a:r>
-              <a:rPr sz="900" b="1" i="0" spc="160">
-                <a:solidFill>
-                  <a:srgbClr val="6B7FA6"/>
-                </a:solidFill>
-                <a:latin typeface="Segoe UI"/>
-                <a:ea typeface="Segoe UI"/>
-                <a:cs typeface="Segoe UI"/>
-              </a:rPr>
-              <a:t>UNIT 4  ·  ETHICS, LEGAL AND SOCIAL IMPLICATIONS</a:t>
-            </a:r>
-          </a:p>
-        </p:txBody>
-      </p:sp>
-      <p:sp>
-        <p:nvSpPr>
-          <p:cNvPr id="11" name="logo-plate"/>
+          <p:cNvPr id="10" name="logo-plate"/>
           <p:cNvSpPr/>
           <p:nvPr/>
         </p:nvSpPr>
@@ -27205,7 +25979,7 @@
       </p:sp>
       <p:pic>
         <p:nvPicPr>
-          <p:cNvPr id="12" name="college-logo" descr="logo-full.png"/>
+          <p:cNvPr id="11" name="college-logo" descr="logo-full.png"/>
           <p:cNvPicPr>
             <a:picLocks noChangeAspect="1"/>
           </p:cNvPicPr>
@@ -27321,8 +26095,77 @@
         </p:nvSpPr>
         <p:spPr>
           <a:xfrm>
-            <a:off x="713232" y="6272784"/>
-            <a:ext cx="5597920" cy="219456"/>
+            <a:off x="8240677" y="6272784"/>
+            <a:ext cx="2651760" cy="219456"/>
+          </a:xfrm>
+          <a:prstGeom prst="rect">
+            <a:avLst/>
+          </a:prstGeom>
+          <a:noFill/>
+        </p:spPr>
+        <p:txBody>
+          <a:bodyPr wrap="square" lIns="0" rIns="0" tIns="0" bIns="0" anchor="t">
+            <a:spAutoFit/>
+          </a:bodyPr>
+          <a:lstStyle/>
+          <a:p>
+            <a:pPr algn="r">
+              <a:lnSpc>
+                <a:spcPct val="122000"/>
+              </a:lnSpc>
+              <a:spcBef>
+                <a:spcPts val="0"/>
+              </a:spcBef>
+              <a:spcAft>
+                <a:spcPts val="0"/>
+              </a:spcAft>
+            </a:pPr>
+            <a:r>
+              <a:rPr sz="900" b="0" i="0">
+                <a:solidFill>
+                  <a:srgbClr val="636E85"/>
+                </a:solidFill>
+                <a:latin typeface="Segoe UI"/>
+                <a:ea typeface="Segoe UI"/>
+                <a:cs typeface="Segoe UI"/>
+              </a:rPr>
+              <a:t>Lingesh K  ·  OSI2509030</a:t>
+            </a:r>
+            <a:r>
+              <a:rPr sz="900" b="0" i="0">
+                <a:solidFill>
+                  <a:srgbClr val="141C2E"/>
+                </a:solidFill>
+                <a:latin typeface="Segoe UI"/>
+                <a:ea typeface="Segoe UI"/>
+                <a:cs typeface="Segoe UI"/>
+              </a:rPr>
+              <a:t>     </a:t>
+            </a:r>
+            <a:r>
+              <a:rPr sz="900" b="1" i="0">
+                <a:solidFill>
+                  <a:srgbClr val="0E1E3C"/>
+                </a:solidFill>
+                <a:latin typeface="Segoe UI"/>
+                <a:ea typeface="Segoe UI"/>
+                <a:cs typeface="Segoe UI"/>
+              </a:rPr>
+              <a:t>06</a:t>
+            </a:r>
+          </a:p>
+        </p:txBody>
+      </p:sp>
+      <p:sp>
+        <p:nvSpPr>
+          <p:cNvPr id="5" name="TextBox 4"/>
+          <p:cNvSpPr txBox="1"/>
+          <p:nvPr/>
+        </p:nvSpPr>
+        <p:spPr>
+          <a:xfrm>
+            <a:off x="713232" y="566928"/>
+            <a:ext cx="10765231" cy="219456"/>
           </a:xfrm>
           <a:prstGeom prst="rect">
             <a:avLst/>
@@ -27347,106 +26190,15 @@
               </a:spcAft>
             </a:pPr>
             <a:r>
-              <a:rPr sz="900" b="1" i="0">
-                <a:solidFill>
-                  <a:srgbClr val="0E1E3C"/>
-                </a:solidFill>
-                <a:latin typeface="Segoe UI"/>
-                <a:ea typeface="Segoe UI"/>
-                <a:cs typeface="Segoe UI"/>
-              </a:rPr>
-              <a:t>Unit 4</a:t>
-            </a:r>
-            <a:r>
-              <a:rPr sz="900" b="0" i="0">
-                <a:solidFill>
-                  <a:srgbClr val="939EB3"/>
-                </a:solidFill>
-                <a:latin typeface="Segoe UI"/>
-                <a:ea typeface="Segoe UI"/>
-                <a:cs typeface="Segoe UI"/>
-              </a:rPr>
-              <a:t>  ·  </a:t>
-            </a:r>
-            <a:r>
-              <a:rPr sz="900" b="0" i="0">
-                <a:solidFill>
-                  <a:srgbClr val="636E85"/>
-                </a:solidFill>
-                <a:latin typeface="Segoe UI"/>
-                <a:ea typeface="Segoe UI"/>
-                <a:cs typeface="Segoe UI"/>
-              </a:rPr>
-              <a:t>Ethics, Legal and Social Implications</a:t>
-            </a:r>
-          </a:p>
-        </p:txBody>
-      </p:sp>
-      <p:sp>
-        <p:nvSpPr>
-          <p:cNvPr id="5" name="TextBox 4"/>
-          <p:cNvSpPr txBox="1"/>
-          <p:nvPr/>
-        </p:nvSpPr>
-        <p:spPr>
-          <a:xfrm>
-            <a:off x="8240677" y="6272784"/>
-            <a:ext cx="2651760" cy="219456"/>
-          </a:xfrm>
-          <a:prstGeom prst="rect">
-            <a:avLst/>
-          </a:prstGeom>
-          <a:noFill/>
-        </p:spPr>
-        <p:txBody>
-          <a:bodyPr wrap="square" lIns="0" rIns="0" tIns="0" bIns="0" anchor="t">
-            <a:spAutoFit/>
-          </a:bodyPr>
-          <a:lstStyle/>
-          <a:p>
-            <a:pPr algn="r">
-              <a:lnSpc>
-                <a:spcPct val="122000"/>
-              </a:lnSpc>
-              <a:spcBef>
-                <a:spcPts val="0"/>
-              </a:spcBef>
-              <a:spcAft>
-                <a:spcPts val="0"/>
-              </a:spcAft>
-            </a:pPr>
-            <a:r>
-              <a:rPr sz="900" b="0" i="0">
-                <a:solidFill>
-                  <a:srgbClr val="636E85"/>
-                </a:solidFill>
-                <a:latin typeface="Segoe UI"/>
-                <a:ea typeface="Segoe UI"/>
-                <a:cs typeface="Segoe UI"/>
-              </a:rPr>
-              <a:t>Lingesh K  ·  OSI2509030</a:t>
-            </a:r>
-            <a:r>
-              <a:rPr sz="900" b="0" i="0">
-                <a:solidFill>
-                  <a:srgbClr val="141C2E"/>
-                </a:solidFill>
-                <a:latin typeface="Segoe UI"/>
-                <a:ea typeface="Segoe UI"/>
-                <a:cs typeface="Segoe UI"/>
-              </a:rPr>
-              <a:t>     </a:t>
-            </a:r>
-            <a:r>
-              <a:rPr sz="900" b="1" i="0">
-                <a:solidFill>
-                  <a:srgbClr val="0E1E3C"/>
-                </a:solidFill>
-                <a:latin typeface="Segoe UI"/>
-                <a:ea typeface="Segoe UI"/>
-                <a:cs typeface="Segoe UI"/>
-              </a:rPr>
-              <a:t>06</a:t>
+              <a:rPr sz="950" b="1" i="0" spc="160">
+                <a:solidFill>
+                  <a:srgbClr val="745CE0"/>
+                </a:solidFill>
+                <a:latin typeface="Segoe UI"/>
+                <a:ea typeface="Segoe UI"/>
+                <a:cs typeface="Segoe UI"/>
+              </a:rPr>
+              <a:t>PRIVACY</a:t>
             </a:r>
           </a:p>
         </p:txBody>
@@ -27454,53 +26206,6 @@
       <p:sp>
         <p:nvSpPr>
           <p:cNvPr id="6" name="TextBox 5"/>
-          <p:cNvSpPr txBox="1"/>
-          <p:nvPr/>
-        </p:nvSpPr>
-        <p:spPr>
-          <a:xfrm>
-            <a:off x="713232" y="566928"/>
-            <a:ext cx="10765231" cy="219456"/>
-          </a:xfrm>
-          <a:prstGeom prst="rect">
-            <a:avLst/>
-          </a:prstGeom>
-          <a:noFill/>
-        </p:spPr>
-        <p:txBody>
-          <a:bodyPr wrap="square" lIns="0" rIns="0" tIns="0" bIns="0" anchor="t">
-            <a:spAutoFit/>
-          </a:bodyPr>
-          <a:lstStyle/>
-          <a:p>
-            <a:pPr algn="l">
-              <a:lnSpc>
-                <a:spcPct val="122000"/>
-              </a:lnSpc>
-              <a:spcBef>
-                <a:spcPts val="0"/>
-              </a:spcBef>
-              <a:spcAft>
-                <a:spcPts val="0"/>
-              </a:spcAft>
-            </a:pPr>
-            <a:r>
-              <a:rPr sz="950" b="1" i="0" spc="160">
-                <a:solidFill>
-                  <a:srgbClr val="745CE0"/>
-                </a:solidFill>
-                <a:latin typeface="Segoe UI"/>
-                <a:ea typeface="Segoe UI"/>
-                <a:cs typeface="Segoe UI"/>
-              </a:rPr>
-              <a:t>PRIVACY</a:t>
-            </a:r>
-          </a:p>
-        </p:txBody>
-      </p:sp>
-      <p:sp>
-        <p:nvSpPr>
-          <p:cNvPr id="7" name="TextBox 6"/>
           <p:cNvSpPr txBox="1"/>
           <p:nvPr/>
         </p:nvSpPr>
@@ -27547,7 +26252,7 @@
       </p:sp>
       <p:sp>
         <p:nvSpPr>
-          <p:cNvPr id="8" name="Rectangle 7"/>
+          <p:cNvPr id="7" name="Rectangle 6"/>
           <p:cNvSpPr/>
           <p:nvPr/>
         </p:nvSpPr>
@@ -27591,7 +26296,7 @@
       </p:sp>
       <p:sp>
         <p:nvSpPr>
-          <p:cNvPr id="9" name="TextBox 8"/>
+          <p:cNvPr id="8" name="TextBox 7"/>
           <p:cNvSpPr txBox="1"/>
           <p:nvPr/>
         </p:nvSpPr>
@@ -27638,7 +26343,7 @@
       </p:sp>
       <p:sp>
         <p:nvSpPr>
-          <p:cNvPr id="10" name="Rounded Rectangle 9"/>
+          <p:cNvPr id="9" name="Rounded Rectangle 8"/>
           <p:cNvSpPr/>
           <p:nvPr/>
         </p:nvSpPr>
@@ -27692,7 +26397,7 @@
       </p:sp>
       <p:sp>
         <p:nvSpPr>
-          <p:cNvPr id="11" name="Rectangle 10"/>
+          <p:cNvPr id="10" name="Rectangle 9"/>
           <p:cNvSpPr/>
           <p:nvPr/>
         </p:nvSpPr>
@@ -27736,7 +26441,7 @@
       </p:sp>
       <p:sp>
         <p:nvSpPr>
-          <p:cNvPr id="12" name="TextBox 11"/>
+          <p:cNvPr id="11" name="TextBox 10"/>
           <p:cNvSpPr txBox="1"/>
           <p:nvPr/>
         </p:nvSpPr>
@@ -27783,7 +26488,7 @@
       </p:sp>
       <p:sp>
         <p:nvSpPr>
-          <p:cNvPr id="13" name="TextBox 12"/>
+          <p:cNvPr id="12" name="TextBox 11"/>
           <p:cNvSpPr txBox="1"/>
           <p:nvPr/>
         </p:nvSpPr>
@@ -27830,7 +26535,7 @@
       </p:sp>
       <p:sp>
         <p:nvSpPr>
-          <p:cNvPr id="14" name="Rounded Rectangle 13"/>
+          <p:cNvPr id="13" name="Rounded Rectangle 12"/>
           <p:cNvSpPr/>
           <p:nvPr/>
         </p:nvSpPr>
@@ -27884,7 +26589,7 @@
       </p:sp>
       <p:sp>
         <p:nvSpPr>
-          <p:cNvPr id="15" name="Rectangle 14"/>
+          <p:cNvPr id="14" name="Rectangle 13"/>
           <p:cNvSpPr/>
           <p:nvPr/>
         </p:nvSpPr>
@@ -27928,7 +26633,7 @@
       </p:sp>
       <p:sp>
         <p:nvSpPr>
-          <p:cNvPr id="16" name="TextBox 15"/>
+          <p:cNvPr id="15" name="TextBox 14"/>
           <p:cNvSpPr txBox="1"/>
           <p:nvPr/>
         </p:nvSpPr>
@@ -27975,7 +26680,7 @@
       </p:sp>
       <p:sp>
         <p:nvSpPr>
-          <p:cNvPr id="17" name="TextBox 16"/>
+          <p:cNvPr id="16" name="TextBox 15"/>
           <p:cNvSpPr txBox="1"/>
           <p:nvPr/>
         </p:nvSpPr>
@@ -28022,7 +26727,7 @@
       </p:sp>
       <p:sp>
         <p:nvSpPr>
-          <p:cNvPr id="18" name="Rounded Rectangle 17"/>
+          <p:cNvPr id="17" name="Rounded Rectangle 16"/>
           <p:cNvSpPr/>
           <p:nvPr/>
         </p:nvSpPr>
@@ -28076,7 +26781,7 @@
       </p:sp>
       <p:sp>
         <p:nvSpPr>
-          <p:cNvPr id="19" name="Rectangle 18"/>
+          <p:cNvPr id="18" name="Rectangle 17"/>
           <p:cNvSpPr/>
           <p:nvPr/>
         </p:nvSpPr>
@@ -28120,7 +26825,7 @@
       </p:sp>
       <p:sp>
         <p:nvSpPr>
-          <p:cNvPr id="20" name="TextBox 19"/>
+          <p:cNvPr id="19" name="TextBox 18"/>
           <p:cNvSpPr txBox="1"/>
           <p:nvPr/>
         </p:nvSpPr>
@@ -28167,7 +26872,7 @@
       </p:sp>
       <p:sp>
         <p:nvSpPr>
-          <p:cNvPr id="21" name="TextBox 20"/>
+          <p:cNvPr id="20" name="TextBox 19"/>
           <p:cNvSpPr txBox="1"/>
           <p:nvPr/>
         </p:nvSpPr>
@@ -28214,7 +26919,7 @@
       </p:sp>
       <p:sp>
         <p:nvSpPr>
-          <p:cNvPr id="22" name="Rounded Rectangle 21"/>
+          <p:cNvPr id="21" name="Rounded Rectangle 20"/>
           <p:cNvSpPr/>
           <p:nvPr/>
         </p:nvSpPr>
@@ -28268,7 +26973,7 @@
       </p:sp>
       <p:sp>
         <p:nvSpPr>
-          <p:cNvPr id="23" name="Rectangle 22"/>
+          <p:cNvPr id="22" name="Rectangle 21"/>
           <p:cNvSpPr/>
           <p:nvPr/>
         </p:nvSpPr>
@@ -28312,7 +27017,7 @@
       </p:sp>
       <p:sp>
         <p:nvSpPr>
-          <p:cNvPr id="24" name="TextBox 23"/>
+          <p:cNvPr id="23" name="TextBox 22"/>
           <p:cNvSpPr txBox="1"/>
           <p:nvPr/>
         </p:nvSpPr>
@@ -28359,7 +27064,7 @@
       </p:sp>
       <p:sp>
         <p:nvSpPr>
-          <p:cNvPr id="25" name="TextBox 24"/>
+          <p:cNvPr id="24" name="TextBox 23"/>
           <p:cNvSpPr txBox="1"/>
           <p:nvPr/>
         </p:nvSpPr>
@@ -28406,7 +27111,7 @@
       </p:sp>
       <p:sp>
         <p:nvSpPr>
-          <p:cNvPr id="26" name="Rounded Rectangle 25"/>
+          <p:cNvPr id="25" name="Rounded Rectangle 24"/>
           <p:cNvSpPr/>
           <p:nvPr/>
         </p:nvSpPr>
@@ -28460,7 +27165,7 @@
       </p:sp>
       <p:sp>
         <p:nvSpPr>
-          <p:cNvPr id="27" name="Rectangle 26"/>
+          <p:cNvPr id="26" name="Rectangle 25"/>
           <p:cNvSpPr/>
           <p:nvPr/>
         </p:nvSpPr>
@@ -28504,7 +27209,7 @@
       </p:sp>
       <p:sp>
         <p:nvSpPr>
-          <p:cNvPr id="28" name="TextBox 27"/>
+          <p:cNvPr id="27" name="TextBox 26"/>
           <p:cNvSpPr txBox="1"/>
           <p:nvPr/>
         </p:nvSpPr>
@@ -28551,7 +27256,7 @@
       </p:sp>
       <p:sp>
         <p:nvSpPr>
-          <p:cNvPr id="29" name="TextBox 28"/>
+          <p:cNvPr id="28" name="TextBox 27"/>
           <p:cNvSpPr txBox="1"/>
           <p:nvPr/>
         </p:nvSpPr>
@@ -28598,7 +27303,7 @@
       </p:sp>
       <p:sp>
         <p:nvSpPr>
-          <p:cNvPr id="30" name="Rounded Rectangle 29"/>
+          <p:cNvPr id="29" name="Rounded Rectangle 28"/>
           <p:cNvSpPr/>
           <p:nvPr/>
         </p:nvSpPr>
@@ -28652,7 +27357,7 @@
       </p:sp>
       <p:sp>
         <p:nvSpPr>
-          <p:cNvPr id="31" name="Rectangle 30"/>
+          <p:cNvPr id="30" name="Rectangle 29"/>
           <p:cNvSpPr/>
           <p:nvPr/>
         </p:nvSpPr>
@@ -28696,7 +27401,7 @@
       </p:sp>
       <p:sp>
         <p:nvSpPr>
-          <p:cNvPr id="32" name="TextBox 31"/>
+          <p:cNvPr id="31" name="TextBox 30"/>
           <p:cNvSpPr txBox="1"/>
           <p:nvPr/>
         </p:nvSpPr>
@@ -28743,7 +27448,7 @@
       </p:sp>
       <p:sp>
         <p:nvSpPr>
-          <p:cNvPr id="33" name="TextBox 32"/>
+          <p:cNvPr id="32" name="TextBox 31"/>
           <p:cNvSpPr txBox="1"/>
           <p:nvPr/>
         </p:nvSpPr>
@@ -28882,8 +27587,77 @@
         </p:nvSpPr>
         <p:spPr>
           <a:xfrm>
-            <a:off x="713232" y="6272784"/>
-            <a:ext cx="5597920" cy="219456"/>
+            <a:off x="8240677" y="6272784"/>
+            <a:ext cx="2651760" cy="219456"/>
+          </a:xfrm>
+          <a:prstGeom prst="rect">
+            <a:avLst/>
+          </a:prstGeom>
+          <a:noFill/>
+        </p:spPr>
+        <p:txBody>
+          <a:bodyPr wrap="square" lIns="0" rIns="0" tIns="0" bIns="0" anchor="t">
+            <a:spAutoFit/>
+          </a:bodyPr>
+          <a:lstStyle/>
+          <a:p>
+            <a:pPr algn="r">
+              <a:lnSpc>
+                <a:spcPct val="122000"/>
+              </a:lnSpc>
+              <a:spcBef>
+                <a:spcPts val="0"/>
+              </a:spcBef>
+              <a:spcAft>
+                <a:spcPts val="0"/>
+              </a:spcAft>
+            </a:pPr>
+            <a:r>
+              <a:rPr sz="900" b="0" i="0">
+                <a:solidFill>
+                  <a:srgbClr val="636E85"/>
+                </a:solidFill>
+                <a:latin typeface="Segoe UI"/>
+                <a:ea typeface="Segoe UI"/>
+                <a:cs typeface="Segoe UI"/>
+              </a:rPr>
+              <a:t>Lingesh K  ·  OSI2509030</a:t>
+            </a:r>
+            <a:r>
+              <a:rPr sz="900" b="0" i="0">
+                <a:solidFill>
+                  <a:srgbClr val="141C2E"/>
+                </a:solidFill>
+                <a:latin typeface="Segoe UI"/>
+                <a:ea typeface="Segoe UI"/>
+                <a:cs typeface="Segoe UI"/>
+              </a:rPr>
+              <a:t>     </a:t>
+            </a:r>
+            <a:r>
+              <a:rPr sz="900" b="1" i="0">
+                <a:solidFill>
+                  <a:srgbClr val="0E1E3C"/>
+                </a:solidFill>
+                <a:latin typeface="Segoe UI"/>
+                <a:ea typeface="Segoe UI"/>
+                <a:cs typeface="Segoe UI"/>
+              </a:rPr>
+              <a:t>07</a:t>
+            </a:r>
+          </a:p>
+        </p:txBody>
+      </p:sp>
+      <p:sp>
+        <p:nvSpPr>
+          <p:cNvPr id="5" name="TextBox 4"/>
+          <p:cNvSpPr txBox="1"/>
+          <p:nvPr/>
+        </p:nvSpPr>
+        <p:spPr>
+          <a:xfrm>
+            <a:off x="713232" y="566928"/>
+            <a:ext cx="10765231" cy="219456"/>
           </a:xfrm>
           <a:prstGeom prst="rect">
             <a:avLst/>
@@ -28908,106 +27682,15 @@
               </a:spcAft>
             </a:pPr>
             <a:r>
-              <a:rPr sz="900" b="1" i="0">
-                <a:solidFill>
-                  <a:srgbClr val="0E1E3C"/>
-                </a:solidFill>
-                <a:latin typeface="Segoe UI"/>
-                <a:ea typeface="Segoe UI"/>
-                <a:cs typeface="Segoe UI"/>
-              </a:rPr>
-              <a:t>Unit 4</a:t>
-            </a:r>
-            <a:r>
-              <a:rPr sz="900" b="0" i="0">
-                <a:solidFill>
-                  <a:srgbClr val="939EB3"/>
-                </a:solidFill>
-                <a:latin typeface="Segoe UI"/>
-                <a:ea typeface="Segoe UI"/>
-                <a:cs typeface="Segoe UI"/>
-              </a:rPr>
-              <a:t>  ·  </a:t>
-            </a:r>
-            <a:r>
-              <a:rPr sz="900" b="0" i="0">
-                <a:solidFill>
-                  <a:srgbClr val="636E85"/>
-                </a:solidFill>
-                <a:latin typeface="Segoe UI"/>
-                <a:ea typeface="Segoe UI"/>
-                <a:cs typeface="Segoe UI"/>
-              </a:rPr>
-              <a:t>Ethics, Legal and Social Implications</a:t>
-            </a:r>
-          </a:p>
-        </p:txBody>
-      </p:sp>
-      <p:sp>
-        <p:nvSpPr>
-          <p:cNvPr id="5" name="TextBox 4"/>
-          <p:cNvSpPr txBox="1"/>
-          <p:nvPr/>
-        </p:nvSpPr>
-        <p:spPr>
-          <a:xfrm>
-            <a:off x="8240677" y="6272784"/>
-            <a:ext cx="2651760" cy="219456"/>
-          </a:xfrm>
-          <a:prstGeom prst="rect">
-            <a:avLst/>
-          </a:prstGeom>
-          <a:noFill/>
-        </p:spPr>
-        <p:txBody>
-          <a:bodyPr wrap="square" lIns="0" rIns="0" tIns="0" bIns="0" anchor="t">
-            <a:spAutoFit/>
-          </a:bodyPr>
-          <a:lstStyle/>
-          <a:p>
-            <a:pPr algn="r">
-              <a:lnSpc>
-                <a:spcPct val="122000"/>
-              </a:lnSpc>
-              <a:spcBef>
-                <a:spcPts val="0"/>
-              </a:spcBef>
-              <a:spcAft>
-                <a:spcPts val="0"/>
-              </a:spcAft>
-            </a:pPr>
-            <a:r>
-              <a:rPr sz="900" b="0" i="0">
-                <a:solidFill>
-                  <a:srgbClr val="636E85"/>
-                </a:solidFill>
-                <a:latin typeface="Segoe UI"/>
-                <a:ea typeface="Segoe UI"/>
-                <a:cs typeface="Segoe UI"/>
-              </a:rPr>
-              <a:t>Lingesh K  ·  OSI2509030</a:t>
-            </a:r>
-            <a:r>
-              <a:rPr sz="900" b="0" i="0">
-                <a:solidFill>
-                  <a:srgbClr val="141C2E"/>
-                </a:solidFill>
-                <a:latin typeface="Segoe UI"/>
-                <a:ea typeface="Segoe UI"/>
-                <a:cs typeface="Segoe UI"/>
-              </a:rPr>
-              <a:t>     </a:t>
-            </a:r>
-            <a:r>
-              <a:rPr sz="900" b="1" i="0">
-                <a:solidFill>
-                  <a:srgbClr val="0E1E3C"/>
-                </a:solidFill>
-                <a:latin typeface="Segoe UI"/>
-                <a:ea typeface="Segoe UI"/>
-                <a:cs typeface="Segoe UI"/>
-              </a:rPr>
-              <a:t>07</a:t>
+              <a:rPr sz="950" b="1" i="0" spc="160">
+                <a:solidFill>
+                  <a:srgbClr val="E05151"/>
+                </a:solidFill>
+                <a:latin typeface="Segoe UI"/>
+                <a:ea typeface="Segoe UI"/>
+                <a:cs typeface="Segoe UI"/>
+              </a:rPr>
+              <a:t>THE EVERYDAY RISK</a:t>
             </a:r>
           </a:p>
         </p:txBody>
@@ -29015,53 +27698,6 @@
       <p:sp>
         <p:nvSpPr>
           <p:cNvPr id="6" name="TextBox 5"/>
-          <p:cNvSpPr txBox="1"/>
-          <p:nvPr/>
-        </p:nvSpPr>
-        <p:spPr>
-          <a:xfrm>
-            <a:off x="713232" y="566928"/>
-            <a:ext cx="10765231" cy="219456"/>
-          </a:xfrm>
-          <a:prstGeom prst="rect">
-            <a:avLst/>
-          </a:prstGeom>
-          <a:noFill/>
-        </p:spPr>
-        <p:txBody>
-          <a:bodyPr wrap="square" lIns="0" rIns="0" tIns="0" bIns="0" anchor="t">
-            <a:spAutoFit/>
-          </a:bodyPr>
-          <a:lstStyle/>
-          <a:p>
-            <a:pPr algn="l">
-              <a:lnSpc>
-                <a:spcPct val="122000"/>
-              </a:lnSpc>
-              <a:spcBef>
-                <a:spcPts val="0"/>
-              </a:spcBef>
-              <a:spcAft>
-                <a:spcPts val="0"/>
-              </a:spcAft>
-            </a:pPr>
-            <a:r>
-              <a:rPr sz="950" b="1" i="0" spc="160">
-                <a:solidFill>
-                  <a:srgbClr val="E05151"/>
-                </a:solidFill>
-                <a:latin typeface="Segoe UI"/>
-                <a:ea typeface="Segoe UI"/>
-                <a:cs typeface="Segoe UI"/>
-              </a:rPr>
-              <a:t>THE EVERYDAY RISK</a:t>
-            </a:r>
-          </a:p>
-        </p:txBody>
-      </p:sp>
-      <p:sp>
-        <p:nvSpPr>
-          <p:cNvPr id="7" name="TextBox 6"/>
           <p:cNvSpPr txBox="1"/>
           <p:nvPr/>
         </p:nvSpPr>
@@ -29108,7 +27744,7 @@
       </p:sp>
       <p:sp>
         <p:nvSpPr>
-          <p:cNvPr id="8" name="Rectangle 7"/>
+          <p:cNvPr id="7" name="Rectangle 6"/>
           <p:cNvSpPr/>
           <p:nvPr/>
         </p:nvSpPr>
@@ -29152,7 +27788,7 @@
       </p:sp>
       <p:sp>
         <p:nvSpPr>
-          <p:cNvPr id="9" name="TextBox 8"/>
+          <p:cNvPr id="8" name="TextBox 7"/>
           <p:cNvSpPr txBox="1"/>
           <p:nvPr/>
         </p:nvSpPr>
@@ -29199,7 +27835,7 @@
       </p:sp>
       <p:sp>
         <p:nvSpPr>
-          <p:cNvPr id="10" name="Rounded Rectangle 9"/>
+          <p:cNvPr id="9" name="Rounded Rectangle 8"/>
           <p:cNvSpPr/>
           <p:nvPr/>
         </p:nvSpPr>
@@ -29266,7 +27902,7 @@
       </p:sp>
       <p:sp>
         <p:nvSpPr>
-          <p:cNvPr id="11" name="Rectangle 10"/>
+          <p:cNvPr id="10" name="Rectangle 9"/>
           <p:cNvSpPr/>
           <p:nvPr/>
         </p:nvSpPr>
@@ -29310,7 +27946,7 @@
       </p:sp>
       <p:sp>
         <p:nvSpPr>
-          <p:cNvPr id="12" name="Rounded Rectangle 11"/>
+          <p:cNvPr id="11" name="Rounded Rectangle 10"/>
           <p:cNvSpPr/>
           <p:nvPr/>
         </p:nvSpPr>
@@ -29356,7 +27992,7 @@
       </p:sp>
       <p:sp>
         <p:nvSpPr>
-          <p:cNvPr id="13" name="TextBox 12"/>
+          <p:cNvPr id="12" name="TextBox 11"/>
           <p:cNvSpPr txBox="1"/>
           <p:nvPr/>
         </p:nvSpPr>
@@ -29427,7 +28063,7 @@
       </p:sp>
       <p:sp>
         <p:nvSpPr>
-          <p:cNvPr id="14" name="Rounded Rectangle 13"/>
+          <p:cNvPr id="13" name="Rounded Rectangle 12"/>
           <p:cNvSpPr/>
           <p:nvPr/>
         </p:nvSpPr>
@@ -29473,7 +28109,7 @@
       </p:sp>
       <p:sp>
         <p:nvSpPr>
-          <p:cNvPr id="15" name="TextBox 14"/>
+          <p:cNvPr id="14" name="TextBox 13"/>
           <p:cNvSpPr txBox="1"/>
           <p:nvPr/>
         </p:nvSpPr>
@@ -29544,7 +28180,7 @@
       </p:sp>
       <p:sp>
         <p:nvSpPr>
-          <p:cNvPr id="16" name="Rounded Rectangle 15"/>
+          <p:cNvPr id="15" name="Rounded Rectangle 14"/>
           <p:cNvSpPr/>
           <p:nvPr/>
         </p:nvSpPr>
@@ -29590,7 +28226,7 @@
       </p:sp>
       <p:sp>
         <p:nvSpPr>
-          <p:cNvPr id="17" name="TextBox 16"/>
+          <p:cNvPr id="16" name="TextBox 15"/>
           <p:cNvSpPr txBox="1"/>
           <p:nvPr/>
         </p:nvSpPr>
@@ -29661,7 +28297,7 @@
       </p:sp>
       <p:sp>
         <p:nvSpPr>
-          <p:cNvPr id="18" name="Rounded Rectangle 17"/>
+          <p:cNvPr id="17" name="Rounded Rectangle 16"/>
           <p:cNvSpPr/>
           <p:nvPr/>
         </p:nvSpPr>
@@ -29707,7 +28343,7 @@
       </p:sp>
       <p:sp>
         <p:nvSpPr>
-          <p:cNvPr id="19" name="TextBox 18"/>
+          <p:cNvPr id="18" name="TextBox 17"/>
           <p:cNvSpPr txBox="1"/>
           <p:nvPr/>
         </p:nvSpPr>
@@ -29778,7 +28414,7 @@
       </p:sp>
       <p:sp>
         <p:nvSpPr>
-          <p:cNvPr id="20" name="Rounded Rectangle 19"/>
+          <p:cNvPr id="19" name="Rounded Rectangle 18"/>
           <p:cNvSpPr/>
           <p:nvPr/>
         </p:nvSpPr>
@@ -29824,7 +28460,7 @@
       </p:sp>
       <p:sp>
         <p:nvSpPr>
-          <p:cNvPr id="21" name="TextBox 20"/>
+          <p:cNvPr id="20" name="TextBox 19"/>
           <p:cNvSpPr txBox="1"/>
           <p:nvPr/>
         </p:nvSpPr>
@@ -29895,7 +28531,7 @@
       </p:sp>
       <p:sp>
         <p:nvSpPr>
-          <p:cNvPr id="22" name="Rounded Rectangle 21"/>
+          <p:cNvPr id="21" name="Rounded Rectangle 20"/>
           <p:cNvSpPr/>
           <p:nvPr/>
         </p:nvSpPr>
@@ -29941,7 +28577,7 @@
       </p:sp>
       <p:sp>
         <p:nvSpPr>
-          <p:cNvPr id="23" name="TextBox 22"/>
+          <p:cNvPr id="22" name="TextBox 21"/>
           <p:cNvSpPr txBox="1"/>
           <p:nvPr/>
         </p:nvSpPr>
@@ -30104,8 +28740,77 @@
         </p:nvSpPr>
         <p:spPr>
           <a:xfrm>
-            <a:off x="713232" y="6272784"/>
-            <a:ext cx="5597920" cy="219456"/>
+            <a:off x="8240677" y="6272784"/>
+            <a:ext cx="2651760" cy="219456"/>
+          </a:xfrm>
+          <a:prstGeom prst="rect">
+            <a:avLst/>
+          </a:prstGeom>
+          <a:noFill/>
+        </p:spPr>
+        <p:txBody>
+          <a:bodyPr wrap="square" lIns="0" rIns="0" tIns="0" bIns="0" anchor="t">
+            <a:spAutoFit/>
+          </a:bodyPr>
+          <a:lstStyle/>
+          <a:p>
+            <a:pPr algn="r">
+              <a:lnSpc>
+                <a:spcPct val="122000"/>
+              </a:lnSpc>
+              <a:spcBef>
+                <a:spcPts val="0"/>
+              </a:spcBef>
+              <a:spcAft>
+                <a:spcPts val="0"/>
+              </a:spcAft>
+            </a:pPr>
+            <a:r>
+              <a:rPr sz="900" b="0" i="0">
+                <a:solidFill>
+                  <a:srgbClr val="636E85"/>
+                </a:solidFill>
+                <a:latin typeface="Segoe UI"/>
+                <a:ea typeface="Segoe UI"/>
+                <a:cs typeface="Segoe UI"/>
+              </a:rPr>
+              <a:t>Lingesh K  ·  OSI2509030</a:t>
+            </a:r>
+            <a:r>
+              <a:rPr sz="900" b="0" i="0">
+                <a:solidFill>
+                  <a:srgbClr val="141C2E"/>
+                </a:solidFill>
+                <a:latin typeface="Segoe UI"/>
+                <a:ea typeface="Segoe UI"/>
+                <a:cs typeface="Segoe UI"/>
+              </a:rPr>
+              <a:t>     </a:t>
+            </a:r>
+            <a:r>
+              <a:rPr sz="900" b="1" i="0">
+                <a:solidFill>
+                  <a:srgbClr val="0E1E3C"/>
+                </a:solidFill>
+                <a:latin typeface="Segoe UI"/>
+                <a:ea typeface="Segoe UI"/>
+                <a:cs typeface="Segoe UI"/>
+              </a:rPr>
+              <a:t>08</a:t>
+            </a:r>
+          </a:p>
+        </p:txBody>
+      </p:sp>
+      <p:sp>
+        <p:nvSpPr>
+          <p:cNvPr id="5" name="TextBox 4"/>
+          <p:cNvSpPr txBox="1"/>
+          <p:nvPr/>
+        </p:nvSpPr>
+        <p:spPr>
+          <a:xfrm>
+            <a:off x="713232" y="566928"/>
+            <a:ext cx="10765231" cy="219456"/>
           </a:xfrm>
           <a:prstGeom prst="rect">
             <a:avLst/>
@@ -30130,106 +28835,15 @@
               </a:spcAft>
             </a:pPr>
             <a:r>
-              <a:rPr sz="900" b="1" i="0">
-                <a:solidFill>
-                  <a:srgbClr val="0E1E3C"/>
-                </a:solidFill>
-                <a:latin typeface="Segoe UI"/>
-                <a:ea typeface="Segoe UI"/>
-                <a:cs typeface="Segoe UI"/>
-              </a:rPr>
-              <a:t>Unit 4</a:t>
-            </a:r>
-            <a:r>
-              <a:rPr sz="900" b="0" i="0">
-                <a:solidFill>
-                  <a:srgbClr val="939EB3"/>
-                </a:solidFill>
-                <a:latin typeface="Segoe UI"/>
-                <a:ea typeface="Segoe UI"/>
-                <a:cs typeface="Segoe UI"/>
-              </a:rPr>
-              <a:t>  ·  </a:t>
-            </a:r>
-            <a:r>
-              <a:rPr sz="900" b="0" i="0">
-                <a:solidFill>
-                  <a:srgbClr val="636E85"/>
-                </a:solidFill>
-                <a:latin typeface="Segoe UI"/>
-                <a:ea typeface="Segoe UI"/>
-                <a:cs typeface="Segoe UI"/>
-              </a:rPr>
-              <a:t>Ethics, Legal and Social Implications</a:t>
-            </a:r>
-          </a:p>
-        </p:txBody>
-      </p:sp>
-      <p:sp>
-        <p:nvSpPr>
-          <p:cNvPr id="5" name="TextBox 4"/>
-          <p:cNvSpPr txBox="1"/>
-          <p:nvPr/>
-        </p:nvSpPr>
-        <p:spPr>
-          <a:xfrm>
-            <a:off x="8240677" y="6272784"/>
-            <a:ext cx="2651760" cy="219456"/>
-          </a:xfrm>
-          <a:prstGeom prst="rect">
-            <a:avLst/>
-          </a:prstGeom>
-          <a:noFill/>
-        </p:spPr>
-        <p:txBody>
-          <a:bodyPr wrap="square" lIns="0" rIns="0" tIns="0" bIns="0" anchor="t">
-            <a:spAutoFit/>
-          </a:bodyPr>
-          <a:lstStyle/>
-          <a:p>
-            <a:pPr algn="r">
-              <a:lnSpc>
-                <a:spcPct val="122000"/>
-              </a:lnSpc>
-              <a:spcBef>
-                <a:spcPts val="0"/>
-              </a:spcBef>
-              <a:spcAft>
-                <a:spcPts val="0"/>
-              </a:spcAft>
-            </a:pPr>
-            <a:r>
-              <a:rPr sz="900" b="0" i="0">
-                <a:solidFill>
-                  <a:srgbClr val="636E85"/>
-                </a:solidFill>
-                <a:latin typeface="Segoe UI"/>
-                <a:ea typeface="Segoe UI"/>
-                <a:cs typeface="Segoe UI"/>
-              </a:rPr>
-              <a:t>Lingesh K  ·  OSI2509030</a:t>
-            </a:r>
-            <a:r>
-              <a:rPr sz="900" b="0" i="0">
-                <a:solidFill>
-                  <a:srgbClr val="141C2E"/>
-                </a:solidFill>
-                <a:latin typeface="Segoe UI"/>
-                <a:ea typeface="Segoe UI"/>
-                <a:cs typeface="Segoe UI"/>
-              </a:rPr>
-              <a:t>     </a:t>
-            </a:r>
-            <a:r>
-              <a:rPr sz="900" b="1" i="0">
-                <a:solidFill>
-                  <a:srgbClr val="0E1E3C"/>
-                </a:solidFill>
-                <a:latin typeface="Segoe UI"/>
-                <a:ea typeface="Segoe UI"/>
-                <a:cs typeface="Segoe UI"/>
-              </a:rPr>
-              <a:t>08</a:t>
+              <a:rPr sz="950" b="1" i="0" spc="160">
+                <a:solidFill>
+                  <a:srgbClr val="E05151"/>
+                </a:solidFill>
+                <a:latin typeface="Segoe UI"/>
+                <a:ea typeface="Segoe UI"/>
+                <a:cs typeface="Segoe UI"/>
+              </a:rPr>
+              <a:t>SECURITY</a:t>
             </a:r>
           </a:p>
         </p:txBody>
@@ -30237,53 +28851,6 @@
       <p:sp>
         <p:nvSpPr>
           <p:cNvPr id="6" name="TextBox 5"/>
-          <p:cNvSpPr txBox="1"/>
-          <p:nvPr/>
-        </p:nvSpPr>
-        <p:spPr>
-          <a:xfrm>
-            <a:off x="713232" y="566928"/>
-            <a:ext cx="10765231" cy="219456"/>
-          </a:xfrm>
-          <a:prstGeom prst="rect">
-            <a:avLst/>
-          </a:prstGeom>
-          <a:noFill/>
-        </p:spPr>
-        <p:txBody>
-          <a:bodyPr wrap="square" lIns="0" rIns="0" tIns="0" bIns="0" anchor="t">
-            <a:spAutoFit/>
-          </a:bodyPr>
-          <a:lstStyle/>
-          <a:p>
-            <a:pPr algn="l">
-              <a:lnSpc>
-                <a:spcPct val="122000"/>
-              </a:lnSpc>
-              <a:spcBef>
-                <a:spcPts val="0"/>
-              </a:spcBef>
-              <a:spcAft>
-                <a:spcPts val="0"/>
-              </a:spcAft>
-            </a:pPr>
-            <a:r>
-              <a:rPr sz="950" b="1" i="0" spc="160">
-                <a:solidFill>
-                  <a:srgbClr val="E05151"/>
-                </a:solidFill>
-                <a:latin typeface="Segoe UI"/>
-                <a:ea typeface="Segoe UI"/>
-                <a:cs typeface="Segoe UI"/>
-              </a:rPr>
-              <a:t>SECURITY</a:t>
-            </a:r>
-          </a:p>
-        </p:txBody>
-      </p:sp>
-      <p:sp>
-        <p:nvSpPr>
-          <p:cNvPr id="7" name="TextBox 6"/>
           <p:cNvSpPr txBox="1"/>
           <p:nvPr/>
         </p:nvSpPr>
@@ -30330,7 +28897,7 @@
       </p:sp>
       <p:sp>
         <p:nvSpPr>
-          <p:cNvPr id="8" name="Rectangle 7"/>
+          <p:cNvPr id="7" name="Rectangle 6"/>
           <p:cNvSpPr/>
           <p:nvPr/>
         </p:nvSpPr>
@@ -30374,7 +28941,7 @@
       </p:sp>
       <p:sp>
         <p:nvSpPr>
-          <p:cNvPr id="9" name="TextBox 8"/>
+          <p:cNvPr id="8" name="TextBox 7"/>
           <p:cNvSpPr txBox="1"/>
           <p:nvPr/>
         </p:nvSpPr>
@@ -30421,7 +28988,7 @@
       </p:sp>
       <p:sp>
         <p:nvSpPr>
-          <p:cNvPr id="10" name="Rounded Rectangle 9"/>
+          <p:cNvPr id="9" name="Rounded Rectangle 8"/>
           <p:cNvSpPr/>
           <p:nvPr/>
         </p:nvSpPr>
@@ -30475,7 +29042,7 @@
       </p:sp>
       <p:sp>
         <p:nvSpPr>
-          <p:cNvPr id="11" name="Rectangle 10"/>
+          <p:cNvPr id="10" name="Rectangle 9"/>
           <p:cNvSpPr/>
           <p:nvPr/>
         </p:nvSpPr>
@@ -30519,7 +29086,7 @@
       </p:sp>
       <p:sp>
         <p:nvSpPr>
-          <p:cNvPr id="12" name="TextBox 11"/>
+          <p:cNvPr id="11" name="TextBox 10"/>
           <p:cNvSpPr txBox="1"/>
           <p:nvPr/>
         </p:nvSpPr>
@@ -30566,7 +29133,7 @@
       </p:sp>
       <p:sp>
         <p:nvSpPr>
-          <p:cNvPr id="13" name="TextBox 12"/>
+          <p:cNvPr id="12" name="TextBox 11"/>
           <p:cNvSpPr txBox="1"/>
           <p:nvPr/>
         </p:nvSpPr>
@@ -30613,7 +29180,7 @@
       </p:sp>
       <p:sp>
         <p:nvSpPr>
-          <p:cNvPr id="14" name="Rounded Rectangle 13"/>
+          <p:cNvPr id="13" name="Rounded Rectangle 12"/>
           <p:cNvSpPr/>
           <p:nvPr/>
         </p:nvSpPr>
@@ -30667,7 +29234,7 @@
       </p:sp>
       <p:sp>
         <p:nvSpPr>
-          <p:cNvPr id="15" name="Rectangle 14"/>
+          <p:cNvPr id="14" name="Rectangle 13"/>
           <p:cNvSpPr/>
           <p:nvPr/>
         </p:nvSpPr>
@@ -30711,7 +29278,7 @@
       </p:sp>
       <p:sp>
         <p:nvSpPr>
-          <p:cNvPr id="16" name="TextBox 15"/>
+          <p:cNvPr id="15" name="TextBox 14"/>
           <p:cNvSpPr txBox="1"/>
           <p:nvPr/>
         </p:nvSpPr>
@@ -30758,7 +29325,7 @@
       </p:sp>
       <p:sp>
         <p:nvSpPr>
-          <p:cNvPr id="17" name="TextBox 16"/>
+          <p:cNvPr id="16" name="TextBox 15"/>
           <p:cNvSpPr txBox="1"/>
           <p:nvPr/>
         </p:nvSpPr>
@@ -30805,7 +29372,7 @@
       </p:sp>
       <p:sp>
         <p:nvSpPr>
-          <p:cNvPr id="18" name="Rounded Rectangle 17"/>
+          <p:cNvPr id="17" name="Rounded Rectangle 16"/>
           <p:cNvSpPr/>
           <p:nvPr/>
         </p:nvSpPr>
@@ -30859,7 +29426,7 @@
       </p:sp>
       <p:sp>
         <p:nvSpPr>
-          <p:cNvPr id="19" name="Rectangle 18"/>
+          <p:cNvPr id="18" name="Rectangle 17"/>
           <p:cNvSpPr/>
           <p:nvPr/>
         </p:nvSpPr>
@@ -30903,7 +29470,7 @@
       </p:sp>
       <p:sp>
         <p:nvSpPr>
-          <p:cNvPr id="20" name="TextBox 19"/>
+          <p:cNvPr id="19" name="TextBox 18"/>
           <p:cNvSpPr txBox="1"/>
           <p:nvPr/>
         </p:nvSpPr>
@@ -30950,7 +29517,7 @@
       </p:sp>
       <p:sp>
         <p:nvSpPr>
-          <p:cNvPr id="21" name="TextBox 20"/>
+          <p:cNvPr id="20" name="TextBox 19"/>
           <p:cNvSpPr txBox="1"/>
           <p:nvPr/>
         </p:nvSpPr>
@@ -30997,7 +29564,7 @@
       </p:sp>
       <p:sp>
         <p:nvSpPr>
-          <p:cNvPr id="22" name="Rounded Rectangle 21"/>
+          <p:cNvPr id="21" name="Rounded Rectangle 20"/>
           <p:cNvSpPr/>
           <p:nvPr/>
         </p:nvSpPr>
@@ -31051,7 +29618,7 @@
       </p:sp>
       <p:sp>
         <p:nvSpPr>
-          <p:cNvPr id="23" name="Rectangle 22"/>
+          <p:cNvPr id="22" name="Rectangle 21"/>
           <p:cNvSpPr/>
           <p:nvPr/>
         </p:nvSpPr>
@@ -31095,7 +29662,7 @@
       </p:sp>
       <p:sp>
         <p:nvSpPr>
-          <p:cNvPr id="24" name="TextBox 23"/>
+          <p:cNvPr id="23" name="TextBox 22"/>
           <p:cNvSpPr txBox="1"/>
           <p:nvPr/>
         </p:nvSpPr>
@@ -31142,7 +29709,7 @@
       </p:sp>
       <p:sp>
         <p:nvSpPr>
-          <p:cNvPr id="25" name="TextBox 24"/>
+          <p:cNvPr id="24" name="TextBox 23"/>
           <p:cNvSpPr txBox="1"/>
           <p:nvPr/>
         </p:nvSpPr>
@@ -31189,7 +29756,7 @@
       </p:sp>
       <p:sp>
         <p:nvSpPr>
-          <p:cNvPr id="26" name="Rounded Rectangle 25"/>
+          <p:cNvPr id="25" name="Rounded Rectangle 24"/>
           <p:cNvSpPr/>
           <p:nvPr/>
         </p:nvSpPr>
@@ -31243,7 +29810,7 @@
       </p:sp>
       <p:sp>
         <p:nvSpPr>
-          <p:cNvPr id="27" name="Rectangle 26"/>
+          <p:cNvPr id="26" name="Rectangle 25"/>
           <p:cNvSpPr/>
           <p:nvPr/>
         </p:nvSpPr>
@@ -31287,7 +29854,7 @@
       </p:sp>
       <p:sp>
         <p:nvSpPr>
-          <p:cNvPr id="28" name="TextBox 27"/>
+          <p:cNvPr id="27" name="TextBox 26"/>
           <p:cNvSpPr txBox="1"/>
           <p:nvPr/>
         </p:nvSpPr>
@@ -31334,7 +29901,7 @@
       </p:sp>
       <p:sp>
         <p:nvSpPr>
-          <p:cNvPr id="29" name="TextBox 28"/>
+          <p:cNvPr id="28" name="TextBox 27"/>
           <p:cNvSpPr txBox="1"/>
           <p:nvPr/>
         </p:nvSpPr>
@@ -31381,7 +29948,7 @@
       </p:sp>
       <p:sp>
         <p:nvSpPr>
-          <p:cNvPr id="30" name="Rounded Rectangle 29"/>
+          <p:cNvPr id="29" name="Rounded Rectangle 28"/>
           <p:cNvSpPr/>
           <p:nvPr/>
         </p:nvSpPr>
@@ -31435,7 +30002,7 @@
       </p:sp>
       <p:sp>
         <p:nvSpPr>
-          <p:cNvPr id="31" name="Rectangle 30"/>
+          <p:cNvPr id="30" name="Rectangle 29"/>
           <p:cNvSpPr/>
           <p:nvPr/>
         </p:nvSpPr>
@@ -31479,7 +30046,7 @@
       </p:sp>
       <p:sp>
         <p:nvSpPr>
-          <p:cNvPr id="32" name="TextBox 31"/>
+          <p:cNvPr id="31" name="TextBox 30"/>
           <p:cNvSpPr txBox="1"/>
           <p:nvPr/>
         </p:nvSpPr>
@@ -31526,7 +30093,7 @@
       </p:sp>
       <p:sp>
         <p:nvSpPr>
-          <p:cNvPr id="33" name="TextBox 32"/>
+          <p:cNvPr id="32" name="TextBox 31"/>
           <p:cNvSpPr txBox="1"/>
           <p:nvPr/>
         </p:nvSpPr>
@@ -31665,8 +30232,77 @@
         </p:nvSpPr>
         <p:spPr>
           <a:xfrm>
-            <a:off x="713232" y="6272784"/>
-            <a:ext cx="5597920" cy="219456"/>
+            <a:off x="8240677" y="6272784"/>
+            <a:ext cx="2651760" cy="219456"/>
+          </a:xfrm>
+          <a:prstGeom prst="rect">
+            <a:avLst/>
+          </a:prstGeom>
+          <a:noFill/>
+        </p:spPr>
+        <p:txBody>
+          <a:bodyPr wrap="square" lIns="0" rIns="0" tIns="0" bIns="0" anchor="t">
+            <a:spAutoFit/>
+          </a:bodyPr>
+          <a:lstStyle/>
+          <a:p>
+            <a:pPr algn="r">
+              <a:lnSpc>
+                <a:spcPct val="122000"/>
+              </a:lnSpc>
+              <a:spcBef>
+                <a:spcPts val="0"/>
+              </a:spcBef>
+              <a:spcAft>
+                <a:spcPts val="0"/>
+              </a:spcAft>
+            </a:pPr>
+            <a:r>
+              <a:rPr sz="900" b="0" i="0">
+                <a:solidFill>
+                  <a:srgbClr val="636E85"/>
+                </a:solidFill>
+                <a:latin typeface="Segoe UI"/>
+                <a:ea typeface="Segoe UI"/>
+                <a:cs typeface="Segoe UI"/>
+              </a:rPr>
+              <a:t>Lingesh K  ·  OSI2509030</a:t>
+            </a:r>
+            <a:r>
+              <a:rPr sz="900" b="0" i="0">
+                <a:solidFill>
+                  <a:srgbClr val="141C2E"/>
+                </a:solidFill>
+                <a:latin typeface="Segoe UI"/>
+                <a:ea typeface="Segoe UI"/>
+                <a:cs typeface="Segoe UI"/>
+              </a:rPr>
+              <a:t>     </a:t>
+            </a:r>
+            <a:r>
+              <a:rPr sz="900" b="1" i="0">
+                <a:solidFill>
+                  <a:srgbClr val="0E1E3C"/>
+                </a:solidFill>
+                <a:latin typeface="Segoe UI"/>
+                <a:ea typeface="Segoe UI"/>
+                <a:cs typeface="Segoe UI"/>
+              </a:rPr>
+              <a:t>09</a:t>
+            </a:r>
+          </a:p>
+        </p:txBody>
+      </p:sp>
+      <p:sp>
+        <p:nvSpPr>
+          <p:cNvPr id="5" name="TextBox 4"/>
+          <p:cNvSpPr txBox="1"/>
+          <p:nvPr/>
+        </p:nvSpPr>
+        <p:spPr>
+          <a:xfrm>
+            <a:off x="713232" y="566928"/>
+            <a:ext cx="10765231" cy="219456"/>
           </a:xfrm>
           <a:prstGeom prst="rect">
             <a:avLst/>
@@ -31691,106 +30327,15 @@
               </a:spcAft>
             </a:pPr>
             <a:r>
-              <a:rPr sz="900" b="1" i="0">
-                <a:solidFill>
-                  <a:srgbClr val="0E1E3C"/>
-                </a:solidFill>
-                <a:latin typeface="Segoe UI"/>
-                <a:ea typeface="Segoe UI"/>
-                <a:cs typeface="Segoe UI"/>
-              </a:rPr>
-              <a:t>Unit 4</a:t>
-            </a:r>
-            <a:r>
-              <a:rPr sz="900" b="0" i="0">
-                <a:solidFill>
-                  <a:srgbClr val="939EB3"/>
-                </a:solidFill>
-                <a:latin typeface="Segoe UI"/>
-                <a:ea typeface="Segoe UI"/>
-                <a:cs typeface="Segoe UI"/>
-              </a:rPr>
-              <a:t>  ·  </a:t>
-            </a:r>
-            <a:r>
-              <a:rPr sz="900" b="0" i="0">
-                <a:solidFill>
-                  <a:srgbClr val="636E85"/>
-                </a:solidFill>
-                <a:latin typeface="Segoe UI"/>
-                <a:ea typeface="Segoe UI"/>
-                <a:cs typeface="Segoe UI"/>
-              </a:rPr>
-              <a:t>Ethics, Legal and Social Implications</a:t>
-            </a:r>
-          </a:p>
-        </p:txBody>
-      </p:sp>
-      <p:sp>
-        <p:nvSpPr>
-          <p:cNvPr id="5" name="TextBox 4"/>
-          <p:cNvSpPr txBox="1"/>
-          <p:nvPr/>
-        </p:nvSpPr>
-        <p:spPr>
-          <a:xfrm>
-            <a:off x="8240677" y="6272784"/>
-            <a:ext cx="2651760" cy="219456"/>
-          </a:xfrm>
-          <a:prstGeom prst="rect">
-            <a:avLst/>
-          </a:prstGeom>
-          <a:noFill/>
-        </p:spPr>
-        <p:txBody>
-          <a:bodyPr wrap="square" lIns="0" rIns="0" tIns="0" bIns="0" anchor="t">
-            <a:spAutoFit/>
-          </a:bodyPr>
-          <a:lstStyle/>
-          <a:p>
-            <a:pPr algn="r">
-              <a:lnSpc>
-                <a:spcPct val="122000"/>
-              </a:lnSpc>
-              <a:spcBef>
-                <a:spcPts val="0"/>
-              </a:spcBef>
-              <a:spcAft>
-                <a:spcPts val="0"/>
-              </a:spcAft>
-            </a:pPr>
-            <a:r>
-              <a:rPr sz="900" b="0" i="0">
-                <a:solidFill>
-                  <a:srgbClr val="636E85"/>
-                </a:solidFill>
-                <a:latin typeface="Segoe UI"/>
-                <a:ea typeface="Segoe UI"/>
-                <a:cs typeface="Segoe UI"/>
-              </a:rPr>
-              <a:t>Lingesh K  ·  OSI2509030</a:t>
-            </a:r>
-            <a:r>
-              <a:rPr sz="900" b="0" i="0">
-                <a:solidFill>
-                  <a:srgbClr val="141C2E"/>
-                </a:solidFill>
-                <a:latin typeface="Segoe UI"/>
-                <a:ea typeface="Segoe UI"/>
-                <a:cs typeface="Segoe UI"/>
-              </a:rPr>
-              <a:t>     </a:t>
-            </a:r>
-            <a:r>
-              <a:rPr sz="900" b="1" i="0">
-                <a:solidFill>
-                  <a:srgbClr val="0E1E3C"/>
-                </a:solidFill>
-                <a:latin typeface="Segoe UI"/>
-                <a:ea typeface="Segoe UI"/>
-                <a:cs typeface="Segoe UI"/>
-              </a:rPr>
-              <a:t>09</a:t>
+              <a:rPr sz="950" b="1" i="0" spc="160">
+                <a:solidFill>
+                  <a:srgbClr val="3B7AF7"/>
+                </a:solidFill>
+                <a:latin typeface="Segoe UI"/>
+                <a:ea typeface="Segoe UI"/>
+                <a:cs typeface="Segoe UI"/>
+              </a:rPr>
+              <a:t>PRACTICAL PROTECTION</a:t>
             </a:r>
           </a:p>
         </p:txBody>
@@ -31798,53 +30343,6 @@
       <p:sp>
         <p:nvSpPr>
           <p:cNvPr id="6" name="TextBox 5"/>
-          <p:cNvSpPr txBox="1"/>
-          <p:nvPr/>
-        </p:nvSpPr>
-        <p:spPr>
-          <a:xfrm>
-            <a:off x="713232" y="566928"/>
-            <a:ext cx="10765231" cy="219456"/>
-          </a:xfrm>
-          <a:prstGeom prst="rect">
-            <a:avLst/>
-          </a:prstGeom>
-          <a:noFill/>
-        </p:spPr>
-        <p:txBody>
-          <a:bodyPr wrap="square" lIns="0" rIns="0" tIns="0" bIns="0" anchor="t">
-            <a:spAutoFit/>
-          </a:bodyPr>
-          <a:lstStyle/>
-          <a:p>
-            <a:pPr algn="l">
-              <a:lnSpc>
-                <a:spcPct val="122000"/>
-              </a:lnSpc>
-              <a:spcBef>
-                <a:spcPts val="0"/>
-              </a:spcBef>
-              <a:spcAft>
-                <a:spcPts val="0"/>
-              </a:spcAft>
-            </a:pPr>
-            <a:r>
-              <a:rPr sz="950" b="1" i="0" spc="160">
-                <a:solidFill>
-                  <a:srgbClr val="3B7AF7"/>
-                </a:solidFill>
-                <a:latin typeface="Segoe UI"/>
-                <a:ea typeface="Segoe UI"/>
-                <a:cs typeface="Segoe UI"/>
-              </a:rPr>
-              <a:t>PRACTICAL PROTECTION</a:t>
-            </a:r>
-          </a:p>
-        </p:txBody>
-      </p:sp>
-      <p:sp>
-        <p:nvSpPr>
-          <p:cNvPr id="7" name="TextBox 6"/>
           <p:cNvSpPr txBox="1"/>
           <p:nvPr/>
         </p:nvSpPr>
@@ -31891,7 +30389,7 @@
       </p:sp>
       <p:sp>
         <p:nvSpPr>
-          <p:cNvPr id="8" name="Rectangle 7"/>
+          <p:cNvPr id="7" name="Rectangle 6"/>
           <p:cNvSpPr/>
           <p:nvPr/>
         </p:nvSpPr>
@@ -31935,7 +30433,7 @@
       </p:sp>
       <p:sp>
         <p:nvSpPr>
-          <p:cNvPr id="9" name="Rectangle 8"/>
+          <p:cNvPr id="8" name="Rectangle 7"/>
           <p:cNvSpPr/>
           <p:nvPr/>
         </p:nvSpPr>
@@ -31979,7 +30477,7 @@
       </p:sp>
       <p:sp>
         <p:nvSpPr>
-          <p:cNvPr id="10" name="Oval 9"/>
+          <p:cNvPr id="9" name="Oval 8"/>
           <p:cNvSpPr/>
           <p:nvPr/>
         </p:nvSpPr>
@@ -32023,7 +30521,7 @@
       </p:sp>
       <p:sp>
         <p:nvSpPr>
-          <p:cNvPr id="11" name="TextBox 10"/>
+          <p:cNvPr id="10" name="TextBox 9"/>
           <p:cNvSpPr txBox="1"/>
           <p:nvPr/>
         </p:nvSpPr>
@@ -32070,7 +30568,7 @@
       </p:sp>
       <p:sp>
         <p:nvSpPr>
-          <p:cNvPr id="12" name="Rounded Rectangle 11"/>
+          <p:cNvPr id="11" name="Rounded Rectangle 10"/>
           <p:cNvSpPr/>
           <p:nvPr/>
         </p:nvSpPr>
@@ -32118,7 +30616,7 @@
       </p:sp>
       <p:sp>
         <p:nvSpPr>
-          <p:cNvPr id="13" name="TextBox 12"/>
+          <p:cNvPr id="12" name="TextBox 11"/>
           <p:cNvSpPr txBox="1"/>
           <p:nvPr/>
         </p:nvSpPr>
@@ -32165,7 +30663,7 @@
       </p:sp>
       <p:sp>
         <p:nvSpPr>
-          <p:cNvPr id="14" name="TextBox 13"/>
+          <p:cNvPr id="13" name="TextBox 12"/>
           <p:cNvSpPr txBox="1"/>
           <p:nvPr/>
         </p:nvSpPr>
@@ -32212,7 +30710,7 @@
       </p:sp>
       <p:sp>
         <p:nvSpPr>
-          <p:cNvPr id="15" name="Oval 14"/>
+          <p:cNvPr id="14" name="Oval 13"/>
           <p:cNvSpPr/>
           <p:nvPr/>
         </p:nvSpPr>
@@ -32256,7 +30754,7 @@
       </p:sp>
       <p:sp>
         <p:nvSpPr>
-          <p:cNvPr id="16" name="TextBox 15"/>
+          <p:cNvPr id="15" name="TextBox 14"/>
           <p:cNvSpPr txBox="1"/>
           <p:nvPr/>
         </p:nvSpPr>
@@ -32303,7 +30801,7 @@
       </p:sp>
       <p:sp>
         <p:nvSpPr>
-          <p:cNvPr id="17" name="Rounded Rectangle 16"/>
+          <p:cNvPr id="16" name="Rounded Rectangle 15"/>
           <p:cNvSpPr/>
           <p:nvPr/>
         </p:nvSpPr>
@@ -32351,7 +30849,7 @@
       </p:sp>
       <p:sp>
         <p:nvSpPr>
-          <p:cNvPr id="18" name="TextBox 17"/>
+          <p:cNvPr id="17" name="TextBox 16"/>
           <p:cNvSpPr txBox="1"/>
           <p:nvPr/>
         </p:nvSpPr>
@@ -32398,7 +30896,7 @@
       </p:sp>
       <p:sp>
         <p:nvSpPr>
-          <p:cNvPr id="19" name="TextBox 18"/>
+          <p:cNvPr id="18" name="TextBox 17"/>
           <p:cNvSpPr txBox="1"/>
           <p:nvPr/>
         </p:nvSpPr>
@@ -32445,7 +30943,7 @@
       </p:sp>
       <p:sp>
         <p:nvSpPr>
-          <p:cNvPr id="20" name="Oval 19"/>
+          <p:cNvPr id="19" name="Oval 18"/>
           <p:cNvSpPr/>
           <p:nvPr/>
         </p:nvSpPr>
@@ -32489,7 +30987,7 @@
       </p:sp>
       <p:sp>
         <p:nvSpPr>
-          <p:cNvPr id="21" name="TextBox 20"/>
+          <p:cNvPr id="20" name="TextBox 19"/>
           <p:cNvSpPr txBox="1"/>
           <p:nvPr/>
         </p:nvSpPr>
@@ -32536,7 +31034,7 @@
       </p:sp>
       <p:sp>
         <p:nvSpPr>
-          <p:cNvPr id="22" name="Rounded Rectangle 21"/>
+          <p:cNvPr id="21" name="Rounded Rectangle 20"/>
           <p:cNvSpPr/>
           <p:nvPr/>
         </p:nvSpPr>
@@ -32584,7 +31082,7 @@
       </p:sp>
       <p:sp>
         <p:nvSpPr>
-          <p:cNvPr id="23" name="TextBox 22"/>
+          <p:cNvPr id="22" name="TextBox 21"/>
           <p:cNvSpPr txBox="1"/>
           <p:nvPr/>
         </p:nvSpPr>
@@ -32631,7 +31129,7 @@
       </p:sp>
       <p:sp>
         <p:nvSpPr>
-          <p:cNvPr id="24" name="TextBox 23"/>
+          <p:cNvPr id="23" name="TextBox 22"/>
           <p:cNvSpPr txBox="1"/>
           <p:nvPr/>
         </p:nvSpPr>
@@ -32678,7 +31176,7 @@
       </p:sp>
       <p:sp>
         <p:nvSpPr>
-          <p:cNvPr id="25" name="Oval 24"/>
+          <p:cNvPr id="24" name="Oval 23"/>
           <p:cNvSpPr/>
           <p:nvPr/>
         </p:nvSpPr>
@@ -32722,7 +31220,7 @@
       </p:sp>
       <p:sp>
         <p:nvSpPr>
-          <p:cNvPr id="26" name="TextBox 25"/>
+          <p:cNvPr id="25" name="TextBox 24"/>
           <p:cNvSpPr txBox="1"/>
           <p:nvPr/>
         </p:nvSpPr>
@@ -32769,7 +31267,7 @@
       </p:sp>
       <p:sp>
         <p:nvSpPr>
-          <p:cNvPr id="27" name="Rounded Rectangle 26"/>
+          <p:cNvPr id="26" name="Rounded Rectangle 25"/>
           <p:cNvSpPr/>
           <p:nvPr/>
         </p:nvSpPr>
@@ -32817,7 +31315,7 @@
       </p:sp>
       <p:sp>
         <p:nvSpPr>
-          <p:cNvPr id="28" name="TextBox 27"/>
+          <p:cNvPr id="27" name="TextBox 26"/>
           <p:cNvSpPr txBox="1"/>
           <p:nvPr/>
         </p:nvSpPr>
@@ -32864,7 +31362,7 @@
       </p:sp>
       <p:sp>
         <p:nvSpPr>
-          <p:cNvPr id="29" name="TextBox 28"/>
+          <p:cNvPr id="28" name="TextBox 27"/>
           <p:cNvSpPr txBox="1"/>
           <p:nvPr/>
         </p:nvSpPr>
@@ -32911,7 +31409,7 @@
       </p:sp>
       <p:sp>
         <p:nvSpPr>
-          <p:cNvPr id="30" name="Oval 29"/>
+          <p:cNvPr id="29" name="Oval 28"/>
           <p:cNvSpPr/>
           <p:nvPr/>
         </p:nvSpPr>
@@ -32955,7 +31453,7 @@
       </p:sp>
       <p:sp>
         <p:nvSpPr>
-          <p:cNvPr id="31" name="TextBox 30"/>
+          <p:cNvPr id="30" name="TextBox 29"/>
           <p:cNvSpPr txBox="1"/>
           <p:nvPr/>
         </p:nvSpPr>
@@ -33002,7 +31500,7 @@
       </p:sp>
       <p:sp>
         <p:nvSpPr>
-          <p:cNvPr id="32" name="Rounded Rectangle 31"/>
+          <p:cNvPr id="31" name="Rounded Rectangle 30"/>
           <p:cNvSpPr/>
           <p:nvPr/>
         </p:nvSpPr>
@@ -33050,7 +31548,7 @@
       </p:sp>
       <p:sp>
         <p:nvSpPr>
-          <p:cNvPr id="33" name="TextBox 32"/>
+          <p:cNvPr id="32" name="TextBox 31"/>
           <p:cNvSpPr txBox="1"/>
           <p:nvPr/>
         </p:nvSpPr>
@@ -33097,7 +31595,7 @@
       </p:sp>
       <p:sp>
         <p:nvSpPr>
-          <p:cNvPr id="34" name="TextBox 33"/>
+          <p:cNvPr id="33" name="TextBox 32"/>
           <p:cNvSpPr txBox="1"/>
           <p:nvPr/>
         </p:nvSpPr>
@@ -33144,7 +31642,7 @@
       </p:sp>
       <p:sp>
         <p:nvSpPr>
-          <p:cNvPr id="35" name="Rounded Rectangle 34"/>
+          <p:cNvPr id="34" name="Rounded Rectangle 33"/>
           <p:cNvSpPr/>
           <p:nvPr/>
         </p:nvSpPr>
@@ -33211,7 +31709,7 @@
       </p:sp>
       <p:sp>
         <p:nvSpPr>
-          <p:cNvPr id="36" name="Rectangle 35"/>
+          <p:cNvPr id="35" name="Rectangle 34"/>
           <p:cNvSpPr/>
           <p:nvPr/>
         </p:nvSpPr>

--- a/Unit 4 - Ethics, Legal and Social Implications.pptx
+++ b/Unit 4 - Ethics, Legal and Social Implications.pptx
@@ -3977,80 +3977,13 @@
       </p:pic>
       <p:sp>
         <p:nvSpPr>
-          <p:cNvPr id="9" name="Rounded Rectangle 8"/>
-          <p:cNvSpPr/>
-          <p:nvPr/>
-        </p:nvSpPr>
-        <p:spPr>
-          <a:xfrm>
-            <a:off x="932688" y="1572768"/>
-            <a:ext cx="1481328" cy="384048"/>
-          </a:xfrm>
-          <a:prstGeom prst="roundRect">
-            <a:avLst>
-              <a:gd name="adj" fmla="val 50000"/>
-            </a:avLst>
-          </a:prstGeom>
-          <a:noFill/>
-          <a:ln w="15875">
-            <a:solidFill>
-              <a:srgbClr val="3B7AF7"/>
-            </a:solidFill>
-          </a:ln>
-          <a:effectLst/>
-        </p:spPr>
-        <p:style>
-          <a:lnRef idx="1">
-            <a:schemeClr val="accent1"/>
-          </a:lnRef>
-          <a:fillRef idx="3">
-            <a:schemeClr val="accent1"/>
-          </a:fillRef>
-          <a:effectRef idx="2">
-            <a:schemeClr val="accent1"/>
-          </a:effectRef>
-          <a:fontRef idx="minor">
-            <a:schemeClr val="lt1"/>
-          </a:fontRef>
-        </p:style>
-        <p:txBody>
-          <a:bodyPr rtlCol="0" anchor="ctr" wrap="square"/>
-          <a:lstStyle/>
-          <a:p>
-            <a:pPr algn="ctr">
-              <a:lnSpc>
-                <a:spcPct val="122000"/>
-              </a:lnSpc>
-              <a:spcBef>
-                <a:spcPts val="0"/>
-              </a:spcBef>
-              <a:spcAft>
-                <a:spcPts val="0"/>
-              </a:spcAft>
-            </a:pPr>
-            <a:r>
-              <a:rPr sz="1050" b="1" i="0" spc="160">
-                <a:solidFill>
-                  <a:srgbClr val="FFFFFF"/>
-                </a:solidFill>
-                <a:latin typeface="Segoe UI"/>
-                <a:ea typeface="Segoe UI"/>
-                <a:cs typeface="Segoe UI"/>
-              </a:rPr>
-              <a:t>UNIT 04</a:t>
-            </a:r>
-          </a:p>
-        </p:txBody>
-      </p:sp>
-      <p:sp>
-        <p:nvSpPr>
-          <p:cNvPr id="10" name="TextBox 9"/>
+          <p:cNvPr id="9" name="TextBox 8"/>
           <p:cNvSpPr txBox="1"/>
           <p:nvPr/>
         </p:nvSpPr>
         <p:spPr>
           <a:xfrm>
-            <a:off x="932688" y="2304288"/>
+            <a:off x="932688" y="2065553"/>
             <a:ext cx="7406640" cy="1578807"/>
           </a:xfrm>
           <a:prstGeom prst="rect">
@@ -4091,13 +4024,13 @@
       </p:sp>
       <p:sp>
         <p:nvSpPr>
-          <p:cNvPr id="11" name="Rectangle 10"/>
+          <p:cNvPr id="10" name="Rectangle 9"/>
           <p:cNvSpPr/>
           <p:nvPr/>
         </p:nvSpPr>
         <p:spPr>
           <a:xfrm>
-            <a:off x="932688" y="3901383"/>
+            <a:off x="932688" y="3662648"/>
             <a:ext cx="658368" cy="45720"/>
           </a:xfrm>
           <a:prstGeom prst="rect">
@@ -4135,14 +4068,14 @@
       </p:sp>
       <p:sp>
         <p:nvSpPr>
-          <p:cNvPr id="12" name="TextBox 11"/>
+          <p:cNvPr id="11" name="TextBox 10"/>
           <p:cNvSpPr txBox="1"/>
           <p:nvPr/>
         </p:nvSpPr>
         <p:spPr>
           <a:xfrm>
-            <a:off x="932688" y="4212279"/>
-            <a:ext cx="6766560" cy="960120"/>
+            <a:off x="932688" y="3973544"/>
+            <a:ext cx="6766560" cy="745750"/>
           </a:xfrm>
           <a:prstGeom prst="rect">
             <a:avLst/>
@@ -4182,13 +4115,13 @@
       </p:sp>
       <p:sp>
         <p:nvSpPr>
-          <p:cNvPr id="13" name="Rounded Rectangle 12"/>
+          <p:cNvPr id="12" name="Rounded Rectangle 11"/>
           <p:cNvSpPr/>
           <p:nvPr/>
         </p:nvSpPr>
         <p:spPr>
           <a:xfrm>
-            <a:off x="932688" y="4992624"/>
+            <a:off x="932688" y="4993614"/>
             <a:ext cx="793598" cy="329184"/>
           </a:xfrm>
           <a:prstGeom prst="roundRect">
@@ -4249,13 +4182,13 @@
       </p:sp>
       <p:sp>
         <p:nvSpPr>
-          <p:cNvPr id="14" name="Rounded Rectangle 13"/>
+          <p:cNvPr id="13" name="Rounded Rectangle 12"/>
           <p:cNvSpPr/>
           <p:nvPr/>
         </p:nvSpPr>
         <p:spPr>
           <a:xfrm>
-            <a:off x="1854302" y="4992624"/>
+            <a:off x="1854302" y="4993614"/>
             <a:ext cx="842066" cy="329184"/>
           </a:xfrm>
           <a:prstGeom prst="roundRect">
@@ -4316,13 +4249,13 @@
       </p:sp>
       <p:sp>
         <p:nvSpPr>
-          <p:cNvPr id="15" name="Rounded Rectangle 14"/>
+          <p:cNvPr id="14" name="Rounded Rectangle 13"/>
           <p:cNvSpPr/>
           <p:nvPr/>
         </p:nvSpPr>
         <p:spPr>
           <a:xfrm>
-            <a:off x="2824384" y="4992624"/>
+            <a:off x="2824384" y="4993614"/>
             <a:ext cx="1002999" cy="329184"/>
           </a:xfrm>
           <a:prstGeom prst="roundRect">
@@ -4383,13 +4316,13 @@
       </p:sp>
       <p:sp>
         <p:nvSpPr>
-          <p:cNvPr id="16" name="Rounded Rectangle 15"/>
+          <p:cNvPr id="15" name="Rounded Rectangle 14"/>
           <p:cNvSpPr/>
           <p:nvPr/>
         </p:nvSpPr>
         <p:spPr>
           <a:xfrm>
-            <a:off x="3955400" y="4992624"/>
+            <a:off x="3955400" y="4993614"/>
             <a:ext cx="1327717" cy="329184"/>
           </a:xfrm>
           <a:prstGeom prst="roundRect">
@@ -4450,7 +4383,7 @@
       </p:sp>
       <p:sp>
         <p:nvSpPr>
-          <p:cNvPr id="17" name="Rectangle 16"/>
+          <p:cNvPr id="16" name="Rectangle 15"/>
           <p:cNvSpPr/>
           <p:nvPr/>
         </p:nvSpPr>
@@ -4494,7 +4427,7 @@
       </p:sp>
       <p:sp>
         <p:nvSpPr>
-          <p:cNvPr id="18" name="TextBox 17"/>
+          <p:cNvPr id="17" name="TextBox 16"/>
           <p:cNvSpPr txBox="1"/>
           <p:nvPr/>
         </p:nvSpPr>
